--- a/docs/content/summary_stats/summary_stats_lecture.pptx
+++ b/docs/content/summary_stats/summary_stats_lecture.pptx
@@ -3365,7 +3365,7 @@
             </a:pPr>
             <a:r>
               <a:rPr/>
-              <a:t>2026-09-04</a:t>
+              <a:t>2026-09-08</a:t>
             </a:r>
           </a:p>
         </p:txBody>

--- a/docs/content/summary_stats/summary_stats_lecture.pptx
+++ b/docs/content/summary_stats/summary_stats_lecture.pptx
@@ -31,6 +31,7 @@
     <p:sldId id="279" r:id="rId25"/>
     <p:sldId id="280" r:id="rId26"/>
     <p:sldId id="281" r:id="rId27"/>
+    <p:sldId id="282" r:id="rId28"/>
   </p:sldIdLst>
   <p:sldSz cx="9144000" cy="5143500" type="screen16x9"/>
   <p:notesSz cx="6858000" cy="9144000"/>
@@ -3766,7 +3767,7 @@
                 </a:solidFill>
                 <a:latin typeface="Courier"/>
               </a:rPr>
-              <a:t>(sunny_wt, </a:t>
+              <a:t>(sunny_mass, </a:t>
             </a:r>
             <a:r>
               <a:rPr>
@@ -3830,7 +3831,7 @@
                 </a:solidFill>
                 <a:latin typeface="Courier"/>
               </a:rPr>
-              <a:t>(shady_wt, </a:t>
+              <a:t>(shady_mass, </a:t>
             </a:r>
             <a:r>
               <a:rPr>
@@ -3931,7 +3932,7 @@
                 </a:solidFill>
                 <a:latin typeface="Courier"/>
               </a:rPr>
-              <a:t>2</a:t>
+              <a:t>4</a:t>
             </a:r>
             <a:r>
               <a:rPr>
@@ -3987,7 +3988,7 @@
               <a:rPr>
                 <a:latin typeface="Courier"/>
               </a:rPr>
-              <a:t>Variance sunny: 0.62 </a:t>
+              <a:t>Variance sunny: 0.0442 </a:t>
             </a:r>
           </a:p>
           <a:p>
@@ -4055,7 +4056,7 @@
                 </a:solidFill>
                 <a:latin typeface="Courier"/>
               </a:rPr>
-              <a:t>2</a:t>
+              <a:t>4</a:t>
             </a:r>
             <a:r>
               <a:rPr>
@@ -4111,7 +4112,7 @@
               <a:rPr>
                 <a:latin typeface="Courier"/>
               </a:rPr>
-              <a:t>Variance shady: 1.07 </a:t>
+              <a:t>Variance shady: 0.0219 </a:t>
             </a:r>
           </a:p>
           <a:p>
@@ -4485,7 +4486,7 @@
                 </a:solidFill>
                 <a:latin typeface="Courier"/>
               </a:rPr>
-              <a:t>(sunny_wt, </a:t>
+              <a:t>(sunny_mass, </a:t>
             </a:r>
             <a:r>
               <a:rPr>
@@ -4549,7 +4550,7 @@
                 </a:solidFill>
                 <a:latin typeface="Courier"/>
               </a:rPr>
-              <a:t>(shady_wt, </a:t>
+              <a:t>(shady_mass, </a:t>
             </a:r>
             <a:r>
               <a:rPr>
@@ -4650,7 +4651,7 @@
                 </a:solidFill>
                 <a:latin typeface="Courier"/>
               </a:rPr>
-              <a:t>2</a:t>
+              <a:t>3</a:t>
             </a:r>
             <a:r>
               <a:rPr>
@@ -4706,7 +4707,7 @@
               <a:rPr>
                 <a:latin typeface="Courier"/>
               </a:rPr>
-              <a:t>SD sunny: 0.79 g</a:t>
+              <a:t>SD sunny: 0.21 g</a:t>
             </a:r>
           </a:p>
           <a:p>
@@ -4774,7 +4775,7 @@
                 </a:solidFill>
                 <a:latin typeface="Courier"/>
               </a:rPr>
-              <a:t>2</a:t>
+              <a:t>3</a:t>
             </a:r>
             <a:r>
               <a:rPr>
@@ -4830,7 +4831,7 @@
               <a:rPr>
                 <a:latin typeface="Courier"/>
               </a:rPr>
-              <a:t>SD shady: 1.03 g</a:t>
+              <a:t>SD shady: 0.148 g</a:t>
             </a:r>
           </a:p>
         </p:txBody>
@@ -5251,7 +5252,7 @@
                 </a:solidFill>
                 <a:latin typeface="Courier"/>
               </a:rPr>
-              <a:t>(sunny_wt))</a:t>
+              <a:t>(sunny_mass))</a:t>
             </a:r>
             <a:br/>
             <a:r>
@@ -5306,7 +5307,7 @@
                 </a:solidFill>
                 <a:latin typeface="Courier"/>
               </a:rPr>
-              <a:t>(shady_wt))</a:t>
+              <a:t>(shady_mass))</a:t>
             </a:r>
             <a:br/>
             <a:br/>
@@ -5484,7 +5485,7 @@
               <a:rPr>
                 <a:latin typeface="Courier"/>
               </a:rPr>
-              <a:t>n sunny  = 10 </a:t>
+              <a:t>n sunny  = 25 </a:t>
             </a:r>
           </a:p>
           <a:p>
@@ -5552,7 +5553,7 @@
                 </a:solidFill>
                 <a:latin typeface="Courier"/>
               </a:rPr>
-              <a:t>2</a:t>
+              <a:t>3</a:t>
             </a:r>
             <a:r>
               <a:rPr>
@@ -5608,7 +5609,7 @@
               <a:rPr>
                 <a:latin typeface="Courier"/>
               </a:rPr>
-              <a:t>SE sunny = 0.25 g</a:t>
+              <a:t>SE sunny = 0.042 g</a:t>
             </a:r>
           </a:p>
           <a:p>
@@ -5696,7 +5697,7 @@
               <a:rPr>
                 <a:latin typeface="Courier"/>
               </a:rPr>
-              <a:t>n shady  = 10 </a:t>
+              <a:t>n shady  = 28 </a:t>
             </a:r>
           </a:p>
           <a:p>
@@ -5764,7 +5765,7 @@
                 </a:solidFill>
                 <a:latin typeface="Courier"/>
               </a:rPr>
-              <a:t>2</a:t>
+              <a:t>3</a:t>
             </a:r>
             <a:r>
               <a:rPr>
@@ -5820,7 +5821,7 @@
               <a:rPr>
                 <a:latin typeface="Courier"/>
               </a:rPr>
-              <a:t>SE shady = 0.33 g</a:t>
+              <a:t>SE shady = 0.028 g</a:t>
             </a:r>
           </a:p>
         </p:txBody>
@@ -6555,6 +6556,23 @@
             <a:pPr lvl="0"/>
             <a:r>
               <a:rPr/>
+              <a:t>Our leaf data has real NAs too: not every leaf got a </a:t>
+            </a:r>
+            <a:r>
+              <a:rPr>
+                <a:latin typeface="Courier"/>
+              </a:rPr>
+              <a:t>paper_mass_g</a:t>
+            </a:r>
+            <a:r>
+              <a:rPr/>
+              <a:t> measurement</a:t>
+            </a:r>
+          </a:p>
+          <a:p>
+            <a:pPr lvl="0"/>
+            <a:r>
+              <a:rPr/>
               <a:t>Using n = 5 in SE = SD / √n when n should be 3 gives the wrong answer</a:t>
             </a:r>
           </a:p>
@@ -7010,7 +7028,7 @@
                 </a:solidFill>
                 <a:latin typeface="Courier"/>
               </a:rPr>
-              <a:t>(sunny_wt))</a:t>
+              <a:t>(sunny_mass))</a:t>
             </a:r>
             <a:br/>
             <a:r>
@@ -7038,7 +7056,7 @@
                 </a:solidFill>
                 <a:latin typeface="Courier"/>
               </a:rPr>
-              <a:t>"Non-missing sunny weights ="</a:t>
+              <a:t>"Non-missing sunny masses ="</a:t>
             </a:r>
             <a:r>
               <a:rPr>
@@ -7094,7 +7112,7 @@
               <a:rPr>
                 <a:latin typeface="Courier"/>
               </a:rPr>
-              <a:t>Non-missing sunny weights = 10 </a:t>
+              <a:t>Non-missing sunny masses = 25 </a:t>
             </a:r>
           </a:p>
         </p:txBody>
@@ -7388,7 +7406,7 @@
                 </a:solidFill>
                 <a:latin typeface="Courier"/>
               </a:rPr>
-              <a:t>(sunny_wt))</a:t>
+              <a:t>(sunny_mass))</a:t>
             </a:r>
             <a:br/>
             <a:r>
@@ -7416,7 +7434,7 @@
                 </a:solidFill>
                 <a:latin typeface="Courier"/>
               </a:rPr>
-              <a:t>(sunny_wt, </a:t>
+              <a:t>(sunny_mass, </a:t>
             </a:r>
             <a:r>
               <a:rPr>
@@ -7480,7 +7498,7 @@
                 </a:solidFill>
                 <a:latin typeface="Courier"/>
               </a:rPr>
-              <a:t>(sunny_wt, </a:t>
+              <a:t>(sunny_mass, </a:t>
             </a:r>
             <a:r>
               <a:rPr>
@@ -7544,7 +7562,7 @@
                 </a:solidFill>
                 <a:latin typeface="Courier"/>
               </a:rPr>
-              <a:t>(sunny_wt, </a:t>
+              <a:t>(sunny_mass, </a:t>
             </a:r>
             <a:r>
               <a:rPr>
@@ -7781,7 +7799,7 @@
               <a:rPr>
                 <a:latin typeface="Courier"/>
               </a:rPr>
-              <a:t>n      = 10 </a:t>
+              <a:t>n      = 25 </a:t>
             </a:r>
           </a:p>
           <a:p>
@@ -7849,7 +7867,7 @@
                 </a:solidFill>
                 <a:latin typeface="Courier"/>
               </a:rPr>
-              <a:t>2</a:t>
+              <a:t>3</a:t>
             </a:r>
             <a:r>
               <a:rPr>
@@ -7905,7 +7923,7 @@
               <a:rPr>
                 <a:latin typeface="Courier"/>
               </a:rPr>
-              <a:t>Mean   = 3.8 </a:t>
+              <a:t>Mean   = 0.505 </a:t>
             </a:r>
           </a:p>
           <a:p>
@@ -7973,7 +7991,7 @@
                 </a:solidFill>
                 <a:latin typeface="Courier"/>
               </a:rPr>
-              <a:t>2</a:t>
+              <a:t>3</a:t>
             </a:r>
             <a:r>
               <a:rPr>
@@ -8029,7 +8047,7 @@
               <a:rPr>
                 <a:latin typeface="Courier"/>
               </a:rPr>
-              <a:t>Median = 4 </a:t>
+              <a:t>Median = 0.48 </a:t>
             </a:r>
           </a:p>
           <a:p>
@@ -8097,7 +8115,7 @@
                 </a:solidFill>
                 <a:latin typeface="Courier"/>
               </a:rPr>
-              <a:t>2</a:t>
+              <a:t>3</a:t>
             </a:r>
             <a:r>
               <a:rPr>
@@ -8153,7 +8171,7 @@
               <a:rPr>
                 <a:latin typeface="Courier"/>
               </a:rPr>
-              <a:t>SD     = 0.79 </a:t>
+              <a:t>SD     = 0.21 </a:t>
             </a:r>
           </a:p>
           <a:p>
@@ -8221,7 +8239,7 @@
                 </a:solidFill>
                 <a:latin typeface="Courier"/>
               </a:rPr>
-              <a:t>2</a:t>
+              <a:t>3</a:t>
             </a:r>
             <a:r>
               <a:rPr>
@@ -8277,7 +8295,7 @@
               <a:rPr>
                 <a:latin typeface="Courier"/>
               </a:rPr>
-              <a:t>SE     = 0.25 </a:t>
+              <a:t>SE     = 0.042 </a:t>
             </a:r>
           </a:p>
         </p:txBody>
@@ -8430,7 +8448,7 @@
             </a:pPr>
             <a:r>
               <a:rPr/>
-              <a:t>Mean, median, spread, and the NA problem. Predict each output, type it, then run it.</a:t>
+              <a:t>Load the data, work the NA problem, and compute mean / median / spread in base R. Predict each output, type it, then run it.</a:t>
             </a:r>
           </a:p>
         </p:txBody>
@@ -8690,7 +8708,7 @@
               <a:rPr sz="2000">
                 <a:latin typeface="Courier"/>
               </a:rPr>
-              <a:t>side</a:t>
+              <a:t>shade</a:t>
             </a:r>
             <a:r>
               <a:rPr sz="2000"/>
@@ -8756,7 +8774,7 @@
                 </a:solidFill>
                 <a:latin typeface="Courier"/>
               </a:rPr>
-              <a:t>stats_df &lt;- tree_df </a:t>
+              <a:t>stats_df &lt;- leaf_df </a:t>
             </a:r>
             <a:r>
               <a:rPr>
@@ -8793,7 +8811,7 @@
                 </a:solidFill>
                 <a:latin typeface="Courier"/>
               </a:rPr>
-              <a:t>(side) </a:t>
+              <a:t>(shade) </a:t>
             </a:r>
             <a:r>
               <a:rPr>
@@ -8903,7 +8921,7 @@
                 </a:solidFill>
                 <a:latin typeface="Courier"/>
               </a:rPr>
-              <a:t>(weight_g)),</a:t>
+              <a:t>(mass_g)),</a:t>
             </a:r>
             <a:br/>
             <a:r>
@@ -8922,7 +8940,7 @@
                 </a:solidFill>
                 <a:latin typeface="Courier"/>
               </a:rPr>
-              <a:t>mean_wt =</a:t>
+              <a:t>mean_mass =</a:t>
             </a:r>
             <a:r>
               <a:rPr>
@@ -8967,7 +8985,7 @@
                 </a:solidFill>
                 <a:latin typeface="Courier"/>
               </a:rPr>
-              <a:t>(weight_g, </a:t>
+              <a:t>(mass_g, </a:t>
             </a:r>
             <a:r>
               <a:rPr>
@@ -9012,7 +9030,7 @@
                 </a:solidFill>
                 <a:latin typeface="Courier"/>
               </a:rPr>
-              <a:t>2</a:t>
+              <a:t>3</a:t>
             </a:r>
             <a:r>
               <a:rPr>
@@ -9040,7 +9058,7 @@
                 </a:solidFill>
                 <a:latin typeface="Courier"/>
               </a:rPr>
-              <a:t>med_wt =</a:t>
+              <a:t>med_mass =</a:t>
             </a:r>
             <a:r>
               <a:rPr>
@@ -9085,7 +9103,7 @@
                 </a:solidFill>
                 <a:latin typeface="Courier"/>
               </a:rPr>
-              <a:t>(weight_g, </a:t>
+              <a:t>(mass_g, </a:t>
             </a:r>
             <a:r>
               <a:rPr>
@@ -9130,7 +9148,7 @@
                 </a:solidFill>
                 <a:latin typeface="Courier"/>
               </a:rPr>
-              <a:t>2</a:t>
+              <a:t>3</a:t>
             </a:r>
             <a:r>
               <a:rPr>
@@ -9158,7 +9176,7 @@
                 </a:solidFill>
                 <a:latin typeface="Courier"/>
               </a:rPr>
-              <a:t>sd_wt =</a:t>
+              <a:t>sd_mass =</a:t>
             </a:r>
             <a:r>
               <a:rPr>
@@ -9203,7 +9221,7 @@
                 </a:solidFill>
                 <a:latin typeface="Courier"/>
               </a:rPr>
-              <a:t>(weight_g, </a:t>
+              <a:t>(mass_g, </a:t>
             </a:r>
             <a:r>
               <a:rPr>
@@ -9248,7 +9266,7 @@
                 </a:solidFill>
                 <a:latin typeface="Courier"/>
               </a:rPr>
-              <a:t>2</a:t>
+              <a:t>3</a:t>
             </a:r>
             <a:r>
               <a:rPr>
@@ -9276,7 +9294,7 @@
                 </a:solidFill>
                 <a:latin typeface="Courier"/>
               </a:rPr>
-              <a:t>se_wt =</a:t>
+              <a:t>se_mass =</a:t>
             </a:r>
             <a:r>
               <a:rPr>
@@ -9303,7 +9321,7 @@
                 </a:solidFill>
                 <a:latin typeface="Courier"/>
               </a:rPr>
-              <a:t>(sd_wt </a:t>
+              <a:t>(sd_mass </a:t>
             </a:r>
             <a:r>
               <a:rPr>
@@ -9348,7 +9366,7 @@
                 </a:solidFill>
                 <a:latin typeface="Courier"/>
               </a:rPr>
-              <a:t>2</a:t>
+              <a:t>3</a:t>
             </a:r>
             <a:r>
               <a:rPr>
@@ -9390,10 +9408,10 @@
                 <a:latin typeface="Courier"/>
               </a:rPr>
               <a:t># A tibble: 2 × 6
-  side      n mean_wt med_wt sd_wt se_wt
-  &lt;chr&gt; &lt;int&gt;   &lt;dbl&gt;  &lt;dbl&gt; &lt;dbl&gt; &lt;dbl&gt;
-1 shady    10     7.8      8  1.03  0.33
-2 sunny    10     3.8      4  0.79  0.25</a:t>
+  shade     n mean_mass med_mass sd_mass se_mass
+  &lt;chr&gt; &lt;int&gt;     &lt;dbl&gt;    &lt;dbl&gt;   &lt;dbl&gt;   &lt;dbl&gt;
+1 shady    28     0.523    0.521   0.148   0.028
+2 sunny    25     0.505    0.48    0.21    0.042</a:t>
             </a:r>
           </a:p>
         </p:txBody>
@@ -9418,7 +9436,7 @@
               <a:rPr>
                 <a:latin typeface="Courier"/>
               </a:rPr>
-              <a:t>group_by(side)</a:t>
+              <a:t>group_by(shade)</a:t>
             </a:r>
             <a:r>
               <a:rPr/>
@@ -9428,7 +9446,7 @@
               <a:rPr>
                 <a:latin typeface="Courier"/>
               </a:rPr>
-              <a:t>side</a:t>
+              <a:t>shade</a:t>
             </a:r>
             <a:r>
               <a:rPr/>
@@ -9469,7 +9487,7 @@
               <a:rPr>
                 <a:latin typeface="Courier"/>
               </a:rPr>
-              <a:t>sd_wt</a:t>
+              <a:t>sd_mass</a:t>
             </a:r>
             <a:r>
               <a:rPr/>
@@ -9479,7 +9497,7 @@
               <a:rPr>
                 <a:latin typeface="Courier"/>
               </a:rPr>
-              <a:t>se_wt</a:t>
+              <a:t>se_mass</a:t>
             </a:r>
             <a:r>
               <a:rPr/>
@@ -9642,7 +9660,7 @@
               <a:rPr>
                 <a:latin typeface="Courier"/>
               </a:rPr>
-              <a:t>tree_df</a:t>
+              <a:t>leaf_df</a:t>
             </a:r>
             <a:r>
               <a:rPr/>
@@ -9652,7 +9670,7 @@
               <a:rPr>
                 <a:latin typeface="Courier"/>
               </a:rPr>
-              <a:t>side</a:t>
+              <a:t>shade</a:t>
             </a:r>
             <a:r>
               <a:rPr/>
@@ -9662,7 +9680,7 @@
               <a:rPr>
                 <a:latin typeface="Courier"/>
               </a:rPr>
-              <a:t>weight_g</a:t>
+              <a:t>mass_g</a:t>
             </a:r>
             <a:r>
               <a:rPr/>
@@ -9672,7 +9690,7 @@
               <a:rPr>
                 <a:latin typeface="Courier"/>
               </a:rPr>
-              <a:t>width_cm</a:t>
+              <a:t>petiole_mm</a:t>
             </a:r>
             <a:r>
               <a:rPr/>
@@ -9682,7 +9700,17 @@
               <a:rPr>
                 <a:latin typeface="Courier"/>
               </a:rPr>
-              <a:t>height_cm</a:t>
+              <a:t>thickness_mm</a:t>
+            </a:r>
+            <a:r>
+              <a:rPr/>
+              <a:t>, </a:t>
+            </a:r>
+            <a:r>
+              <a:rPr>
+                <a:latin typeface="Courier"/>
+              </a:rPr>
+              <a:t>paper_mass_g</a:t>
             </a:r>
           </a:p>
           <a:p>
@@ -9812,7 +9840,7 @@
                 </a:solidFill>
                 <a:latin typeface="Courier"/>
               </a:rPr>
-              <a:t>size_stats_df &lt;- tree_df </a:t>
+              <a:t>size_stats_df &lt;- leaf_df </a:t>
             </a:r>
             <a:r>
               <a:rPr>
@@ -9849,7 +9877,7 @@
                 </a:solidFill>
                 <a:latin typeface="Courier"/>
               </a:rPr>
-              <a:t>(side) </a:t>
+              <a:t>(shade) </a:t>
             </a:r>
             <a:r>
               <a:rPr>
@@ -9959,7 +9987,7 @@
                 </a:solidFill>
                 <a:latin typeface="Courier"/>
               </a:rPr>
-              <a:t>(weight_g)),</a:t>
+              <a:t>(mass_g)),</a:t>
             </a:r>
             <a:br/>
             <a:r>
@@ -9978,7 +10006,7 @@
                 </a:solidFill>
                 <a:latin typeface="Courier"/>
               </a:rPr>
-              <a:t>mean_wt =</a:t>
+              <a:t>mean_mass =</a:t>
             </a:r>
             <a:r>
               <a:rPr>
@@ -10023,7 +10051,7 @@
                 </a:solidFill>
                 <a:latin typeface="Courier"/>
               </a:rPr>
-              <a:t>(weight_g, </a:t>
+              <a:t>(mass_g, </a:t>
             </a:r>
             <a:r>
               <a:rPr>
@@ -10068,7 +10096,7 @@
                 </a:solidFill>
                 <a:latin typeface="Courier"/>
               </a:rPr>
-              <a:t>2</a:t>
+              <a:t>3</a:t>
             </a:r>
             <a:r>
               <a:rPr>
@@ -10096,7 +10124,7 @@
                 </a:solidFill>
                 <a:latin typeface="Courier"/>
               </a:rPr>
-              <a:t>mean_ht =</a:t>
+              <a:t>mean_thick =</a:t>
             </a:r>
             <a:r>
               <a:rPr>
@@ -10141,7 +10169,7 @@
                 </a:solidFill>
                 <a:latin typeface="Courier"/>
               </a:rPr>
-              <a:t>(height_cm, </a:t>
+              <a:t>(thickness_mm, </a:t>
             </a:r>
             <a:r>
               <a:rPr>
@@ -10186,7 +10214,7 @@
                 </a:solidFill>
                 <a:latin typeface="Courier"/>
               </a:rPr>
-              <a:t>2</a:t>
+              <a:t>3</a:t>
             </a:r>
             <a:r>
               <a:rPr>
@@ -10214,7 +10242,7 @@
                 </a:solidFill>
                 <a:latin typeface="Courier"/>
               </a:rPr>
-              <a:t>mean_wd =</a:t>
+              <a:t>mean_pet =</a:t>
             </a:r>
             <a:r>
               <a:rPr>
@@ -10259,7 +10287,7 @@
                 </a:solidFill>
                 <a:latin typeface="Courier"/>
               </a:rPr>
-              <a:t>(width_cm, </a:t>
+              <a:t>(petiole_mm, </a:t>
             </a:r>
             <a:r>
               <a:rPr>
@@ -10304,7 +10332,7 @@
                 </a:solidFill>
                 <a:latin typeface="Courier"/>
               </a:rPr>
-              <a:t>2</a:t>
+              <a:t>1</a:t>
             </a:r>
             <a:r>
               <a:rPr>
@@ -10346,10 +10374,10 @@
                 <a:latin typeface="Courier"/>
               </a:rPr>
               <a:t># A tibble: 2 × 5
-  side      n mean_wt mean_ht mean_wd
-  &lt;chr&gt; &lt;int&gt;   &lt;dbl&gt;   &lt;dbl&gt;   &lt;dbl&gt;
-1 shady    10     7.8    27.9    17.3
-2 sunny    10     3.8    22.3    13.7</a:t>
+  shade     n mean_mass mean_thick mean_pet
+  &lt;chr&gt; &lt;int&gt;     &lt;dbl&gt;      &lt;dbl&gt;    &lt;dbl&gt;
+1 shady    28     0.523      0.356     56.7
+2 sunny    25     0.505      0.29      54.4</a:t>
             </a:r>
           </a:p>
         </p:txBody>
@@ -10418,33 +10446,33 @@
               <a:rPr>
                 <a:latin typeface="Courier"/>
               </a:rPr>
-              <a:t>mean_wt</a:t>
+              <a:t>mean_mass</a:t>
             </a:r>
           </a:p>
           <a:p>
             <a:pPr lvl="0"/>
             <a:r>
               <a:rPr/>
-              <a:t>Shady taller? → check </a:t>
-            </a:r>
-            <a:r>
-              <a:rPr>
-                <a:latin typeface="Courier"/>
-              </a:rPr>
-              <a:t>mean_ht</a:t>
+              <a:t>Shady leaves thicker? → check </a:t>
+            </a:r>
+            <a:r>
+              <a:rPr>
+                <a:latin typeface="Courier"/>
+              </a:rPr>
+              <a:t>mean_thick</a:t>
             </a:r>
           </a:p>
           <a:p>
             <a:pPr lvl="0"/>
             <a:r>
               <a:rPr/>
-              <a:t>Shady wider? → check </a:t>
-            </a:r>
-            <a:r>
-              <a:rPr>
-                <a:latin typeface="Courier"/>
-              </a:rPr>
-              <a:t>mean_wd</a:t>
+              <a:t>Shady petioles longer? → check </a:t>
+            </a:r>
+            <a:r>
+              <a:rPr>
+                <a:latin typeface="Courier"/>
+              </a:rPr>
+              <a:t>mean_pet</a:t>
             </a:r>
           </a:p>
         </p:txBody>
@@ -10545,7 +10573,7 @@
                 </a:solidFill>
                 <a:latin typeface="Courier"/>
               </a:rPr>
-              <a:t>mean_all_df &lt;- tree_df </a:t>
+              <a:t>mean_all_df &lt;- leaf_df </a:t>
             </a:r>
             <a:r>
               <a:rPr>
@@ -10582,7 +10610,7 @@
                 </a:solidFill>
                 <a:latin typeface="Courier"/>
               </a:rPr>
-              <a:t>(side) </a:t>
+              <a:t>(shade) </a:t>
             </a:r>
             <a:r>
               <a:rPr>
@@ -10675,7 +10703,7 @@
                 </a:solidFill>
                 <a:latin typeface="Courier"/>
               </a:rPr>
-              <a:t>(weight_g, width_cm, height_cm),</a:t>
+              <a:t>(mass_g, petiole_mm, thickness_mm),</a:t>
             </a:r>
             <a:br/>
             <a:r>
@@ -10784,7 +10812,7 @@
                 </a:solidFill>
                 <a:latin typeface="Courier"/>
               </a:rPr>
-              <a:t>2</a:t>
+              <a:t>3</a:t>
             </a:r>
             <a:r>
               <a:rPr>
@@ -10836,10 +10864,10 @@
                 <a:latin typeface="Courier"/>
               </a:rPr>
               <a:t># A tibble: 2 × 4
-  side  weight_g width_cm height_cm
-  &lt;chr&gt;    &lt;dbl&gt;    &lt;dbl&gt;     &lt;dbl&gt;
-1 shady      7.8     17.3      27.9
-2 sunny      3.8     13.7      22.3</a:t>
+  shade mass_g petiole_mm thickness_mm
+  &lt;chr&gt;  &lt;dbl&gt;      &lt;dbl&gt;        &lt;dbl&gt;
+1 shady  0.523       56.7        0.356
+2 sunny  0.505       54.4        0.29 </a:t>
             </a:r>
           </a:p>
         </p:txBody>
@@ -10902,7 +10930,7 @@
               <a:rPr>
                 <a:latin typeface="Courier"/>
               </a:rPr>
-              <a:t>mean_wt</a:t>
+              <a:t>mean_mass</a:t>
             </a:r>
             <a:r>
               <a:rPr/>
@@ -10912,7 +10940,7 @@
               <a:rPr>
                 <a:latin typeface="Courier"/>
               </a:rPr>
-              <a:t>mean_ht</a:t>
+              <a:t>mean_thick</a:t>
             </a:r>
             <a:r>
               <a:rPr/>
@@ -10922,7 +10950,7 @@
               <a:rPr>
                 <a:latin typeface="Courier"/>
               </a:rPr>
-              <a:t>mean_wd</a:t>
+              <a:t>mean_pet</a:t>
             </a:r>
             <a:r>
               <a:rPr/>
@@ -11042,7 +11070,7 @@
                 </a:solidFill>
                 <a:latin typeface="Courier"/>
               </a:rPr>
-              <a:t># skim() grouped by side — full column summaries ------</a:t>
+              <a:t># skim() grouped by shade — full column summaries -----</a:t>
             </a:r>
             <a:br/>
             <a:r>
@@ -11052,7 +11080,7 @@
                 </a:solidFill>
                 <a:latin typeface="Courier"/>
               </a:rPr>
-              <a:t>tree_df </a:t>
+              <a:t>leaf_df </a:t>
             </a:r>
             <a:r>
               <a:rPr>
@@ -11089,7 +11117,7 @@
                 </a:solidFill>
                 <a:latin typeface="Courier"/>
               </a:rPr>
-              <a:t>(side) </a:t>
+              <a:t>(shade) </a:t>
             </a:r>
             <a:r>
               <a:rPr>
@@ -11213,7 +11241,7 @@
                       </a:pPr>
                       <a:r>
                         <a:rPr/>
-                        <a:t>20</a:t>
+                        <a:t>53</a:t>
                       </a:r>
                     </a:p>
                   </a:txBody>
@@ -11245,7 +11273,7 @@
                       </a:pPr>
                       <a:r>
                         <a:rPr/>
-                        <a:t>5</a:t>
+                        <a:t>8</a:t>
                       </a:r>
                     </a:p>
                   </a:txBody>
@@ -11314,7 +11342,7 @@
                       </a:pPr>
                       <a:r>
                         <a:rPr/>
-                        <a:t>numeric</a:t>
+                        <a:t>character</a:t>
                       </a:r>
                     </a:p>
                   </a:txBody>
@@ -11329,7 +11357,7 @@
                       </a:pPr>
                       <a:r>
                         <a:rPr/>
-                        <a:t>4</a:t>
+                        <a:t>3</a:t>
                       </a:r>
                     </a:p>
                   </a:txBody>
@@ -11346,17 +11374,23 @@
                       </a:pPr>
                       <a:r>
                         <a:rPr/>
-                        <a:t>________________________</a:t>
-                      </a:r>
-                    </a:p>
-                  </a:txBody>
-                </a:tc>
-                <a:tc>
-                  <a:txBody>
-                    <a:bodyPr/>
-                    <a:lstStyle/>
-                    <a:p>
-                      <a:endParaRPr/>
+                        <a:t>numeric</a:t>
+                      </a:r>
+                    </a:p>
+                  </a:txBody>
+                </a:tc>
+                <a:tc>
+                  <a:txBody>
+                    <a:bodyPr/>
+                    <a:lstStyle/>
+                    <a:p>
+                      <a:pPr lvl="0" indent="0" marL="0" algn="l">
+                        <a:buNone/>
+                      </a:pPr>
+                      <a:r>
+                        <a:rPr/>
+                        <a:t>4</a:t>
+                      </a:r>
                     </a:p>
                   </a:txBody>
                 </a:tc>
@@ -11372,6 +11406,32 @@
                       </a:pPr>
                       <a:r>
                         <a:rPr/>
+                        <a:t>________________________</a:t>
+                      </a:r>
+                    </a:p>
+                  </a:txBody>
+                </a:tc>
+                <a:tc>
+                  <a:txBody>
+                    <a:bodyPr/>
+                    <a:lstStyle/>
+                    <a:p>
+                      <a:endParaRPr/>
+                    </a:p>
+                  </a:txBody>
+                </a:tc>
+              </a:tr>
+              <a:tr h="0">
+                <a:tc>
+                  <a:txBody>
+                    <a:bodyPr/>
+                    <a:lstStyle/>
+                    <a:p>
+                      <a:pPr lvl="0" indent="0" marL="0" algn="l">
+                        <a:buNone/>
+                      </a:pPr>
+                      <a:r>
+                        <a:rPr/>
                         <a:t>Group variables</a:t>
                       </a:r>
                     </a:p>
@@ -11387,7 +11447,7 @@
                       </a:pPr>
                       <a:r>
                         <a:rPr/>
-                        <a:t>side</a:t>
+                        <a:t>shade</a:t>
                       </a:r>
                     </a:p>
                   </a:txBody>
@@ -11471,7 +11531,7 @@
             </a:pPr>
             <a:r>
               <a:rPr b="1"/>
-              <a:t>Variable type: numeric</a:t>
+              <a:t>Variable type: character</a:t>
             </a:r>
           </a:p>
         </p:txBody>
@@ -11497,18 +11557,15 @@
                 <a:tableStyleId>{5C22544A-7EE6-4342-B048-85BDC9FD1C3A}</a:tableStyleId>
               </a:tblPr>
               <a:tblGrid>
-                <a:gridCol w="1435100"/>
-                <a:gridCol w="622300"/>
-                <a:gridCol w="1028700"/>
-                <a:gridCol w="1435100"/>
-                <a:gridCol w="520700"/>
-                <a:gridCol w="520700"/>
-                <a:gridCol w="304800"/>
-                <a:gridCol w="622300"/>
-                <a:gridCol w="520700"/>
-                <a:gridCol w="622300"/>
-                <a:gridCol w="520700"/>
-                <a:gridCol w="622300"/>
+                <a:gridCol w="1574800"/>
+                <a:gridCol w="673100"/>
+                <a:gridCol w="1117600"/>
+                <a:gridCol w="1574800"/>
+                <a:gridCol w="444500"/>
+                <a:gridCol w="444500"/>
+                <a:gridCol w="673100"/>
+                <a:gridCol w="1016000"/>
+                <a:gridCol w="1231900"/>
               </a:tblGrid>
               <a:tr h="0">
                 <a:tc>
@@ -11537,7 +11594,7 @@
                       </a:pPr>
                       <a:r>
                         <a:rPr/>
-                        <a:t>side</a:t>
+                        <a:t>shade</a:t>
                       </a:r>
                     </a:p>
                   </a:txBody>
@@ -11585,7 +11642,7 @@
                       </a:pPr>
                       <a:r>
                         <a:rPr/>
-                        <a:t>mean</a:t>
+                        <a:t>min</a:t>
                       </a:r>
                     </a:p>
                   </a:txBody>
@@ -11601,7 +11658,7 @@
                       </a:pPr>
                       <a:r>
                         <a:rPr/>
-                        <a:t>sd</a:t>
+                        <a:t>max</a:t>
                       </a:r>
                     </a:p>
                   </a:txBody>
@@ -11617,7 +11674,7 @@
                       </a:pPr>
                       <a:r>
                         <a:rPr/>
-                        <a:t>p0</a:t>
+                        <a:t>empty</a:t>
                       </a:r>
                     </a:p>
                   </a:txBody>
@@ -11633,7 +11690,7 @@
                       </a:pPr>
                       <a:r>
                         <a:rPr/>
-                        <a:t>p25</a:t>
+                        <a:t>n_unique</a:t>
                       </a:r>
                     </a:p>
                   </a:txBody>
@@ -11649,55 +11706,7 @@
                       </a:pPr>
                       <a:r>
                         <a:rPr/>
-                        <a:t>p50</a:t>
-                      </a:r>
-                    </a:p>
-                  </a:txBody>
-                  <a:tcPr/>
-                </a:tc>
-                <a:tc>
-                  <a:txBody>
-                    <a:bodyPr/>
-                    <a:lstStyle/>
-                    <a:p>
-                      <a:pPr lvl="0" indent="0" marL="0" algn="r">
-                        <a:buNone/>
-                      </a:pPr>
-                      <a:r>
-                        <a:rPr/>
-                        <a:t>p75</a:t>
-                      </a:r>
-                    </a:p>
-                  </a:txBody>
-                  <a:tcPr/>
-                </a:tc>
-                <a:tc>
-                  <a:txBody>
-                    <a:bodyPr/>
-                    <a:lstStyle/>
-                    <a:p>
-                      <a:pPr lvl="0" indent="0" marL="0" algn="r">
-                        <a:buNone/>
-                      </a:pPr>
-                      <a:r>
-                        <a:rPr/>
-                        <a:t>p100</a:t>
-                      </a:r>
-                    </a:p>
-                  </a:txBody>
-                  <a:tcPr/>
-                </a:tc>
-                <a:tc>
-                  <a:txBody>
-                    <a:bodyPr/>
-                    <a:lstStyle/>
-                    <a:p>
-                      <a:pPr lvl="0" indent="0" marL="0" algn="l">
-                        <a:buNone/>
-                      </a:pPr>
-                      <a:r>
-                        <a:rPr/>
-                        <a:t>hist</a:t>
+                        <a:t>whitespace</a:t>
                       </a:r>
                     </a:p>
                   </a:txBody>
@@ -11715,7 +11724,7 @@
                       </a:pPr>
                       <a:r>
                         <a:rPr/>
-                        <a:t>index</a:t>
+                        <a:t>twig_id</a:t>
                       </a:r>
                     </a:p>
                   </a:txBody>
@@ -11745,6 +11754,66 @@
                       </a:pPr>
                       <a:r>
                         <a:rPr/>
+                        <a:t>22</a:t>
+                      </a:r>
+                    </a:p>
+                  </a:txBody>
+                </a:tc>
+                <a:tc>
+                  <a:txBody>
+                    <a:bodyPr/>
+                    <a:lstStyle/>
+                    <a:p>
+                      <a:pPr lvl="0" indent="0" marL="0" algn="r">
+                        <a:buNone/>
+                      </a:pPr>
+                      <a:r>
+                        <a:rPr/>
+                        <a:t>0.21</a:t>
+                      </a:r>
+                    </a:p>
+                  </a:txBody>
+                </a:tc>
+                <a:tc>
+                  <a:txBody>
+                    <a:bodyPr/>
+                    <a:lstStyle/>
+                    <a:p>
+                      <a:pPr lvl="0" indent="0" marL="0" algn="r">
+                        <a:buNone/>
+                      </a:pPr>
+                      <a:r>
+                        <a:rPr/>
+                        <a:t>6</a:t>
+                      </a:r>
+                    </a:p>
+                  </a:txBody>
+                </a:tc>
+                <a:tc>
+                  <a:txBody>
+                    <a:bodyPr/>
+                    <a:lstStyle/>
+                    <a:p>
+                      <a:pPr lvl="0" indent="0" marL="0" algn="r">
+                        <a:buNone/>
+                      </a:pPr>
+                      <a:r>
+                        <a:rPr/>
+                        <a:t>6</a:t>
+                      </a:r>
+                    </a:p>
+                  </a:txBody>
+                </a:tc>
+                <a:tc>
+                  <a:txBody>
+                    <a:bodyPr/>
+                    <a:lstStyle/>
+                    <a:p>
+                      <a:pPr lvl="0" indent="0" marL="0" algn="r">
+                        <a:buNone/>
+                      </a:pPr>
+                      <a:r>
+                        <a:rPr/>
                         <a:t>0</a:t>
                       </a:r>
                     </a:p>
@@ -11760,7 +11829,7 @@
                       </a:pPr>
                       <a:r>
                         <a:rPr/>
-                        <a:t>1</a:t>
+                        <a:t>3</a:t>
                       </a:r>
                     </a:p>
                   </a:txBody>
@@ -11775,112 +11844,7 @@
                       </a:pPr>
                       <a:r>
                         <a:rPr/>
-                        <a:t>15.5</a:t>
-                      </a:r>
-                    </a:p>
-                  </a:txBody>
-                </a:tc>
-                <a:tc>
-                  <a:txBody>
-                    <a:bodyPr/>
-                    <a:lstStyle/>
-                    <a:p>
-                      <a:pPr lvl="0" indent="0" marL="0" algn="r">
-                        <a:buNone/>
-                      </a:pPr>
-                      <a:r>
-                        <a:rPr/>
-                        <a:t>3.03</a:t>
-                      </a:r>
-                    </a:p>
-                  </a:txBody>
-                </a:tc>
-                <a:tc>
-                  <a:txBody>
-                    <a:bodyPr/>
-                    <a:lstStyle/>
-                    <a:p>
-                      <a:pPr lvl="0" indent="0" marL="0" algn="r">
-                        <a:buNone/>
-                      </a:pPr>
-                      <a:r>
-                        <a:rPr/>
-                        <a:t>11</a:t>
-                      </a:r>
-                    </a:p>
-                  </a:txBody>
-                </a:tc>
-                <a:tc>
-                  <a:txBody>
-                    <a:bodyPr/>
-                    <a:lstStyle/>
-                    <a:p>
-                      <a:pPr lvl="0" indent="0" marL="0" algn="r">
-                        <a:buNone/>
-                      </a:pPr>
-                      <a:r>
-                        <a:rPr/>
-                        <a:t>13.25</a:t>
-                      </a:r>
-                    </a:p>
-                  </a:txBody>
-                </a:tc>
-                <a:tc>
-                  <a:txBody>
-                    <a:bodyPr/>
-                    <a:lstStyle/>
-                    <a:p>
-                      <a:pPr lvl="0" indent="0" marL="0" algn="r">
-                        <a:buNone/>
-                      </a:pPr>
-                      <a:r>
-                        <a:rPr/>
-                        <a:t>15.5</a:t>
-                      </a:r>
-                    </a:p>
-                  </a:txBody>
-                </a:tc>
-                <a:tc>
-                  <a:txBody>
-                    <a:bodyPr/>
-                    <a:lstStyle/>
-                    <a:p>
-                      <a:pPr lvl="0" indent="0" marL="0" algn="r">
-                        <a:buNone/>
-                      </a:pPr>
-                      <a:r>
-                        <a:rPr/>
-                        <a:t>17.75</a:t>
-                      </a:r>
-                    </a:p>
-                  </a:txBody>
-                </a:tc>
-                <a:tc>
-                  <a:txBody>
-                    <a:bodyPr/>
-                    <a:lstStyle/>
-                    <a:p>
-                      <a:pPr lvl="0" indent="0" marL="0" algn="r">
-                        <a:buNone/>
-                      </a:pPr>
-                      <a:r>
-                        <a:rPr/>
-                        <a:t>20</a:t>
-                      </a:r>
-                    </a:p>
-                  </a:txBody>
-                </a:tc>
-                <a:tc>
-                  <a:txBody>
-                    <a:bodyPr/>
-                    <a:lstStyle/>
-                    <a:p>
-                      <a:pPr lvl="0" indent="0" marL="0" algn="l">
-                        <a:buNone/>
-                      </a:pPr>
-                      <a:r>
-                        <a:rPr/>
-                        <a:t>▇▇▇▇▇</a:t>
+                        <a:t>0</a:t>
                       </a:r>
                     </a:p>
                   </a:txBody>
@@ -11897,7 +11861,7 @@
                       </a:pPr>
                       <a:r>
                         <a:rPr/>
-                        <a:t>index</a:t>
+                        <a:t>twig_id</a:t>
                       </a:r>
                     </a:p>
                   </a:txBody>
@@ -11927,6 +11891,66 @@
                       </a:pPr>
                       <a:r>
                         <a:rPr/>
+                        <a:t>19</a:t>
+                      </a:r>
+                    </a:p>
+                  </a:txBody>
+                </a:tc>
+                <a:tc>
+                  <a:txBody>
+                    <a:bodyPr/>
+                    <a:lstStyle/>
+                    <a:p>
+                      <a:pPr lvl="0" indent="0" marL="0" algn="r">
+                        <a:buNone/>
+                      </a:pPr>
+                      <a:r>
+                        <a:rPr/>
+                        <a:t>0.24</a:t>
+                      </a:r>
+                    </a:p>
+                  </a:txBody>
+                </a:tc>
+                <a:tc>
+                  <a:txBody>
+                    <a:bodyPr/>
+                    <a:lstStyle/>
+                    <a:p>
+                      <a:pPr lvl="0" indent="0" marL="0" algn="r">
+                        <a:buNone/>
+                      </a:pPr>
+                      <a:r>
+                        <a:rPr/>
+                        <a:t>6</a:t>
+                      </a:r>
+                    </a:p>
+                  </a:txBody>
+                </a:tc>
+                <a:tc>
+                  <a:txBody>
+                    <a:bodyPr/>
+                    <a:lstStyle/>
+                    <a:p>
+                      <a:pPr lvl="0" indent="0" marL="0" algn="r">
+                        <a:buNone/>
+                      </a:pPr>
+                      <a:r>
+                        <a:rPr/>
+                        <a:t>6</a:t>
+                      </a:r>
+                    </a:p>
+                  </a:txBody>
+                </a:tc>
+                <a:tc>
+                  <a:txBody>
+                    <a:bodyPr/>
+                    <a:lstStyle/>
+                    <a:p>
+                      <a:pPr lvl="0" indent="0" marL="0" algn="r">
+                        <a:buNone/>
+                      </a:pPr>
+                      <a:r>
+                        <a:rPr/>
                         <a:t>0</a:t>
                       </a:r>
                     </a:p>
@@ -11942,7 +11966,7 @@
                       </a:pPr>
                       <a:r>
                         <a:rPr/>
-                        <a:t>1</a:t>
+                        <a:t>3</a:t>
                       </a:r>
                     </a:p>
                   </a:txBody>
@@ -11957,112 +11981,7 @@
                       </a:pPr>
                       <a:r>
                         <a:rPr/>
-                        <a:t>5.5</a:t>
-                      </a:r>
-                    </a:p>
-                  </a:txBody>
-                </a:tc>
-                <a:tc>
-                  <a:txBody>
-                    <a:bodyPr/>
-                    <a:lstStyle/>
-                    <a:p>
-                      <a:pPr lvl="0" indent="0" marL="0" algn="r">
-                        <a:buNone/>
-                      </a:pPr>
-                      <a:r>
-                        <a:rPr/>
-                        <a:t>3.03</a:t>
-                      </a:r>
-                    </a:p>
-                  </a:txBody>
-                </a:tc>
-                <a:tc>
-                  <a:txBody>
-                    <a:bodyPr/>
-                    <a:lstStyle/>
-                    <a:p>
-                      <a:pPr lvl="0" indent="0" marL="0" algn="r">
-                        <a:buNone/>
-                      </a:pPr>
-                      <a:r>
-                        <a:rPr/>
-                        <a:t>1</a:t>
-                      </a:r>
-                    </a:p>
-                  </a:txBody>
-                </a:tc>
-                <a:tc>
-                  <a:txBody>
-                    <a:bodyPr/>
-                    <a:lstStyle/>
-                    <a:p>
-                      <a:pPr lvl="0" indent="0" marL="0" algn="r">
-                        <a:buNone/>
-                      </a:pPr>
-                      <a:r>
-                        <a:rPr/>
-                        <a:t>3.25</a:t>
-                      </a:r>
-                    </a:p>
-                  </a:txBody>
-                </a:tc>
-                <a:tc>
-                  <a:txBody>
-                    <a:bodyPr/>
-                    <a:lstStyle/>
-                    <a:p>
-                      <a:pPr lvl="0" indent="0" marL="0" algn="r">
-                        <a:buNone/>
-                      </a:pPr>
-                      <a:r>
-                        <a:rPr/>
-                        <a:t>5.5</a:t>
-                      </a:r>
-                    </a:p>
-                  </a:txBody>
-                </a:tc>
-                <a:tc>
-                  <a:txBody>
-                    <a:bodyPr/>
-                    <a:lstStyle/>
-                    <a:p>
-                      <a:pPr lvl="0" indent="0" marL="0" algn="r">
-                        <a:buNone/>
-                      </a:pPr>
-                      <a:r>
-                        <a:rPr/>
-                        <a:t>7.75</a:t>
-                      </a:r>
-                    </a:p>
-                  </a:txBody>
-                </a:tc>
-                <a:tc>
-                  <a:txBody>
-                    <a:bodyPr/>
-                    <a:lstStyle/>
-                    <a:p>
-                      <a:pPr lvl="0" indent="0" marL="0" algn="r">
-                        <a:buNone/>
-                      </a:pPr>
-                      <a:r>
-                        <a:rPr/>
-                        <a:t>10</a:t>
-                      </a:r>
-                    </a:p>
-                  </a:txBody>
-                </a:tc>
-                <a:tc>
-                  <a:txBody>
-                    <a:bodyPr/>
-                    <a:lstStyle/>
-                    <a:p>
-                      <a:pPr lvl="0" indent="0" marL="0" algn="l">
-                        <a:buNone/>
-                      </a:pPr>
-                      <a:r>
-                        <a:rPr/>
-                        <a:t>▇▇▇▇▇</a:t>
+                        <a:t>0</a:t>
                       </a:r>
                     </a:p>
                   </a:txBody>
@@ -12079,7 +11998,7 @@
                       </a:pPr>
                       <a:r>
                         <a:rPr/>
-                        <a:t>weight_g</a:t>
+                        <a:t>leaf_id</a:t>
                       </a:r>
                     </a:p>
                   </a:txBody>
@@ -12109,6 +12028,66 @@
                       </a:pPr>
                       <a:r>
                         <a:rPr/>
+                        <a:t>16</a:t>
+                      </a:r>
+                    </a:p>
+                  </a:txBody>
+                </a:tc>
+                <a:tc>
+                  <a:txBody>
+                    <a:bodyPr/>
+                    <a:lstStyle/>
+                    <a:p>
+                      <a:pPr lvl="0" indent="0" marL="0" algn="r">
+                        <a:buNone/>
+                      </a:pPr>
+                      <a:r>
+                        <a:rPr/>
+                        <a:t>0.43</a:t>
+                      </a:r>
+                    </a:p>
+                  </a:txBody>
+                </a:tc>
+                <a:tc>
+                  <a:txBody>
+                    <a:bodyPr/>
+                    <a:lstStyle/>
+                    <a:p>
+                      <a:pPr lvl="0" indent="0" marL="0" algn="r">
+                        <a:buNone/>
+                      </a:pPr>
+                      <a:r>
+                        <a:rPr/>
+                        <a:t>1</a:t>
+                      </a:r>
+                    </a:p>
+                  </a:txBody>
+                </a:tc>
+                <a:tc>
+                  <a:txBody>
+                    <a:bodyPr/>
+                    <a:lstStyle/>
+                    <a:p>
+                      <a:pPr lvl="0" indent="0" marL="0" algn="r">
+                        <a:buNone/>
+                      </a:pPr>
+                      <a:r>
+                        <a:rPr/>
+                        <a:t>3</a:t>
+                      </a:r>
+                    </a:p>
+                  </a:txBody>
+                </a:tc>
+                <a:tc>
+                  <a:txBody>
+                    <a:bodyPr/>
+                    <a:lstStyle/>
+                    <a:p>
+                      <a:pPr lvl="0" indent="0" marL="0" algn="r">
+                        <a:buNone/>
+                      </a:pPr>
+                      <a:r>
+                        <a:rPr/>
                         <a:t>0</a:t>
                       </a:r>
                     </a:p>
@@ -12124,7 +12103,7 @@
                       </a:pPr>
                       <a:r>
                         <a:rPr/>
-                        <a:t>1</a:t>
+                        <a:t>12</a:t>
                       </a:r>
                     </a:p>
                   </a:txBody>
@@ -12139,112 +12118,7 @@
                       </a:pPr>
                       <a:r>
                         <a:rPr/>
-                        <a:t>7.8</a:t>
-                      </a:r>
-                    </a:p>
-                  </a:txBody>
-                </a:tc>
-                <a:tc>
-                  <a:txBody>
-                    <a:bodyPr/>
-                    <a:lstStyle/>
-                    <a:p>
-                      <a:pPr lvl="0" indent="0" marL="0" algn="r">
-                        <a:buNone/>
-                      </a:pPr>
-                      <a:r>
-                        <a:rPr/>
-                        <a:t>1.03</a:t>
-                      </a:r>
-                    </a:p>
-                  </a:txBody>
-                </a:tc>
-                <a:tc>
-                  <a:txBody>
-                    <a:bodyPr/>
-                    <a:lstStyle/>
-                    <a:p>
-                      <a:pPr lvl="0" indent="0" marL="0" algn="r">
-                        <a:buNone/>
-                      </a:pPr>
-                      <a:r>
-                        <a:rPr/>
-                        <a:t>6</a:t>
-                      </a:r>
-                    </a:p>
-                  </a:txBody>
-                </a:tc>
-                <a:tc>
-                  <a:txBody>
-                    <a:bodyPr/>
-                    <a:lstStyle/>
-                    <a:p>
-                      <a:pPr lvl="0" indent="0" marL="0" algn="r">
-                        <a:buNone/>
-                      </a:pPr>
-                      <a:r>
-                        <a:rPr/>
-                        <a:t>7.00</a:t>
-                      </a:r>
-                    </a:p>
-                  </a:txBody>
-                </a:tc>
-                <a:tc>
-                  <a:txBody>
-                    <a:bodyPr/>
-                    <a:lstStyle/>
-                    <a:p>
-                      <a:pPr lvl="0" indent="0" marL="0" algn="r">
-                        <a:buNone/>
-                      </a:pPr>
-                      <a:r>
-                        <a:rPr/>
-                        <a:t>8.0</a:t>
-                      </a:r>
-                    </a:p>
-                  </a:txBody>
-                </a:tc>
-                <a:tc>
-                  <a:txBody>
-                    <a:bodyPr/>
-                    <a:lstStyle/>
-                    <a:p>
-                      <a:pPr lvl="0" indent="0" marL="0" algn="r">
-                        <a:buNone/>
-                      </a:pPr>
-                      <a:r>
-                        <a:rPr/>
-                        <a:t>8.75</a:t>
-                      </a:r>
-                    </a:p>
-                  </a:txBody>
-                </a:tc>
-                <a:tc>
-                  <a:txBody>
-                    <a:bodyPr/>
-                    <a:lstStyle/>
-                    <a:p>
-                      <a:pPr lvl="0" indent="0" marL="0" algn="r">
-                        <a:buNone/>
-                      </a:pPr>
-                      <a:r>
-                        <a:rPr/>
-                        <a:t>9</a:t>
-                      </a:r>
-                    </a:p>
-                  </a:txBody>
-                </a:tc>
-                <a:tc>
-                  <a:txBody>
-                    <a:bodyPr/>
-                    <a:lstStyle/>
-                    <a:p>
-                      <a:pPr lvl="0" indent="0" marL="0" algn="l">
-                        <a:buNone/>
-                      </a:pPr>
-                      <a:r>
-                        <a:rPr/>
-                        <a:t>▂▇▁▇▇</a:t>
+                        <a:t>0</a:t>
                       </a:r>
                     </a:p>
                   </a:txBody>
@@ -12261,7 +12135,7 @@
                       </a:pPr>
                       <a:r>
                         <a:rPr/>
-                        <a:t>weight_g</a:t>
+                        <a:t>leaf_id</a:t>
                       </a:r>
                     </a:p>
                   </a:txBody>
@@ -12291,6 +12165,66 @@
                       </a:pPr>
                       <a:r>
                         <a:rPr/>
+                        <a:t>13</a:t>
+                      </a:r>
+                    </a:p>
+                  </a:txBody>
+                </a:tc>
+                <a:tc>
+                  <a:txBody>
+                    <a:bodyPr/>
+                    <a:lstStyle/>
+                    <a:p>
+                      <a:pPr lvl="0" indent="0" marL="0" algn="r">
+                        <a:buNone/>
+                      </a:pPr>
+                      <a:r>
+                        <a:rPr/>
+                        <a:t>0.48</a:t>
+                      </a:r>
+                    </a:p>
+                  </a:txBody>
+                </a:tc>
+                <a:tc>
+                  <a:txBody>
+                    <a:bodyPr/>
+                    <a:lstStyle/>
+                    <a:p>
+                      <a:pPr lvl="0" indent="0" marL="0" algn="r">
+                        <a:buNone/>
+                      </a:pPr>
+                      <a:r>
+                        <a:rPr/>
+                        <a:t>1</a:t>
+                      </a:r>
+                    </a:p>
+                  </a:txBody>
+                </a:tc>
+                <a:tc>
+                  <a:txBody>
+                    <a:bodyPr/>
+                    <a:lstStyle/>
+                    <a:p>
+                      <a:pPr lvl="0" indent="0" marL="0" algn="r">
+                        <a:buNone/>
+                      </a:pPr>
+                      <a:r>
+                        <a:rPr/>
+                        <a:t>3</a:t>
+                      </a:r>
+                    </a:p>
+                  </a:txBody>
+                </a:tc>
+                <a:tc>
+                  <a:txBody>
+                    <a:bodyPr/>
+                    <a:lstStyle/>
+                    <a:p>
+                      <a:pPr lvl="0" indent="0" marL="0" algn="r">
+                        <a:buNone/>
+                      </a:pPr>
+                      <a:r>
+                        <a:rPr/>
                         <a:t>0</a:t>
                       </a:r>
                     </a:p>
@@ -12306,7 +12240,7 @@
                       </a:pPr>
                       <a:r>
                         <a:rPr/>
-                        <a:t>1</a:t>
+                        <a:t>12</a:t>
                       </a:r>
                     </a:p>
                   </a:txBody>
@@ -12321,112 +12255,7 @@
                       </a:pPr>
                       <a:r>
                         <a:rPr/>
-                        <a:t>3.8</a:t>
-                      </a:r>
-                    </a:p>
-                  </a:txBody>
-                </a:tc>
-                <a:tc>
-                  <a:txBody>
-                    <a:bodyPr/>
-                    <a:lstStyle/>
-                    <a:p>
-                      <a:pPr lvl="0" indent="0" marL="0" algn="r">
-                        <a:buNone/>
-                      </a:pPr>
-                      <a:r>
-                        <a:rPr/>
-                        <a:t>0.79</a:t>
-                      </a:r>
-                    </a:p>
-                  </a:txBody>
-                </a:tc>
-                <a:tc>
-                  <a:txBody>
-                    <a:bodyPr/>
-                    <a:lstStyle/>
-                    <a:p>
-                      <a:pPr lvl="0" indent="0" marL="0" algn="r">
-                        <a:buNone/>
-                      </a:pPr>
-                      <a:r>
-                        <a:rPr/>
-                        <a:t>3</a:t>
-                      </a:r>
-                    </a:p>
-                  </a:txBody>
-                </a:tc>
-                <a:tc>
-                  <a:txBody>
-                    <a:bodyPr/>
-                    <a:lstStyle/>
-                    <a:p>
-                      <a:pPr lvl="0" indent="0" marL="0" algn="r">
-                        <a:buNone/>
-                      </a:pPr>
-                      <a:r>
-                        <a:rPr/>
-                        <a:t>3.00</a:t>
-                      </a:r>
-                    </a:p>
-                  </a:txBody>
-                </a:tc>
-                <a:tc>
-                  <a:txBody>
-                    <a:bodyPr/>
-                    <a:lstStyle/>
-                    <a:p>
-                      <a:pPr lvl="0" indent="0" marL="0" algn="r">
-                        <a:buNone/>
-                      </a:pPr>
-                      <a:r>
-                        <a:rPr/>
-                        <a:t>4.0</a:t>
-                      </a:r>
-                    </a:p>
-                  </a:txBody>
-                </a:tc>
-                <a:tc>
-                  <a:txBody>
-                    <a:bodyPr/>
-                    <a:lstStyle/>
-                    <a:p>
-                      <a:pPr lvl="0" indent="0" marL="0" algn="r">
-                        <a:buNone/>
-                      </a:pPr>
-                      <a:r>
-                        <a:rPr/>
-                        <a:t>4.00</a:t>
-                      </a:r>
-                    </a:p>
-                  </a:txBody>
-                </a:tc>
-                <a:tc>
-                  <a:txBody>
-                    <a:bodyPr/>
-                    <a:lstStyle/>
-                    <a:p>
-                      <a:pPr lvl="0" indent="0" marL="0" algn="r">
-                        <a:buNone/>
-                      </a:pPr>
-                      <a:r>
-                        <a:rPr/>
-                        <a:t>5</a:t>
-                      </a:r>
-                    </a:p>
-                  </a:txBody>
-                </a:tc>
-                <a:tc>
-                  <a:txBody>
-                    <a:bodyPr/>
-                    <a:lstStyle/>
-                    <a:p>
-                      <a:pPr lvl="0" indent="0" marL="0" algn="l">
-                        <a:buNone/>
-                      </a:pPr>
-                      <a:r>
-                        <a:rPr/>
-                        <a:t>▇▁▇▁▃</a:t>
+                        <a:t>0</a:t>
                       </a:r>
                     </a:p>
                   </a:txBody>
@@ -12443,7 +12272,7 @@
                       </a:pPr>
                       <a:r>
                         <a:rPr/>
-                        <a:t>width_cm</a:t>
+                        <a:t>teams</a:t>
                       </a:r>
                     </a:p>
                   </a:txBody>
@@ -12488,7 +12317,7 @@
                       </a:pPr>
                       <a:r>
                         <a:rPr/>
-                        <a:t>1</a:t>
+                        <a:t>1.00</a:t>
                       </a:r>
                     </a:p>
                   </a:txBody>
@@ -12503,7 +12332,7 @@
                       </a:pPr>
                       <a:r>
                         <a:rPr/>
-                        <a:t>17.3</a:t>
+                        <a:t>5</a:t>
                       </a:r>
                     </a:p>
                   </a:txBody>
@@ -12518,7 +12347,7 @@
                       </a:pPr>
                       <a:r>
                         <a:rPr/>
-                        <a:t>3.02</a:t>
+                        <a:t>18</a:t>
                       </a:r>
                     </a:p>
                   </a:txBody>
@@ -12533,7 +12362,7 @@
                       </a:pPr>
                       <a:r>
                         <a:rPr/>
-                        <a:t>9</a:t>
+                        <a:t>0</a:t>
                       </a:r>
                     </a:p>
                   </a:txBody>
@@ -12548,7 +12377,7 @@
                       </a:pPr>
                       <a:r>
                         <a:rPr/>
-                        <a:t>17.25</a:t>
+                        <a:t>5</a:t>
                       </a:r>
                     </a:p>
                   </a:txBody>
@@ -12563,52 +12392,7 @@
                       </a:pPr>
                       <a:r>
                         <a:rPr/>
-                        <a:t>18.0</a:t>
-                      </a:r>
-                    </a:p>
-                  </a:txBody>
-                </a:tc>
-                <a:tc>
-                  <a:txBody>
-                    <a:bodyPr/>
-                    <a:lstStyle/>
-                    <a:p>
-                      <a:pPr lvl="0" indent="0" marL="0" algn="r">
-                        <a:buNone/>
-                      </a:pPr>
-                      <a:r>
-                        <a:rPr/>
-                        <a:t>19.00</a:t>
-                      </a:r>
-                    </a:p>
-                  </a:txBody>
-                </a:tc>
-                <a:tc>
-                  <a:txBody>
-                    <a:bodyPr/>
-                    <a:lstStyle/>
-                    <a:p>
-                      <a:pPr lvl="0" indent="0" marL="0" algn="r">
-                        <a:buNone/>
-                      </a:pPr>
-                      <a:r>
-                        <a:rPr/>
-                        <a:t>19</a:t>
-                      </a:r>
-                    </a:p>
-                  </a:txBody>
-                </a:tc>
-                <a:tc>
-                  <a:txBody>
-                    <a:bodyPr/>
-                    <a:lstStyle/>
-                    <a:p>
-                      <a:pPr lvl="0" indent="0" marL="0" algn="l">
-                        <a:buNone/>
-                      </a:pPr>
-                      <a:r>
-                        <a:rPr/>
-                        <a:t>▁▁▁▂▇</a:t>
+                        <a:t>0</a:t>
                       </a:r>
                     </a:p>
                   </a:txBody>
@@ -12625,7 +12409,7 @@
                       </a:pPr>
                       <a:r>
                         <a:rPr/>
-                        <a:t>width_cm</a:t>
+                        <a:t>teams</a:t>
                       </a:r>
                     </a:p>
                   </a:txBody>
@@ -12670,7 +12454,7 @@
                       </a:pPr>
                       <a:r>
                         <a:rPr/>
-                        <a:t>1</a:t>
+                        <a:t>1.00</a:t>
                       </a:r>
                     </a:p>
                   </a:txBody>
@@ -12685,7 +12469,7 @@
                       </a:pPr>
                       <a:r>
                         <a:rPr/>
-                        <a:t>13.7</a:t>
+                        <a:t>5</a:t>
                       </a:r>
                     </a:p>
                   </a:txBody>
@@ -12700,7 +12484,7 @@
                       </a:pPr>
                       <a:r>
                         <a:rPr/>
-                        <a:t>1.34</a:t>
+                        <a:t>18</a:t>
                       </a:r>
                     </a:p>
                   </a:txBody>
@@ -12715,7 +12499,7 @@
                       </a:pPr>
                       <a:r>
                         <a:rPr/>
-                        <a:t>12</a:t>
+                        <a:t>0</a:t>
                       </a:r>
                     </a:p>
                   </a:txBody>
@@ -12730,7 +12514,7 @@
                       </a:pPr>
                       <a:r>
                         <a:rPr/>
-                        <a:t>13.00</a:t>
+                        <a:t>5</a:t>
                       </a:r>
                     </a:p>
                   </a:txBody>
@@ -12745,416 +12529,7 @@
                       </a:pPr>
                       <a:r>
                         <a:rPr/>
-                        <a:t>13.5</a:t>
-                      </a:r>
-                    </a:p>
-                  </a:txBody>
-                </a:tc>
-                <a:tc>
-                  <a:txBody>
-                    <a:bodyPr/>
-                    <a:lstStyle/>
-                    <a:p>
-                      <a:pPr lvl="0" indent="0" marL="0" algn="r">
-                        <a:buNone/>
-                      </a:pPr>
-                      <a:r>
-                        <a:rPr/>
-                        <a:t>14.75</a:t>
-                      </a:r>
-                    </a:p>
-                  </a:txBody>
-                </a:tc>
-                <a:tc>
-                  <a:txBody>
-                    <a:bodyPr/>
-                    <a:lstStyle/>
-                    <a:p>
-                      <a:pPr lvl="0" indent="0" marL="0" algn="r">
-                        <a:buNone/>
-                      </a:pPr>
-                      <a:r>
-                        <a:rPr/>
-                        <a:t>16</a:t>
-                      </a:r>
-                    </a:p>
-                  </a:txBody>
-                </a:tc>
-                <a:tc>
-                  <a:txBody>
-                    <a:bodyPr/>
-                    <a:lstStyle/>
-                    <a:p>
-                      <a:pPr lvl="0" indent="0" marL="0" algn="l">
-                        <a:buNone/>
-                      </a:pPr>
-                      <a:r>
-                        <a:rPr/>
-                        <a:t>▅▇▅▅▂</a:t>
-                      </a:r>
-                    </a:p>
-                  </a:txBody>
-                </a:tc>
-              </a:tr>
-              <a:tr h="0">
-                <a:tc>
-                  <a:txBody>
-                    <a:bodyPr/>
-                    <a:lstStyle/>
-                    <a:p>
-                      <a:pPr lvl="0" indent="0" marL="0" algn="l">
-                        <a:buNone/>
-                      </a:pPr>
-                      <a:r>
-                        <a:rPr/>
-                        <a:t>height_cm</a:t>
-                      </a:r>
-                    </a:p>
-                  </a:txBody>
-                </a:tc>
-                <a:tc>
-                  <a:txBody>
-                    <a:bodyPr/>
-                    <a:lstStyle/>
-                    <a:p>
-                      <a:pPr lvl="0" indent="0" marL="0" algn="l">
-                        <a:buNone/>
-                      </a:pPr>
-                      <a:r>
-                        <a:rPr/>
-                        <a:t>shady</a:t>
-                      </a:r>
-                    </a:p>
-                  </a:txBody>
-                </a:tc>
-                <a:tc>
-                  <a:txBody>
-                    <a:bodyPr/>
-                    <a:lstStyle/>
-                    <a:p>
-                      <a:pPr lvl="0" indent="0" marL="0" algn="r">
-                        <a:buNone/>
-                      </a:pPr>
-                      <a:r>
-                        <a:rPr/>
                         <a:t>0</a:t>
-                      </a:r>
-                    </a:p>
-                  </a:txBody>
-                </a:tc>
-                <a:tc>
-                  <a:txBody>
-                    <a:bodyPr/>
-                    <a:lstStyle/>
-                    <a:p>
-                      <a:pPr lvl="0" indent="0" marL="0" algn="r">
-                        <a:buNone/>
-                      </a:pPr>
-                      <a:r>
-                        <a:rPr/>
-                        <a:t>1</a:t>
-                      </a:r>
-                    </a:p>
-                  </a:txBody>
-                </a:tc>
-                <a:tc>
-                  <a:txBody>
-                    <a:bodyPr/>
-                    <a:lstStyle/>
-                    <a:p>
-                      <a:pPr lvl="0" indent="0" marL="0" algn="r">
-                        <a:buNone/>
-                      </a:pPr>
-                      <a:r>
-                        <a:rPr/>
-                        <a:t>27.9</a:t>
-                      </a:r>
-                    </a:p>
-                  </a:txBody>
-                </a:tc>
-                <a:tc>
-                  <a:txBody>
-                    <a:bodyPr/>
-                    <a:lstStyle/>
-                    <a:p>
-                      <a:pPr lvl="0" indent="0" marL="0" algn="r">
-                        <a:buNone/>
-                      </a:pPr>
-                      <a:r>
-                        <a:rPr/>
-                        <a:t>0.88</a:t>
-                      </a:r>
-                    </a:p>
-                  </a:txBody>
-                </a:tc>
-                <a:tc>
-                  <a:txBody>
-                    <a:bodyPr/>
-                    <a:lstStyle/>
-                    <a:p>
-                      <a:pPr lvl="0" indent="0" marL="0" algn="r">
-                        <a:buNone/>
-                      </a:pPr>
-                      <a:r>
-                        <a:rPr/>
-                        <a:t>27</a:t>
-                      </a:r>
-                    </a:p>
-                  </a:txBody>
-                </a:tc>
-                <a:tc>
-                  <a:txBody>
-                    <a:bodyPr/>
-                    <a:lstStyle/>
-                    <a:p>
-                      <a:pPr lvl="0" indent="0" marL="0" algn="r">
-                        <a:buNone/>
-                      </a:pPr>
-                      <a:r>
-                        <a:rPr/>
-                        <a:t>27.00</a:t>
-                      </a:r>
-                    </a:p>
-                  </a:txBody>
-                </a:tc>
-                <a:tc>
-                  <a:txBody>
-                    <a:bodyPr/>
-                    <a:lstStyle/>
-                    <a:p>
-                      <a:pPr lvl="0" indent="0" marL="0" algn="r">
-                        <a:buNone/>
-                      </a:pPr>
-                      <a:r>
-                        <a:rPr/>
-                        <a:t>28.0</a:t>
-                      </a:r>
-                    </a:p>
-                  </a:txBody>
-                </a:tc>
-                <a:tc>
-                  <a:txBody>
-                    <a:bodyPr/>
-                    <a:lstStyle/>
-                    <a:p>
-                      <a:pPr lvl="0" indent="0" marL="0" algn="r">
-                        <a:buNone/>
-                      </a:pPr>
-                      <a:r>
-                        <a:rPr/>
-                        <a:t>28.75</a:t>
-                      </a:r>
-                    </a:p>
-                  </a:txBody>
-                </a:tc>
-                <a:tc>
-                  <a:txBody>
-                    <a:bodyPr/>
-                    <a:lstStyle/>
-                    <a:p>
-                      <a:pPr lvl="0" indent="0" marL="0" algn="r">
-                        <a:buNone/>
-                      </a:pPr>
-                      <a:r>
-                        <a:rPr/>
-                        <a:t>29</a:t>
-                      </a:r>
-                    </a:p>
-                  </a:txBody>
-                </a:tc>
-                <a:tc>
-                  <a:txBody>
-                    <a:bodyPr/>
-                    <a:lstStyle/>
-                    <a:p>
-                      <a:pPr lvl="0" indent="0" marL="0" algn="l">
-                        <a:buNone/>
-                      </a:pPr>
-                      <a:r>
-                        <a:rPr/>
-                        <a:t>▇▁▆▁▆</a:t>
-                      </a:r>
-                    </a:p>
-                  </a:txBody>
-                </a:tc>
-              </a:tr>
-              <a:tr h="0">
-                <a:tc>
-                  <a:txBody>
-                    <a:bodyPr/>
-                    <a:lstStyle/>
-                    <a:p>
-                      <a:pPr lvl="0" indent="0" marL="0" algn="l">
-                        <a:buNone/>
-                      </a:pPr>
-                      <a:r>
-                        <a:rPr/>
-                        <a:t>height_cm</a:t>
-                      </a:r>
-                    </a:p>
-                  </a:txBody>
-                </a:tc>
-                <a:tc>
-                  <a:txBody>
-                    <a:bodyPr/>
-                    <a:lstStyle/>
-                    <a:p>
-                      <a:pPr lvl="0" indent="0" marL="0" algn="l">
-                        <a:buNone/>
-                      </a:pPr>
-                      <a:r>
-                        <a:rPr/>
-                        <a:t>sunny</a:t>
-                      </a:r>
-                    </a:p>
-                  </a:txBody>
-                </a:tc>
-                <a:tc>
-                  <a:txBody>
-                    <a:bodyPr/>
-                    <a:lstStyle/>
-                    <a:p>
-                      <a:pPr lvl="0" indent="0" marL="0" algn="r">
-                        <a:buNone/>
-                      </a:pPr>
-                      <a:r>
-                        <a:rPr/>
-                        <a:t>0</a:t>
-                      </a:r>
-                    </a:p>
-                  </a:txBody>
-                </a:tc>
-                <a:tc>
-                  <a:txBody>
-                    <a:bodyPr/>
-                    <a:lstStyle/>
-                    <a:p>
-                      <a:pPr lvl="0" indent="0" marL="0" algn="r">
-                        <a:buNone/>
-                      </a:pPr>
-                      <a:r>
-                        <a:rPr/>
-                        <a:t>1</a:t>
-                      </a:r>
-                    </a:p>
-                  </a:txBody>
-                </a:tc>
-                <a:tc>
-                  <a:txBody>
-                    <a:bodyPr/>
-                    <a:lstStyle/>
-                    <a:p>
-                      <a:pPr lvl="0" indent="0" marL="0" algn="r">
-                        <a:buNone/>
-                      </a:pPr>
-                      <a:r>
-                        <a:rPr/>
-                        <a:t>22.3</a:t>
-                      </a:r>
-                    </a:p>
-                  </a:txBody>
-                </a:tc>
-                <a:tc>
-                  <a:txBody>
-                    <a:bodyPr/>
-                    <a:lstStyle/>
-                    <a:p>
-                      <a:pPr lvl="0" indent="0" marL="0" algn="r">
-                        <a:buNone/>
-                      </a:pPr>
-                      <a:r>
-                        <a:rPr/>
-                        <a:t>1.06</a:t>
-                      </a:r>
-                    </a:p>
-                  </a:txBody>
-                </a:tc>
-                <a:tc>
-                  <a:txBody>
-                    <a:bodyPr/>
-                    <a:lstStyle/>
-                    <a:p>
-                      <a:pPr lvl="0" indent="0" marL="0" algn="r">
-                        <a:buNone/>
-                      </a:pPr>
-                      <a:r>
-                        <a:rPr/>
-                        <a:t>21</a:t>
-                      </a:r>
-                    </a:p>
-                  </a:txBody>
-                </a:tc>
-                <a:tc>
-                  <a:txBody>
-                    <a:bodyPr/>
-                    <a:lstStyle/>
-                    <a:p>
-                      <a:pPr lvl="0" indent="0" marL="0" algn="r">
-                        <a:buNone/>
-                      </a:pPr>
-                      <a:r>
-                        <a:rPr/>
-                        <a:t>21.25</a:t>
-                      </a:r>
-                    </a:p>
-                  </a:txBody>
-                </a:tc>
-                <a:tc>
-                  <a:txBody>
-                    <a:bodyPr/>
-                    <a:lstStyle/>
-                    <a:p>
-                      <a:pPr lvl="0" indent="0" marL="0" algn="r">
-                        <a:buNone/>
-                      </a:pPr>
-                      <a:r>
-                        <a:rPr/>
-                        <a:t>22.5</a:t>
-                      </a:r>
-                    </a:p>
-                  </a:txBody>
-                </a:tc>
-                <a:tc>
-                  <a:txBody>
-                    <a:bodyPr/>
-                    <a:lstStyle/>
-                    <a:p>
-                      <a:pPr lvl="0" indent="0" marL="0" algn="r">
-                        <a:buNone/>
-                      </a:pPr>
-                      <a:r>
-                        <a:rPr/>
-                        <a:t>23.00</a:t>
-                      </a:r>
-                    </a:p>
-                  </a:txBody>
-                </a:tc>
-                <a:tc>
-                  <a:txBody>
-                    <a:bodyPr/>
-                    <a:lstStyle/>
-                    <a:p>
-                      <a:pPr lvl="0" indent="0" marL="0" algn="r">
-                        <a:buNone/>
-                      </a:pPr>
-                      <a:r>
-                        <a:rPr/>
-                        <a:t>24</a:t>
-                      </a:r>
-                    </a:p>
-                  </a:txBody>
-                </a:tc>
-                <a:tc>
-                  <a:txBody>
-                    <a:bodyPr/>
-                    <a:lstStyle/>
-                    <a:p>
-                      <a:pPr lvl="0" indent="0" marL="0" algn="l">
-                        <a:buNone/>
-                      </a:pPr>
-                      <a:r>
-                        <a:rPr/>
-                        <a:t>▆▃▁▇▂</a:t>
                       </a:r>
                     </a:p>
                   </a:txBody>
@@ -13170,6 +12545,1741 @@
 </file>
 
 <file path=ppt/slides/slide24.xml><?xml version="1.0" encoding="utf-8"?>
+<p:sld xmlns:a="http://schemas.openxmlformats.org/drawingml/2006/main" xmlns:r="http://schemas.openxmlformats.org/officeDocument/2006/relationships" xmlns:p="http://schemas.openxmlformats.org/presentationml/2006/main">
+  <p:cSld>
+    <p:spTree>
+      <p:nvGrpSpPr>
+        <p:cNvPr id="1" name=""/>
+        <p:cNvGrpSpPr/>
+        <p:nvPr/>
+      </p:nvGrpSpPr>
+      <p:grpSpPr>
+        <a:xfrm>
+          <a:off x="0" y="0"/>
+          <a:ext cx="0" cy="0"/>
+          <a:chOff x="0" y="0"/>
+          <a:chExt cx="0" cy="0"/>
+        </a:xfrm>
+      </p:grpSpPr>
+      <p:sp>
+        <p:nvSpPr>
+          <p:cNvPr id="4" name="Text Placeholder 3"/>
+          <p:cNvSpPr>
+            <a:spLocks noGrp="1"/>
+          </p:cNvSpPr>
+          <p:nvPr>
+            <p:ph idx="2" sz="half" type="body"/>
+          </p:nvPr>
+        </p:nvSpPr>
+        <p:spPr/>
+        <p:txBody>
+          <a:bodyPr/>
+          <a:lstStyle/>
+          <a:p>
+            <a:pPr lvl="0" indent="0" marL="0">
+              <a:buNone/>
+            </a:pPr>
+            <a:r>
+              <a:rPr b="1"/>
+              <a:t>Variable type: numeric</a:t>
+            </a:r>
+          </a:p>
+        </p:txBody>
+      </p:sp>
+      <p:graphicFrame>
+        <p:nvGraphicFramePr>
+          <p:cNvPr id="6" name="Content Placeholder 5"/>
+          <p:cNvGraphicFramePr>
+            <a:graphicFrameLocks noGrp="1"/>
+          </p:cNvGraphicFramePr>
+          <p:nvPr>
+            <p:ph idx="1"/>
+          </p:nvPr>
+        </p:nvGraphicFramePr>
+        <p:xfrm>
+          <a:off x="127000" y="2819400"/>
+          <a:ext cx="8750300" cy="1943100"/>
+        </p:xfrm>
+        <a:graphic>
+          <a:graphicData uri="http://schemas.openxmlformats.org/drawingml/2006/table">
+            <a:tbl>
+              <a:tblPr firstRow="1" bandRow="1">
+                <a:tableStyleId>{5C22544A-7EE6-4342-B048-85BDC9FD1C3A}</a:tableStyleId>
+              </a:tblPr>
+              <a:tblGrid>
+                <a:gridCol w="1333500"/>
+                <a:gridCol w="571500"/>
+                <a:gridCol w="952500"/>
+                <a:gridCol w="1333500"/>
+                <a:gridCol w="571500"/>
+                <a:gridCol w="571500"/>
+                <a:gridCol w="571500"/>
+                <a:gridCol w="571500"/>
+                <a:gridCol w="571500"/>
+                <a:gridCol w="571500"/>
+                <a:gridCol w="571500"/>
+                <a:gridCol w="571500"/>
+              </a:tblGrid>
+              <a:tr h="0">
+                <a:tc>
+                  <a:txBody>
+                    <a:bodyPr/>
+                    <a:lstStyle/>
+                    <a:p>
+                      <a:pPr lvl="0" indent="0" marL="0" algn="l">
+                        <a:buNone/>
+                      </a:pPr>
+                      <a:r>
+                        <a:rPr/>
+                        <a:t>skim_variable</a:t>
+                      </a:r>
+                    </a:p>
+                  </a:txBody>
+                  <a:tcPr/>
+                </a:tc>
+                <a:tc>
+                  <a:txBody>
+                    <a:bodyPr/>
+                    <a:lstStyle/>
+                    <a:p>
+                      <a:pPr lvl="0" indent="0" marL="0" algn="l">
+                        <a:buNone/>
+                      </a:pPr>
+                      <a:r>
+                        <a:rPr/>
+                        <a:t>shade</a:t>
+                      </a:r>
+                    </a:p>
+                  </a:txBody>
+                  <a:tcPr/>
+                </a:tc>
+                <a:tc>
+                  <a:txBody>
+                    <a:bodyPr/>
+                    <a:lstStyle/>
+                    <a:p>
+                      <a:pPr lvl="0" indent="0" marL="0" algn="r">
+                        <a:buNone/>
+                      </a:pPr>
+                      <a:r>
+                        <a:rPr/>
+                        <a:t>n_missing</a:t>
+                      </a:r>
+                    </a:p>
+                  </a:txBody>
+                  <a:tcPr/>
+                </a:tc>
+                <a:tc>
+                  <a:txBody>
+                    <a:bodyPr/>
+                    <a:lstStyle/>
+                    <a:p>
+                      <a:pPr lvl="0" indent="0" marL="0" algn="r">
+                        <a:buNone/>
+                      </a:pPr>
+                      <a:r>
+                        <a:rPr/>
+                        <a:t>complete_rate</a:t>
+                      </a:r>
+                    </a:p>
+                  </a:txBody>
+                  <a:tcPr/>
+                </a:tc>
+                <a:tc>
+                  <a:txBody>
+                    <a:bodyPr/>
+                    <a:lstStyle/>
+                    <a:p>
+                      <a:pPr lvl="0" indent="0" marL="0" algn="r">
+                        <a:buNone/>
+                      </a:pPr>
+                      <a:r>
+                        <a:rPr/>
+                        <a:t>mean</a:t>
+                      </a:r>
+                    </a:p>
+                  </a:txBody>
+                  <a:tcPr/>
+                </a:tc>
+                <a:tc>
+                  <a:txBody>
+                    <a:bodyPr/>
+                    <a:lstStyle/>
+                    <a:p>
+                      <a:pPr lvl="0" indent="0" marL="0" algn="r">
+                        <a:buNone/>
+                      </a:pPr>
+                      <a:r>
+                        <a:rPr/>
+                        <a:t>sd</a:t>
+                      </a:r>
+                    </a:p>
+                  </a:txBody>
+                  <a:tcPr/>
+                </a:tc>
+                <a:tc>
+                  <a:txBody>
+                    <a:bodyPr/>
+                    <a:lstStyle/>
+                    <a:p>
+                      <a:pPr lvl="0" indent="0" marL="0" algn="r">
+                        <a:buNone/>
+                      </a:pPr>
+                      <a:r>
+                        <a:rPr/>
+                        <a:t>p0</a:t>
+                      </a:r>
+                    </a:p>
+                  </a:txBody>
+                  <a:tcPr/>
+                </a:tc>
+                <a:tc>
+                  <a:txBody>
+                    <a:bodyPr/>
+                    <a:lstStyle/>
+                    <a:p>
+                      <a:pPr lvl="0" indent="0" marL="0" algn="r">
+                        <a:buNone/>
+                      </a:pPr>
+                      <a:r>
+                        <a:rPr/>
+                        <a:t>p25</a:t>
+                      </a:r>
+                    </a:p>
+                  </a:txBody>
+                  <a:tcPr/>
+                </a:tc>
+                <a:tc>
+                  <a:txBody>
+                    <a:bodyPr/>
+                    <a:lstStyle/>
+                    <a:p>
+                      <a:pPr lvl="0" indent="0" marL="0" algn="r">
+                        <a:buNone/>
+                      </a:pPr>
+                      <a:r>
+                        <a:rPr/>
+                        <a:t>p50</a:t>
+                      </a:r>
+                    </a:p>
+                  </a:txBody>
+                  <a:tcPr/>
+                </a:tc>
+                <a:tc>
+                  <a:txBody>
+                    <a:bodyPr/>
+                    <a:lstStyle/>
+                    <a:p>
+                      <a:pPr lvl="0" indent="0" marL="0" algn="r">
+                        <a:buNone/>
+                      </a:pPr>
+                      <a:r>
+                        <a:rPr/>
+                        <a:t>p75</a:t>
+                      </a:r>
+                    </a:p>
+                  </a:txBody>
+                  <a:tcPr/>
+                </a:tc>
+                <a:tc>
+                  <a:txBody>
+                    <a:bodyPr/>
+                    <a:lstStyle/>
+                    <a:p>
+                      <a:pPr lvl="0" indent="0" marL="0" algn="r">
+                        <a:buNone/>
+                      </a:pPr>
+                      <a:r>
+                        <a:rPr/>
+                        <a:t>p100</a:t>
+                      </a:r>
+                    </a:p>
+                  </a:txBody>
+                  <a:tcPr/>
+                </a:tc>
+                <a:tc>
+                  <a:txBody>
+                    <a:bodyPr/>
+                    <a:lstStyle/>
+                    <a:p>
+                      <a:pPr lvl="0" indent="0" marL="0" algn="l">
+                        <a:buNone/>
+                      </a:pPr>
+                      <a:r>
+                        <a:rPr/>
+                        <a:t>hist</a:t>
+                      </a:r>
+                    </a:p>
+                  </a:txBody>
+                  <a:tcPr/>
+                </a:tc>
+              </a:tr>
+              <a:tr h="0">
+                <a:tc>
+                  <a:txBody>
+                    <a:bodyPr/>
+                    <a:lstStyle/>
+                    <a:p>
+                      <a:pPr lvl="0" indent="0" marL="0" algn="l">
+                        <a:buNone/>
+                      </a:pPr>
+                      <a:r>
+                        <a:rPr/>
+                        <a:t>mass_g</a:t>
+                      </a:r>
+                    </a:p>
+                  </a:txBody>
+                </a:tc>
+                <a:tc>
+                  <a:txBody>
+                    <a:bodyPr/>
+                    <a:lstStyle/>
+                    <a:p>
+                      <a:pPr lvl="0" indent="0" marL="0" algn="l">
+                        <a:buNone/>
+                      </a:pPr>
+                      <a:r>
+                        <a:rPr/>
+                        <a:t>shady</a:t>
+                      </a:r>
+                    </a:p>
+                  </a:txBody>
+                </a:tc>
+                <a:tc>
+                  <a:txBody>
+                    <a:bodyPr/>
+                    <a:lstStyle/>
+                    <a:p>
+                      <a:pPr lvl="0" indent="0" marL="0" algn="r">
+                        <a:buNone/>
+                      </a:pPr>
+                      <a:r>
+                        <a:rPr/>
+                        <a:t>0</a:t>
+                      </a:r>
+                    </a:p>
+                  </a:txBody>
+                </a:tc>
+                <a:tc>
+                  <a:txBody>
+                    <a:bodyPr/>
+                    <a:lstStyle/>
+                    <a:p>
+                      <a:pPr lvl="0" indent="0" marL="0" algn="r">
+                        <a:buNone/>
+                      </a:pPr>
+                      <a:r>
+                        <a:rPr/>
+                        <a:t>1.00</a:t>
+                      </a:r>
+                    </a:p>
+                  </a:txBody>
+                </a:tc>
+                <a:tc>
+                  <a:txBody>
+                    <a:bodyPr/>
+                    <a:lstStyle/>
+                    <a:p>
+                      <a:pPr lvl="0" indent="0" marL="0" algn="r">
+                        <a:buNone/>
+                      </a:pPr>
+                      <a:r>
+                        <a:rPr/>
+                        <a:t>0.52</a:t>
+                      </a:r>
+                    </a:p>
+                  </a:txBody>
+                </a:tc>
+                <a:tc>
+                  <a:txBody>
+                    <a:bodyPr/>
+                    <a:lstStyle/>
+                    <a:p>
+                      <a:pPr lvl="0" indent="0" marL="0" algn="r">
+                        <a:buNone/>
+                      </a:pPr>
+                      <a:r>
+                        <a:rPr/>
+                        <a:t>0.15</a:t>
+                      </a:r>
+                    </a:p>
+                  </a:txBody>
+                </a:tc>
+                <a:tc>
+                  <a:txBody>
+                    <a:bodyPr/>
+                    <a:lstStyle/>
+                    <a:p>
+                      <a:pPr lvl="0" indent="0" marL="0" algn="r">
+                        <a:buNone/>
+                      </a:pPr>
+                      <a:r>
+                        <a:rPr/>
+                        <a:t>0.34</a:t>
+                      </a:r>
+                    </a:p>
+                  </a:txBody>
+                </a:tc>
+                <a:tc>
+                  <a:txBody>
+                    <a:bodyPr/>
+                    <a:lstStyle/>
+                    <a:p>
+                      <a:pPr lvl="0" indent="0" marL="0" algn="r">
+                        <a:buNone/>
+                      </a:pPr>
+                      <a:r>
+                        <a:rPr/>
+                        <a:t>0.42</a:t>
+                      </a:r>
+                    </a:p>
+                  </a:txBody>
+                </a:tc>
+                <a:tc>
+                  <a:txBody>
+                    <a:bodyPr/>
+                    <a:lstStyle/>
+                    <a:p>
+                      <a:pPr lvl="0" indent="0" marL="0" algn="r">
+                        <a:buNone/>
+                      </a:pPr>
+                      <a:r>
+                        <a:rPr/>
+                        <a:t>0.52</a:t>
+                      </a:r>
+                    </a:p>
+                  </a:txBody>
+                </a:tc>
+                <a:tc>
+                  <a:txBody>
+                    <a:bodyPr/>
+                    <a:lstStyle/>
+                    <a:p>
+                      <a:pPr lvl="0" indent="0" marL="0" algn="r">
+                        <a:buNone/>
+                      </a:pPr>
+                      <a:r>
+                        <a:rPr/>
+                        <a:t>0.59</a:t>
+                      </a:r>
+                    </a:p>
+                  </a:txBody>
+                </a:tc>
+                <a:tc>
+                  <a:txBody>
+                    <a:bodyPr/>
+                    <a:lstStyle/>
+                    <a:p>
+                      <a:pPr lvl="0" indent="0" marL="0" algn="r">
+                        <a:buNone/>
+                      </a:pPr>
+                      <a:r>
+                        <a:rPr/>
+                        <a:t>0.92</a:t>
+                      </a:r>
+                    </a:p>
+                  </a:txBody>
+                </a:tc>
+                <a:tc>
+                  <a:txBody>
+                    <a:bodyPr/>
+                    <a:lstStyle/>
+                    <a:p>
+                      <a:pPr lvl="0" indent="0" marL="0" algn="l">
+                        <a:buNone/>
+                      </a:pPr>
+                      <a:r>
+                        <a:rPr/>
+                        <a:t>▇▅▃▁▁</a:t>
+                      </a:r>
+                    </a:p>
+                  </a:txBody>
+                </a:tc>
+              </a:tr>
+              <a:tr h="0">
+                <a:tc>
+                  <a:txBody>
+                    <a:bodyPr/>
+                    <a:lstStyle/>
+                    <a:p>
+                      <a:pPr lvl="0" indent="0" marL="0" algn="l">
+                        <a:buNone/>
+                      </a:pPr>
+                      <a:r>
+                        <a:rPr/>
+                        <a:t>mass_g</a:t>
+                      </a:r>
+                    </a:p>
+                  </a:txBody>
+                </a:tc>
+                <a:tc>
+                  <a:txBody>
+                    <a:bodyPr/>
+                    <a:lstStyle/>
+                    <a:p>
+                      <a:pPr lvl="0" indent="0" marL="0" algn="l">
+                        <a:buNone/>
+                      </a:pPr>
+                      <a:r>
+                        <a:rPr/>
+                        <a:t>sunny</a:t>
+                      </a:r>
+                    </a:p>
+                  </a:txBody>
+                </a:tc>
+                <a:tc>
+                  <a:txBody>
+                    <a:bodyPr/>
+                    <a:lstStyle/>
+                    <a:p>
+                      <a:pPr lvl="0" indent="0" marL="0" algn="r">
+                        <a:buNone/>
+                      </a:pPr>
+                      <a:r>
+                        <a:rPr/>
+                        <a:t>0</a:t>
+                      </a:r>
+                    </a:p>
+                  </a:txBody>
+                </a:tc>
+                <a:tc>
+                  <a:txBody>
+                    <a:bodyPr/>
+                    <a:lstStyle/>
+                    <a:p>
+                      <a:pPr lvl="0" indent="0" marL="0" algn="r">
+                        <a:buNone/>
+                      </a:pPr>
+                      <a:r>
+                        <a:rPr/>
+                        <a:t>1.00</a:t>
+                      </a:r>
+                    </a:p>
+                  </a:txBody>
+                </a:tc>
+                <a:tc>
+                  <a:txBody>
+                    <a:bodyPr/>
+                    <a:lstStyle/>
+                    <a:p>
+                      <a:pPr lvl="0" indent="0" marL="0" algn="r">
+                        <a:buNone/>
+                      </a:pPr>
+                      <a:r>
+                        <a:rPr/>
+                        <a:t>0.51</a:t>
+                      </a:r>
+                    </a:p>
+                  </a:txBody>
+                </a:tc>
+                <a:tc>
+                  <a:txBody>
+                    <a:bodyPr/>
+                    <a:lstStyle/>
+                    <a:p>
+                      <a:pPr lvl="0" indent="0" marL="0" algn="r">
+                        <a:buNone/>
+                      </a:pPr>
+                      <a:r>
+                        <a:rPr/>
+                        <a:t>0.21</a:t>
+                      </a:r>
+                    </a:p>
+                  </a:txBody>
+                </a:tc>
+                <a:tc>
+                  <a:txBody>
+                    <a:bodyPr/>
+                    <a:lstStyle/>
+                    <a:p>
+                      <a:pPr lvl="0" indent="0" marL="0" algn="r">
+                        <a:buNone/>
+                      </a:pPr>
+                      <a:r>
+                        <a:rPr/>
+                        <a:t>0.19</a:t>
+                      </a:r>
+                    </a:p>
+                  </a:txBody>
+                </a:tc>
+                <a:tc>
+                  <a:txBody>
+                    <a:bodyPr/>
+                    <a:lstStyle/>
+                    <a:p>
+                      <a:pPr lvl="0" indent="0" marL="0" algn="r">
+                        <a:buNone/>
+                      </a:pPr>
+                      <a:r>
+                        <a:rPr/>
+                        <a:t>0.35</a:t>
+                      </a:r>
+                    </a:p>
+                  </a:txBody>
+                </a:tc>
+                <a:tc>
+                  <a:txBody>
+                    <a:bodyPr/>
+                    <a:lstStyle/>
+                    <a:p>
+                      <a:pPr lvl="0" indent="0" marL="0" algn="r">
+                        <a:buNone/>
+                      </a:pPr>
+                      <a:r>
+                        <a:rPr/>
+                        <a:t>0.48</a:t>
+                      </a:r>
+                    </a:p>
+                  </a:txBody>
+                </a:tc>
+                <a:tc>
+                  <a:txBody>
+                    <a:bodyPr/>
+                    <a:lstStyle/>
+                    <a:p>
+                      <a:pPr lvl="0" indent="0" marL="0" algn="r">
+                        <a:buNone/>
+                      </a:pPr>
+                      <a:r>
+                        <a:rPr/>
+                        <a:t>0.65</a:t>
+                      </a:r>
+                    </a:p>
+                  </a:txBody>
+                </a:tc>
+                <a:tc>
+                  <a:txBody>
+                    <a:bodyPr/>
+                    <a:lstStyle/>
+                    <a:p>
+                      <a:pPr lvl="0" indent="0" marL="0" algn="r">
+                        <a:buNone/>
+                      </a:pPr>
+                      <a:r>
+                        <a:rPr/>
+                        <a:t>1.08</a:t>
+                      </a:r>
+                    </a:p>
+                  </a:txBody>
+                </a:tc>
+                <a:tc>
+                  <a:txBody>
+                    <a:bodyPr/>
+                    <a:lstStyle/>
+                    <a:p>
+                      <a:pPr lvl="0" indent="0" marL="0" algn="l">
+                        <a:buNone/>
+                      </a:pPr>
+                      <a:r>
+                        <a:rPr/>
+                        <a:t>▇▇▆▃▁</a:t>
+                      </a:r>
+                    </a:p>
+                  </a:txBody>
+                </a:tc>
+              </a:tr>
+              <a:tr h="0">
+                <a:tc>
+                  <a:txBody>
+                    <a:bodyPr/>
+                    <a:lstStyle/>
+                    <a:p>
+                      <a:pPr lvl="0" indent="0" marL="0" algn="l">
+                        <a:buNone/>
+                      </a:pPr>
+                      <a:r>
+                        <a:rPr/>
+                        <a:t>petiole_mm</a:t>
+                      </a:r>
+                    </a:p>
+                  </a:txBody>
+                </a:tc>
+                <a:tc>
+                  <a:txBody>
+                    <a:bodyPr/>
+                    <a:lstStyle/>
+                    <a:p>
+                      <a:pPr lvl="0" indent="0" marL="0" algn="l">
+                        <a:buNone/>
+                      </a:pPr>
+                      <a:r>
+                        <a:rPr/>
+                        <a:t>shady</a:t>
+                      </a:r>
+                    </a:p>
+                  </a:txBody>
+                </a:tc>
+                <a:tc>
+                  <a:txBody>
+                    <a:bodyPr/>
+                    <a:lstStyle/>
+                    <a:p>
+                      <a:pPr lvl="0" indent="0" marL="0" algn="r">
+                        <a:buNone/>
+                      </a:pPr>
+                      <a:r>
+                        <a:rPr/>
+                        <a:t>0</a:t>
+                      </a:r>
+                    </a:p>
+                  </a:txBody>
+                </a:tc>
+                <a:tc>
+                  <a:txBody>
+                    <a:bodyPr/>
+                    <a:lstStyle/>
+                    <a:p>
+                      <a:pPr lvl="0" indent="0" marL="0" algn="r">
+                        <a:buNone/>
+                      </a:pPr>
+                      <a:r>
+                        <a:rPr/>
+                        <a:t>1.00</a:t>
+                      </a:r>
+                    </a:p>
+                  </a:txBody>
+                </a:tc>
+                <a:tc>
+                  <a:txBody>
+                    <a:bodyPr/>
+                    <a:lstStyle/>
+                    <a:p>
+                      <a:pPr lvl="0" indent="0" marL="0" algn="r">
+                        <a:buNone/>
+                      </a:pPr>
+                      <a:r>
+                        <a:rPr/>
+                        <a:t>56.66</a:t>
+                      </a:r>
+                    </a:p>
+                  </a:txBody>
+                </a:tc>
+                <a:tc>
+                  <a:txBody>
+                    <a:bodyPr/>
+                    <a:lstStyle/>
+                    <a:p>
+                      <a:pPr lvl="0" indent="0" marL="0" algn="r">
+                        <a:buNone/>
+                      </a:pPr>
+                      <a:r>
+                        <a:rPr/>
+                        <a:t>17.53</a:t>
+                      </a:r>
+                    </a:p>
+                  </a:txBody>
+                </a:tc>
+                <a:tc>
+                  <a:txBody>
+                    <a:bodyPr/>
+                    <a:lstStyle/>
+                    <a:p>
+                      <a:pPr lvl="0" indent="0" marL="0" algn="r">
+                        <a:buNone/>
+                      </a:pPr>
+                      <a:r>
+                        <a:rPr/>
+                        <a:t>0.38</a:t>
+                      </a:r>
+                    </a:p>
+                  </a:txBody>
+                </a:tc>
+                <a:tc>
+                  <a:txBody>
+                    <a:bodyPr/>
+                    <a:lstStyle/>
+                    <a:p>
+                      <a:pPr lvl="0" indent="0" marL="0" algn="r">
+                        <a:buNone/>
+                      </a:pPr>
+                      <a:r>
+                        <a:rPr/>
+                        <a:t>50.28</a:t>
+                      </a:r>
+                    </a:p>
+                  </a:txBody>
+                </a:tc>
+                <a:tc>
+                  <a:txBody>
+                    <a:bodyPr/>
+                    <a:lstStyle/>
+                    <a:p>
+                      <a:pPr lvl="0" indent="0" marL="0" algn="r">
+                        <a:buNone/>
+                      </a:pPr>
+                      <a:r>
+                        <a:rPr/>
+                        <a:t>58.69</a:t>
+                      </a:r>
+                    </a:p>
+                  </a:txBody>
+                </a:tc>
+                <a:tc>
+                  <a:txBody>
+                    <a:bodyPr/>
+                    <a:lstStyle/>
+                    <a:p>
+                      <a:pPr lvl="0" indent="0" marL="0" algn="r">
+                        <a:buNone/>
+                      </a:pPr>
+                      <a:r>
+                        <a:rPr/>
+                        <a:t>66.85</a:t>
+                      </a:r>
+                    </a:p>
+                  </a:txBody>
+                </a:tc>
+                <a:tc>
+                  <a:txBody>
+                    <a:bodyPr/>
+                    <a:lstStyle/>
+                    <a:p>
+                      <a:pPr lvl="0" indent="0" marL="0" algn="r">
+                        <a:buNone/>
+                      </a:pPr>
+                      <a:r>
+                        <a:rPr/>
+                        <a:t>91.00</a:t>
+                      </a:r>
+                    </a:p>
+                  </a:txBody>
+                </a:tc>
+                <a:tc>
+                  <a:txBody>
+                    <a:bodyPr/>
+                    <a:lstStyle/>
+                    <a:p>
+                      <a:pPr lvl="0" indent="0" marL="0" algn="l">
+                        <a:buNone/>
+                      </a:pPr>
+                      <a:r>
+                        <a:rPr/>
+                        <a:t>▁▁▅▇▂</a:t>
+                      </a:r>
+                    </a:p>
+                  </a:txBody>
+                </a:tc>
+              </a:tr>
+              <a:tr h="0">
+                <a:tc>
+                  <a:txBody>
+                    <a:bodyPr/>
+                    <a:lstStyle/>
+                    <a:p>
+                      <a:pPr lvl="0" indent="0" marL="0" algn="l">
+                        <a:buNone/>
+                      </a:pPr>
+                      <a:r>
+                        <a:rPr/>
+                        <a:t>petiole_mm</a:t>
+                      </a:r>
+                    </a:p>
+                  </a:txBody>
+                </a:tc>
+                <a:tc>
+                  <a:txBody>
+                    <a:bodyPr/>
+                    <a:lstStyle/>
+                    <a:p>
+                      <a:pPr lvl="0" indent="0" marL="0" algn="l">
+                        <a:buNone/>
+                      </a:pPr>
+                      <a:r>
+                        <a:rPr/>
+                        <a:t>sunny</a:t>
+                      </a:r>
+                    </a:p>
+                  </a:txBody>
+                </a:tc>
+                <a:tc>
+                  <a:txBody>
+                    <a:bodyPr/>
+                    <a:lstStyle/>
+                    <a:p>
+                      <a:pPr lvl="0" indent="0" marL="0" algn="r">
+                        <a:buNone/>
+                      </a:pPr>
+                      <a:r>
+                        <a:rPr/>
+                        <a:t>0</a:t>
+                      </a:r>
+                    </a:p>
+                  </a:txBody>
+                </a:tc>
+                <a:tc>
+                  <a:txBody>
+                    <a:bodyPr/>
+                    <a:lstStyle/>
+                    <a:p>
+                      <a:pPr lvl="0" indent="0" marL="0" algn="r">
+                        <a:buNone/>
+                      </a:pPr>
+                      <a:r>
+                        <a:rPr/>
+                        <a:t>1.00</a:t>
+                      </a:r>
+                    </a:p>
+                  </a:txBody>
+                </a:tc>
+                <a:tc>
+                  <a:txBody>
+                    <a:bodyPr/>
+                    <a:lstStyle/>
+                    <a:p>
+                      <a:pPr lvl="0" indent="0" marL="0" algn="r">
+                        <a:buNone/>
+                      </a:pPr>
+                      <a:r>
+                        <a:rPr/>
+                        <a:t>54.39</a:t>
+                      </a:r>
+                    </a:p>
+                  </a:txBody>
+                </a:tc>
+                <a:tc>
+                  <a:txBody>
+                    <a:bodyPr/>
+                    <a:lstStyle/>
+                    <a:p>
+                      <a:pPr lvl="0" indent="0" marL="0" algn="r">
+                        <a:buNone/>
+                      </a:pPr>
+                      <a:r>
+                        <a:rPr/>
+                        <a:t>16.92</a:t>
+                      </a:r>
+                    </a:p>
+                  </a:txBody>
+                </a:tc>
+                <a:tc>
+                  <a:txBody>
+                    <a:bodyPr/>
+                    <a:lstStyle/>
+                    <a:p>
+                      <a:pPr lvl="0" indent="0" marL="0" algn="r">
+                        <a:buNone/>
+                      </a:pPr>
+                      <a:r>
+                        <a:rPr/>
+                        <a:t>29.00</a:t>
+                      </a:r>
+                    </a:p>
+                  </a:txBody>
+                </a:tc>
+                <a:tc>
+                  <a:txBody>
+                    <a:bodyPr/>
+                    <a:lstStyle/>
+                    <a:p>
+                      <a:pPr lvl="0" indent="0" marL="0" algn="r">
+                        <a:buNone/>
+                      </a:pPr>
+                      <a:r>
+                        <a:rPr/>
+                        <a:t>44.85</a:t>
+                      </a:r>
+                    </a:p>
+                  </a:txBody>
+                </a:tc>
+                <a:tc>
+                  <a:txBody>
+                    <a:bodyPr/>
+                    <a:lstStyle/>
+                    <a:p>
+                      <a:pPr lvl="0" indent="0" marL="0" algn="r">
+                        <a:buNone/>
+                      </a:pPr>
+                      <a:r>
+                        <a:rPr/>
+                        <a:t>49.00</a:t>
+                      </a:r>
+                    </a:p>
+                  </a:txBody>
+                </a:tc>
+                <a:tc>
+                  <a:txBody>
+                    <a:bodyPr/>
+                    <a:lstStyle/>
+                    <a:p>
+                      <a:pPr lvl="0" indent="0" marL="0" algn="r">
+                        <a:buNone/>
+                      </a:pPr>
+                      <a:r>
+                        <a:rPr/>
+                        <a:t>64.00</a:t>
+                      </a:r>
+                    </a:p>
+                  </a:txBody>
+                </a:tc>
+                <a:tc>
+                  <a:txBody>
+                    <a:bodyPr/>
+                    <a:lstStyle/>
+                    <a:p>
+                      <a:pPr lvl="0" indent="0" marL="0" algn="r">
+                        <a:buNone/>
+                      </a:pPr>
+                      <a:r>
+                        <a:rPr/>
+                        <a:t>85.00</a:t>
+                      </a:r>
+                    </a:p>
+                  </a:txBody>
+                </a:tc>
+                <a:tc>
+                  <a:txBody>
+                    <a:bodyPr/>
+                    <a:lstStyle/>
+                    <a:p>
+                      <a:pPr lvl="0" indent="0" marL="0" algn="l">
+                        <a:buNone/>
+                      </a:pPr>
+                      <a:r>
+                        <a:rPr/>
+                        <a:t>▆▇▂▃▅</a:t>
+                      </a:r>
+                    </a:p>
+                  </a:txBody>
+                </a:tc>
+              </a:tr>
+              <a:tr h="0">
+                <a:tc>
+                  <a:txBody>
+                    <a:bodyPr/>
+                    <a:lstStyle/>
+                    <a:p>
+                      <a:pPr lvl="0" indent="0" marL="0" algn="l">
+                        <a:buNone/>
+                      </a:pPr>
+                      <a:r>
+                        <a:rPr/>
+                        <a:t>thickness_mm</a:t>
+                      </a:r>
+                    </a:p>
+                  </a:txBody>
+                </a:tc>
+                <a:tc>
+                  <a:txBody>
+                    <a:bodyPr/>
+                    <a:lstStyle/>
+                    <a:p>
+                      <a:pPr lvl="0" indent="0" marL="0" algn="l">
+                        <a:buNone/>
+                      </a:pPr>
+                      <a:r>
+                        <a:rPr/>
+                        <a:t>shady</a:t>
+                      </a:r>
+                    </a:p>
+                  </a:txBody>
+                </a:tc>
+                <a:tc>
+                  <a:txBody>
+                    <a:bodyPr/>
+                    <a:lstStyle/>
+                    <a:p>
+                      <a:pPr lvl="0" indent="0" marL="0" algn="r">
+                        <a:buNone/>
+                      </a:pPr>
+                      <a:r>
+                        <a:rPr/>
+                        <a:t>1</a:t>
+                      </a:r>
+                    </a:p>
+                  </a:txBody>
+                </a:tc>
+                <a:tc>
+                  <a:txBody>
+                    <a:bodyPr/>
+                    <a:lstStyle/>
+                    <a:p>
+                      <a:pPr lvl="0" indent="0" marL="0" algn="r">
+                        <a:buNone/>
+                      </a:pPr>
+                      <a:r>
+                        <a:rPr/>
+                        <a:t>0.96</a:t>
+                      </a:r>
+                    </a:p>
+                  </a:txBody>
+                </a:tc>
+                <a:tc>
+                  <a:txBody>
+                    <a:bodyPr/>
+                    <a:lstStyle/>
+                    <a:p>
+                      <a:pPr lvl="0" indent="0" marL="0" algn="r">
+                        <a:buNone/>
+                      </a:pPr>
+                      <a:r>
+                        <a:rPr/>
+                        <a:t>0.36</a:t>
+                      </a:r>
+                    </a:p>
+                  </a:txBody>
+                </a:tc>
+                <a:tc>
+                  <a:txBody>
+                    <a:bodyPr/>
+                    <a:lstStyle/>
+                    <a:p>
+                      <a:pPr lvl="0" indent="0" marL="0" algn="r">
+                        <a:buNone/>
+                      </a:pPr>
+                      <a:r>
+                        <a:rPr/>
+                        <a:t>0.16</a:t>
+                      </a:r>
+                    </a:p>
+                  </a:txBody>
+                </a:tc>
+                <a:tc>
+                  <a:txBody>
+                    <a:bodyPr/>
+                    <a:lstStyle/>
+                    <a:p>
+                      <a:pPr lvl="0" indent="0" marL="0" algn="r">
+                        <a:buNone/>
+                      </a:pPr>
+                      <a:r>
+                        <a:rPr/>
+                        <a:t>0.12</a:t>
+                      </a:r>
+                    </a:p>
+                  </a:txBody>
+                </a:tc>
+                <a:tc>
+                  <a:txBody>
+                    <a:bodyPr/>
+                    <a:lstStyle/>
+                    <a:p>
+                      <a:pPr lvl="0" indent="0" marL="0" algn="r">
+                        <a:buNone/>
+                      </a:pPr>
+                      <a:r>
+                        <a:rPr/>
+                        <a:t>0.23</a:t>
+                      </a:r>
+                    </a:p>
+                  </a:txBody>
+                </a:tc>
+                <a:tc>
+                  <a:txBody>
+                    <a:bodyPr/>
+                    <a:lstStyle/>
+                    <a:p>
+                      <a:pPr lvl="0" indent="0" marL="0" algn="r">
+                        <a:buNone/>
+                      </a:pPr>
+                      <a:r>
+                        <a:rPr/>
+                        <a:t>0.36</a:t>
+                      </a:r>
+                    </a:p>
+                  </a:txBody>
+                </a:tc>
+                <a:tc>
+                  <a:txBody>
+                    <a:bodyPr/>
+                    <a:lstStyle/>
+                    <a:p>
+                      <a:pPr lvl="0" indent="0" marL="0" algn="r">
+                        <a:buNone/>
+                      </a:pPr>
+                      <a:r>
+                        <a:rPr/>
+                        <a:t>0.48</a:t>
+                      </a:r>
+                    </a:p>
+                  </a:txBody>
+                </a:tc>
+                <a:tc>
+                  <a:txBody>
+                    <a:bodyPr/>
+                    <a:lstStyle/>
+                    <a:p>
+                      <a:pPr lvl="0" indent="0" marL="0" algn="r">
+                        <a:buNone/>
+                      </a:pPr>
+                      <a:r>
+                        <a:rPr/>
+                        <a:t>0.67</a:t>
+                      </a:r>
+                    </a:p>
+                  </a:txBody>
+                </a:tc>
+                <a:tc>
+                  <a:txBody>
+                    <a:bodyPr/>
+                    <a:lstStyle/>
+                    <a:p>
+                      <a:pPr lvl="0" indent="0" marL="0" algn="l">
+                        <a:buNone/>
+                      </a:pPr>
+                      <a:r>
+                        <a:rPr/>
+                        <a:t>▇▆▃▇▂</a:t>
+                      </a:r>
+                    </a:p>
+                  </a:txBody>
+                </a:tc>
+              </a:tr>
+              <a:tr h="0">
+                <a:tc>
+                  <a:txBody>
+                    <a:bodyPr/>
+                    <a:lstStyle/>
+                    <a:p>
+                      <a:pPr lvl="0" indent="0" marL="0" algn="l">
+                        <a:buNone/>
+                      </a:pPr>
+                      <a:r>
+                        <a:rPr/>
+                        <a:t>thickness_mm</a:t>
+                      </a:r>
+                    </a:p>
+                  </a:txBody>
+                </a:tc>
+                <a:tc>
+                  <a:txBody>
+                    <a:bodyPr/>
+                    <a:lstStyle/>
+                    <a:p>
+                      <a:pPr lvl="0" indent="0" marL="0" algn="l">
+                        <a:buNone/>
+                      </a:pPr>
+                      <a:r>
+                        <a:rPr/>
+                        <a:t>sunny</a:t>
+                      </a:r>
+                    </a:p>
+                  </a:txBody>
+                </a:tc>
+                <a:tc>
+                  <a:txBody>
+                    <a:bodyPr/>
+                    <a:lstStyle/>
+                    <a:p>
+                      <a:pPr lvl="0" indent="0" marL="0" algn="r">
+                        <a:buNone/>
+                      </a:pPr>
+                      <a:r>
+                        <a:rPr/>
+                        <a:t>0</a:t>
+                      </a:r>
+                    </a:p>
+                  </a:txBody>
+                </a:tc>
+                <a:tc>
+                  <a:txBody>
+                    <a:bodyPr/>
+                    <a:lstStyle/>
+                    <a:p>
+                      <a:pPr lvl="0" indent="0" marL="0" algn="r">
+                        <a:buNone/>
+                      </a:pPr>
+                      <a:r>
+                        <a:rPr/>
+                        <a:t>1.00</a:t>
+                      </a:r>
+                    </a:p>
+                  </a:txBody>
+                </a:tc>
+                <a:tc>
+                  <a:txBody>
+                    <a:bodyPr/>
+                    <a:lstStyle/>
+                    <a:p>
+                      <a:pPr lvl="0" indent="0" marL="0" algn="r">
+                        <a:buNone/>
+                      </a:pPr>
+                      <a:r>
+                        <a:rPr/>
+                        <a:t>0.29</a:t>
+                      </a:r>
+                    </a:p>
+                  </a:txBody>
+                </a:tc>
+                <a:tc>
+                  <a:txBody>
+                    <a:bodyPr/>
+                    <a:lstStyle/>
+                    <a:p>
+                      <a:pPr lvl="0" indent="0" marL="0" algn="r">
+                        <a:buNone/>
+                      </a:pPr>
+                      <a:r>
+                        <a:rPr/>
+                        <a:t>0.19</a:t>
+                      </a:r>
+                    </a:p>
+                  </a:txBody>
+                </a:tc>
+                <a:tc>
+                  <a:txBody>
+                    <a:bodyPr/>
+                    <a:lstStyle/>
+                    <a:p>
+                      <a:pPr lvl="0" indent="0" marL="0" algn="r">
+                        <a:buNone/>
+                      </a:pPr>
+                      <a:r>
+                        <a:rPr/>
+                        <a:t>0.10</a:t>
+                      </a:r>
+                    </a:p>
+                  </a:txBody>
+                </a:tc>
+                <a:tc>
+                  <a:txBody>
+                    <a:bodyPr/>
+                    <a:lstStyle/>
+                    <a:p>
+                      <a:pPr lvl="0" indent="0" marL="0" algn="r">
+                        <a:buNone/>
+                      </a:pPr>
+                      <a:r>
+                        <a:rPr/>
+                        <a:t>0.14</a:t>
+                      </a:r>
+                    </a:p>
+                  </a:txBody>
+                </a:tc>
+                <a:tc>
+                  <a:txBody>
+                    <a:bodyPr/>
+                    <a:lstStyle/>
+                    <a:p>
+                      <a:pPr lvl="0" indent="0" marL="0" algn="r">
+                        <a:buNone/>
+                      </a:pPr>
+                      <a:r>
+                        <a:rPr/>
+                        <a:t>0.23</a:t>
+                      </a:r>
+                    </a:p>
+                  </a:txBody>
+                </a:tc>
+                <a:tc>
+                  <a:txBody>
+                    <a:bodyPr/>
+                    <a:lstStyle/>
+                    <a:p>
+                      <a:pPr lvl="0" indent="0" marL="0" algn="r">
+                        <a:buNone/>
+                      </a:pPr>
+                      <a:r>
+                        <a:rPr/>
+                        <a:t>0.40</a:t>
+                      </a:r>
+                    </a:p>
+                  </a:txBody>
+                </a:tc>
+                <a:tc>
+                  <a:txBody>
+                    <a:bodyPr/>
+                    <a:lstStyle/>
+                    <a:p>
+                      <a:pPr lvl="0" indent="0" marL="0" algn="r">
+                        <a:buNone/>
+                      </a:pPr>
+                      <a:r>
+                        <a:rPr/>
+                        <a:t>0.69</a:t>
+                      </a:r>
+                    </a:p>
+                  </a:txBody>
+                </a:tc>
+                <a:tc>
+                  <a:txBody>
+                    <a:bodyPr/>
+                    <a:lstStyle/>
+                    <a:p>
+                      <a:pPr lvl="0" indent="0" marL="0" algn="l">
+                        <a:buNone/>
+                      </a:pPr>
+                      <a:r>
+                        <a:rPr/>
+                        <a:t>▇▂▃▁▂</a:t>
+                      </a:r>
+                    </a:p>
+                  </a:txBody>
+                </a:tc>
+              </a:tr>
+              <a:tr h="0">
+                <a:tc>
+                  <a:txBody>
+                    <a:bodyPr/>
+                    <a:lstStyle/>
+                    <a:p>
+                      <a:pPr lvl="0" indent="0" marL="0" algn="l">
+                        <a:buNone/>
+                      </a:pPr>
+                      <a:r>
+                        <a:rPr/>
+                        <a:t>paper_mass_g</a:t>
+                      </a:r>
+                    </a:p>
+                  </a:txBody>
+                </a:tc>
+                <a:tc>
+                  <a:txBody>
+                    <a:bodyPr/>
+                    <a:lstStyle/>
+                    <a:p>
+                      <a:pPr lvl="0" indent="0" marL="0" algn="l">
+                        <a:buNone/>
+                      </a:pPr>
+                      <a:r>
+                        <a:rPr/>
+                        <a:t>shady</a:t>
+                      </a:r>
+                    </a:p>
+                  </a:txBody>
+                </a:tc>
+                <a:tc>
+                  <a:txBody>
+                    <a:bodyPr/>
+                    <a:lstStyle/>
+                    <a:p>
+                      <a:pPr lvl="0" indent="0" marL="0" algn="r">
+                        <a:buNone/>
+                      </a:pPr>
+                      <a:r>
+                        <a:rPr/>
+                        <a:t>7</a:t>
+                      </a:r>
+                    </a:p>
+                  </a:txBody>
+                </a:tc>
+                <a:tc>
+                  <a:txBody>
+                    <a:bodyPr/>
+                    <a:lstStyle/>
+                    <a:p>
+                      <a:pPr lvl="0" indent="0" marL="0" algn="r">
+                        <a:buNone/>
+                      </a:pPr>
+                      <a:r>
+                        <a:rPr/>
+                        <a:t>0.75</a:t>
+                      </a:r>
+                    </a:p>
+                  </a:txBody>
+                </a:tc>
+                <a:tc>
+                  <a:txBody>
+                    <a:bodyPr/>
+                    <a:lstStyle/>
+                    <a:p>
+                      <a:pPr lvl="0" indent="0" marL="0" algn="r">
+                        <a:buNone/>
+                      </a:pPr>
+                      <a:r>
+                        <a:rPr/>
+                        <a:t>0.28</a:t>
+                      </a:r>
+                    </a:p>
+                  </a:txBody>
+                </a:tc>
+                <a:tc>
+                  <a:txBody>
+                    <a:bodyPr/>
+                    <a:lstStyle/>
+                    <a:p>
+                      <a:pPr lvl="0" indent="0" marL="0" algn="r">
+                        <a:buNone/>
+                      </a:pPr>
+                      <a:r>
+                        <a:rPr/>
+                        <a:t>0.04</a:t>
+                      </a:r>
+                    </a:p>
+                  </a:txBody>
+                </a:tc>
+                <a:tc>
+                  <a:txBody>
+                    <a:bodyPr/>
+                    <a:lstStyle/>
+                    <a:p>
+                      <a:pPr lvl="0" indent="0" marL="0" algn="r">
+                        <a:buNone/>
+                      </a:pPr>
+                      <a:r>
+                        <a:rPr/>
+                        <a:t>0.20</a:t>
+                      </a:r>
+                    </a:p>
+                  </a:txBody>
+                </a:tc>
+                <a:tc>
+                  <a:txBody>
+                    <a:bodyPr/>
+                    <a:lstStyle/>
+                    <a:p>
+                      <a:pPr lvl="0" indent="0" marL="0" algn="r">
+                        <a:buNone/>
+                      </a:pPr>
+                      <a:r>
+                        <a:rPr/>
+                        <a:t>0.25</a:t>
+                      </a:r>
+                    </a:p>
+                  </a:txBody>
+                </a:tc>
+                <a:tc>
+                  <a:txBody>
+                    <a:bodyPr/>
+                    <a:lstStyle/>
+                    <a:p>
+                      <a:pPr lvl="0" indent="0" marL="0" algn="r">
+                        <a:buNone/>
+                      </a:pPr>
+                      <a:r>
+                        <a:rPr/>
+                        <a:t>0.27</a:t>
+                      </a:r>
+                    </a:p>
+                  </a:txBody>
+                </a:tc>
+                <a:tc>
+                  <a:txBody>
+                    <a:bodyPr/>
+                    <a:lstStyle/>
+                    <a:p>
+                      <a:pPr lvl="0" indent="0" marL="0" algn="r">
+                        <a:buNone/>
+                      </a:pPr>
+                      <a:r>
+                        <a:rPr/>
+                        <a:t>0.30</a:t>
+                      </a:r>
+                    </a:p>
+                  </a:txBody>
+                </a:tc>
+                <a:tc>
+                  <a:txBody>
+                    <a:bodyPr/>
+                    <a:lstStyle/>
+                    <a:p>
+                      <a:pPr lvl="0" indent="0" marL="0" algn="r">
+                        <a:buNone/>
+                      </a:pPr>
+                      <a:r>
+                        <a:rPr/>
+                        <a:t>0.36</a:t>
+                      </a:r>
+                    </a:p>
+                  </a:txBody>
+                </a:tc>
+                <a:tc>
+                  <a:txBody>
+                    <a:bodyPr/>
+                    <a:lstStyle/>
+                    <a:p>
+                      <a:pPr lvl="0" indent="0" marL="0" algn="l">
+                        <a:buNone/>
+                      </a:pPr>
+                      <a:r>
+                        <a:rPr/>
+                        <a:t>▁▇▃▂▃</a:t>
+                      </a:r>
+                    </a:p>
+                  </a:txBody>
+                </a:tc>
+              </a:tr>
+              <a:tr h="0">
+                <a:tc>
+                  <a:txBody>
+                    <a:bodyPr/>
+                    <a:lstStyle/>
+                    <a:p>
+                      <a:pPr lvl="0" indent="0" marL="0" algn="l">
+                        <a:buNone/>
+                      </a:pPr>
+                      <a:r>
+                        <a:rPr/>
+                        <a:t>paper_mass_g</a:t>
+                      </a:r>
+                    </a:p>
+                  </a:txBody>
+                </a:tc>
+                <a:tc>
+                  <a:txBody>
+                    <a:bodyPr/>
+                    <a:lstStyle/>
+                    <a:p>
+                      <a:pPr lvl="0" indent="0" marL="0" algn="l">
+                        <a:buNone/>
+                      </a:pPr>
+                      <a:r>
+                        <a:rPr/>
+                        <a:t>sunny</a:t>
+                      </a:r>
+                    </a:p>
+                  </a:txBody>
+                </a:tc>
+                <a:tc>
+                  <a:txBody>
+                    <a:bodyPr/>
+                    <a:lstStyle/>
+                    <a:p>
+                      <a:pPr lvl="0" indent="0" marL="0" algn="r">
+                        <a:buNone/>
+                      </a:pPr>
+                      <a:r>
+                        <a:rPr/>
+                        <a:t>6</a:t>
+                      </a:r>
+                    </a:p>
+                  </a:txBody>
+                </a:tc>
+                <a:tc>
+                  <a:txBody>
+                    <a:bodyPr/>
+                    <a:lstStyle/>
+                    <a:p>
+                      <a:pPr lvl="0" indent="0" marL="0" algn="r">
+                        <a:buNone/>
+                      </a:pPr>
+                      <a:r>
+                        <a:rPr/>
+                        <a:t>0.76</a:t>
+                      </a:r>
+                    </a:p>
+                  </a:txBody>
+                </a:tc>
+                <a:tc>
+                  <a:txBody>
+                    <a:bodyPr/>
+                    <a:lstStyle/>
+                    <a:p>
+                      <a:pPr lvl="0" indent="0" marL="0" algn="r">
+                        <a:buNone/>
+                      </a:pPr>
+                      <a:r>
+                        <a:rPr/>
+                        <a:t>0.27</a:t>
+                      </a:r>
+                    </a:p>
+                  </a:txBody>
+                </a:tc>
+                <a:tc>
+                  <a:txBody>
+                    <a:bodyPr/>
+                    <a:lstStyle/>
+                    <a:p>
+                      <a:pPr lvl="0" indent="0" marL="0" algn="r">
+                        <a:buNone/>
+                      </a:pPr>
+                      <a:r>
+                        <a:rPr/>
+                        <a:t>0.09</a:t>
+                      </a:r>
+                    </a:p>
+                  </a:txBody>
+                </a:tc>
+                <a:tc>
+                  <a:txBody>
+                    <a:bodyPr/>
+                    <a:lstStyle/>
+                    <a:p>
+                      <a:pPr lvl="0" indent="0" marL="0" algn="r">
+                        <a:buNone/>
+                      </a:pPr>
+                      <a:r>
+                        <a:rPr/>
+                        <a:t>0.11</a:t>
+                      </a:r>
+                    </a:p>
+                  </a:txBody>
+                </a:tc>
+                <a:tc>
+                  <a:txBody>
+                    <a:bodyPr/>
+                    <a:lstStyle/>
+                    <a:p>
+                      <a:pPr lvl="0" indent="0" marL="0" algn="r">
+                        <a:buNone/>
+                      </a:pPr>
+                      <a:r>
+                        <a:rPr/>
+                        <a:t>0.21</a:t>
+                      </a:r>
+                    </a:p>
+                  </a:txBody>
+                </a:tc>
+                <a:tc>
+                  <a:txBody>
+                    <a:bodyPr/>
+                    <a:lstStyle/>
+                    <a:p>
+                      <a:pPr lvl="0" indent="0" marL="0" algn="r">
+                        <a:buNone/>
+                      </a:pPr>
+                      <a:r>
+                        <a:rPr/>
+                        <a:t>0.25</a:t>
+                      </a:r>
+                    </a:p>
+                  </a:txBody>
+                </a:tc>
+                <a:tc>
+                  <a:txBody>
+                    <a:bodyPr/>
+                    <a:lstStyle/>
+                    <a:p>
+                      <a:pPr lvl="0" indent="0" marL="0" algn="r">
+                        <a:buNone/>
+                      </a:pPr>
+                      <a:r>
+                        <a:rPr/>
+                        <a:t>0.34</a:t>
+                      </a:r>
+                    </a:p>
+                  </a:txBody>
+                </a:tc>
+                <a:tc>
+                  <a:txBody>
+                    <a:bodyPr/>
+                    <a:lstStyle/>
+                    <a:p>
+                      <a:pPr lvl="0" indent="0" marL="0" algn="r">
+                        <a:buNone/>
+                      </a:pPr>
+                      <a:r>
+                        <a:rPr/>
+                        <a:t>0.43</a:t>
+                      </a:r>
+                    </a:p>
+                  </a:txBody>
+                </a:tc>
+                <a:tc>
+                  <a:txBody>
+                    <a:bodyPr/>
+                    <a:lstStyle/>
+                    <a:p>
+                      <a:pPr lvl="0" indent="0" marL="0" algn="l">
+                        <a:buNone/>
+                      </a:pPr>
+                      <a:r>
+                        <a:rPr/>
+                        <a:t>▂▇▃▅▅</a:t>
+                      </a:r>
+                    </a:p>
+                  </a:txBody>
+                </a:tc>
+              </a:tr>
+            </a:tbl>
+          </a:graphicData>
+        </a:graphic>
+      </p:graphicFrame>
+    </p:spTree>
+  </p:cSld>
+</p:sld>
+</file>
+
+<file path=ppt/slides/slide25.xml><?xml version="1.0" encoding="utf-8"?>
 <p:sld xmlns:a="http://schemas.openxmlformats.org/drawingml/2006/main" xmlns:r="http://schemas.openxmlformats.org/officeDocument/2006/relationships" xmlns:p="http://schemas.openxmlformats.org/presentationml/2006/main">
   <p:cSld>
     <p:spTree>
@@ -13324,7 +14434,7 @@
 </p:sld>
 </file>
 
-<file path=ppt/slides/slide25.xml><?xml version="1.0" encoding="utf-8"?>
+<file path=ppt/slides/slide26.xml><?xml version="1.0" encoding="utf-8"?>
 <p:sld xmlns:a="http://schemas.openxmlformats.org/drawingml/2006/main" xmlns:r="http://schemas.openxmlformats.org/officeDocument/2006/relationships" xmlns:p="http://schemas.openxmlformats.org/presentationml/2006/main">
   <p:cSld>
     <p:spTree>
@@ -13450,7 +14560,7 @@
 </p:sld>
 </file>
 
-<file path=ppt/slides/slide26.xml><?xml version="1.0" encoding="utf-8"?>
+<file path=ppt/slides/slide27.xml><?xml version="1.0" encoding="utf-8"?>
 <p:sld xmlns:a="http://schemas.openxmlformats.org/drawingml/2006/main" xmlns:r="http://schemas.openxmlformats.org/officeDocument/2006/relationships" xmlns:p="http://schemas.openxmlformats.org/presentationml/2006/main">
   <p:cSld>
     <p:spTree>
@@ -14223,7 +15333,7 @@
             </a:r>
             <a:r>
               <a:rPr/>
-              <a:t>. After each chunk you switch to the activity worksheet and type the code yourself.</a:t>
+              <a:t>. After each chunk you switch to the activity and type the code yourself into your R script.</a:t>
             </a:r>
           </a:p>
           <a:p>
@@ -14504,6 +15614,34 @@
                 </a:solidFill>
                 <a:latin typeface="Courier"/>
               </a:rPr>
+              <a:t>(janitor) </a:t>
+            </a:r>
+            <a:r>
+              <a:rPr>
+                <a:solidFill>
+                  <a:srgbClr val="5E5E5E"/>
+                </a:solidFill>
+                <a:latin typeface="Courier"/>
+              </a:rPr>
+              <a:t># clean_names()</a:t>
+            </a:r>
+            <a:br/>
+            <a:r>
+              <a:rPr>
+                <a:solidFill>
+                  <a:srgbClr val="4758AB"/>
+                </a:solidFill>
+                <a:latin typeface="Courier"/>
+              </a:rPr>
+              <a:t>library</a:t>
+            </a:r>
+            <a:r>
+              <a:rPr>
+                <a:solidFill>
+                  <a:srgbClr val="003B4F"/>
+                </a:solidFill>
+                <a:latin typeface="Courier"/>
+              </a:rPr>
               <a:t>(skimr) </a:t>
             </a:r>
             <a:r>
@@ -14537,7 +15675,7 @@
                 </a:solidFill>
                 <a:latin typeface="Courier"/>
               </a:rPr>
-              <a:t>tree_df &lt;- </a:t>
+              <a:t>leaf_df &lt;- </a:t>
             </a:r>
             <a:r>
               <a:rPr>
@@ -14564,16 +15702,53 @@
                 </a:solidFill>
                 <a:latin typeface="Courier"/>
               </a:rPr>
-              <a:t>"data/2026_06_25_tree_experiment_raw_data.xlsx"</a:t>
-            </a:r>
-            <a:r>
-              <a:rPr>
-                <a:solidFill>
-                  <a:srgbClr val="003B4F"/>
-                </a:solidFill>
-                <a:latin typeface="Courier"/>
-              </a:rPr>
-              <a:t>)</a:t>
+              <a:t>"data/2026_09_03_data_sci_leaf_area.xlsx"</a:t>
+            </a:r>
+            <a:r>
+              <a:rPr>
+                <a:solidFill>
+                  <a:srgbClr val="003B4F"/>
+                </a:solidFill>
+                <a:latin typeface="Courier"/>
+              </a:rPr>
+              <a:t>) </a:t>
+            </a:r>
+            <a:r>
+              <a:rPr>
+                <a:solidFill>
+                  <a:srgbClr val="5E5E5E"/>
+                </a:solidFill>
+                <a:latin typeface="Courier"/>
+              </a:rPr>
+              <a:t>%&gt;%</a:t>
+            </a:r>
+            <a:br/>
+            <a:r>
+              <a:rPr>
+                <a:solidFill>
+                  <a:srgbClr val="003B4F"/>
+                </a:solidFill>
+                <a:latin typeface="Courier"/>
+              </a:rPr>
+              <a:t>  </a:t>
+            </a:r>
+            <a:r>
+              <a:rPr>
+                <a:solidFill>
+                  <a:srgbClr val="4758AB"/>
+                </a:solidFill>
+                <a:latin typeface="Courier"/>
+              </a:rPr>
+              <a:t>clean_names</a:t>
+            </a:r>
+            <a:r>
+              <a:rPr>
+                <a:solidFill>
+                  <a:srgbClr val="003B4F"/>
+                </a:solidFill>
+                <a:latin typeface="Courier"/>
+              </a:rPr>
+              <a:t>()</a:t>
             </a:r>
           </a:p>
           <a:p>
@@ -14721,7 +15896,7 @@
             </a:pPr>
             <a:r>
               <a:rPr b="1"/>
-              <a:t>🛑 After this chunk: Activity Parts 1–3 (mean, median, spread, and the NA problem).</a:t>
+              <a:t>🛑 After this chunk: Activity Parts 1–3 (load, the NA problem, and base-R stats).</a:t>
             </a:r>
           </a:p>
         </p:txBody>
@@ -15123,7 +16298,7 @@
                 </a:solidFill>
                 <a:latin typeface="Courier"/>
               </a:rPr>
-              <a:t>sunny_wt &lt;- tree_df </a:t>
+              <a:t>sunny_mass &lt;- leaf_df </a:t>
             </a:r>
             <a:r>
               <a:rPr>
@@ -15160,7 +16335,7 @@
                 </a:solidFill>
                 <a:latin typeface="Courier"/>
               </a:rPr>
-              <a:t>(side </a:t>
+              <a:t>(shade </a:t>
             </a:r>
             <a:r>
               <a:rPr>
@@ -15233,7 +16408,7 @@
                 </a:solidFill>
                 <a:latin typeface="Courier"/>
               </a:rPr>
-              <a:t>(weight_g)</a:t>
+              <a:t>(mass_g)</a:t>
             </a:r>
             <a:br/>
             <a:br/>
@@ -15244,7 +16419,7 @@
                 </a:solidFill>
                 <a:latin typeface="Courier"/>
               </a:rPr>
-              <a:t>sunny_wt </a:t>
+              <a:t>sunny_mass </a:t>
             </a:r>
             <a:r>
               <a:rPr>
@@ -15264,7 +16439,9 @@
               <a:rPr>
                 <a:latin typeface="Courier"/>
               </a:rPr>
-              <a:t> [1] 4 3 5 3 4 3 5 4 3 4</a:t>
+              <a:t> [1] 0.4000 0.4800 0.3400 0.6500 0.2700 0.4300 0.7366 0.4263 0.5682 0.7600
+[11] 0.5777 0.1933 0.7912 0.4990 0.6882 0.4162 0.6185 1.0842 0.6649 0.3571
+[21] 0.3484 0.5107 0.2303 0.3041 0.2817</a:t>
             </a:r>
           </a:p>
           <a:p>
@@ -15306,7 +16483,7 @@
                 </a:solidFill>
                 <a:latin typeface="Courier"/>
               </a:rPr>
-              <a:t>(sunny_wt, </a:t>
+              <a:t>(sunny_mass, </a:t>
             </a:r>
             <a:r>
               <a:rPr>
@@ -15370,7 +16547,7 @@
                 </a:solidFill>
                 <a:latin typeface="Courier"/>
               </a:rPr>
-              <a:t>"Mean sunny weight:"</a:t>
+              <a:t>"Mean sunny mass:"</a:t>
             </a:r>
             <a:r>
               <a:rPr>
@@ -15406,7 +16583,7 @@
                 </a:solidFill>
                 <a:latin typeface="Courier"/>
               </a:rPr>
-              <a:t>2</a:t>
+              <a:t>3</a:t>
             </a:r>
             <a:r>
               <a:rPr>
@@ -15462,7 +16639,7 @@
               <a:rPr>
                 <a:latin typeface="Courier"/>
               </a:rPr>
-              <a:t>Mean sunny weight: 3.8 g</a:t>
+              <a:t>Mean sunny mass: 0.505 g</a:t>
             </a:r>
           </a:p>
         </p:txBody>
@@ -15487,7 +16664,7 @@
               <a:rPr>
                 <a:latin typeface="Courier"/>
               </a:rPr>
-              <a:t>filter(side == "sunny")</a:t>
+              <a:t>filter(shade == "sunny")</a:t>
             </a:r>
             <a:r>
               <a:rPr/>
@@ -15500,7 +16677,7 @@
               <a:rPr>
                 <a:latin typeface="Courier"/>
               </a:rPr>
-              <a:t>pull(weight_g)</a:t>
+              <a:t>pull(mass_g)</a:t>
             </a:r>
             <a:r>
               <a:rPr/>
@@ -15913,7 +17090,7 @@
                 </a:solidFill>
                 <a:latin typeface="Courier"/>
               </a:rPr>
-              <a:t>shady_wt &lt;- tree_df </a:t>
+              <a:t>shady_mass &lt;- leaf_df </a:t>
             </a:r>
             <a:r>
               <a:rPr>
@@ -15950,7 +17127,7 @@
                 </a:solidFill>
                 <a:latin typeface="Courier"/>
               </a:rPr>
-              <a:t>(side </a:t>
+              <a:t>(shade </a:t>
             </a:r>
             <a:r>
               <a:rPr>
@@ -16023,7 +17200,7 @@
                 </a:solidFill>
                 <a:latin typeface="Courier"/>
               </a:rPr>
-              <a:t>(weight_g)</a:t>
+              <a:t>(mass_g)</a:t>
             </a:r>
             <a:br/>
             <a:br/>
@@ -16052,7 +17229,7 @@
                 </a:solidFill>
                 <a:latin typeface="Courier"/>
               </a:rPr>
-              <a:t>(sunny_wt, </a:t>
+              <a:t>(sunny_mass, </a:t>
             </a:r>
             <a:r>
               <a:rPr>
@@ -16116,7 +17293,7 @@
                 </a:solidFill>
                 <a:latin typeface="Courier"/>
               </a:rPr>
-              <a:t>(shady_wt, </a:t>
+              <a:t>(shady_mass, </a:t>
             </a:r>
             <a:r>
               <a:rPr>
@@ -16217,7 +17394,7 @@
                 </a:solidFill>
                 <a:latin typeface="Courier"/>
               </a:rPr>
-              <a:t>2</a:t>
+              <a:t>3</a:t>
             </a:r>
             <a:r>
               <a:rPr>
@@ -16273,7 +17450,7 @@
               <a:rPr>
                 <a:latin typeface="Courier"/>
               </a:rPr>
-              <a:t>Median sunny: 4 </a:t>
+              <a:t>Median sunny: 0.48 </a:t>
             </a:r>
           </a:p>
           <a:p>
@@ -16341,7 +17518,7 @@
                 </a:solidFill>
                 <a:latin typeface="Courier"/>
               </a:rPr>
-              <a:t>2</a:t>
+              <a:t>3</a:t>
             </a:r>
             <a:r>
               <a:rPr>
@@ -16397,7 +17574,7 @@
               <a:rPr>
                 <a:latin typeface="Courier"/>
               </a:rPr>
-              <a:t>Median shady: 8 </a:t>
+              <a:t>Median shady: 0.521 </a:t>
             </a:r>
           </a:p>
         </p:txBody>

--- a/docs/content/summary_stats/summary_stats_lecture.pptx
+++ b/docs/content/summary_stats/summary_stats_lecture.pptx
@@ -3366,7 +3366,7 @@
             </a:pPr>
             <a:r>
               <a:rPr/>
-              <a:t>2026-09-08</a:t>
+              <a:t>2026-09-10</a:t>
             </a:r>
           </a:p>
         </p:txBody>

--- a/docs/content/summary_stats/summary_stats_lecture.pptx
+++ b/docs/content/summary_stats/summary_stats_lecture.pptx
@@ -3366,7 +3366,7 @@
             </a:pPr>
             <a:r>
               <a:rPr/>
-              <a:t>2026-09-10</a:t>
+              <a:t>2026-09-14</a:t>
             </a:r>
           </a:p>
         </p:txBody>

--- a/docs/content/summary_stats/summary_stats_lecture.pptx
+++ b/docs/content/summary_stats/summary_stats_lecture.pptx
@@ -30,6 +30,10 @@
     <p:sldId id="278" r:id="rId24"/>
     <p:sldId id="279" r:id="rId25"/>
     <p:sldId id="280" r:id="rId26"/>
+    <p:sldId id="281" r:id="rId27"/>
+    <p:sldId id="282" r:id="rId28"/>
+    <p:sldId id="283" r:id="rId29"/>
+    <p:sldId id="284" r:id="rId30"/>
   </p:sldIdLst>
   <p:sldSz cx="9144000" cy="5143500" type="screen16x9"/>
   <p:notesSz cx="6858000" cy="9144000"/>
@@ -3364,7 +3368,7 @@
             </a:pPr>
             <a:r>
               <a:rPr/>
-              <a:t>2026-09-21</a:t>
+              <a:t>2026-09-22</a:t>
             </a:r>
           </a:p>
         </p:txBody>
@@ -3442,17 +3446,7 @@
             </a:r>
             <a:r>
               <a:rPr sz="2000"/>
-              <a:t> — even when you think there are no NAs. It is exactly what our </a:t>
-            </a:r>
-            <a:r>
-              <a:rPr sz="2000">
-                <a:latin typeface="Courier"/>
-              </a:rPr>
-              <a:t>summary_stats()</a:t>
-            </a:r>
-            <a:r>
-              <a:rPr sz="2000"/>
-              <a:t> function below uses.</a:t>
+              <a:t> — even when you think there are no NAs.</a:t>
             </a:r>
           </a:p>
         </p:txBody>
@@ -3463,6 +3457,403 @@
 </file>
 
 <file path=ppt/slides/slide11.xml><?xml version="1.0" encoding="utf-8"?>
+<p:sld xmlns:a="http://schemas.openxmlformats.org/drawingml/2006/main" xmlns:r="http://schemas.openxmlformats.org/officeDocument/2006/relationships" xmlns:p="http://schemas.openxmlformats.org/presentationml/2006/main">
+  <p:cSld>
+    <p:spTree>
+      <p:nvGrpSpPr>
+        <p:cNvPr id="1" name=""/>
+        <p:cNvGrpSpPr/>
+        <p:nvPr/>
+      </p:nvGrpSpPr>
+      <p:grpSpPr>
+        <a:xfrm>
+          <a:off x="0" y="0"/>
+          <a:ext cx="0" cy="0"/>
+          <a:chOff x="0" y="0"/>
+          <a:chExt cx="0" cy="0"/>
+        </a:xfrm>
+      </p:grpSpPr>
+      <p:sp>
+        <p:nvSpPr>
+          <p:cNvPr id="2" name="Title 1"/>
+          <p:cNvSpPr>
+            <a:spLocks noGrp="1"/>
+          </p:cNvSpPr>
+          <p:nvPr>
+            <p:ph type="title"/>
+          </p:nvPr>
+        </p:nvSpPr>
+        <p:spPr>
+          <a:xfrm>
+            <a:off x="0" y="0"/>
+            <a:ext cx="9144000" cy="602780"/>
+          </a:xfrm>
+          <a:solidFill>
+            <a:srgbClr val="1A1A2E"/>
+          </a:solidFill>
+        </p:spPr>
+        <p:txBody>
+          <a:bodyPr/>
+          <a:lstStyle/>
+          <a:p>
+            <a:pPr lvl="0" indent="0" marL="0">
+              <a:buNone/>
+            </a:pPr>
+            <a:r>
+              <a:rPr/>
+              <a:t>Finding the NAs in Real Data</a:t>
+            </a:r>
+          </a:p>
+        </p:txBody>
+      </p:sp>
+      <p:sp>
+        <p:nvSpPr>
+          <p:cNvPr id="3" name="Content Placeholder 2"/>
+          <p:cNvSpPr>
+            <a:spLocks noGrp="1"/>
+          </p:cNvSpPr>
+          <p:nvPr>
+            <p:ph idx="1" sz="half"/>
+          </p:nvPr>
+        </p:nvSpPr>
+        <p:spPr/>
+        <p:txBody>
+          <a:bodyPr/>
+          <a:lstStyle/>
+          <a:p>
+            <a:pPr lvl="0" indent="0">
+              <a:buNone/>
+            </a:pPr>
+            <a:r>
+              <a:rPr>
+                <a:solidFill>
+                  <a:srgbClr val="5E5E5E"/>
+                </a:solidFill>
+                <a:latin typeface="Courier"/>
+              </a:rPr>
+              <a:t># Which rows are MISSING a paper_mass_g value? ---------</a:t>
+            </a:r>
+            <a:br/>
+            <a:r>
+              <a:rPr>
+                <a:solidFill>
+                  <a:srgbClr val="003B4F"/>
+                </a:solidFill>
+                <a:latin typeface="Courier"/>
+              </a:rPr>
+              <a:t>leaf_df </a:t>
+            </a:r>
+            <a:r>
+              <a:rPr>
+                <a:solidFill>
+                  <a:srgbClr val="5E5E5E"/>
+                </a:solidFill>
+                <a:latin typeface="Courier"/>
+              </a:rPr>
+              <a:t>%&gt;%</a:t>
+            </a:r>
+            <a:br/>
+            <a:r>
+              <a:rPr>
+                <a:solidFill>
+                  <a:srgbClr val="003B4F"/>
+                </a:solidFill>
+                <a:latin typeface="Courier"/>
+              </a:rPr>
+              <a:t>  </a:t>
+            </a:r>
+            <a:r>
+              <a:rPr>
+                <a:solidFill>
+                  <a:srgbClr val="4758AB"/>
+                </a:solidFill>
+                <a:latin typeface="Courier"/>
+              </a:rPr>
+              <a:t>filter</a:t>
+            </a:r>
+            <a:r>
+              <a:rPr>
+                <a:solidFill>
+                  <a:srgbClr val="003B4F"/>
+                </a:solidFill>
+                <a:latin typeface="Courier"/>
+              </a:rPr>
+              <a:t>(</a:t>
+            </a:r>
+            <a:r>
+              <a:rPr>
+                <a:solidFill>
+                  <a:srgbClr val="4758AB"/>
+                </a:solidFill>
+                <a:latin typeface="Courier"/>
+              </a:rPr>
+              <a:t>is.na</a:t>
+            </a:r>
+            <a:r>
+              <a:rPr>
+                <a:solidFill>
+                  <a:srgbClr val="003B4F"/>
+                </a:solidFill>
+                <a:latin typeface="Courier"/>
+              </a:rPr>
+              <a:t>(paper_mass_g))</a:t>
+            </a:r>
+          </a:p>
+          <a:p>
+            <a:pPr lvl="0" indent="0">
+              <a:buNone/>
+            </a:pPr>
+            <a:r>
+              <a:rPr>
+                <a:latin typeface="Courier"/>
+              </a:rPr>
+              <a:t># A tibble: 13 × 8
+   twig_id leaf_id teams       shade mass_g petiole_mm thickness_mm paper_mass_g
+   &lt;chr&gt;   &lt;chr&gt;   &lt;chr&gt;       &lt;chr&gt;  &lt;dbl&gt;      &lt;dbl&gt;        &lt;dbl&gt;        &lt;dbl&gt;
+ 1 twig_2  l09     fighting_m… shady  0.920      0.383        NA              NA
+ 2 &lt;NA&gt;    1       Oscar_Karl  shady  0.454     53.6           0.36           NA
+ 3 &lt;NA&gt;    2       Oscar_Karl  shady  0.371     26.3           0.43           NA
+ 4 &lt;NA&gt;    3       Oscar_Karl  shady  0.351     57.8           0.48           NA
+ 5 &lt;NA&gt;    4       Oscar_Karl  shady  0.453     51.0           0.41           NA
+ 6 &lt;NA&gt;    5       Oscar_Karl  shady  0.344     37.0           0.25           NA
+ 7 &lt;NA&gt;    6       Oscar_Karl  shady  0.426     66.3           0.5            NA
+ 8 &lt;NA&gt;    1       Oscar_Karl  sunny  0.357     48.7           0.41           NA
+ 9 &lt;NA&gt;    2       Oscar_Karl  sunny  0.348     44.8           0.39           NA
+10 &lt;NA&gt;    3       Oscar_Karl  sunny  0.511     63.4           0.53           NA
+11 &lt;NA&gt;    4       Oscar_Karl  sunny  0.230     35.7           0.36           NA
+12 &lt;NA&gt;    5       Oscar_Karl  sunny  0.304     51.3           0.43           NA
+13 &lt;NA&gt;    6       Oscar_Karl  sunny  0.282     46.9           0.4            NA</a:t>
+            </a:r>
+          </a:p>
+          <a:p>
+            <a:pPr lvl="0" indent="0">
+              <a:buNone/>
+            </a:pPr>
+            <a:r>
+              <a:rPr>
+                <a:solidFill>
+                  <a:srgbClr val="5E5E5E"/>
+                </a:solidFill>
+                <a:latin typeface="Courier"/>
+              </a:rPr>
+              <a:t># Flip it with ! — keep only the rows that HAVE a value</a:t>
+            </a:r>
+            <a:br/>
+            <a:r>
+              <a:rPr>
+                <a:solidFill>
+                  <a:srgbClr val="003B4F"/>
+                </a:solidFill>
+                <a:latin typeface="Courier"/>
+              </a:rPr>
+              <a:t>leaf_df </a:t>
+            </a:r>
+            <a:r>
+              <a:rPr>
+                <a:solidFill>
+                  <a:srgbClr val="5E5E5E"/>
+                </a:solidFill>
+                <a:latin typeface="Courier"/>
+              </a:rPr>
+              <a:t>%&gt;%</a:t>
+            </a:r>
+            <a:br/>
+            <a:r>
+              <a:rPr>
+                <a:solidFill>
+                  <a:srgbClr val="003B4F"/>
+                </a:solidFill>
+                <a:latin typeface="Courier"/>
+              </a:rPr>
+              <a:t>  </a:t>
+            </a:r>
+            <a:r>
+              <a:rPr>
+                <a:solidFill>
+                  <a:srgbClr val="4758AB"/>
+                </a:solidFill>
+                <a:latin typeface="Courier"/>
+              </a:rPr>
+              <a:t>filter</a:t>
+            </a:r>
+            <a:r>
+              <a:rPr>
+                <a:solidFill>
+                  <a:srgbClr val="003B4F"/>
+                </a:solidFill>
+                <a:latin typeface="Courier"/>
+              </a:rPr>
+              <a:t>(</a:t>
+            </a:r>
+            <a:r>
+              <a:rPr>
+                <a:solidFill>
+                  <a:srgbClr val="5E5E5E"/>
+                </a:solidFill>
+                <a:latin typeface="Courier"/>
+              </a:rPr>
+              <a:t>!</a:t>
+            </a:r>
+            <a:r>
+              <a:rPr>
+                <a:solidFill>
+                  <a:srgbClr val="4758AB"/>
+                </a:solidFill>
+                <a:latin typeface="Courier"/>
+              </a:rPr>
+              <a:t>is.na</a:t>
+            </a:r>
+            <a:r>
+              <a:rPr>
+                <a:solidFill>
+                  <a:srgbClr val="003B4F"/>
+                </a:solidFill>
+                <a:latin typeface="Courier"/>
+              </a:rPr>
+              <a:t>(paper_mass_g))</a:t>
+            </a:r>
+          </a:p>
+          <a:p>
+            <a:pPr lvl="0" indent="0">
+              <a:buNone/>
+            </a:pPr>
+            <a:r>
+              <a:rPr>
+                <a:latin typeface="Courier"/>
+              </a:rPr>
+              <a:t># A tibble: 40 × 8
+   twig_id leaf_id teams shade mass_g petiole_mm thickness_mm paper_mass_g
+   &lt;chr&gt;   &lt;chr&gt;   &lt;chr&gt; &lt;chr&gt;  &lt;dbl&gt;      &lt;dbl&gt;        &lt;dbl&gt;        &lt;dbl&gt;
+ 1 &lt;NA&gt;    &lt;NA&gt;    12345 sunny   0.4          79         0.15         0.21
+ 2 &lt;NA&gt;    &lt;NA&gt;    12345 sunny   0.48         63         0.14         0.21
+ 3 &lt;NA&gt;    &lt;NA&gt;    12345 sunny   0.34         68         0.14         0.21
+ 4 &lt;NA&gt;    &lt;NA&gt;    12345 sunny   0.65         35         0.15         0.24
+ 5 &lt;NA&gt;    &lt;NA&gt;    12345 sunny   0.27         34         0.11         0.15
+ 6 &lt;NA&gt;    &lt;NA&gt;    12345 sunny   0.43         40         0.16         0.34
+ 7 &lt;NA&gt;    &lt;NA&gt;    12345 shady   0.39         40         0.14         0.29
+ 8 &lt;NA&gt;    &lt;NA&gt;    12345 shady   0.45         65         0.15         0.25
+ 9 &lt;NA&gt;    &lt;NA&gt;    12345 shady   0.6          68         0.12         0.23
+10 &lt;NA&gt;    &lt;NA&gt;    12345 shady   0.57         73         0.14         0.28
+# ℹ 30 more rows</a:t>
+            </a:r>
+          </a:p>
+        </p:txBody>
+      </p:sp>
+      <p:sp>
+        <p:nvSpPr>
+          <p:cNvPr id="4" name="Content Placeholder 3"/>
+          <p:cNvSpPr>
+            <a:spLocks noGrp="1"/>
+          </p:cNvSpPr>
+          <p:nvPr>
+            <p:ph idx="2" sz="half"/>
+          </p:nvPr>
+        </p:nvSpPr>
+        <p:spPr/>
+        <p:txBody>
+          <a:bodyPr/>
+          <a:lstStyle/>
+          <a:p>
+            <a:pPr lvl="0"/>
+            <a:r>
+              <a:rPr>
+                <a:latin typeface="Courier"/>
+              </a:rPr>
+              <a:t>filter(is.na(paper_mass_g))</a:t>
+            </a:r>
+            <a:r>
+              <a:rPr/>
+              <a:t> </a:t>
+            </a:r>
+            <a:r>
+              <a:rPr b="1"/>
+              <a:t>shows you the problem</a:t>
+            </a:r>
+            <a:r>
+              <a:rPr/>
+              <a:t> — every row where the measurement is missing</a:t>
+            </a:r>
+          </a:p>
+          <a:p>
+            <a:pPr lvl="0"/>
+            <a:r>
+              <a:rPr>
+                <a:latin typeface="Courier"/>
+              </a:rPr>
+              <a:t>filter(!is.na(paper_mass_g))</a:t>
+            </a:r>
+            <a:r>
+              <a:rPr/>
+              <a:t> keeps the rows with real values — the same </a:t>
+            </a:r>
+            <a:r>
+              <a:rPr>
+                <a:latin typeface="Courier"/>
+              </a:rPr>
+              <a:t>!</a:t>
+            </a:r>
+            <a:r>
+              <a:rPr/>
+              <a:t> idea as </a:t>
+            </a:r>
+            <a:r>
+              <a:rPr>
+                <a:latin typeface="Courier"/>
+              </a:rPr>
+              <a:t>sum(!is.na())</a:t>
+            </a:r>
+          </a:p>
+          <a:p>
+            <a:pPr lvl="0"/>
+            <a:r>
+              <a:rPr/>
+              <a:t>Look at the row counts: the two tables together add back up to </a:t>
+            </a:r>
+            <a:r>
+              <a:rPr>
+                <a:latin typeface="Courier"/>
+              </a:rPr>
+              <a:t>nrow(leaf_df)</a:t>
+            </a:r>
+          </a:p>
+          <a:p>
+            <a:pPr lvl="0"/>
+            <a:r>
+              <a:rPr/>
+              <a:t>Do this </a:t>
+            </a:r>
+            <a:r>
+              <a:rPr b="1"/>
+              <a:t>before</a:t>
+            </a:r>
+            <a:r>
+              <a:rPr/>
+              <a:t> any statistics — you cannot trust a mean until you know what is missing</a:t>
+            </a:r>
+          </a:p>
+          <a:p>
+            <a:pPr lvl="0" indent="0" marL="0">
+              <a:buNone/>
+            </a:pPr>
+            <a:r>
+              <a:rPr/>
+              <a:t>📖 </a:t>
+            </a:r>
+            <a:r>
+              <a:rPr>
+                <a:hlinkClick r:id="rId2"/>
+              </a:rPr>
+              <a:t>R4DS §18 — Missing Values</a:t>
+            </a:r>
+          </a:p>
+        </p:txBody>
+      </p:sp>
+    </p:spTree>
+  </p:cSld>
+</p:sld>
+</file>
+
+<file path=ppt/slides/slide12.xml><?xml version="1.0" encoding="utf-8"?>
 <p:sld xmlns:a="http://schemas.openxmlformats.org/drawingml/2006/main" xmlns:r="http://schemas.openxmlformats.org/officeDocument/2006/relationships" xmlns:p="http://schemas.openxmlformats.org/presentationml/2006/main">
   <p:cSld>
     <p:spTree>
@@ -3962,7 +4353,7 @@
 </p:sld>
 </file>
 
-<file path=ppt/slides/slide12.xml><?xml version="1.0" encoding="utf-8"?>
+<file path=ppt/slides/slide13.xml><?xml version="1.0" encoding="utf-8"?>
 <p:sld xmlns:a="http://schemas.openxmlformats.org/drawingml/2006/main" xmlns:r="http://schemas.openxmlformats.org/officeDocument/2006/relationships" xmlns:p="http://schemas.openxmlformats.org/presentationml/2006/main">
   <p:cSld>
     <p:spTree>
@@ -4245,7 +4636,7 @@
 </p:sld>
 </file>
 
-<file path=ppt/slides/slide13.xml><?xml version="1.0" encoding="utf-8"?>
+<file path=ppt/slides/slide14.xml><?xml version="1.0" encoding="utf-8"?>
 <p:sld xmlns:a="http://schemas.openxmlformats.org/drawingml/2006/main" xmlns:r="http://schemas.openxmlformats.org/officeDocument/2006/relationships" xmlns:p="http://schemas.openxmlformats.org/presentationml/2006/main">
   <p:cSld>
     <p:spTree>
@@ -4581,7 +4972,7 @@
 </p:sld>
 </file>
 
-<file path=ppt/slides/slide14.xml><?xml version="1.0" encoding="utf-8"?>
+<file path=ppt/slides/slide15.xml><?xml version="1.0" encoding="utf-8"?>
 <p:sld xmlns:a="http://schemas.openxmlformats.org/drawingml/2006/main" xmlns:r="http://schemas.openxmlformats.org/officeDocument/2006/relationships" xmlns:p="http://schemas.openxmlformats.org/presentationml/2006/main">
   <p:cSld>
     <p:spTree>
@@ -4626,13 +5017,7 @@
             </a:pPr>
             <a:r>
               <a:rPr/>
-              <a:t>One Function, All the Basics — </a:t>
-            </a:r>
-            <a:r>
-              <a:rPr>
-                <a:latin typeface="Courier"/>
-              </a:rPr>
-              <a:t>summary_stats()</a:t>
+              <a:t>Do It By Hand First — One Group</a:t>
             </a:r>
           </a:p>
         </p:txBody>
@@ -4658,29 +5043,11 @@
             <a:r>
               <a:rPr>
                 <a:solidFill>
-                  <a:srgbClr val="003B4F"/>
-                </a:solidFill>
-                <a:latin typeface="Courier"/>
-              </a:rPr>
-              <a:t>summary_stats &lt;- </a:t>
-            </a:r>
-            <a:r>
-              <a:rPr b="1">
-                <a:solidFill>
-                  <a:srgbClr val="003B4F"/>
-                </a:solidFill>
-                <a:latin typeface="Courier"/>
-              </a:rPr>
-              <a:t>function</a:t>
-            </a:r>
-            <a:r>
-              <a:rPr>
-                <a:solidFill>
-                  <a:srgbClr val="003B4F"/>
-                </a:solidFill>
-                <a:latin typeface="Courier"/>
-              </a:rPr>
-              <a:t>(data, variable) {</a:t>
+                  <a:srgbClr val="5E5E5E"/>
+                </a:solidFill>
+                <a:latin typeface="Courier"/>
+              </a:rPr>
+              <a:t># Every statistic, written out, for the sunny leaves ----</a:t>
             </a:r>
             <a:br/>
             <a:r>
@@ -4690,7 +5057,7 @@
                 </a:solidFill>
                 <a:latin typeface="Courier"/>
               </a:rPr>
-              <a:t>  data </a:t>
+              <a:t>leaf_df </a:t>
             </a:r>
             <a:r>
               <a:rPr>
@@ -4709,16 +5076,381 @@
                 </a:solidFill>
                 <a:latin typeface="Courier"/>
               </a:rPr>
+              <a:t>  </a:t>
+            </a:r>
+            <a:r>
+              <a:rPr>
+                <a:solidFill>
+                  <a:srgbClr val="4758AB"/>
+                </a:solidFill>
+                <a:latin typeface="Courier"/>
+              </a:rPr>
+              <a:t>filter</a:t>
+            </a:r>
+            <a:r>
+              <a:rPr>
+                <a:solidFill>
+                  <a:srgbClr val="003B4F"/>
+                </a:solidFill>
+                <a:latin typeface="Courier"/>
+              </a:rPr>
+              <a:t>(shade </a:t>
+            </a:r>
+            <a:r>
+              <a:rPr>
+                <a:solidFill>
+                  <a:srgbClr val="5E5E5E"/>
+                </a:solidFill>
+                <a:latin typeface="Courier"/>
+              </a:rPr>
+              <a:t>==</a:t>
+            </a:r>
+            <a:r>
+              <a:rPr>
+                <a:solidFill>
+                  <a:srgbClr val="003B4F"/>
+                </a:solidFill>
+                <a:latin typeface="Courier"/>
+              </a:rPr>
+              <a:t> </a:t>
+            </a:r>
+            <a:r>
+              <a:rPr>
+                <a:solidFill>
+                  <a:srgbClr val="20794D"/>
+                </a:solidFill>
+                <a:latin typeface="Courier"/>
+              </a:rPr>
+              <a:t>"sunny"</a:t>
+            </a:r>
+            <a:r>
+              <a:rPr>
+                <a:solidFill>
+                  <a:srgbClr val="003B4F"/>
+                </a:solidFill>
+                <a:latin typeface="Courier"/>
+              </a:rPr>
+              <a:t>) </a:t>
+            </a:r>
+            <a:r>
+              <a:rPr>
+                <a:solidFill>
+                  <a:srgbClr val="5E5E5E"/>
+                </a:solidFill>
+                <a:latin typeface="Courier"/>
+              </a:rPr>
+              <a:t>%&gt;%</a:t>
+            </a:r>
+            <a:br/>
+            <a:r>
+              <a:rPr>
+                <a:solidFill>
+                  <a:srgbClr val="003B4F"/>
+                </a:solidFill>
+                <a:latin typeface="Courier"/>
+              </a:rPr>
+              <a:t>  </a:t>
+            </a:r>
+            <a:r>
+              <a:rPr>
+                <a:solidFill>
+                  <a:srgbClr val="4758AB"/>
+                </a:solidFill>
+                <a:latin typeface="Courier"/>
+              </a:rPr>
+              <a:t>summarize</a:t>
+            </a:r>
+            <a:r>
+              <a:rPr>
+                <a:solidFill>
+                  <a:srgbClr val="003B4F"/>
+                </a:solidFill>
+                <a:latin typeface="Courier"/>
+              </a:rPr>
+              <a:t>(</a:t>
+            </a:r>
+            <a:br/>
+            <a:r>
+              <a:rPr>
+                <a:solidFill>
+                  <a:srgbClr val="003B4F"/>
+                </a:solidFill>
+                <a:latin typeface="Courier"/>
+              </a:rPr>
               <a:t>    </a:t>
             </a:r>
             <a:r>
               <a:rPr>
                 <a:solidFill>
+                  <a:srgbClr val="657422"/>
+                </a:solidFill>
+                <a:latin typeface="Courier"/>
+              </a:rPr>
+              <a:t>mean     =</a:t>
+            </a:r>
+            <a:r>
+              <a:rPr>
+                <a:solidFill>
+                  <a:srgbClr val="003B4F"/>
+                </a:solidFill>
+                <a:latin typeface="Courier"/>
+              </a:rPr>
+              <a:t> </a:t>
+            </a:r>
+            <a:r>
+              <a:rPr>
+                <a:solidFill>
                   <a:srgbClr val="4758AB"/>
                 </a:solidFill>
                 <a:latin typeface="Courier"/>
               </a:rPr>
-              <a:t>summarize</a:t>
+              <a:t>mean</a:t>
+            </a:r>
+            <a:r>
+              <a:rPr>
+                <a:solidFill>
+                  <a:srgbClr val="003B4F"/>
+                </a:solidFill>
+                <a:latin typeface="Courier"/>
+              </a:rPr>
+              <a:t>(mass_g, </a:t>
+            </a:r>
+            <a:r>
+              <a:rPr>
+                <a:solidFill>
+                  <a:srgbClr val="657422"/>
+                </a:solidFill>
+                <a:latin typeface="Courier"/>
+              </a:rPr>
+              <a:t>na.rm =</a:t>
+            </a:r>
+            <a:r>
+              <a:rPr>
+                <a:solidFill>
+                  <a:srgbClr val="003B4F"/>
+                </a:solidFill>
+                <a:latin typeface="Courier"/>
+              </a:rPr>
+              <a:t> </a:t>
+            </a:r>
+            <a:r>
+              <a:rPr>
+                <a:solidFill>
+                  <a:srgbClr val="8F5902"/>
+                </a:solidFill>
+                <a:latin typeface="Courier"/>
+              </a:rPr>
+              <a:t>TRUE</a:t>
+            </a:r>
+            <a:r>
+              <a:rPr>
+                <a:solidFill>
+                  <a:srgbClr val="003B4F"/>
+                </a:solidFill>
+                <a:latin typeface="Courier"/>
+              </a:rPr>
+              <a:t>),</a:t>
+            </a:r>
+            <a:br/>
+            <a:r>
+              <a:rPr>
+                <a:solidFill>
+                  <a:srgbClr val="003B4F"/>
+                </a:solidFill>
+                <a:latin typeface="Courier"/>
+              </a:rPr>
+              <a:t>    </a:t>
+            </a:r>
+            <a:r>
+              <a:rPr>
+                <a:solidFill>
+                  <a:srgbClr val="657422"/>
+                </a:solidFill>
+                <a:latin typeface="Courier"/>
+              </a:rPr>
+              <a:t>variance =</a:t>
+            </a:r>
+            <a:r>
+              <a:rPr>
+                <a:solidFill>
+                  <a:srgbClr val="003B4F"/>
+                </a:solidFill>
+                <a:latin typeface="Courier"/>
+              </a:rPr>
+              <a:t> </a:t>
+            </a:r>
+            <a:r>
+              <a:rPr>
+                <a:solidFill>
+                  <a:srgbClr val="4758AB"/>
+                </a:solidFill>
+                <a:latin typeface="Courier"/>
+              </a:rPr>
+              <a:t>var</a:t>
+            </a:r>
+            <a:r>
+              <a:rPr>
+                <a:solidFill>
+                  <a:srgbClr val="003B4F"/>
+                </a:solidFill>
+                <a:latin typeface="Courier"/>
+              </a:rPr>
+              <a:t>(mass_g, </a:t>
+            </a:r>
+            <a:r>
+              <a:rPr>
+                <a:solidFill>
+                  <a:srgbClr val="657422"/>
+                </a:solidFill>
+                <a:latin typeface="Courier"/>
+              </a:rPr>
+              <a:t>na.rm =</a:t>
+            </a:r>
+            <a:r>
+              <a:rPr>
+                <a:solidFill>
+                  <a:srgbClr val="003B4F"/>
+                </a:solidFill>
+                <a:latin typeface="Courier"/>
+              </a:rPr>
+              <a:t> </a:t>
+            </a:r>
+            <a:r>
+              <a:rPr>
+                <a:solidFill>
+                  <a:srgbClr val="8F5902"/>
+                </a:solidFill>
+                <a:latin typeface="Courier"/>
+              </a:rPr>
+              <a:t>TRUE</a:t>
+            </a:r>
+            <a:r>
+              <a:rPr>
+                <a:solidFill>
+                  <a:srgbClr val="003B4F"/>
+                </a:solidFill>
+                <a:latin typeface="Courier"/>
+              </a:rPr>
+              <a:t>),</a:t>
+            </a:r>
+            <a:br/>
+            <a:r>
+              <a:rPr>
+                <a:solidFill>
+                  <a:srgbClr val="003B4F"/>
+                </a:solidFill>
+                <a:latin typeface="Courier"/>
+              </a:rPr>
+              <a:t>    </a:t>
+            </a:r>
+            <a:r>
+              <a:rPr>
+                <a:solidFill>
+                  <a:srgbClr val="657422"/>
+                </a:solidFill>
+                <a:latin typeface="Courier"/>
+              </a:rPr>
+              <a:t>sd       =</a:t>
+            </a:r>
+            <a:r>
+              <a:rPr>
+                <a:solidFill>
+                  <a:srgbClr val="003B4F"/>
+                </a:solidFill>
+                <a:latin typeface="Courier"/>
+              </a:rPr>
+              <a:t> </a:t>
+            </a:r>
+            <a:r>
+              <a:rPr>
+                <a:solidFill>
+                  <a:srgbClr val="4758AB"/>
+                </a:solidFill>
+                <a:latin typeface="Courier"/>
+              </a:rPr>
+              <a:t>sd</a:t>
+            </a:r>
+            <a:r>
+              <a:rPr>
+                <a:solidFill>
+                  <a:srgbClr val="003B4F"/>
+                </a:solidFill>
+                <a:latin typeface="Courier"/>
+              </a:rPr>
+              <a:t>(mass_g, </a:t>
+            </a:r>
+            <a:r>
+              <a:rPr>
+                <a:solidFill>
+                  <a:srgbClr val="657422"/>
+                </a:solidFill>
+                <a:latin typeface="Courier"/>
+              </a:rPr>
+              <a:t>na.rm =</a:t>
+            </a:r>
+            <a:r>
+              <a:rPr>
+                <a:solidFill>
+                  <a:srgbClr val="003B4F"/>
+                </a:solidFill>
+                <a:latin typeface="Courier"/>
+              </a:rPr>
+              <a:t> </a:t>
+            </a:r>
+            <a:r>
+              <a:rPr>
+                <a:solidFill>
+                  <a:srgbClr val="8F5902"/>
+                </a:solidFill>
+                <a:latin typeface="Courier"/>
+              </a:rPr>
+              <a:t>TRUE</a:t>
+            </a:r>
+            <a:r>
+              <a:rPr>
+                <a:solidFill>
+                  <a:srgbClr val="003B4F"/>
+                </a:solidFill>
+                <a:latin typeface="Courier"/>
+              </a:rPr>
+              <a:t>),</a:t>
+            </a:r>
+            <a:br/>
+            <a:r>
+              <a:rPr>
+                <a:solidFill>
+                  <a:srgbClr val="003B4F"/>
+                </a:solidFill>
+                <a:latin typeface="Courier"/>
+              </a:rPr>
+              <a:t>    </a:t>
+            </a:r>
+            <a:r>
+              <a:rPr>
+                <a:solidFill>
+                  <a:srgbClr val="657422"/>
+                </a:solidFill>
+                <a:latin typeface="Courier"/>
+              </a:rPr>
+              <a:t>n        =</a:t>
+            </a:r>
+            <a:r>
+              <a:rPr>
+                <a:solidFill>
+                  <a:srgbClr val="003B4F"/>
+                </a:solidFill>
+                <a:latin typeface="Courier"/>
+              </a:rPr>
+              <a:t> </a:t>
+            </a:r>
+            <a:r>
+              <a:rPr>
+                <a:solidFill>
+                  <a:srgbClr val="4758AB"/>
+                </a:solidFill>
+                <a:latin typeface="Courier"/>
+              </a:rPr>
+              <a:t>sum</a:t>
             </a:r>
             <a:r>
               <a:rPr>
@@ -4729,6 +5461,33 @@
               </a:rPr>
               <a:t>(</a:t>
             </a:r>
+            <a:r>
+              <a:rPr>
+                <a:solidFill>
+                  <a:srgbClr val="5E5E5E"/>
+                </a:solidFill>
+                <a:latin typeface="Courier"/>
+              </a:rPr>
+              <a:t>!</a:t>
+            </a:r>
+            <a:r>
+              <a:rPr>
+                <a:solidFill>
+                  <a:srgbClr val="4758AB"/>
+                </a:solidFill>
+                <a:latin typeface="Courier"/>
+              </a:rPr>
+              <a:t>is.na</a:t>
+            </a:r>
+            <a:r>
+              <a:rPr>
+                <a:solidFill>
+                  <a:srgbClr val="003B4F"/>
+                </a:solidFill>
+                <a:latin typeface="Courier"/>
+              </a:rPr>
+              <a:t>(mass_g)),</a:t>
+            </a:r>
             <a:br/>
             <a:r>
               <a:rPr>
@@ -4737,7 +5496,7 @@
                 </a:solidFill>
                 <a:latin typeface="Courier"/>
               </a:rPr>
-              <a:t>      </a:t>
+              <a:t>    </a:t>
             </a:r>
             <a:r>
               <a:rPr>
@@ -4746,7 +5505,25 @@
                 </a:solidFill>
                 <a:latin typeface="Courier"/>
               </a:rPr>
-              <a:t>n        =</a:t>
+              <a:t>se       =</a:t>
+            </a:r>
+            <a:r>
+              <a:rPr>
+                <a:solidFill>
+                  <a:srgbClr val="003B4F"/>
+                </a:solidFill>
+                <a:latin typeface="Courier"/>
+              </a:rPr>
+              <a:t> sd </a:t>
+            </a:r>
+            <a:r>
+              <a:rPr>
+                <a:solidFill>
+                  <a:srgbClr val="5E5E5E"/>
+                </a:solidFill>
+                <a:latin typeface="Courier"/>
+              </a:rPr>
+              <a:t>/</a:t>
             </a:r>
             <a:r>
               <a:rPr>
@@ -4764,43 +5541,16 @@
                 </a:solidFill>
                 <a:latin typeface="Courier"/>
               </a:rPr>
-              <a:t>sum</a:t>
-            </a:r>
-            <a:r>
-              <a:rPr>
-                <a:solidFill>
-                  <a:srgbClr val="003B4F"/>
-                </a:solidFill>
-                <a:latin typeface="Courier"/>
-              </a:rPr>
-              <a:t>(</a:t>
-            </a:r>
-            <a:r>
-              <a:rPr>
-                <a:solidFill>
-                  <a:srgbClr val="5E5E5E"/>
-                </a:solidFill>
-                <a:latin typeface="Courier"/>
-              </a:rPr>
-              <a:t>!</a:t>
-            </a:r>
-            <a:r>
-              <a:rPr>
-                <a:solidFill>
-                  <a:srgbClr val="4758AB"/>
-                </a:solidFill>
-                <a:latin typeface="Courier"/>
-              </a:rPr>
-              <a:t>is.na</a:t>
-            </a:r>
-            <a:r>
-              <a:rPr>
-                <a:solidFill>
-                  <a:srgbClr val="003B4F"/>
-                </a:solidFill>
-                <a:latin typeface="Courier"/>
-              </a:rPr>
-              <a:t>({{ variable }})),</a:t>
+              <a:t>sqrt</a:t>
+            </a:r>
+            <a:r>
+              <a:rPr>
+                <a:solidFill>
+                  <a:srgbClr val="003B4F"/>
+                </a:solidFill>
+                <a:latin typeface="Courier"/>
+              </a:rPr>
+              <a:t>(n)</a:t>
             </a:r>
             <a:br/>
             <a:r>
@@ -4810,809 +5560,21 @@
                 </a:solidFill>
                 <a:latin typeface="Courier"/>
               </a:rPr>
-              <a:t>      </a:t>
-            </a:r>
-            <a:r>
-              <a:rPr>
-                <a:solidFill>
-                  <a:srgbClr val="657422"/>
-                </a:solidFill>
-                <a:latin typeface="Courier"/>
-              </a:rPr>
-              <a:t>mean     =</a:t>
-            </a:r>
-            <a:r>
-              <a:rPr>
-                <a:solidFill>
-                  <a:srgbClr val="003B4F"/>
-                </a:solidFill>
-                <a:latin typeface="Courier"/>
-              </a:rPr>
-              <a:t> </a:t>
-            </a:r>
-            <a:r>
-              <a:rPr>
-                <a:solidFill>
-                  <a:srgbClr val="4758AB"/>
-                </a:solidFill>
-                <a:latin typeface="Courier"/>
-              </a:rPr>
-              <a:t>mean</a:t>
-            </a:r>
-            <a:r>
-              <a:rPr>
-                <a:solidFill>
-                  <a:srgbClr val="003B4F"/>
-                </a:solidFill>
-                <a:latin typeface="Courier"/>
-              </a:rPr>
-              <a:t>({{ variable }}, </a:t>
-            </a:r>
-            <a:r>
-              <a:rPr>
-                <a:solidFill>
-                  <a:srgbClr val="657422"/>
-                </a:solidFill>
-                <a:latin typeface="Courier"/>
-              </a:rPr>
-              <a:t>na.rm =</a:t>
-            </a:r>
-            <a:r>
-              <a:rPr>
-                <a:solidFill>
-                  <a:srgbClr val="003B4F"/>
-                </a:solidFill>
-                <a:latin typeface="Courier"/>
-              </a:rPr>
-              <a:t> </a:t>
-            </a:r>
-            <a:r>
-              <a:rPr>
-                <a:solidFill>
-                  <a:srgbClr val="8F5902"/>
-                </a:solidFill>
-                <a:latin typeface="Courier"/>
-              </a:rPr>
-              <a:t>TRUE</a:t>
-            </a:r>
-            <a:r>
-              <a:rPr>
-                <a:solidFill>
-                  <a:srgbClr val="003B4F"/>
-                </a:solidFill>
-                <a:latin typeface="Courier"/>
-              </a:rPr>
-              <a:t>),</a:t>
-            </a:r>
-            <a:br/>
-            <a:r>
-              <a:rPr>
-                <a:solidFill>
-                  <a:srgbClr val="003B4F"/>
-                </a:solidFill>
-                <a:latin typeface="Courier"/>
-              </a:rPr>
-              <a:t>      </a:t>
-            </a:r>
-            <a:r>
-              <a:rPr>
-                <a:solidFill>
-                  <a:srgbClr val="657422"/>
-                </a:solidFill>
-                <a:latin typeface="Courier"/>
-              </a:rPr>
-              <a:t>variance =</a:t>
-            </a:r>
-            <a:r>
-              <a:rPr>
-                <a:solidFill>
-                  <a:srgbClr val="003B4F"/>
-                </a:solidFill>
-                <a:latin typeface="Courier"/>
-              </a:rPr>
-              <a:t> </a:t>
-            </a:r>
-            <a:r>
-              <a:rPr>
-                <a:solidFill>
-                  <a:srgbClr val="4758AB"/>
-                </a:solidFill>
-                <a:latin typeface="Courier"/>
-              </a:rPr>
-              <a:t>var</a:t>
-            </a:r>
-            <a:r>
-              <a:rPr>
-                <a:solidFill>
-                  <a:srgbClr val="003B4F"/>
-                </a:solidFill>
-                <a:latin typeface="Courier"/>
-              </a:rPr>
-              <a:t>({{ variable }}, </a:t>
-            </a:r>
-            <a:r>
-              <a:rPr>
-                <a:solidFill>
-                  <a:srgbClr val="657422"/>
-                </a:solidFill>
-                <a:latin typeface="Courier"/>
-              </a:rPr>
-              <a:t>na.rm =</a:t>
-            </a:r>
-            <a:r>
-              <a:rPr>
-                <a:solidFill>
-                  <a:srgbClr val="003B4F"/>
-                </a:solidFill>
-                <a:latin typeface="Courier"/>
-              </a:rPr>
-              <a:t> </a:t>
-            </a:r>
-            <a:r>
-              <a:rPr>
-                <a:solidFill>
-                  <a:srgbClr val="8F5902"/>
-                </a:solidFill>
-                <a:latin typeface="Courier"/>
-              </a:rPr>
-              <a:t>TRUE</a:t>
-            </a:r>
-            <a:r>
-              <a:rPr>
-                <a:solidFill>
-                  <a:srgbClr val="003B4F"/>
-                </a:solidFill>
-                <a:latin typeface="Courier"/>
-              </a:rPr>
-              <a:t>),</a:t>
-            </a:r>
-            <a:br/>
-            <a:r>
-              <a:rPr>
-                <a:solidFill>
-                  <a:srgbClr val="003B4F"/>
-                </a:solidFill>
-                <a:latin typeface="Courier"/>
-              </a:rPr>
-              <a:t>      </a:t>
-            </a:r>
-            <a:r>
-              <a:rPr>
-                <a:solidFill>
-                  <a:srgbClr val="657422"/>
-                </a:solidFill>
-                <a:latin typeface="Courier"/>
-              </a:rPr>
-              <a:t>sd       =</a:t>
-            </a:r>
-            <a:r>
-              <a:rPr>
-                <a:solidFill>
-                  <a:srgbClr val="003B4F"/>
-                </a:solidFill>
-                <a:latin typeface="Courier"/>
-              </a:rPr>
-              <a:t> </a:t>
-            </a:r>
-            <a:r>
-              <a:rPr>
-                <a:solidFill>
-                  <a:srgbClr val="4758AB"/>
-                </a:solidFill>
-                <a:latin typeface="Courier"/>
-              </a:rPr>
-              <a:t>sd</a:t>
-            </a:r>
-            <a:r>
-              <a:rPr>
-                <a:solidFill>
-                  <a:srgbClr val="003B4F"/>
-                </a:solidFill>
-                <a:latin typeface="Courier"/>
-              </a:rPr>
-              <a:t>({{ variable }}, </a:t>
-            </a:r>
-            <a:r>
-              <a:rPr>
-                <a:solidFill>
-                  <a:srgbClr val="657422"/>
-                </a:solidFill>
-                <a:latin typeface="Courier"/>
-              </a:rPr>
-              <a:t>na.rm =</a:t>
-            </a:r>
-            <a:r>
-              <a:rPr>
-                <a:solidFill>
-                  <a:srgbClr val="003B4F"/>
-                </a:solidFill>
-                <a:latin typeface="Courier"/>
-              </a:rPr>
-              <a:t> </a:t>
-            </a:r>
-            <a:r>
-              <a:rPr>
-                <a:solidFill>
-                  <a:srgbClr val="8F5902"/>
-                </a:solidFill>
-                <a:latin typeface="Courier"/>
-              </a:rPr>
-              <a:t>TRUE</a:t>
-            </a:r>
-            <a:r>
-              <a:rPr>
-                <a:solidFill>
-                  <a:srgbClr val="003B4F"/>
-                </a:solidFill>
-                <a:latin typeface="Courier"/>
-              </a:rPr>
-              <a:t>),</a:t>
-            </a:r>
-            <a:br/>
-            <a:r>
-              <a:rPr>
-                <a:solidFill>
-                  <a:srgbClr val="003B4F"/>
-                </a:solidFill>
-                <a:latin typeface="Courier"/>
-              </a:rPr>
-              <a:t>      </a:t>
-            </a:r>
-            <a:r>
-              <a:rPr>
-                <a:solidFill>
-                  <a:srgbClr val="657422"/>
-                </a:solidFill>
-                <a:latin typeface="Courier"/>
-              </a:rPr>
-              <a:t>se       =</a:t>
-            </a:r>
-            <a:r>
-              <a:rPr>
-                <a:solidFill>
-                  <a:srgbClr val="003B4F"/>
-                </a:solidFill>
-                <a:latin typeface="Courier"/>
-              </a:rPr>
-              <a:t> sd </a:t>
-            </a:r>
-            <a:r>
-              <a:rPr>
-                <a:solidFill>
-                  <a:srgbClr val="5E5E5E"/>
-                </a:solidFill>
-                <a:latin typeface="Courier"/>
-              </a:rPr>
-              <a:t>/</a:t>
-            </a:r>
-            <a:r>
-              <a:rPr>
-                <a:solidFill>
-                  <a:srgbClr val="003B4F"/>
-                </a:solidFill>
-                <a:latin typeface="Courier"/>
-              </a:rPr>
-              <a:t> </a:t>
-            </a:r>
-            <a:r>
-              <a:rPr>
-                <a:solidFill>
-                  <a:srgbClr val="4758AB"/>
-                </a:solidFill>
-                <a:latin typeface="Courier"/>
-              </a:rPr>
-              <a:t>sqrt</a:t>
-            </a:r>
-            <a:r>
-              <a:rPr>
-                <a:solidFill>
-                  <a:srgbClr val="003B4F"/>
-                </a:solidFill>
-                <a:latin typeface="Courier"/>
-              </a:rPr>
-              <a:t>(n),</a:t>
-            </a:r>
-            <a:br/>
-            <a:r>
-              <a:rPr>
-                <a:solidFill>
-                  <a:srgbClr val="003B4F"/>
-                </a:solidFill>
-                <a:latin typeface="Courier"/>
-              </a:rPr>
-              <a:t>      </a:t>
-            </a:r>
-            <a:r>
-              <a:rPr>
-                <a:solidFill>
-                  <a:srgbClr val="657422"/>
-                </a:solidFill>
-                <a:latin typeface="Courier"/>
-              </a:rPr>
-              <a:t>ci_lower =</a:t>
-            </a:r>
-            <a:r>
-              <a:rPr>
-                <a:solidFill>
-                  <a:srgbClr val="003B4F"/>
-                </a:solidFill>
-                <a:latin typeface="Courier"/>
-              </a:rPr>
-              <a:t> mean </a:t>
-            </a:r>
-            <a:r>
-              <a:rPr>
-                <a:solidFill>
-                  <a:srgbClr val="5E5E5E"/>
-                </a:solidFill>
-                <a:latin typeface="Courier"/>
-              </a:rPr>
-              <a:t>-</a:t>
-            </a:r>
-            <a:r>
-              <a:rPr>
-                <a:solidFill>
-                  <a:srgbClr val="003B4F"/>
-                </a:solidFill>
-                <a:latin typeface="Courier"/>
-              </a:rPr>
-              <a:t> </a:t>
-            </a:r>
-            <a:r>
-              <a:rPr>
-                <a:solidFill>
-                  <a:srgbClr val="4758AB"/>
-                </a:solidFill>
-                <a:latin typeface="Courier"/>
-              </a:rPr>
-              <a:t>qt</a:t>
-            </a:r>
-            <a:r>
-              <a:rPr>
-                <a:solidFill>
-                  <a:srgbClr val="003B4F"/>
-                </a:solidFill>
-                <a:latin typeface="Courier"/>
-              </a:rPr>
-              <a:t>(</a:t>
-            </a:r>
-            <a:r>
-              <a:rPr>
-                <a:solidFill>
-                  <a:srgbClr val="AD0000"/>
-                </a:solidFill>
-                <a:latin typeface="Courier"/>
-              </a:rPr>
-              <a:t>0.975</a:t>
-            </a:r>
-            <a:r>
-              <a:rPr>
-                <a:solidFill>
-                  <a:srgbClr val="003B4F"/>
-                </a:solidFill>
-                <a:latin typeface="Courier"/>
-              </a:rPr>
-              <a:t>, </a:t>
-            </a:r>
-            <a:r>
-              <a:rPr>
-                <a:solidFill>
-                  <a:srgbClr val="657422"/>
-                </a:solidFill>
-                <a:latin typeface="Courier"/>
-              </a:rPr>
-              <a:t>df =</a:t>
-            </a:r>
-            <a:r>
-              <a:rPr>
-                <a:solidFill>
-                  <a:srgbClr val="003B4F"/>
-                </a:solidFill>
-                <a:latin typeface="Courier"/>
-              </a:rPr>
-              <a:t> n </a:t>
-            </a:r>
-            <a:r>
-              <a:rPr>
-                <a:solidFill>
-                  <a:srgbClr val="5E5E5E"/>
-                </a:solidFill>
-                <a:latin typeface="Courier"/>
-              </a:rPr>
-              <a:t>-</a:t>
-            </a:r>
-            <a:r>
-              <a:rPr>
-                <a:solidFill>
-                  <a:srgbClr val="003B4F"/>
-                </a:solidFill>
-                <a:latin typeface="Courier"/>
-              </a:rPr>
-              <a:t> </a:t>
-            </a:r>
-            <a:r>
-              <a:rPr>
-                <a:solidFill>
-                  <a:srgbClr val="AD0000"/>
-                </a:solidFill>
-                <a:latin typeface="Courier"/>
-              </a:rPr>
-              <a:t>1</a:t>
-            </a:r>
-            <a:r>
-              <a:rPr>
-                <a:solidFill>
-                  <a:srgbClr val="003B4F"/>
-                </a:solidFill>
-                <a:latin typeface="Courier"/>
-              </a:rPr>
-              <a:t>) </a:t>
-            </a:r>
-            <a:r>
-              <a:rPr>
-                <a:solidFill>
-                  <a:srgbClr val="5E5E5E"/>
-                </a:solidFill>
-                <a:latin typeface="Courier"/>
-              </a:rPr>
-              <a:t>*</a:t>
-            </a:r>
-            <a:r>
-              <a:rPr>
-                <a:solidFill>
-                  <a:srgbClr val="003B4F"/>
-                </a:solidFill>
-                <a:latin typeface="Courier"/>
-              </a:rPr>
-              <a:t> se,</a:t>
-            </a:r>
-            <a:br/>
-            <a:r>
-              <a:rPr>
-                <a:solidFill>
-                  <a:srgbClr val="003B4F"/>
-                </a:solidFill>
-                <a:latin typeface="Courier"/>
-              </a:rPr>
-              <a:t>      </a:t>
-            </a:r>
-            <a:r>
-              <a:rPr>
-                <a:solidFill>
-                  <a:srgbClr val="657422"/>
-                </a:solidFill>
-                <a:latin typeface="Courier"/>
-              </a:rPr>
-              <a:t>ci_upper =</a:t>
-            </a:r>
-            <a:r>
-              <a:rPr>
-                <a:solidFill>
-                  <a:srgbClr val="003B4F"/>
-                </a:solidFill>
-                <a:latin typeface="Courier"/>
-              </a:rPr>
-              <a:t> mean </a:t>
-            </a:r>
-            <a:r>
-              <a:rPr>
-                <a:solidFill>
-                  <a:srgbClr val="5E5E5E"/>
-                </a:solidFill>
-                <a:latin typeface="Courier"/>
-              </a:rPr>
-              <a:t>+</a:t>
-            </a:r>
-            <a:r>
-              <a:rPr>
-                <a:solidFill>
-                  <a:srgbClr val="003B4F"/>
-                </a:solidFill>
-                <a:latin typeface="Courier"/>
-              </a:rPr>
-              <a:t> </a:t>
-            </a:r>
-            <a:r>
-              <a:rPr>
-                <a:solidFill>
-                  <a:srgbClr val="4758AB"/>
-                </a:solidFill>
-                <a:latin typeface="Courier"/>
-              </a:rPr>
-              <a:t>qt</a:t>
-            </a:r>
-            <a:r>
-              <a:rPr>
-                <a:solidFill>
-                  <a:srgbClr val="003B4F"/>
-                </a:solidFill>
-                <a:latin typeface="Courier"/>
-              </a:rPr>
-              <a:t>(</a:t>
-            </a:r>
-            <a:r>
-              <a:rPr>
-                <a:solidFill>
-                  <a:srgbClr val="AD0000"/>
-                </a:solidFill>
-                <a:latin typeface="Courier"/>
-              </a:rPr>
-              <a:t>0.975</a:t>
-            </a:r>
-            <a:r>
-              <a:rPr>
-                <a:solidFill>
-                  <a:srgbClr val="003B4F"/>
-                </a:solidFill>
-                <a:latin typeface="Courier"/>
-              </a:rPr>
-              <a:t>, </a:t>
-            </a:r>
-            <a:r>
-              <a:rPr>
-                <a:solidFill>
-                  <a:srgbClr val="657422"/>
-                </a:solidFill>
-                <a:latin typeface="Courier"/>
-              </a:rPr>
-              <a:t>df =</a:t>
-            </a:r>
-            <a:r>
-              <a:rPr>
-                <a:solidFill>
-                  <a:srgbClr val="003B4F"/>
-                </a:solidFill>
-                <a:latin typeface="Courier"/>
-              </a:rPr>
-              <a:t> n </a:t>
-            </a:r>
-            <a:r>
-              <a:rPr>
-                <a:solidFill>
-                  <a:srgbClr val="5E5E5E"/>
-                </a:solidFill>
-                <a:latin typeface="Courier"/>
-              </a:rPr>
-              <a:t>-</a:t>
-            </a:r>
-            <a:r>
-              <a:rPr>
-                <a:solidFill>
-                  <a:srgbClr val="003B4F"/>
-                </a:solidFill>
-                <a:latin typeface="Courier"/>
-              </a:rPr>
-              <a:t> </a:t>
-            </a:r>
-            <a:r>
-              <a:rPr>
-                <a:solidFill>
-                  <a:srgbClr val="AD0000"/>
-                </a:solidFill>
-                <a:latin typeface="Courier"/>
-              </a:rPr>
-              <a:t>1</a:t>
-            </a:r>
-            <a:r>
-              <a:rPr>
-                <a:solidFill>
-                  <a:srgbClr val="003B4F"/>
-                </a:solidFill>
-                <a:latin typeface="Courier"/>
-              </a:rPr>
-              <a:t>) </a:t>
-            </a:r>
-            <a:r>
-              <a:rPr>
-                <a:solidFill>
-                  <a:srgbClr val="5E5E5E"/>
-                </a:solidFill>
-                <a:latin typeface="Courier"/>
-              </a:rPr>
-              <a:t>*</a:t>
-            </a:r>
-            <a:r>
-              <a:rPr>
-                <a:solidFill>
-                  <a:srgbClr val="003B4F"/>
-                </a:solidFill>
-                <a:latin typeface="Courier"/>
-              </a:rPr>
-              <a:t> se,</a:t>
-            </a:r>
-            <a:br/>
-            <a:r>
-              <a:rPr>
-                <a:solidFill>
-                  <a:srgbClr val="003B4F"/>
-                </a:solidFill>
-                <a:latin typeface="Courier"/>
-              </a:rPr>
-              <a:t>      </a:t>
-            </a:r>
-            <a:r>
-              <a:rPr>
-                <a:solidFill>
-                  <a:srgbClr val="657422"/>
-                </a:solidFill>
-                <a:latin typeface="Courier"/>
-              </a:rPr>
-              <a:t>.groups  =</a:t>
-            </a:r>
-            <a:r>
-              <a:rPr>
-                <a:solidFill>
-                  <a:srgbClr val="003B4F"/>
-                </a:solidFill>
-                <a:latin typeface="Courier"/>
-              </a:rPr>
-              <a:t> </a:t>
-            </a:r>
-            <a:r>
-              <a:rPr>
-                <a:solidFill>
-                  <a:srgbClr val="20794D"/>
-                </a:solidFill>
-                <a:latin typeface="Courier"/>
-              </a:rPr>
-              <a:t>"drop"</a:t>
-            </a:r>
-            <a:br/>
-            <a:r>
-              <a:rPr>
-                <a:solidFill>
-                  <a:srgbClr val="003B4F"/>
-                </a:solidFill>
-                <a:latin typeface="Courier"/>
-              </a:rPr>
-              <a:t>    ) </a:t>
-            </a:r>
-            <a:r>
-              <a:rPr>
-                <a:solidFill>
-                  <a:srgbClr val="5E5E5E"/>
-                </a:solidFill>
-                <a:latin typeface="Courier"/>
-              </a:rPr>
-              <a:t>%&gt;%</a:t>
-            </a:r>
-            <a:br/>
-            <a:r>
-              <a:rPr>
-                <a:solidFill>
-                  <a:srgbClr val="003B4F"/>
-                </a:solidFill>
-                <a:latin typeface="Courier"/>
-              </a:rPr>
-              <a:t>    </a:t>
-            </a:r>
-            <a:r>
-              <a:rPr>
-                <a:solidFill>
-                  <a:srgbClr val="4758AB"/>
-                </a:solidFill>
-                <a:latin typeface="Courier"/>
-              </a:rPr>
-              <a:t>mutate</a:t>
-            </a:r>
-            <a:r>
-              <a:rPr>
-                <a:solidFill>
-                  <a:srgbClr val="003B4F"/>
-                </a:solidFill>
-                <a:latin typeface="Courier"/>
-              </a:rPr>
-              <a:t>(</a:t>
-            </a:r>
-            <a:r>
-              <a:rPr>
-                <a:solidFill>
-                  <a:srgbClr val="4758AB"/>
-                </a:solidFill>
-                <a:latin typeface="Courier"/>
-              </a:rPr>
-              <a:t>across</a:t>
-            </a:r>
-            <a:r>
-              <a:rPr>
-                <a:solidFill>
-                  <a:srgbClr val="003B4F"/>
-                </a:solidFill>
-                <a:latin typeface="Courier"/>
-              </a:rPr>
-              <a:t>(</a:t>
-            </a:r>
-            <a:r>
-              <a:rPr>
-                <a:solidFill>
-                  <a:srgbClr val="4758AB"/>
-                </a:solidFill>
-                <a:latin typeface="Courier"/>
-              </a:rPr>
-              <a:t>c</a:t>
-            </a:r>
-            <a:r>
-              <a:rPr>
-                <a:solidFill>
-                  <a:srgbClr val="003B4F"/>
-                </a:solidFill>
-                <a:latin typeface="Courier"/>
-              </a:rPr>
-              <a:t>(mean, variance, sd, se, ci_lower, ci_upper),</a:t>
-            </a:r>
-            <a:br/>
-            <a:r>
-              <a:rPr>
-                <a:solidFill>
-                  <a:srgbClr val="003B4F"/>
-                </a:solidFill>
-                <a:latin typeface="Courier"/>
-              </a:rPr>
-              <a:t>                  </a:t>
-            </a:r>
-            <a:r>
-              <a:rPr>
-                <a:solidFill>
-                  <a:srgbClr val="5E5E5E"/>
-                </a:solidFill>
-                <a:latin typeface="Courier"/>
-              </a:rPr>
-              <a:t>~</a:t>
-            </a:r>
-            <a:r>
-              <a:rPr>
-                <a:solidFill>
-                  <a:srgbClr val="003B4F"/>
-                </a:solidFill>
-                <a:latin typeface="Courier"/>
-              </a:rPr>
-              <a:t> </a:t>
-            </a:r>
-            <a:r>
-              <a:rPr>
-                <a:solidFill>
-                  <a:srgbClr val="4758AB"/>
-                </a:solidFill>
-                <a:latin typeface="Courier"/>
-              </a:rPr>
-              <a:t>round_half_up</a:t>
-            </a:r>
-            <a:r>
-              <a:rPr>
-                <a:solidFill>
-                  <a:srgbClr val="003B4F"/>
-                </a:solidFill>
-                <a:latin typeface="Courier"/>
-              </a:rPr>
-              <a:t>(.x, </a:t>
-            </a:r>
-            <a:r>
-              <a:rPr>
-                <a:solidFill>
-                  <a:srgbClr val="AD0000"/>
-                </a:solidFill>
-                <a:latin typeface="Courier"/>
-              </a:rPr>
-              <a:t>2</a:t>
-            </a:r>
-            <a:r>
-              <a:rPr>
-                <a:solidFill>
-                  <a:srgbClr val="003B4F"/>
-                </a:solidFill>
-                <a:latin typeface="Courier"/>
-              </a:rPr>
-              <a:t>)))</a:t>
-            </a:r>
-            <a:br/>
-            <a:r>
-              <a:rPr>
-                <a:solidFill>
-                  <a:srgbClr val="003B4F"/>
-                </a:solidFill>
-                <a:latin typeface="Courier"/>
-              </a:rPr>
-              <a:t>}</a:t>
+              <a:t>  )</a:t>
+            </a:r>
+          </a:p>
+          <a:p>
+            <a:pPr lvl="0" indent="0">
+              <a:buNone/>
+            </a:pPr>
+            <a:r>
+              <a:rPr>
+                <a:latin typeface="Courier"/>
+              </a:rPr>
+              <a:t># A tibble: 1 × 5
+   mean variance    sd     n     se
+  &lt;dbl&gt;    &lt;dbl&gt; &lt;dbl&gt; &lt;int&gt;  &lt;dbl&gt;
+1 0.505   0.0442 0.210    25 0.0421</a:t>
             </a:r>
           </a:p>
         </p:txBody>
@@ -5634,8 +5596,97 @@
           <a:p>
             <a:pPr lvl="0"/>
             <a:r>
-              <a:rPr/>
-              <a:t>One call gives you </a:t>
+              <a:rPr>
+                <a:latin typeface="Courier"/>
+              </a:rPr>
+              <a:t>summarize()</a:t>
+            </a:r>
+            <a:r>
+              <a:rPr/>
+              <a:t> collapses many rows down to </a:t>
+            </a:r>
+            <a:r>
+              <a:rPr b="1"/>
+              <a:t>one row</a:t>
+            </a:r>
+            <a:r>
+              <a:rPr/>
+              <a:t> of statistics</a:t>
+            </a:r>
+          </a:p>
+          <a:p>
+            <a:pPr lvl="0"/>
+            <a:r>
+              <a:rPr/>
+              <a:t>Every function gets </a:t>
+            </a:r>
+            <a:r>
+              <a:rPr>
+                <a:latin typeface="Courier"/>
+              </a:rPr>
+              <a:t>na.rm = TRUE</a:t>
+            </a:r>
+            <a:r>
+              <a:rPr/>
+              <a:t> — otherwise one </a:t>
+            </a:r>
+            <a:r>
+              <a:rPr>
+                <a:latin typeface="Courier"/>
+              </a:rPr>
+              <a:t>NA</a:t>
+            </a:r>
+            <a:r>
+              <a:rPr/>
+              <a:t> makes the whole answer </a:t>
+            </a:r>
+            <a:r>
+              <a:rPr>
+                <a:latin typeface="Courier"/>
+              </a:rPr>
+              <a:t>NA</a:t>
+            </a:r>
+          </a:p>
+          <a:p>
+            <a:pPr lvl="0"/>
+            <a:r>
+              <a:rPr>
+                <a:latin typeface="Courier"/>
+              </a:rPr>
+              <a:t>n = sum(!is.na(mass_g))</a:t>
+            </a:r>
+            <a:r>
+              <a:rPr/>
+              <a:t> — the correct count, not </a:t>
+            </a:r>
+            <a:r>
+              <a:rPr>
+                <a:latin typeface="Courier"/>
+              </a:rPr>
+              <a:t>n()</a:t>
+            </a:r>
+          </a:p>
+          <a:p>
+            <a:pPr lvl="0"/>
+            <a:r>
+              <a:rPr>
+                <a:latin typeface="Courier"/>
+              </a:rPr>
+              <a:t>se = sd / sqrt(n)</a:t>
+            </a:r>
+            <a:r>
+              <a:rPr/>
+              <a:t> — you can reuse </a:t>
+            </a:r>
+            <a:r>
+              <a:rPr>
+                <a:latin typeface="Courier"/>
+              </a:rPr>
+              <a:t>sd</a:t>
+            </a:r>
+            <a:r>
+              <a:rPr/>
+              <a:t> and </a:t>
             </a:r>
             <a:r>
               <a:rPr>
@@ -5645,153 +5696,44 @@
             </a:r>
             <a:r>
               <a:rPr/>
-              <a:t>, </a:t>
-            </a:r>
-            <a:r>
-              <a:rPr>
-                <a:latin typeface="Courier"/>
-              </a:rPr>
-              <a:t>mean</a:t>
-            </a:r>
-            <a:r>
-              <a:rPr/>
-              <a:t>, </a:t>
-            </a:r>
-            <a:r>
-              <a:rPr>
-                <a:latin typeface="Courier"/>
-              </a:rPr>
-              <a:t>variance</a:t>
-            </a:r>
-            <a:r>
-              <a:rPr/>
-              <a:t>, </a:t>
-            </a:r>
-            <a:r>
-              <a:rPr>
-                <a:latin typeface="Courier"/>
-              </a:rPr>
-              <a:t>sd</a:t>
-            </a:r>
-            <a:r>
-              <a:rPr/>
-              <a:t>, </a:t>
-            </a:r>
-            <a:r>
-              <a:rPr>
-                <a:latin typeface="Courier"/>
-              </a:rPr>
-              <a:t>se</a:t>
-            </a:r>
-            <a:r>
-              <a:rPr/>
-              <a:t>, and a 95% CI</a:t>
+              <a:t> </a:t>
+            </a:r>
+            <a:r>
+              <a:rPr b="1"/>
+              <a:t>later in the same </a:t>
+            </a:r>
+            <a:r>
+              <a:rPr b="1">
+                <a:latin typeface="Courier"/>
+              </a:rPr>
+              <a:t>summarize()</a:t>
+            </a:r>
+            <a:r>
+              <a:rPr/>
+              <a:t>, because they are already columns by then</a:t>
             </a:r>
           </a:p>
           <a:p>
             <a:pPr lvl="0"/>
             <a:r>
-              <a:rPr>
-                <a:latin typeface="Courier"/>
-              </a:rPr>
-              <a:t>n = sum(!is.na())</a:t>
-            </a:r>
-            <a:r>
-              <a:rPr/>
-              <a:t> — no </a:t>
-            </a:r>
-            <a:r>
-              <a:rPr>
-                <a:latin typeface="Courier"/>
-              </a:rPr>
-              <a:t>length()</a:t>
-            </a:r>
-            <a:r>
-              <a:rPr/>
-              <a:t> trap</a:t>
-            </a:r>
-          </a:p>
-          <a:p>
-            <a:pPr lvl="0"/>
-            <a:r>
-              <a:rPr>
-                <a:latin typeface="Courier"/>
-              </a:rPr>
-              <a:t>{ variable }</a:t>
-            </a:r>
-            <a:r>
-              <a:rPr/>
-              <a:t> lets you pass a bare column name in, like </a:t>
-            </a:r>
-            <a:r>
-              <a:rPr>
-                <a:latin typeface="Courier"/>
-              </a:rPr>
-              <a:t>mass_g</a:t>
-            </a:r>
-          </a:p>
-          <a:p>
-            <a:pPr lvl="0"/>
-            <a:r>
-              <a:rPr/>
-              <a:t>Works on </a:t>
-            </a:r>
-            <a:r>
-              <a:rPr b="1"/>
-              <a:t>one group</a:t>
-            </a:r>
-            <a:r>
-              <a:rPr/>
-              <a:t> or, if the data are already </a:t>
-            </a:r>
-            <a:r>
-              <a:rPr>
-                <a:latin typeface="Courier"/>
-              </a:rPr>
-              <a:t>group_by()</a:t>
-            </a:r>
-            <a:r>
-              <a:rPr/>
-              <a:t>-ed, </a:t>
-            </a:r>
-            <a:r>
-              <a:rPr b="1"/>
-              <a:t>every group at once</a:t>
-            </a:r>
-          </a:p>
-          <a:p>
-            <a:pPr lvl="0"/>
-            <a:r>
-              <a:rPr/>
-              <a:t>Source: </a:t>
-            </a:r>
-            <a:r>
-              <a:rPr>
-                <a:hlinkClick r:id="rId2"/>
-                <a:latin typeface="Courier"/>
-              </a:rPr>
-              <a:t>themes/summary_stats_function.R</a:t>
-            </a:r>
-            <a:r>
-              <a:rPr/>
-              <a:t> — same </a:t>
-            </a:r>
-            <a:r>
-              <a:rPr>
-                <a:latin typeface="Courier"/>
-              </a:rPr>
-              <a:t>themes/</a:t>
-            </a:r>
-            <a:r>
-              <a:rPr/>
-              <a:t> folder as your ggplot </a:t>
-            </a:r>
-            <a:r>
-              <a:rPr>
-                <a:hlinkClick r:id="rId3"/>
-                <a:latin typeface="Courier"/>
-              </a:rPr>
-              <a:t>theme file</a:t>
+              <a:rPr/>
+              <a:t>The result is a data frame, so it pipes onward into </a:t>
+            </a:r>
+            <a:r>
+              <a:rPr>
+                <a:latin typeface="Courier"/>
+              </a:rPr>
+              <a:t>ggplot()</a:t>
+            </a:r>
+            <a:r>
+              <a:rPr/>
+              <a:t> or </a:t>
+            </a:r>
+            <a:r>
+              <a:rPr>
+                <a:latin typeface="Courier"/>
+              </a:rPr>
+              <a:t>write_csv()</a:t>
             </a:r>
           </a:p>
         </p:txBody>
@@ -5801,7 +5743,115 @@
 </p:sld>
 </file>
 
-<file path=ppt/slides/slide15.xml><?xml version="1.0" encoding="utf-8"?>
+<file path=ppt/slides/slide16.xml><?xml version="1.0" encoding="utf-8"?>
+<p:sld xmlns:a="http://schemas.openxmlformats.org/drawingml/2006/main" xmlns:r="http://schemas.openxmlformats.org/officeDocument/2006/relationships" xmlns:p="http://schemas.openxmlformats.org/presentationml/2006/main">
+  <p:cSld>
+    <p:spTree>
+      <p:nvGrpSpPr>
+        <p:cNvPr id="1" name=""/>
+        <p:cNvGrpSpPr/>
+        <p:nvPr/>
+      </p:nvGrpSpPr>
+      <p:grpSpPr>
+        <a:xfrm>
+          <a:off x="0" y="0"/>
+          <a:ext cx="0" cy="0"/>
+          <a:chOff x="0" y="0"/>
+          <a:chExt cx="0" cy="0"/>
+        </a:xfrm>
+      </p:grpSpPr>
+      <p:sp>
+        <p:nvSpPr>
+          <p:cNvPr id="2" name="Title 1"/>
+          <p:cNvSpPr>
+            <a:spLocks noGrp="1"/>
+          </p:cNvSpPr>
+          <p:nvPr>
+            <p:ph type="title"/>
+          </p:nvPr>
+        </p:nvSpPr>
+        <p:spPr>
+          <a:xfrm>
+            <a:off x="0" y="0"/>
+            <a:ext cx="9144000" cy="582780"/>
+          </a:xfrm>
+        </p:spPr>
+        <p:txBody>
+          <a:bodyPr/>
+          <a:lstStyle/>
+          <a:p>
+            <a:pPr lvl="0" indent="0" marL="0">
+              <a:buNone/>
+            </a:pPr>
+            <a:r>
+              <a:rPr/>
+              <a:t>Do It By Hand — Every Group at Once</a:t>
+            </a:r>
+          </a:p>
+        </p:txBody>
+      </p:sp>
+      <p:sp>
+        <p:nvSpPr>
+          <p:cNvPr id="3" name="Content Placeholder 2"/>
+          <p:cNvSpPr>
+            <a:spLocks noGrp="1"/>
+          </p:cNvSpPr>
+          <p:nvPr>
+            <p:ph idx="1"/>
+          </p:nvPr>
+        </p:nvSpPr>
+        <p:spPr/>
+        <p:txBody>
+          <a:bodyPr/>
+          <a:lstStyle/>
+          <a:p>
+            <a:pPr lvl="0" indent="0" marL="1270000">
+              <a:buNone/>
+            </a:pPr>
+            <a:r>
+              <a:rPr sz="2000" b="1"/>
+              <a:t>Note</a:t>
+            </a:r>
+          </a:p>
+          <a:p>
+            <a:pPr lvl="0" indent="0" marL="1270000">
+              <a:buNone/>
+            </a:pPr>
+            <a:r>
+              <a:rPr sz="2000" b="1"/>
+              <a:t>🔮 Predict first:</a:t>
+            </a:r>
+            <a:r>
+              <a:rPr sz="2000"/>
+              <a:t> How many </a:t>
+            </a:r>
+            <a:r>
+              <a:rPr sz="2000" b="1"/>
+              <a:t>rows</a:t>
+            </a:r>
+            <a:r>
+              <a:rPr sz="2000"/>
+              <a:t> will this return? (Hint: how many values does </a:t>
+            </a:r>
+            <a:r>
+              <a:rPr sz="2000">
+                <a:latin typeface="Courier"/>
+              </a:rPr>
+              <a:t>shade</a:t>
+            </a:r>
+            <a:r>
+              <a:rPr sz="2000"/>
+              <a:t> take?)</a:t>
+            </a:r>
+          </a:p>
+        </p:txBody>
+      </p:sp>
+    </p:spTree>
+  </p:cSld>
+</p:sld>
+</file>
+
+<file path=ppt/slides/slide17.xml><?xml version="1.0" encoding="utf-8"?>
 <p:sld xmlns:a="http://schemas.openxmlformats.org/drawingml/2006/main" xmlns:r="http://schemas.openxmlformats.org/officeDocument/2006/relationships" xmlns:p="http://schemas.openxmlformats.org/presentationml/2006/main">
   <p:cSld>
     <p:spTree>
@@ -5825,7 +5875,7 @@
             <a:spLocks noGrp="1"/>
           </p:cNvSpPr>
           <p:nvPr>
-            <p:ph idx="1"/>
+            <p:ph idx="1" sz="half"/>
           </p:nvPr>
         </p:nvSpPr>
         <p:spPr/>
@@ -5843,17 +5893,82 @@
                 </a:solidFill>
                 <a:latin typeface="Courier"/>
               </a:rPr>
-              <a:t># source() loads summary_stats() from another .R file --</a:t>
+              <a:t># group_by() splits the data; summarize() runs per group</a:t>
             </a:r>
             <a:br/>
             <a:r>
               <a:rPr>
                 <a:solidFill>
+                  <a:srgbClr val="003B4F"/>
+                </a:solidFill>
+                <a:latin typeface="Courier"/>
+              </a:rPr>
+              <a:t>leaf_df </a:t>
+            </a:r>
+            <a:r>
+              <a:rPr>
+                <a:solidFill>
+                  <a:srgbClr val="5E5E5E"/>
+                </a:solidFill>
+                <a:latin typeface="Courier"/>
+              </a:rPr>
+              <a:t>%&gt;%</a:t>
+            </a:r>
+            <a:br/>
+            <a:r>
+              <a:rPr>
+                <a:solidFill>
+                  <a:srgbClr val="003B4F"/>
+                </a:solidFill>
+                <a:latin typeface="Courier"/>
+              </a:rPr>
+              <a:t>  </a:t>
+            </a:r>
+            <a:r>
+              <a:rPr>
+                <a:solidFill>
                   <a:srgbClr val="4758AB"/>
                 </a:solidFill>
                 <a:latin typeface="Courier"/>
               </a:rPr>
-              <a:t>source</a:t>
+              <a:t>group_by</a:t>
+            </a:r>
+            <a:r>
+              <a:rPr>
+                <a:solidFill>
+                  <a:srgbClr val="003B4F"/>
+                </a:solidFill>
+                <a:latin typeface="Courier"/>
+              </a:rPr>
+              <a:t>(shade) </a:t>
+            </a:r>
+            <a:r>
+              <a:rPr>
+                <a:solidFill>
+                  <a:srgbClr val="5E5E5E"/>
+                </a:solidFill>
+                <a:latin typeface="Courier"/>
+              </a:rPr>
+              <a:t>%&gt;%</a:t>
+            </a:r>
+            <a:br/>
+            <a:r>
+              <a:rPr>
+                <a:solidFill>
+                  <a:srgbClr val="003B4F"/>
+                </a:solidFill>
+                <a:latin typeface="Courier"/>
+              </a:rPr>
+              <a:t>  </a:t>
+            </a:r>
+            <a:r>
+              <a:rPr>
+                <a:solidFill>
+                  <a:srgbClr val="4758AB"/>
+                </a:solidFill>
+                <a:latin typeface="Courier"/>
+              </a:rPr>
+              <a:t>summarize</a:t>
             </a:r>
             <a:r>
               <a:rPr>
@@ -5864,23 +5979,511 @@
               </a:rPr>
               <a:t>(</a:t>
             </a:r>
-            <a:r>
-              <a:rPr>
-                <a:solidFill>
-                  <a:srgbClr val="20794D"/>
-                </a:solidFill>
-                <a:latin typeface="Courier"/>
-              </a:rPr>
-              <a:t>"themes/summary_stats_function.R"</a:t>
-            </a:r>
-            <a:r>
-              <a:rPr>
-                <a:solidFill>
-                  <a:srgbClr val="003B4F"/>
-                </a:solidFill>
-                <a:latin typeface="Courier"/>
-              </a:rPr>
-              <a:t>)</a:t>
+            <a:br/>
+            <a:r>
+              <a:rPr>
+                <a:solidFill>
+                  <a:srgbClr val="003B4F"/>
+                </a:solidFill>
+                <a:latin typeface="Courier"/>
+              </a:rPr>
+              <a:t>    </a:t>
+            </a:r>
+            <a:r>
+              <a:rPr>
+                <a:solidFill>
+                  <a:srgbClr val="657422"/>
+                </a:solidFill>
+                <a:latin typeface="Courier"/>
+              </a:rPr>
+              <a:t>mean     =</a:t>
+            </a:r>
+            <a:r>
+              <a:rPr>
+                <a:solidFill>
+                  <a:srgbClr val="003B4F"/>
+                </a:solidFill>
+                <a:latin typeface="Courier"/>
+              </a:rPr>
+              <a:t> </a:t>
+            </a:r>
+            <a:r>
+              <a:rPr>
+                <a:solidFill>
+                  <a:srgbClr val="4758AB"/>
+                </a:solidFill>
+                <a:latin typeface="Courier"/>
+              </a:rPr>
+              <a:t>mean</a:t>
+            </a:r>
+            <a:r>
+              <a:rPr>
+                <a:solidFill>
+                  <a:srgbClr val="003B4F"/>
+                </a:solidFill>
+                <a:latin typeface="Courier"/>
+              </a:rPr>
+              <a:t>(mass_g, </a:t>
+            </a:r>
+            <a:r>
+              <a:rPr>
+                <a:solidFill>
+                  <a:srgbClr val="657422"/>
+                </a:solidFill>
+                <a:latin typeface="Courier"/>
+              </a:rPr>
+              <a:t>na.rm =</a:t>
+            </a:r>
+            <a:r>
+              <a:rPr>
+                <a:solidFill>
+                  <a:srgbClr val="003B4F"/>
+                </a:solidFill>
+                <a:latin typeface="Courier"/>
+              </a:rPr>
+              <a:t> </a:t>
+            </a:r>
+            <a:r>
+              <a:rPr>
+                <a:solidFill>
+                  <a:srgbClr val="8F5902"/>
+                </a:solidFill>
+                <a:latin typeface="Courier"/>
+              </a:rPr>
+              <a:t>TRUE</a:t>
+            </a:r>
+            <a:r>
+              <a:rPr>
+                <a:solidFill>
+                  <a:srgbClr val="003B4F"/>
+                </a:solidFill>
+                <a:latin typeface="Courier"/>
+              </a:rPr>
+              <a:t>),</a:t>
+            </a:r>
+            <a:br/>
+            <a:r>
+              <a:rPr>
+                <a:solidFill>
+                  <a:srgbClr val="003B4F"/>
+                </a:solidFill>
+                <a:latin typeface="Courier"/>
+              </a:rPr>
+              <a:t>    </a:t>
+            </a:r>
+            <a:r>
+              <a:rPr>
+                <a:solidFill>
+                  <a:srgbClr val="657422"/>
+                </a:solidFill>
+                <a:latin typeface="Courier"/>
+              </a:rPr>
+              <a:t>variance =</a:t>
+            </a:r>
+            <a:r>
+              <a:rPr>
+                <a:solidFill>
+                  <a:srgbClr val="003B4F"/>
+                </a:solidFill>
+                <a:latin typeface="Courier"/>
+              </a:rPr>
+              <a:t> </a:t>
+            </a:r>
+            <a:r>
+              <a:rPr>
+                <a:solidFill>
+                  <a:srgbClr val="4758AB"/>
+                </a:solidFill>
+                <a:latin typeface="Courier"/>
+              </a:rPr>
+              <a:t>var</a:t>
+            </a:r>
+            <a:r>
+              <a:rPr>
+                <a:solidFill>
+                  <a:srgbClr val="003B4F"/>
+                </a:solidFill>
+                <a:latin typeface="Courier"/>
+              </a:rPr>
+              <a:t>(mass_g, </a:t>
+            </a:r>
+            <a:r>
+              <a:rPr>
+                <a:solidFill>
+                  <a:srgbClr val="657422"/>
+                </a:solidFill>
+                <a:latin typeface="Courier"/>
+              </a:rPr>
+              <a:t>na.rm =</a:t>
+            </a:r>
+            <a:r>
+              <a:rPr>
+                <a:solidFill>
+                  <a:srgbClr val="003B4F"/>
+                </a:solidFill>
+                <a:latin typeface="Courier"/>
+              </a:rPr>
+              <a:t> </a:t>
+            </a:r>
+            <a:r>
+              <a:rPr>
+                <a:solidFill>
+                  <a:srgbClr val="8F5902"/>
+                </a:solidFill>
+                <a:latin typeface="Courier"/>
+              </a:rPr>
+              <a:t>TRUE</a:t>
+            </a:r>
+            <a:r>
+              <a:rPr>
+                <a:solidFill>
+                  <a:srgbClr val="003B4F"/>
+                </a:solidFill>
+                <a:latin typeface="Courier"/>
+              </a:rPr>
+              <a:t>),</a:t>
+            </a:r>
+            <a:br/>
+            <a:r>
+              <a:rPr>
+                <a:solidFill>
+                  <a:srgbClr val="003B4F"/>
+                </a:solidFill>
+                <a:latin typeface="Courier"/>
+              </a:rPr>
+              <a:t>    </a:t>
+            </a:r>
+            <a:r>
+              <a:rPr>
+                <a:solidFill>
+                  <a:srgbClr val="657422"/>
+                </a:solidFill>
+                <a:latin typeface="Courier"/>
+              </a:rPr>
+              <a:t>sd       =</a:t>
+            </a:r>
+            <a:r>
+              <a:rPr>
+                <a:solidFill>
+                  <a:srgbClr val="003B4F"/>
+                </a:solidFill>
+                <a:latin typeface="Courier"/>
+              </a:rPr>
+              <a:t> </a:t>
+            </a:r>
+            <a:r>
+              <a:rPr>
+                <a:solidFill>
+                  <a:srgbClr val="4758AB"/>
+                </a:solidFill>
+                <a:latin typeface="Courier"/>
+              </a:rPr>
+              <a:t>sd</a:t>
+            </a:r>
+            <a:r>
+              <a:rPr>
+                <a:solidFill>
+                  <a:srgbClr val="003B4F"/>
+                </a:solidFill>
+                <a:latin typeface="Courier"/>
+              </a:rPr>
+              <a:t>(mass_g, </a:t>
+            </a:r>
+            <a:r>
+              <a:rPr>
+                <a:solidFill>
+                  <a:srgbClr val="657422"/>
+                </a:solidFill>
+                <a:latin typeface="Courier"/>
+              </a:rPr>
+              <a:t>na.rm =</a:t>
+            </a:r>
+            <a:r>
+              <a:rPr>
+                <a:solidFill>
+                  <a:srgbClr val="003B4F"/>
+                </a:solidFill>
+                <a:latin typeface="Courier"/>
+              </a:rPr>
+              <a:t> </a:t>
+            </a:r>
+            <a:r>
+              <a:rPr>
+                <a:solidFill>
+                  <a:srgbClr val="8F5902"/>
+                </a:solidFill>
+                <a:latin typeface="Courier"/>
+              </a:rPr>
+              <a:t>TRUE</a:t>
+            </a:r>
+            <a:r>
+              <a:rPr>
+                <a:solidFill>
+                  <a:srgbClr val="003B4F"/>
+                </a:solidFill>
+                <a:latin typeface="Courier"/>
+              </a:rPr>
+              <a:t>),</a:t>
+            </a:r>
+            <a:br/>
+            <a:r>
+              <a:rPr>
+                <a:solidFill>
+                  <a:srgbClr val="003B4F"/>
+                </a:solidFill>
+                <a:latin typeface="Courier"/>
+              </a:rPr>
+              <a:t>    </a:t>
+            </a:r>
+            <a:r>
+              <a:rPr>
+                <a:solidFill>
+                  <a:srgbClr val="657422"/>
+                </a:solidFill>
+                <a:latin typeface="Courier"/>
+              </a:rPr>
+              <a:t>n        =</a:t>
+            </a:r>
+            <a:r>
+              <a:rPr>
+                <a:solidFill>
+                  <a:srgbClr val="003B4F"/>
+                </a:solidFill>
+                <a:latin typeface="Courier"/>
+              </a:rPr>
+              <a:t> </a:t>
+            </a:r>
+            <a:r>
+              <a:rPr>
+                <a:solidFill>
+                  <a:srgbClr val="4758AB"/>
+                </a:solidFill>
+                <a:latin typeface="Courier"/>
+              </a:rPr>
+              <a:t>sum</a:t>
+            </a:r>
+            <a:r>
+              <a:rPr>
+                <a:solidFill>
+                  <a:srgbClr val="003B4F"/>
+                </a:solidFill>
+                <a:latin typeface="Courier"/>
+              </a:rPr>
+              <a:t>(</a:t>
+            </a:r>
+            <a:r>
+              <a:rPr>
+                <a:solidFill>
+                  <a:srgbClr val="5E5E5E"/>
+                </a:solidFill>
+                <a:latin typeface="Courier"/>
+              </a:rPr>
+              <a:t>!</a:t>
+            </a:r>
+            <a:r>
+              <a:rPr>
+                <a:solidFill>
+                  <a:srgbClr val="4758AB"/>
+                </a:solidFill>
+                <a:latin typeface="Courier"/>
+              </a:rPr>
+              <a:t>is.na</a:t>
+            </a:r>
+            <a:r>
+              <a:rPr>
+                <a:solidFill>
+                  <a:srgbClr val="003B4F"/>
+                </a:solidFill>
+                <a:latin typeface="Courier"/>
+              </a:rPr>
+              <a:t>(mass_g)),</a:t>
+            </a:r>
+            <a:br/>
+            <a:r>
+              <a:rPr>
+                <a:solidFill>
+                  <a:srgbClr val="003B4F"/>
+                </a:solidFill>
+                <a:latin typeface="Courier"/>
+              </a:rPr>
+              <a:t>    </a:t>
+            </a:r>
+            <a:r>
+              <a:rPr>
+                <a:solidFill>
+                  <a:srgbClr val="657422"/>
+                </a:solidFill>
+                <a:latin typeface="Courier"/>
+              </a:rPr>
+              <a:t>se       =</a:t>
+            </a:r>
+            <a:r>
+              <a:rPr>
+                <a:solidFill>
+                  <a:srgbClr val="003B4F"/>
+                </a:solidFill>
+                <a:latin typeface="Courier"/>
+              </a:rPr>
+              <a:t> sd </a:t>
+            </a:r>
+            <a:r>
+              <a:rPr>
+                <a:solidFill>
+                  <a:srgbClr val="5E5E5E"/>
+                </a:solidFill>
+                <a:latin typeface="Courier"/>
+              </a:rPr>
+              <a:t>/</a:t>
+            </a:r>
+            <a:r>
+              <a:rPr>
+                <a:solidFill>
+                  <a:srgbClr val="003B4F"/>
+                </a:solidFill>
+                <a:latin typeface="Courier"/>
+              </a:rPr>
+              <a:t> </a:t>
+            </a:r>
+            <a:r>
+              <a:rPr>
+                <a:solidFill>
+                  <a:srgbClr val="4758AB"/>
+                </a:solidFill>
+                <a:latin typeface="Courier"/>
+              </a:rPr>
+              <a:t>sqrt</a:t>
+            </a:r>
+            <a:r>
+              <a:rPr>
+                <a:solidFill>
+                  <a:srgbClr val="003B4F"/>
+                </a:solidFill>
+                <a:latin typeface="Courier"/>
+              </a:rPr>
+              <a:t>(n)</a:t>
+            </a:r>
+            <a:br/>
+            <a:r>
+              <a:rPr>
+                <a:solidFill>
+                  <a:srgbClr val="003B4F"/>
+                </a:solidFill>
+                <a:latin typeface="Courier"/>
+              </a:rPr>
+              <a:t>  )</a:t>
+            </a:r>
+          </a:p>
+          <a:p>
+            <a:pPr lvl="0" indent="0">
+              <a:buNone/>
+            </a:pPr>
+            <a:r>
+              <a:rPr>
+                <a:latin typeface="Courier"/>
+              </a:rPr>
+              <a:t># A tibble: 2 × 6
+  shade  mean variance    sd     n     se
+  &lt;chr&gt; &lt;dbl&gt;    &lt;dbl&gt; &lt;dbl&gt; &lt;int&gt;  &lt;dbl&gt;
+1 shady 0.523   0.0219 0.148    28 0.0280
+2 sunny 0.505   0.0442 0.210    25 0.0421</a:t>
+            </a:r>
+          </a:p>
+        </p:txBody>
+      </p:sp>
+      <p:sp>
+        <p:nvSpPr>
+          <p:cNvPr id="4" name="Content Placeholder 3"/>
+          <p:cNvSpPr>
+            <a:spLocks noGrp="1"/>
+          </p:cNvSpPr>
+          <p:nvPr>
+            <p:ph idx="2" sz="half"/>
+          </p:nvPr>
+        </p:nvSpPr>
+        <p:spPr/>
+        <p:txBody>
+          <a:bodyPr/>
+          <a:lstStyle/>
+          <a:p>
+            <a:pPr lvl="0"/>
+            <a:r>
+              <a:rPr/>
+              <a:t>Exactly the same </a:t>
+            </a:r>
+            <a:r>
+              <a:rPr>
+                <a:latin typeface="Courier"/>
+              </a:rPr>
+              <a:t>summarize()</a:t>
+            </a:r>
+            <a:r>
+              <a:rPr/>
+              <a:t> — the only new line is </a:t>
+            </a:r>
+            <a:r>
+              <a:rPr>
+                <a:latin typeface="Courier"/>
+              </a:rPr>
+              <a:t>group_by(shade)</a:t>
+            </a:r>
+          </a:p>
+          <a:p>
+            <a:pPr lvl="0"/>
+            <a:r>
+              <a:rPr/>
+              <a:t>One row </a:t>
+            </a:r>
+            <a:r>
+              <a:rPr b="1"/>
+              <a:t>per group</a:t>
+            </a:r>
+            <a:r>
+              <a:rPr/>
+              <a:t> instead of one row overall</a:t>
+            </a:r>
+          </a:p>
+          <a:p>
+            <a:pPr lvl="0"/>
+            <a:r>
+              <a:rPr/>
+              <a:t>This is the workhorse pattern for the rest of the course</a:t>
+            </a:r>
+          </a:p>
+          <a:p>
+            <a:pPr lvl="0" indent="0" marL="1270000">
+              <a:buNone/>
+            </a:pPr>
+            <a:r>
+              <a:rPr sz="2000" b="1"/>
+              <a:t>Note</a:t>
+            </a:r>
+          </a:p>
+          <a:p>
+            <a:pPr lvl="0" indent="0" marL="1270000">
+              <a:buNone/>
+            </a:pPr>
+            <a:r>
+              <a:rPr sz="2000" b="1"/>
+              <a:t>✅ Key idea</a:t>
+            </a:r>
+          </a:p>
+          <a:p>
+            <a:pPr lvl="0" indent="0" marL="1270000">
+              <a:buNone/>
+            </a:pPr>
+            <a:r>
+              <a:rPr sz="2000"/>
+              <a:t>Running this once for sunny and again for shady is exactly the repetition </a:t>
+            </a:r>
+            <a:r>
+              <a:rPr sz="2000">
+                <a:latin typeface="Courier"/>
+              </a:rPr>
+              <a:t>group_by()</a:t>
+            </a:r>
+            <a:r>
+              <a:rPr sz="2000"/>
+              <a:t> exists to remove.</a:t>
             </a:r>
           </a:p>
         </p:txBody>
@@ -5890,7 +6493,7 @@
 </p:sld>
 </file>
 
-<file path=ppt/slides/slide16.xml><?xml version="1.0" encoding="utf-8"?>
+<file path=ppt/slides/slide18.xml><?xml version="1.0" encoding="utf-8"?>
 <p:sld xmlns:a="http://schemas.openxmlformats.org/drawingml/2006/main" xmlns:r="http://schemas.openxmlformats.org/officeDocument/2006/relationships" xmlns:p="http://schemas.openxmlformats.org/presentationml/2006/main">
   <p:cSld>
     <p:spTree>
@@ -5935,17 +6538,7 @@
             </a:pPr>
             <a:r>
               <a:rPr/>
-              <a:t>One Group at a Time — </a:t>
-            </a:r>
-            <a:r>
-              <a:rPr>
-                <a:latin typeface="Courier"/>
-              </a:rPr>
-              <a:t>filter()</a:t>
-            </a:r>
-            <a:r>
-              <a:rPr/>
-              <a:t> + </a:t>
+              <a:t>Now Package It — </a:t>
             </a:r>
             <a:r>
               <a:rPr>
@@ -5977,11 +6570,48 @@
             <a:r>
               <a:rPr>
                 <a:solidFill>
+                  <a:srgbClr val="003B4F"/>
+                </a:solidFill>
+                <a:latin typeface="Courier"/>
+              </a:rPr>
+              <a:t>summary_stats &lt;- </a:t>
+            </a:r>
+            <a:r>
+              <a:rPr b="1">
+                <a:solidFill>
+                  <a:srgbClr val="003B4F"/>
+                </a:solidFill>
+                <a:latin typeface="Courier"/>
+              </a:rPr>
+              <a:t>function</a:t>
+            </a:r>
+            <a:r>
+              <a:rPr>
+                <a:solidFill>
+                  <a:srgbClr val="003B4F"/>
+                </a:solidFill>
+                <a:latin typeface="Courier"/>
+              </a:rPr>
+              <a:t>(data, variable) {</a:t>
+            </a:r>
+            <a:br/>
+            <a:r>
+              <a:rPr>
+                <a:solidFill>
+                  <a:srgbClr val="003B4F"/>
+                </a:solidFill>
+                <a:latin typeface="Courier"/>
+              </a:rPr>
+              <a:t>  data </a:t>
+            </a:r>
+            <a:r>
+              <a:rPr>
+                <a:solidFill>
                   <a:srgbClr val="5E5E5E"/>
                 </a:solidFill>
                 <a:latin typeface="Courier"/>
               </a:rPr>
-              <a:t># Filter to one side, then hand it straight to the function</a:t>
+              <a:t>%&gt;%</a:t>
             </a:r>
             <a:br/>
             <a:r>
@@ -5991,7 +6621,71 @@
                 </a:solidFill>
                 <a:latin typeface="Courier"/>
               </a:rPr>
-              <a:t>leaf_df </a:t>
+              <a:t>    </a:t>
+            </a:r>
+            <a:r>
+              <a:rPr>
+                <a:solidFill>
+                  <a:srgbClr val="4758AB"/>
+                </a:solidFill>
+                <a:latin typeface="Courier"/>
+              </a:rPr>
+              <a:t>summarize</a:t>
+            </a:r>
+            <a:r>
+              <a:rPr>
+                <a:solidFill>
+                  <a:srgbClr val="003B4F"/>
+                </a:solidFill>
+                <a:latin typeface="Courier"/>
+              </a:rPr>
+              <a:t>(</a:t>
+            </a:r>
+            <a:br/>
+            <a:r>
+              <a:rPr>
+                <a:solidFill>
+                  <a:srgbClr val="003B4F"/>
+                </a:solidFill>
+                <a:latin typeface="Courier"/>
+              </a:rPr>
+              <a:t>      </a:t>
+            </a:r>
+            <a:r>
+              <a:rPr>
+                <a:solidFill>
+                  <a:srgbClr val="657422"/>
+                </a:solidFill>
+                <a:latin typeface="Courier"/>
+              </a:rPr>
+              <a:t>n        =</a:t>
+            </a:r>
+            <a:r>
+              <a:rPr>
+                <a:solidFill>
+                  <a:srgbClr val="003B4F"/>
+                </a:solidFill>
+                <a:latin typeface="Courier"/>
+              </a:rPr>
+              <a:t> </a:t>
+            </a:r>
+            <a:r>
+              <a:rPr>
+                <a:solidFill>
+                  <a:srgbClr val="4758AB"/>
+                </a:solidFill>
+                <a:latin typeface="Courier"/>
+              </a:rPr>
+              <a:t>sum</a:t>
+            </a:r>
+            <a:r>
+              <a:rPr>
+                <a:solidFill>
+                  <a:srgbClr val="003B4F"/>
+                </a:solidFill>
+                <a:latin typeface="Courier"/>
+              </a:rPr>
+              <a:t>(</a:t>
             </a:r>
             <a:r>
               <a:rPr>
@@ -6000,7 +6694,25 @@
                 </a:solidFill>
                 <a:latin typeface="Courier"/>
               </a:rPr>
-              <a:t>%&gt;%</a:t>
+              <a:t>!</a:t>
+            </a:r>
+            <a:r>
+              <a:rPr>
+                <a:solidFill>
+                  <a:srgbClr val="4758AB"/>
+                </a:solidFill>
+                <a:latin typeface="Courier"/>
+              </a:rPr>
+              <a:t>is.na</a:t>
+            </a:r>
+            <a:r>
+              <a:rPr>
+                <a:solidFill>
+                  <a:srgbClr val="003B4F"/>
+                </a:solidFill>
+                <a:latin typeface="Courier"/>
+              </a:rPr>
+              <a:t>({{ variable }})),</a:t>
             </a:r>
             <a:br/>
             <a:r>
@@ -6010,7 +6722,25 @@
                 </a:solidFill>
                 <a:latin typeface="Courier"/>
               </a:rPr>
-              <a:t>  </a:t>
+              <a:t>      </a:t>
+            </a:r>
+            <a:r>
+              <a:rPr>
+                <a:solidFill>
+                  <a:srgbClr val="657422"/>
+                </a:solidFill>
+                <a:latin typeface="Courier"/>
+              </a:rPr>
+              <a:t>mean     =</a:t>
+            </a:r>
+            <a:r>
+              <a:rPr>
+                <a:solidFill>
+                  <a:srgbClr val="003B4F"/>
+                </a:solidFill>
+                <a:latin typeface="Courier"/>
+              </a:rPr>
+              <a:t> </a:t>
             </a:r>
             <a:r>
               <a:rPr>
@@ -6019,16 +6749,244 @@
                 </a:solidFill>
                 <a:latin typeface="Courier"/>
               </a:rPr>
-              <a:t>filter</a:t>
-            </a:r>
-            <a:r>
-              <a:rPr>
-                <a:solidFill>
-                  <a:srgbClr val="003B4F"/>
-                </a:solidFill>
-                <a:latin typeface="Courier"/>
-              </a:rPr>
-              <a:t>(shade </a:t>
+              <a:t>mean</a:t>
+            </a:r>
+            <a:r>
+              <a:rPr>
+                <a:solidFill>
+                  <a:srgbClr val="003B4F"/>
+                </a:solidFill>
+                <a:latin typeface="Courier"/>
+              </a:rPr>
+              <a:t>({{ variable }}, </a:t>
+            </a:r>
+            <a:r>
+              <a:rPr>
+                <a:solidFill>
+                  <a:srgbClr val="657422"/>
+                </a:solidFill>
+                <a:latin typeface="Courier"/>
+              </a:rPr>
+              <a:t>na.rm =</a:t>
+            </a:r>
+            <a:r>
+              <a:rPr>
+                <a:solidFill>
+                  <a:srgbClr val="003B4F"/>
+                </a:solidFill>
+                <a:latin typeface="Courier"/>
+              </a:rPr>
+              <a:t> </a:t>
+            </a:r>
+            <a:r>
+              <a:rPr>
+                <a:solidFill>
+                  <a:srgbClr val="8F5902"/>
+                </a:solidFill>
+                <a:latin typeface="Courier"/>
+              </a:rPr>
+              <a:t>TRUE</a:t>
+            </a:r>
+            <a:r>
+              <a:rPr>
+                <a:solidFill>
+                  <a:srgbClr val="003B4F"/>
+                </a:solidFill>
+                <a:latin typeface="Courier"/>
+              </a:rPr>
+              <a:t>),</a:t>
+            </a:r>
+            <a:br/>
+            <a:r>
+              <a:rPr>
+                <a:solidFill>
+                  <a:srgbClr val="003B4F"/>
+                </a:solidFill>
+                <a:latin typeface="Courier"/>
+              </a:rPr>
+              <a:t>      </a:t>
+            </a:r>
+            <a:r>
+              <a:rPr>
+                <a:solidFill>
+                  <a:srgbClr val="657422"/>
+                </a:solidFill>
+                <a:latin typeface="Courier"/>
+              </a:rPr>
+              <a:t>variance =</a:t>
+            </a:r>
+            <a:r>
+              <a:rPr>
+                <a:solidFill>
+                  <a:srgbClr val="003B4F"/>
+                </a:solidFill>
+                <a:latin typeface="Courier"/>
+              </a:rPr>
+              <a:t> </a:t>
+            </a:r>
+            <a:r>
+              <a:rPr>
+                <a:solidFill>
+                  <a:srgbClr val="4758AB"/>
+                </a:solidFill>
+                <a:latin typeface="Courier"/>
+              </a:rPr>
+              <a:t>var</a:t>
+            </a:r>
+            <a:r>
+              <a:rPr>
+                <a:solidFill>
+                  <a:srgbClr val="003B4F"/>
+                </a:solidFill>
+                <a:latin typeface="Courier"/>
+              </a:rPr>
+              <a:t>({{ variable }}, </a:t>
+            </a:r>
+            <a:r>
+              <a:rPr>
+                <a:solidFill>
+                  <a:srgbClr val="657422"/>
+                </a:solidFill>
+                <a:latin typeface="Courier"/>
+              </a:rPr>
+              <a:t>na.rm =</a:t>
+            </a:r>
+            <a:r>
+              <a:rPr>
+                <a:solidFill>
+                  <a:srgbClr val="003B4F"/>
+                </a:solidFill>
+                <a:latin typeface="Courier"/>
+              </a:rPr>
+              <a:t> </a:t>
+            </a:r>
+            <a:r>
+              <a:rPr>
+                <a:solidFill>
+                  <a:srgbClr val="8F5902"/>
+                </a:solidFill>
+                <a:latin typeface="Courier"/>
+              </a:rPr>
+              <a:t>TRUE</a:t>
+            </a:r>
+            <a:r>
+              <a:rPr>
+                <a:solidFill>
+                  <a:srgbClr val="003B4F"/>
+                </a:solidFill>
+                <a:latin typeface="Courier"/>
+              </a:rPr>
+              <a:t>),</a:t>
+            </a:r>
+            <a:br/>
+            <a:r>
+              <a:rPr>
+                <a:solidFill>
+                  <a:srgbClr val="003B4F"/>
+                </a:solidFill>
+                <a:latin typeface="Courier"/>
+              </a:rPr>
+              <a:t>      </a:t>
+            </a:r>
+            <a:r>
+              <a:rPr>
+                <a:solidFill>
+                  <a:srgbClr val="657422"/>
+                </a:solidFill>
+                <a:latin typeface="Courier"/>
+              </a:rPr>
+              <a:t>sd       =</a:t>
+            </a:r>
+            <a:r>
+              <a:rPr>
+                <a:solidFill>
+                  <a:srgbClr val="003B4F"/>
+                </a:solidFill>
+                <a:latin typeface="Courier"/>
+              </a:rPr>
+              <a:t> </a:t>
+            </a:r>
+            <a:r>
+              <a:rPr>
+                <a:solidFill>
+                  <a:srgbClr val="4758AB"/>
+                </a:solidFill>
+                <a:latin typeface="Courier"/>
+              </a:rPr>
+              <a:t>sd</a:t>
+            </a:r>
+            <a:r>
+              <a:rPr>
+                <a:solidFill>
+                  <a:srgbClr val="003B4F"/>
+                </a:solidFill>
+                <a:latin typeface="Courier"/>
+              </a:rPr>
+              <a:t>({{ variable }}, </a:t>
+            </a:r>
+            <a:r>
+              <a:rPr>
+                <a:solidFill>
+                  <a:srgbClr val="657422"/>
+                </a:solidFill>
+                <a:latin typeface="Courier"/>
+              </a:rPr>
+              <a:t>na.rm =</a:t>
+            </a:r>
+            <a:r>
+              <a:rPr>
+                <a:solidFill>
+                  <a:srgbClr val="003B4F"/>
+                </a:solidFill>
+                <a:latin typeface="Courier"/>
+              </a:rPr>
+              <a:t> </a:t>
+            </a:r>
+            <a:r>
+              <a:rPr>
+                <a:solidFill>
+                  <a:srgbClr val="8F5902"/>
+                </a:solidFill>
+                <a:latin typeface="Courier"/>
+              </a:rPr>
+              <a:t>TRUE</a:t>
+            </a:r>
+            <a:r>
+              <a:rPr>
+                <a:solidFill>
+                  <a:srgbClr val="003B4F"/>
+                </a:solidFill>
+                <a:latin typeface="Courier"/>
+              </a:rPr>
+              <a:t>),</a:t>
+            </a:r>
+            <a:br/>
+            <a:r>
+              <a:rPr>
+                <a:solidFill>
+                  <a:srgbClr val="003B4F"/>
+                </a:solidFill>
+                <a:latin typeface="Courier"/>
+              </a:rPr>
+              <a:t>      </a:t>
+            </a:r>
+            <a:r>
+              <a:rPr>
+                <a:solidFill>
+                  <a:srgbClr val="657422"/>
+                </a:solidFill>
+                <a:latin typeface="Courier"/>
+              </a:rPr>
+              <a:t>se       =</a:t>
+            </a:r>
+            <a:r>
+              <a:rPr>
+                <a:solidFill>
+                  <a:srgbClr val="003B4F"/>
+                </a:solidFill>
+                <a:latin typeface="Courier"/>
+              </a:rPr>
+              <a:t> sd </a:t>
             </a:r>
             <a:r>
               <a:rPr>
@@ -6037,7 +6995,7 @@
                 </a:solidFill>
                 <a:latin typeface="Courier"/>
               </a:rPr>
-              <a:t>==</a:t>
+              <a:t>/</a:t>
             </a:r>
             <a:r>
               <a:rPr>
@@ -6051,29 +7009,365 @@
             <a:r>
               <a:rPr>
                 <a:solidFill>
+                  <a:srgbClr val="4758AB"/>
+                </a:solidFill>
+                <a:latin typeface="Courier"/>
+              </a:rPr>
+              <a:t>sqrt</a:t>
+            </a:r>
+            <a:r>
+              <a:rPr>
+                <a:solidFill>
+                  <a:srgbClr val="003B4F"/>
+                </a:solidFill>
+                <a:latin typeface="Courier"/>
+              </a:rPr>
+              <a:t>(n),</a:t>
+            </a:r>
+            <a:br/>
+            <a:r>
+              <a:rPr>
+                <a:solidFill>
+                  <a:srgbClr val="003B4F"/>
+                </a:solidFill>
+                <a:latin typeface="Courier"/>
+              </a:rPr>
+              <a:t>      </a:t>
+            </a:r>
+            <a:r>
+              <a:rPr>
+                <a:solidFill>
+                  <a:srgbClr val="657422"/>
+                </a:solidFill>
+                <a:latin typeface="Courier"/>
+              </a:rPr>
+              <a:t>ci_lower =</a:t>
+            </a:r>
+            <a:r>
+              <a:rPr>
+                <a:solidFill>
+                  <a:srgbClr val="003B4F"/>
+                </a:solidFill>
+                <a:latin typeface="Courier"/>
+              </a:rPr>
+              <a:t> mean </a:t>
+            </a:r>
+            <a:r>
+              <a:rPr>
+                <a:solidFill>
+                  <a:srgbClr val="5E5E5E"/>
+                </a:solidFill>
+                <a:latin typeface="Courier"/>
+              </a:rPr>
+              <a:t>-</a:t>
+            </a:r>
+            <a:r>
+              <a:rPr>
+                <a:solidFill>
+                  <a:srgbClr val="003B4F"/>
+                </a:solidFill>
+                <a:latin typeface="Courier"/>
+              </a:rPr>
+              <a:t> </a:t>
+            </a:r>
+            <a:r>
+              <a:rPr>
+                <a:solidFill>
+                  <a:srgbClr val="4758AB"/>
+                </a:solidFill>
+                <a:latin typeface="Courier"/>
+              </a:rPr>
+              <a:t>qt</a:t>
+            </a:r>
+            <a:r>
+              <a:rPr>
+                <a:solidFill>
+                  <a:srgbClr val="003B4F"/>
+                </a:solidFill>
+                <a:latin typeface="Courier"/>
+              </a:rPr>
+              <a:t>(</a:t>
+            </a:r>
+            <a:r>
+              <a:rPr>
+                <a:solidFill>
+                  <a:srgbClr val="AD0000"/>
+                </a:solidFill>
+                <a:latin typeface="Courier"/>
+              </a:rPr>
+              <a:t>0.975</a:t>
+            </a:r>
+            <a:r>
+              <a:rPr>
+                <a:solidFill>
+                  <a:srgbClr val="003B4F"/>
+                </a:solidFill>
+                <a:latin typeface="Courier"/>
+              </a:rPr>
+              <a:t>, </a:t>
+            </a:r>
+            <a:r>
+              <a:rPr>
+                <a:solidFill>
+                  <a:srgbClr val="657422"/>
+                </a:solidFill>
+                <a:latin typeface="Courier"/>
+              </a:rPr>
+              <a:t>df =</a:t>
+            </a:r>
+            <a:r>
+              <a:rPr>
+                <a:solidFill>
+                  <a:srgbClr val="003B4F"/>
+                </a:solidFill>
+                <a:latin typeface="Courier"/>
+              </a:rPr>
+              <a:t> n </a:t>
+            </a:r>
+            <a:r>
+              <a:rPr>
+                <a:solidFill>
+                  <a:srgbClr val="5E5E5E"/>
+                </a:solidFill>
+                <a:latin typeface="Courier"/>
+              </a:rPr>
+              <a:t>-</a:t>
+            </a:r>
+            <a:r>
+              <a:rPr>
+                <a:solidFill>
+                  <a:srgbClr val="003B4F"/>
+                </a:solidFill>
+                <a:latin typeface="Courier"/>
+              </a:rPr>
+              <a:t> </a:t>
+            </a:r>
+            <a:r>
+              <a:rPr>
+                <a:solidFill>
+                  <a:srgbClr val="AD0000"/>
+                </a:solidFill>
+                <a:latin typeface="Courier"/>
+              </a:rPr>
+              <a:t>1</a:t>
+            </a:r>
+            <a:r>
+              <a:rPr>
+                <a:solidFill>
+                  <a:srgbClr val="003B4F"/>
+                </a:solidFill>
+                <a:latin typeface="Courier"/>
+              </a:rPr>
+              <a:t>) </a:t>
+            </a:r>
+            <a:r>
+              <a:rPr>
+                <a:solidFill>
+                  <a:srgbClr val="5E5E5E"/>
+                </a:solidFill>
+                <a:latin typeface="Courier"/>
+              </a:rPr>
+              <a:t>*</a:t>
+            </a:r>
+            <a:r>
+              <a:rPr>
+                <a:solidFill>
+                  <a:srgbClr val="003B4F"/>
+                </a:solidFill>
+                <a:latin typeface="Courier"/>
+              </a:rPr>
+              <a:t> se,</a:t>
+            </a:r>
+            <a:br/>
+            <a:r>
+              <a:rPr>
+                <a:solidFill>
+                  <a:srgbClr val="003B4F"/>
+                </a:solidFill>
+                <a:latin typeface="Courier"/>
+              </a:rPr>
+              <a:t>      </a:t>
+            </a:r>
+            <a:r>
+              <a:rPr>
+                <a:solidFill>
+                  <a:srgbClr val="657422"/>
+                </a:solidFill>
+                <a:latin typeface="Courier"/>
+              </a:rPr>
+              <a:t>ci_upper =</a:t>
+            </a:r>
+            <a:r>
+              <a:rPr>
+                <a:solidFill>
+                  <a:srgbClr val="003B4F"/>
+                </a:solidFill>
+                <a:latin typeface="Courier"/>
+              </a:rPr>
+              <a:t> mean </a:t>
+            </a:r>
+            <a:r>
+              <a:rPr>
+                <a:solidFill>
+                  <a:srgbClr val="5E5E5E"/>
+                </a:solidFill>
+                <a:latin typeface="Courier"/>
+              </a:rPr>
+              <a:t>+</a:t>
+            </a:r>
+            <a:r>
+              <a:rPr>
+                <a:solidFill>
+                  <a:srgbClr val="003B4F"/>
+                </a:solidFill>
+                <a:latin typeface="Courier"/>
+              </a:rPr>
+              <a:t> </a:t>
+            </a:r>
+            <a:r>
+              <a:rPr>
+                <a:solidFill>
+                  <a:srgbClr val="4758AB"/>
+                </a:solidFill>
+                <a:latin typeface="Courier"/>
+              </a:rPr>
+              <a:t>qt</a:t>
+            </a:r>
+            <a:r>
+              <a:rPr>
+                <a:solidFill>
+                  <a:srgbClr val="003B4F"/>
+                </a:solidFill>
+                <a:latin typeface="Courier"/>
+              </a:rPr>
+              <a:t>(</a:t>
+            </a:r>
+            <a:r>
+              <a:rPr>
+                <a:solidFill>
+                  <a:srgbClr val="AD0000"/>
+                </a:solidFill>
+                <a:latin typeface="Courier"/>
+              </a:rPr>
+              <a:t>0.975</a:t>
+            </a:r>
+            <a:r>
+              <a:rPr>
+                <a:solidFill>
+                  <a:srgbClr val="003B4F"/>
+                </a:solidFill>
+                <a:latin typeface="Courier"/>
+              </a:rPr>
+              <a:t>, </a:t>
+            </a:r>
+            <a:r>
+              <a:rPr>
+                <a:solidFill>
+                  <a:srgbClr val="657422"/>
+                </a:solidFill>
+                <a:latin typeface="Courier"/>
+              </a:rPr>
+              <a:t>df =</a:t>
+            </a:r>
+            <a:r>
+              <a:rPr>
+                <a:solidFill>
+                  <a:srgbClr val="003B4F"/>
+                </a:solidFill>
+                <a:latin typeface="Courier"/>
+              </a:rPr>
+              <a:t> n </a:t>
+            </a:r>
+            <a:r>
+              <a:rPr>
+                <a:solidFill>
+                  <a:srgbClr val="5E5E5E"/>
+                </a:solidFill>
+                <a:latin typeface="Courier"/>
+              </a:rPr>
+              <a:t>-</a:t>
+            </a:r>
+            <a:r>
+              <a:rPr>
+                <a:solidFill>
+                  <a:srgbClr val="003B4F"/>
+                </a:solidFill>
+                <a:latin typeface="Courier"/>
+              </a:rPr>
+              <a:t> </a:t>
+            </a:r>
+            <a:r>
+              <a:rPr>
+                <a:solidFill>
+                  <a:srgbClr val="AD0000"/>
+                </a:solidFill>
+                <a:latin typeface="Courier"/>
+              </a:rPr>
+              <a:t>1</a:t>
+            </a:r>
+            <a:r>
+              <a:rPr>
+                <a:solidFill>
+                  <a:srgbClr val="003B4F"/>
+                </a:solidFill>
+                <a:latin typeface="Courier"/>
+              </a:rPr>
+              <a:t>) </a:t>
+            </a:r>
+            <a:r>
+              <a:rPr>
+                <a:solidFill>
+                  <a:srgbClr val="5E5E5E"/>
+                </a:solidFill>
+                <a:latin typeface="Courier"/>
+              </a:rPr>
+              <a:t>*</a:t>
+            </a:r>
+            <a:r>
+              <a:rPr>
+                <a:solidFill>
+                  <a:srgbClr val="003B4F"/>
+                </a:solidFill>
+                <a:latin typeface="Courier"/>
+              </a:rPr>
+              <a:t> se,</a:t>
+            </a:r>
+            <a:br/>
+            <a:r>
+              <a:rPr>
+                <a:solidFill>
+                  <a:srgbClr val="003B4F"/>
+                </a:solidFill>
+                <a:latin typeface="Courier"/>
+              </a:rPr>
+              <a:t>      </a:t>
+            </a:r>
+            <a:r>
+              <a:rPr>
+                <a:solidFill>
+                  <a:srgbClr val="657422"/>
+                </a:solidFill>
+                <a:latin typeface="Courier"/>
+              </a:rPr>
+              <a:t>.groups  =</a:t>
+            </a:r>
+            <a:r>
+              <a:rPr>
+                <a:solidFill>
+                  <a:srgbClr val="003B4F"/>
+                </a:solidFill>
+                <a:latin typeface="Courier"/>
+              </a:rPr>
+              <a:t> </a:t>
+            </a:r>
+            <a:r>
+              <a:rPr>
+                <a:solidFill>
                   <a:srgbClr val="20794D"/>
                 </a:solidFill>
                 <a:latin typeface="Courier"/>
               </a:rPr>
-              <a:t>"sunny"</a:t>
-            </a:r>
-            <a:r>
-              <a:rPr>
-                <a:solidFill>
-                  <a:srgbClr val="003B4F"/>
-                </a:solidFill>
-                <a:latin typeface="Courier"/>
-              </a:rPr>
-              <a:t>) </a:t>
-            </a:r>
-            <a:r>
-              <a:rPr>
-                <a:solidFill>
-                  <a:srgbClr val="5E5E5E"/>
-                </a:solidFill>
-                <a:latin typeface="Courier"/>
-              </a:rPr>
-              <a:t>%&gt;%</a:t>
+              <a:t>"drop"</a:t>
             </a:r>
             <a:br/>
             <a:r>
@@ -6083,39 +7377,17 @@
                 </a:solidFill>
                 <a:latin typeface="Courier"/>
               </a:rPr>
-              <a:t>  </a:t>
-            </a:r>
-            <a:r>
-              <a:rPr>
-                <a:solidFill>
-                  <a:srgbClr val="4758AB"/>
-                </a:solidFill>
-                <a:latin typeface="Courier"/>
-              </a:rPr>
-              <a:t>summary_stats</a:t>
-            </a:r>
-            <a:r>
-              <a:rPr>
-                <a:solidFill>
-                  <a:srgbClr val="003B4F"/>
-                </a:solidFill>
-                <a:latin typeface="Courier"/>
-              </a:rPr>
-              <a:t>(mass_g)</a:t>
-            </a:r>
-          </a:p>
-          <a:p>
-            <a:pPr lvl="0" indent="0">
-              <a:buNone/>
-            </a:pPr>
-            <a:r>
-              <a:rPr>
-                <a:latin typeface="Courier"/>
-              </a:rPr>
-              <a:t># A tibble: 1 × 7
-      n  mean variance    sd    se ci_lower ci_upper
-  &lt;int&gt; &lt;dbl&gt;    &lt;dbl&gt; &lt;dbl&gt; &lt;dbl&gt;    &lt;dbl&gt;    &lt;dbl&gt;
-1    25  0.51     0.04  0.21  0.04     0.42     0.59</a:t>
+              <a:t>    )</a:t>
+            </a:r>
+            <a:br/>
+            <a:r>
+              <a:rPr>
+                <a:solidFill>
+                  <a:srgbClr val="003B4F"/>
+                </a:solidFill>
+                <a:latin typeface="Courier"/>
+              </a:rPr>
+              <a:t>}</a:t>
             </a:r>
           </a:p>
         </p:txBody>
@@ -6137,319 +7409,122 @@
           <a:p>
             <a:pPr lvl="0"/>
             <a:r>
-              <a:rPr>
-                <a:latin typeface="Courier"/>
-              </a:rPr>
-              <a:t>filter(shade == "sunny")</a:t>
-            </a:r>
-            <a:r>
-              <a:rPr/>
-              <a:t> — keeps only sunny rows</a:t>
+              <a:rPr b="1"/>
+              <a:t>It is the same </a:t>
+            </a:r>
+            <a:r>
+              <a:rPr b="1">
+                <a:latin typeface="Courier"/>
+              </a:rPr>
+              <a:t>summarize()</a:t>
+            </a:r>
+            <a:r>
+              <a:rPr b="1"/>
+              <a:t> you just wrote by hand</a:t>
+            </a:r>
+            <a:r>
+              <a:rPr/>
+              <a:t> — wrapped in </a:t>
+            </a:r>
+            <a:r>
+              <a:rPr>
+                <a:latin typeface="Courier"/>
+              </a:rPr>
+              <a:t>function()</a:t>
+            </a:r>
+            <a:r>
+              <a:rPr/>
+              <a:t> so you type it once, not once per variable</a:t>
             </a:r>
           </a:p>
           <a:p>
             <a:pPr lvl="0"/>
             <a:r>
               <a:rPr/>
-              <a:t>Pipe the filtered data straight into </a:t>
-            </a:r>
-            <a:r>
-              <a:rPr>
-                <a:latin typeface="Courier"/>
-              </a:rPr>
-              <a:t>summary_stats(mass_g)</a:t>
-            </a:r>
-            <a:r>
-              <a:rPr/>
-              <a:t> — no </a:t>
-            </a:r>
-            <a:r>
-              <a:rPr>
-                <a:latin typeface="Courier"/>
-              </a:rPr>
-              <a:t>pull()</a:t>
-            </a:r>
-            <a:r>
-              <a:rPr/>
-              <a:t>, no vector, no hand-written math</a:t>
+              <a:t>Plus a 95% confidence interval for the mean, for free</a:t>
             </a:r>
           </a:p>
           <a:p>
             <a:pPr lvl="0"/>
             <a:r>
-              <a:rPr/>
-              <a:t>Swap </a:t>
-            </a:r>
-            <a:r>
-              <a:rPr>
-                <a:latin typeface="Courier"/>
-              </a:rPr>
-              <a:t>"sunny"</a:t>
-            </a:r>
-            <a:r>
-              <a:rPr/>
-              <a:t> for </a:t>
-            </a:r>
-            <a:r>
-              <a:rPr>
-                <a:latin typeface="Courier"/>
-              </a:rPr>
-              <a:t>"shady"</a:t>
-            </a:r>
-            <a:r>
-              <a:rPr/>
-              <a:t> to get the other side</a:t>
-            </a:r>
-          </a:p>
-          <a:p>
-            <a:pPr lvl="0" indent="0" marL="0">
-              <a:buNone/>
-            </a:pPr>
-            <a:r>
-              <a:rPr/>
-              <a:t>📖 </a:t>
+              <a:rPr>
+                <a:latin typeface="Courier"/>
+              </a:rPr>
+              <a:t>{ variable }</a:t>
+            </a:r>
+            <a:r>
+              <a:rPr/>
+              <a:t> lets you pass a bare column name in, like </a:t>
+            </a:r>
+            <a:r>
+              <a:rPr>
+                <a:latin typeface="Courier"/>
+              </a:rPr>
+              <a:t>mass_g</a:t>
+            </a:r>
+          </a:p>
+          <a:p>
+            <a:pPr lvl="0"/>
+            <a:r>
+              <a:rPr/>
+              <a:t>Works on </a:t>
+            </a:r>
+            <a:r>
+              <a:rPr b="1"/>
+              <a:t>one group</a:t>
+            </a:r>
+            <a:r>
+              <a:rPr/>
+              <a:t> or, if the data are already </a:t>
+            </a:r>
+            <a:r>
+              <a:rPr>
+                <a:latin typeface="Courier"/>
+              </a:rPr>
+              <a:t>group_by()</a:t>
+            </a:r>
+            <a:r>
+              <a:rPr/>
+              <a:t>-ed, </a:t>
+            </a:r>
+            <a:r>
+              <a:rPr b="1"/>
+              <a:t>every group at once</a:t>
+            </a:r>
+          </a:p>
+          <a:p>
+            <a:pPr lvl="0"/>
+            <a:r>
+              <a:rPr/>
+              <a:t>Source: </a:t>
             </a:r>
             <a:r>
               <a:rPr>
                 <a:hlinkClick r:id="rId2"/>
-              </a:rPr>
-              <a:t>R4DS §3 — Data Transformation</a:t>
-            </a:r>
-          </a:p>
-        </p:txBody>
-      </p:sp>
-    </p:spTree>
-  </p:cSld>
-</p:sld>
-</file>
-
-<file path=ppt/slides/slide17.xml><?xml version="1.0" encoding="utf-8"?>
-<p:sld xmlns:a="http://schemas.openxmlformats.org/drawingml/2006/main" xmlns:r="http://schemas.openxmlformats.org/officeDocument/2006/relationships" xmlns:p="http://schemas.openxmlformats.org/presentationml/2006/main">
-  <p:cSld>
-    <p:spTree>
-      <p:nvGrpSpPr>
-        <p:cNvPr id="1" name=""/>
-        <p:cNvGrpSpPr/>
-        <p:nvPr/>
-      </p:nvGrpSpPr>
-      <p:grpSpPr>
-        <a:xfrm>
-          <a:off x="0" y="0"/>
-          <a:ext cx="0" cy="0"/>
-          <a:chOff x="0" y="0"/>
-          <a:chExt cx="0" cy="0"/>
-        </a:xfrm>
-      </p:grpSpPr>
-      <p:sp>
-        <p:nvSpPr>
-          <p:cNvPr id="2" name="Title 1"/>
-          <p:cNvSpPr>
-            <a:spLocks noGrp="1"/>
-          </p:cNvSpPr>
-          <p:nvPr>
-            <p:ph type="title"/>
-          </p:nvPr>
-        </p:nvSpPr>
-        <p:spPr>
-          <a:xfrm>
-            <a:off x="0" y="0"/>
-            <a:ext cx="9144000" cy="582780"/>
-          </a:xfrm>
-        </p:spPr>
-        <p:txBody>
-          <a:bodyPr/>
-          <a:lstStyle/>
-          <a:p>
-            <a:pPr lvl="0" indent="0" marL="0">
-              <a:buNone/>
-            </a:pPr>
-            <a:r>
-              <a:rPr/>
-              <a:t>🛑 Pause — Do Activity Parts 1–3 Now</a:t>
-            </a:r>
-          </a:p>
-        </p:txBody>
-      </p:sp>
-      <p:sp>
-        <p:nvSpPr>
-          <p:cNvPr id="3" name="Content Placeholder 2"/>
-          <p:cNvSpPr>
-            <a:spLocks noGrp="1"/>
-          </p:cNvSpPr>
-          <p:nvPr>
-            <p:ph idx="1"/>
-          </p:nvPr>
-        </p:nvSpPr>
-        <p:spPr/>
-        <p:txBody>
-          <a:bodyPr/>
-          <a:lstStyle/>
-          <a:p>
-            <a:pPr lvl="0" indent="0" marL="0">
-              <a:buNone/>
-            </a:pPr>
-            <a:r>
-              <a:rPr b="1"/>
-              <a:t>🛑 Do Activity Parts 1–3 now</a:t>
-            </a:r>
-          </a:p>
-          <a:p>
-            <a:pPr lvl="0" indent="0" marL="0">
-              <a:buNone/>
-            </a:pPr>
-            <a:r>
-              <a:rPr/>
-              <a:t>Load the data, work the NA problem, source </a:t>
-            </a:r>
-            <a:r>
-              <a:rPr>
-                <a:latin typeface="Courier"/>
-              </a:rPr>
-              <a:t>summary_stats()</a:t>
-            </a:r>
-            <a:r>
-              <a:rPr/>
-              <a:t>, and use it on one group with </a:t>
-            </a:r>
-            <a:r>
-              <a:rPr>
-                <a:latin typeface="Courier"/>
-              </a:rPr>
-              <a:t>filter()</a:t>
-            </a:r>
-            <a:r>
-              <a:rPr/>
-              <a:t>. Predict each output, type it, then run it.</a:t>
-            </a:r>
-          </a:p>
-        </p:txBody>
-      </p:sp>
-    </p:spTree>
-  </p:cSld>
-</p:sld>
-</file>
-
-<file path=ppt/slides/slide18.xml><?xml version="1.0" encoding="utf-8"?>
-<p:sld xmlns:a="http://schemas.openxmlformats.org/drawingml/2006/main" xmlns:r="http://schemas.openxmlformats.org/officeDocument/2006/relationships" xmlns:p="http://schemas.openxmlformats.org/presentationml/2006/main">
-  <p:cSld>
-    <p:spTree>
-      <p:nvGrpSpPr>
-        <p:cNvPr id="1" name=""/>
-        <p:cNvGrpSpPr/>
-        <p:nvPr/>
-      </p:nvGrpSpPr>
-      <p:grpSpPr>
-        <a:xfrm>
-          <a:off x="0" y="0"/>
-          <a:ext cx="0" cy="0"/>
-          <a:chOff x="0" y="0"/>
-          <a:chExt cx="0" cy="0"/>
-        </a:xfrm>
-      </p:grpSpPr>
-      <p:sp>
-        <p:nvSpPr>
-          <p:cNvPr id="2" name="Title 1"/>
-          <p:cNvSpPr>
-            <a:spLocks noGrp="1"/>
-          </p:cNvSpPr>
-          <p:nvPr>
-            <p:ph type="title"/>
-          </p:nvPr>
-        </p:nvSpPr>
-        <p:spPr>
-          <a:xfrm>
-            <a:off x="0" y="0"/>
-            <a:ext cx="9144000" cy="582780"/>
-          </a:xfrm>
-        </p:spPr>
-        <p:txBody>
-          <a:bodyPr/>
-          <a:lstStyle/>
-          <a:p>
-            <a:pPr lvl="0" indent="0" marL="0">
-              <a:buNone/>
-            </a:pPr>
-            <a:r>
-              <a:rPr/>
-              <a:t>🧩 Chunk 2 of 2 · Every Group, Every Column, Fast</a:t>
-            </a:r>
-          </a:p>
-        </p:txBody>
-      </p:sp>
-      <p:sp>
-        <p:nvSpPr>
-          <p:cNvPr id="3" name="Content Placeholder 2"/>
-          <p:cNvSpPr>
-            <a:spLocks noGrp="1"/>
-          </p:cNvSpPr>
-          <p:nvPr>
-            <p:ph idx="1"/>
-          </p:nvPr>
-        </p:nvSpPr>
-        <p:spPr/>
-        <p:txBody>
-          <a:bodyPr/>
-          <a:lstStyle/>
-          <a:p>
-            <a:pPr lvl="0" indent="0" marL="0">
-              <a:buNone/>
-            </a:pPr>
-            <a:r>
-              <a:rPr b="1"/>
-              <a:t>We will cover:</a:t>
-            </a:r>
-            <a:r>
-              <a:rPr/>
-              <a:t> </a:t>
-            </a:r>
-            <a:r>
-              <a:rPr>
-                <a:latin typeface="Courier"/>
-              </a:rPr>
-              <a:t>group_by()</a:t>
-            </a:r>
-            <a:r>
-              <a:rPr/>
-              <a:t> + </a:t>
-            </a:r>
-            <a:r>
-              <a:rPr>
-                <a:latin typeface="Courier"/>
-              </a:rPr>
-              <a:t>summary_stats()</a:t>
-            </a:r>
-            <a:r>
-              <a:rPr/>
-              <a:t> for every group at once, fast overviews with </a:t>
-            </a:r>
-            <a:r>
-              <a:rPr>
-                <a:latin typeface="Courier"/>
-              </a:rPr>
-              <a:t>skimr</a:t>
-            </a:r>
-            <a:r>
-              <a:rPr/>
-              <a:t>, and — if time allows — </a:t>
-            </a:r>
-            <a:r>
-              <a:rPr>
-                <a:latin typeface="Courier"/>
-              </a:rPr>
-              <a:t>across()</a:t>
-            </a:r>
-            <a:r>
-              <a:rPr/>
-              <a:t> for many columns at once.</a:t>
-            </a:r>
-          </a:p>
-          <a:p>
-            <a:pPr lvl="0" indent="0" marL="0">
-              <a:buNone/>
-            </a:pPr>
-            <a:r>
-              <a:rPr b="1"/>
-              <a:t>🛑 After this chunk: Activity Parts 4–6.</a:t>
+                <a:latin typeface="Courier"/>
+              </a:rPr>
+              <a:t>themes/summary_stats_function.R</a:t>
+            </a:r>
+            <a:r>
+              <a:rPr/>
+              <a:t> — same </a:t>
+            </a:r>
+            <a:r>
+              <a:rPr>
+                <a:latin typeface="Courier"/>
+              </a:rPr>
+              <a:t>themes/</a:t>
+            </a:r>
+            <a:r>
+              <a:rPr/>
+              <a:t> folder as your ggplot </a:t>
+            </a:r>
+            <a:r>
+              <a:rPr>
+                <a:hlinkClick r:id="rId3"/>
+                <a:latin typeface="Courier"/>
+              </a:rPr>
+              <a:t>theme file</a:t>
             </a:r>
           </a:p>
         </p:txBody>
@@ -6478,52 +7553,6 @@
       </p:grpSpPr>
       <p:sp>
         <p:nvSpPr>
-          <p:cNvPr id="2" name="Title 1"/>
-          <p:cNvSpPr>
-            <a:spLocks noGrp="1"/>
-          </p:cNvSpPr>
-          <p:nvPr>
-            <p:ph type="title"/>
-          </p:nvPr>
-        </p:nvSpPr>
-        <p:spPr>
-          <a:xfrm>
-            <a:off x="0" y="0"/>
-            <a:ext cx="9144000" cy="582780"/>
-          </a:xfrm>
-        </p:spPr>
-        <p:txBody>
-          <a:bodyPr/>
-          <a:lstStyle/>
-          <a:p>
-            <a:pPr lvl="0" indent="0" marL="0">
-              <a:buNone/>
-            </a:pPr>
-            <a:r>
-              <a:rPr/>
-              <a:t>Stats the Tidy Way — </a:t>
-            </a:r>
-            <a:r>
-              <a:rPr>
-                <a:latin typeface="Courier"/>
-              </a:rPr>
-              <a:t>group_by()</a:t>
-            </a:r>
-            <a:r>
-              <a:rPr/>
-              <a:t> + </a:t>
-            </a:r>
-            <a:r>
-              <a:rPr>
-                <a:latin typeface="Courier"/>
-              </a:rPr>
-              <a:t>summary_stats()</a:t>
-            </a:r>
-          </a:p>
-        </p:txBody>
-      </p:sp>
-      <p:sp>
-        <p:nvSpPr>
           <p:cNvPr id="3" name="Content Placeholder 2"/>
           <p:cNvSpPr>
             <a:spLocks noGrp="1"/>
@@ -6537,43 +7566,54 @@
           <a:bodyPr/>
           <a:lstStyle/>
           <a:p>
-            <a:pPr lvl="0" indent="0" marL="1270000">
+            <a:pPr lvl="0" indent="0">
               <a:buNone/>
             </a:pPr>
             <a:r>
-              <a:rPr sz="2000" b="1"/>
-              <a:t>Note</a:t>
-            </a:r>
-          </a:p>
-          <a:p>
-            <a:pPr lvl="0" indent="0" marL="1270000">
-              <a:buNone/>
-            </a:pPr>
-            <a:r>
-              <a:rPr sz="2000" b="1"/>
-              <a:t>🔮 Predict first:</a:t>
-            </a:r>
-            <a:r>
-              <a:rPr sz="2000"/>
-              <a:t> How many </a:t>
-            </a:r>
-            <a:r>
-              <a:rPr sz="2000" b="1"/>
-              <a:t>rows</a:t>
-            </a:r>
-            <a:r>
-              <a:rPr sz="2000"/>
-              <a:t> will this return? (Hint: how many values does </a:t>
-            </a:r>
-            <a:r>
-              <a:rPr sz="2000">
-                <a:latin typeface="Courier"/>
-              </a:rPr>
-              <a:t>shade</a:t>
-            </a:r>
-            <a:r>
-              <a:rPr sz="2000"/>
-              <a:t> take?) Predict the number before you run it.</a:t>
+              <a:rPr>
+                <a:solidFill>
+                  <a:srgbClr val="5E5E5E"/>
+                </a:solidFill>
+                <a:latin typeface="Courier"/>
+              </a:rPr>
+              <a:t># source() loads summary_stats() from another .R file --</a:t>
+            </a:r>
+            <a:br/>
+            <a:r>
+              <a:rPr>
+                <a:solidFill>
+                  <a:srgbClr val="4758AB"/>
+                </a:solidFill>
+                <a:latin typeface="Courier"/>
+              </a:rPr>
+              <a:t>source</a:t>
+            </a:r>
+            <a:r>
+              <a:rPr>
+                <a:solidFill>
+                  <a:srgbClr val="003B4F"/>
+                </a:solidFill>
+                <a:latin typeface="Courier"/>
+              </a:rPr>
+              <a:t>(</a:t>
+            </a:r>
+            <a:r>
+              <a:rPr>
+                <a:solidFill>
+                  <a:srgbClr val="20794D"/>
+                </a:solidFill>
+                <a:latin typeface="Courier"/>
+              </a:rPr>
+              <a:t>"themes/summary_stats_function.R"</a:t>
+            </a:r>
+            <a:r>
+              <a:rPr>
+                <a:solidFill>
+                  <a:srgbClr val="003B4F"/>
+                </a:solidFill>
+                <a:latin typeface="Courier"/>
+              </a:rPr>
+              <a:t>)</a:t>
             </a:r>
           </a:p>
         </p:txBody>
@@ -6824,6 +7864,55 @@
       </p:grpSpPr>
       <p:sp>
         <p:nvSpPr>
+          <p:cNvPr id="2" name="Title 1"/>
+          <p:cNvSpPr>
+            <a:spLocks noGrp="1"/>
+          </p:cNvSpPr>
+          <p:nvPr>
+            <p:ph type="title"/>
+          </p:nvPr>
+        </p:nvSpPr>
+        <p:spPr>
+          <a:xfrm>
+            <a:off x="0" y="0"/>
+            <a:ext cx="9144000" cy="602780"/>
+          </a:xfrm>
+          <a:solidFill>
+            <a:srgbClr val="1A1A2E"/>
+          </a:solidFill>
+        </p:spPr>
+        <p:txBody>
+          <a:bodyPr/>
+          <a:lstStyle/>
+          <a:p>
+            <a:pPr lvl="0" indent="0" marL="0">
+              <a:buNone/>
+            </a:pPr>
+            <a:r>
+              <a:rPr/>
+              <a:t>One Group at a Time — </a:t>
+            </a:r>
+            <a:r>
+              <a:rPr>
+                <a:latin typeface="Courier"/>
+              </a:rPr>
+              <a:t>filter()</a:t>
+            </a:r>
+            <a:r>
+              <a:rPr/>
+              <a:t> + </a:t>
+            </a:r>
+            <a:r>
+              <a:rPr>
+                <a:latin typeface="Courier"/>
+              </a:rPr>
+              <a:t>summary_stats()</a:t>
+            </a:r>
+          </a:p>
+        </p:txBody>
+      </p:sp>
+      <p:sp>
+        <p:nvSpPr>
           <p:cNvPr id="3" name="Content Placeholder 2"/>
           <p:cNvSpPr>
             <a:spLocks noGrp="1"/>
@@ -6847,7 +7936,7 @@
                 </a:solidFill>
                 <a:latin typeface="Courier"/>
               </a:rPr>
-              <a:t># Group first, then call the SAME function -------------</a:t>
+              <a:t># Filter to one side, then hand it straight to the function</a:t>
             </a:r>
             <a:br/>
             <a:r>
@@ -6857,7 +7946,7 @@
                 </a:solidFill>
                 <a:latin typeface="Courier"/>
               </a:rPr>
-              <a:t>stats_df &lt;- leaf_df </a:t>
+              <a:t>leaf_df </a:t>
             </a:r>
             <a:r>
               <a:rPr>
@@ -6885,16 +7974,16 @@
                 </a:solidFill>
                 <a:latin typeface="Courier"/>
               </a:rPr>
-              <a:t>group_by</a:t>
-            </a:r>
-            <a:r>
-              <a:rPr>
-                <a:solidFill>
-                  <a:srgbClr val="003B4F"/>
-                </a:solidFill>
-                <a:latin typeface="Courier"/>
-              </a:rPr>
-              <a:t>(shade) </a:t>
+              <a:t>filter</a:t>
+            </a:r>
+            <a:r>
+              <a:rPr>
+                <a:solidFill>
+                  <a:srgbClr val="003B4F"/>
+                </a:solidFill>
+                <a:latin typeface="Courier"/>
+              </a:rPr>
+              <a:t>(shade </a:t>
             </a:r>
             <a:r>
               <a:rPr>
@@ -6903,6 +7992,42 @@
                 </a:solidFill>
                 <a:latin typeface="Courier"/>
               </a:rPr>
+              <a:t>==</a:t>
+            </a:r>
+            <a:r>
+              <a:rPr>
+                <a:solidFill>
+                  <a:srgbClr val="003B4F"/>
+                </a:solidFill>
+                <a:latin typeface="Courier"/>
+              </a:rPr>
+              <a:t> </a:t>
+            </a:r>
+            <a:r>
+              <a:rPr>
+                <a:solidFill>
+                  <a:srgbClr val="20794D"/>
+                </a:solidFill>
+                <a:latin typeface="Courier"/>
+              </a:rPr>
+              <a:t>"sunny"</a:t>
+            </a:r>
+            <a:r>
+              <a:rPr>
+                <a:solidFill>
+                  <a:srgbClr val="003B4F"/>
+                </a:solidFill>
+                <a:latin typeface="Courier"/>
+              </a:rPr>
+              <a:t>) </a:t>
+            </a:r>
+            <a:r>
+              <a:rPr>
+                <a:solidFill>
+                  <a:srgbClr val="5E5E5E"/>
+                </a:solidFill>
+                <a:latin typeface="Courier"/>
+              </a:rPr>
               <a:t>%&gt;%</a:t>
             </a:r>
             <a:br/>
@@ -6933,17 +8058,6 @@
               </a:rPr>
               <a:t>(mass_g)</a:t>
             </a:r>
-            <a:br/>
-            <a:br/>
-            <a:r>
-              <a:rPr>
-                <a:solidFill>
-                  <a:srgbClr val="003B4F"/>
-                </a:solidFill>
-                <a:latin typeface="Courier"/>
-              </a:rPr>
-              <a:t>stats_df</a:t>
-            </a:r>
           </a:p>
           <a:p>
             <a:pPr lvl="0" indent="0">
@@ -6953,11 +8067,10 @@
               <a:rPr>
                 <a:latin typeface="Courier"/>
               </a:rPr>
-              <a:t># A tibble: 2 × 8
-  shade     n  mean variance    sd    se ci_lower ci_upper
-  &lt;chr&gt; &lt;int&gt; &lt;dbl&gt;    &lt;dbl&gt; &lt;dbl&gt; &lt;dbl&gt;    &lt;dbl&gt;    &lt;dbl&gt;
-1 shady    28  0.52     0.02  0.15  0.03     0.47     0.58
-2 sunny    25  0.51     0.04  0.21  0.04     0.42     0.59</a:t>
+              <a:t># A tibble: 1 × 7
+      n  mean variance    sd    se ci_lower ci_upper
+  &lt;int&gt; &lt;dbl&gt;    &lt;dbl&gt; &lt;dbl&gt; &lt;dbl&gt;    &lt;dbl&gt;    &lt;dbl&gt;
+1    25  0.51     0.04  0.21  0.04     0.42     0.59</a:t>
             </a:r>
           </a:p>
         </p:txBody>
@@ -6982,45 +8095,65 @@
               <a:rPr>
                 <a:latin typeface="Courier"/>
               </a:rPr>
-              <a:t>group_by(shade)</a:t>
-            </a:r>
-            <a:r>
-              <a:rPr/>
-              <a:t> splits the data by the </a:t>
-            </a:r>
-            <a:r>
-              <a:rPr>
-                <a:latin typeface="Courier"/>
-              </a:rPr>
-              <a:t>shade</a:t>
-            </a:r>
-            <a:r>
-              <a:rPr/>
-              <a:t> column</a:t>
+              <a:t>filter(shade == "sunny")</a:t>
+            </a:r>
+            <a:r>
+              <a:rPr/>
+              <a:t> — keeps only sunny rows</a:t>
             </a:r>
           </a:p>
           <a:p>
             <a:pPr lvl="0"/>
             <a:r>
-              <a:rPr>
-                <a:latin typeface="Courier"/>
-              </a:rPr>
-              <a:t>summary_stats()</a:t>
-            </a:r>
-            <a:r>
-              <a:rPr/>
-              <a:t> doesn’t change at all — it runs once per group</a:t>
+              <a:rPr/>
+              <a:t>Pipe the filtered data straight into </a:t>
+            </a:r>
+            <a:r>
+              <a:rPr>
+                <a:latin typeface="Courier"/>
+              </a:rPr>
+              <a:t>summary_stats(mass_g)</a:t>
+            </a:r>
+            <a:r>
+              <a:rPr/>
+              <a:t> — no </a:t>
+            </a:r>
+            <a:r>
+              <a:rPr>
+                <a:latin typeface="Courier"/>
+              </a:rPr>
+              <a:t>pull()</a:t>
+            </a:r>
+            <a:r>
+              <a:rPr/>
+              <a:t>, no vector, no hand-written math</a:t>
             </a:r>
           </a:p>
           <a:p>
             <a:pPr lvl="0"/>
             <a:r>
               <a:rPr/>
-              <a:t>You get </a:t>
-            </a:r>
-            <a:r>
-              <a:rPr b="1"/>
-              <a:t>both groups, every statistic, in one clean table</a:t>
+              <a:t>Swap </a:t>
+            </a:r>
+            <a:r>
+              <a:rPr>
+                <a:latin typeface="Courier"/>
+              </a:rPr>
+              <a:t>"sunny"</a:t>
+            </a:r>
+            <a:r>
+              <a:rPr/>
+              <a:t> for </a:t>
+            </a:r>
+            <a:r>
+              <a:rPr>
+                <a:latin typeface="Courier"/>
+              </a:rPr>
+              <a:t>"shady"</a:t>
+            </a:r>
+            <a:r>
+              <a:rPr/>
+              <a:t> to get the other side</a:t>
             </a:r>
           </a:p>
           <a:p>
@@ -7035,14 +8168,7 @@
               <a:rPr>
                 <a:hlinkClick r:id="rId2"/>
               </a:rPr>
-              <a:t>R4DS §3.5 — </a:t>
-            </a:r>
-            <a:r>
-              <a:rPr>
-                <a:hlinkClick r:id="rId3"/>
-                <a:latin typeface="Courier"/>
-              </a:rPr>
-              <a:t>summarize()</a:t>
+              <a:t>R4DS §3 — Data Transformation</a:t>
             </a:r>
           </a:p>
         </p:txBody>
@@ -7082,11 +8208,8 @@
         <p:spPr>
           <a:xfrm>
             <a:off x="0" y="0"/>
-            <a:ext cx="9144000" cy="602780"/>
+            <a:ext cx="9144000" cy="582780"/>
           </a:xfrm>
-          <a:solidFill>
-            <a:srgbClr val="1A1A2E"/>
-          </a:solidFill>
         </p:spPr>
         <p:txBody>
           <a:bodyPr/>
@@ -7097,7 +8220,7 @@
             </a:pPr>
             <a:r>
               <a:rPr/>
-              <a:t>Multiple Variables at Once</a:t>
+              <a:t>🛑 Pause — Do Activity Parts 1–3 Now</a:t>
             </a:r>
           </a:p>
         </p:txBody>
@@ -7109,7 +8232,7 @@
             <a:spLocks noGrp="1"/>
           </p:cNvSpPr>
           <p:nvPr>
-            <p:ph idx="1" sz="half"/>
+            <p:ph idx="1"/>
           </p:nvPr>
         </p:nvSpPr>
         <p:spPr/>
@@ -7117,611 +8240,51 @@
           <a:bodyPr/>
           <a:lstStyle/>
           <a:p>
-            <a:pPr lvl="0" indent="0">
+            <a:pPr lvl="0" indent="0" marL="0">
               <a:buNone/>
             </a:pPr>
             <a:r>
-              <a:rPr>
-                <a:solidFill>
-                  <a:srgbClr val="5E5E5E"/>
-                </a:solidFill>
-                <a:latin typeface="Courier"/>
-              </a:rPr>
-              <a:t># summary_stats() handles ONE variable, so for several</a:t>
-            </a:r>
-            <a:br/>
-            <a:r>
-              <a:rPr>
-                <a:solidFill>
-                  <a:srgbClr val="5E5E5E"/>
-                </a:solidFill>
-                <a:latin typeface="Courier"/>
-              </a:rPr>
-              <a:t># measurements at once we still write summarize() directly</a:t>
-            </a:r>
-            <a:br/>
-            <a:r>
-              <a:rPr>
-                <a:solidFill>
-                  <a:srgbClr val="003B4F"/>
-                </a:solidFill>
-                <a:latin typeface="Courier"/>
-              </a:rPr>
-              <a:t>size_stats_df &lt;- leaf_df </a:t>
-            </a:r>
-            <a:r>
-              <a:rPr>
-                <a:solidFill>
-                  <a:srgbClr val="5E5E5E"/>
-                </a:solidFill>
-                <a:latin typeface="Courier"/>
-              </a:rPr>
-              <a:t>%&gt;%</a:t>
-            </a:r>
-            <a:br/>
-            <a:r>
-              <a:rPr>
-                <a:solidFill>
-                  <a:srgbClr val="003B4F"/>
-                </a:solidFill>
-                <a:latin typeface="Courier"/>
-              </a:rPr>
-              <a:t>  </a:t>
-            </a:r>
-            <a:r>
-              <a:rPr>
-                <a:solidFill>
-                  <a:srgbClr val="4758AB"/>
-                </a:solidFill>
-                <a:latin typeface="Courier"/>
-              </a:rPr>
-              <a:t>group_by</a:t>
-            </a:r>
-            <a:r>
-              <a:rPr>
-                <a:solidFill>
-                  <a:srgbClr val="003B4F"/>
-                </a:solidFill>
-                <a:latin typeface="Courier"/>
-              </a:rPr>
-              <a:t>(shade) </a:t>
-            </a:r>
-            <a:r>
-              <a:rPr>
-                <a:solidFill>
-                  <a:srgbClr val="5E5E5E"/>
-                </a:solidFill>
-                <a:latin typeface="Courier"/>
-              </a:rPr>
-              <a:t>%&gt;%</a:t>
-            </a:r>
-            <a:br/>
-            <a:r>
-              <a:rPr>
-                <a:solidFill>
-                  <a:srgbClr val="003B4F"/>
-                </a:solidFill>
-                <a:latin typeface="Courier"/>
-              </a:rPr>
-              <a:t>  </a:t>
-            </a:r>
-            <a:r>
-              <a:rPr>
-                <a:solidFill>
-                  <a:srgbClr val="4758AB"/>
-                </a:solidFill>
-                <a:latin typeface="Courier"/>
-              </a:rPr>
-              <a:t>summarize</a:t>
-            </a:r>
-            <a:r>
-              <a:rPr>
-                <a:solidFill>
-                  <a:srgbClr val="003B4F"/>
-                </a:solidFill>
-                <a:latin typeface="Courier"/>
-              </a:rPr>
-              <a:t>(</a:t>
-            </a:r>
-            <a:br/>
-            <a:r>
-              <a:rPr>
-                <a:solidFill>
-                  <a:srgbClr val="003B4F"/>
-                </a:solidFill>
-                <a:latin typeface="Courier"/>
-              </a:rPr>
-              <a:t>    </a:t>
-            </a:r>
-            <a:r>
-              <a:rPr>
-                <a:solidFill>
-                  <a:srgbClr val="657422"/>
-                </a:solidFill>
-                <a:latin typeface="Courier"/>
-              </a:rPr>
-              <a:t>n         =</a:t>
-            </a:r>
-            <a:r>
-              <a:rPr>
-                <a:solidFill>
-                  <a:srgbClr val="003B4F"/>
-                </a:solidFill>
-                <a:latin typeface="Courier"/>
-              </a:rPr>
-              <a:t> </a:t>
-            </a:r>
-            <a:r>
-              <a:rPr>
-                <a:solidFill>
-                  <a:srgbClr val="4758AB"/>
-                </a:solidFill>
-                <a:latin typeface="Courier"/>
-              </a:rPr>
-              <a:t>n</a:t>
-            </a:r>
-            <a:r>
-              <a:rPr>
-                <a:solidFill>
-                  <a:srgbClr val="003B4F"/>
-                </a:solidFill>
-                <a:latin typeface="Courier"/>
-              </a:rPr>
-              <a:t>(),</a:t>
-            </a:r>
-            <a:br/>
-            <a:r>
-              <a:rPr>
-                <a:solidFill>
-                  <a:srgbClr val="003B4F"/>
-                </a:solidFill>
-                <a:latin typeface="Courier"/>
-              </a:rPr>
-              <a:t>    </a:t>
-            </a:r>
-            <a:r>
-              <a:rPr>
-                <a:solidFill>
-                  <a:srgbClr val="657422"/>
-                </a:solidFill>
-                <a:latin typeface="Courier"/>
-              </a:rPr>
-              <a:t>mean_mass =</a:t>
-            </a:r>
-            <a:r>
-              <a:rPr>
-                <a:solidFill>
-                  <a:srgbClr val="003B4F"/>
-                </a:solidFill>
-                <a:latin typeface="Courier"/>
-              </a:rPr>
-              <a:t> </a:t>
-            </a:r>
-            <a:r>
-              <a:rPr>
-                <a:solidFill>
-                  <a:srgbClr val="4758AB"/>
-                </a:solidFill>
-                <a:latin typeface="Courier"/>
-              </a:rPr>
-              <a:t>round</a:t>
-            </a:r>
-            <a:r>
-              <a:rPr>
-                <a:solidFill>
-                  <a:srgbClr val="003B4F"/>
-                </a:solidFill>
-                <a:latin typeface="Courier"/>
-              </a:rPr>
-              <a:t>(</a:t>
-            </a:r>
-            <a:r>
-              <a:rPr>
-                <a:solidFill>
-                  <a:srgbClr val="4758AB"/>
-                </a:solidFill>
-                <a:latin typeface="Courier"/>
-              </a:rPr>
-              <a:t>mean</a:t>
-            </a:r>
-            <a:r>
-              <a:rPr>
-                <a:solidFill>
-                  <a:srgbClr val="003B4F"/>
-                </a:solidFill>
-                <a:latin typeface="Courier"/>
-              </a:rPr>
-              <a:t>(mass_g,       </a:t>
-            </a:r>
-            <a:r>
-              <a:rPr>
-                <a:solidFill>
-                  <a:srgbClr val="657422"/>
-                </a:solidFill>
-                <a:latin typeface="Courier"/>
-              </a:rPr>
-              <a:t>na.rm =</a:t>
-            </a:r>
-            <a:r>
-              <a:rPr>
-                <a:solidFill>
-                  <a:srgbClr val="003B4F"/>
-                </a:solidFill>
-                <a:latin typeface="Courier"/>
-              </a:rPr>
-              <a:t> </a:t>
-            </a:r>
-            <a:r>
-              <a:rPr>
-                <a:solidFill>
-                  <a:srgbClr val="8F5902"/>
-                </a:solidFill>
-                <a:latin typeface="Courier"/>
-              </a:rPr>
-              <a:t>TRUE</a:t>
-            </a:r>
-            <a:r>
-              <a:rPr>
-                <a:solidFill>
-                  <a:srgbClr val="003B4F"/>
-                </a:solidFill>
-                <a:latin typeface="Courier"/>
-              </a:rPr>
-              <a:t>), </a:t>
-            </a:r>
-            <a:r>
-              <a:rPr>
-                <a:solidFill>
-                  <a:srgbClr val="AD0000"/>
-                </a:solidFill>
-                <a:latin typeface="Courier"/>
-              </a:rPr>
-              <a:t>3</a:t>
-            </a:r>
-            <a:r>
-              <a:rPr>
-                <a:solidFill>
-                  <a:srgbClr val="003B4F"/>
-                </a:solidFill>
-                <a:latin typeface="Courier"/>
-              </a:rPr>
-              <a:t>),</a:t>
-            </a:r>
-            <a:br/>
-            <a:r>
-              <a:rPr>
-                <a:solidFill>
-                  <a:srgbClr val="003B4F"/>
-                </a:solidFill>
-                <a:latin typeface="Courier"/>
-              </a:rPr>
-              <a:t>    </a:t>
-            </a:r>
-            <a:r>
-              <a:rPr>
-                <a:solidFill>
-                  <a:srgbClr val="657422"/>
-                </a:solidFill>
-                <a:latin typeface="Courier"/>
-              </a:rPr>
-              <a:t>mean_pet  =</a:t>
-            </a:r>
-            <a:r>
-              <a:rPr>
-                <a:solidFill>
-                  <a:srgbClr val="003B4F"/>
-                </a:solidFill>
-                <a:latin typeface="Courier"/>
-              </a:rPr>
-              <a:t> </a:t>
-            </a:r>
-            <a:r>
-              <a:rPr>
-                <a:solidFill>
-                  <a:srgbClr val="4758AB"/>
-                </a:solidFill>
-                <a:latin typeface="Courier"/>
-              </a:rPr>
-              <a:t>round</a:t>
-            </a:r>
-            <a:r>
-              <a:rPr>
-                <a:solidFill>
-                  <a:srgbClr val="003B4F"/>
-                </a:solidFill>
-                <a:latin typeface="Courier"/>
-              </a:rPr>
-              <a:t>(</a:t>
-            </a:r>
-            <a:r>
-              <a:rPr>
-                <a:solidFill>
-                  <a:srgbClr val="4758AB"/>
-                </a:solidFill>
-                <a:latin typeface="Courier"/>
-              </a:rPr>
-              <a:t>mean</a:t>
-            </a:r>
-            <a:r>
-              <a:rPr>
-                <a:solidFill>
-                  <a:srgbClr val="003B4F"/>
-                </a:solidFill>
-                <a:latin typeface="Courier"/>
-              </a:rPr>
-              <a:t>(petiole_mm,   </a:t>
-            </a:r>
-            <a:r>
-              <a:rPr>
-                <a:solidFill>
-                  <a:srgbClr val="657422"/>
-                </a:solidFill>
-                <a:latin typeface="Courier"/>
-              </a:rPr>
-              <a:t>na.rm =</a:t>
-            </a:r>
-            <a:r>
-              <a:rPr>
-                <a:solidFill>
-                  <a:srgbClr val="003B4F"/>
-                </a:solidFill>
-                <a:latin typeface="Courier"/>
-              </a:rPr>
-              <a:t> </a:t>
-            </a:r>
-            <a:r>
-              <a:rPr>
-                <a:solidFill>
-                  <a:srgbClr val="8F5902"/>
-                </a:solidFill>
-                <a:latin typeface="Courier"/>
-              </a:rPr>
-              <a:t>TRUE</a:t>
-            </a:r>
-            <a:r>
-              <a:rPr>
-                <a:solidFill>
-                  <a:srgbClr val="003B4F"/>
-                </a:solidFill>
-                <a:latin typeface="Courier"/>
-              </a:rPr>
-              <a:t>), </a:t>
-            </a:r>
-            <a:r>
-              <a:rPr>
-                <a:solidFill>
-                  <a:srgbClr val="AD0000"/>
-                </a:solidFill>
-                <a:latin typeface="Courier"/>
-              </a:rPr>
-              <a:t>1</a:t>
-            </a:r>
-            <a:r>
-              <a:rPr>
-                <a:solidFill>
-                  <a:srgbClr val="003B4F"/>
-                </a:solidFill>
-                <a:latin typeface="Courier"/>
-              </a:rPr>
-              <a:t>),</a:t>
-            </a:r>
-            <a:br/>
-            <a:r>
-              <a:rPr>
-                <a:solidFill>
-                  <a:srgbClr val="003B4F"/>
-                </a:solidFill>
-                <a:latin typeface="Courier"/>
-              </a:rPr>
-              <a:t>    </a:t>
-            </a:r>
-            <a:r>
-              <a:rPr>
-                <a:solidFill>
-                  <a:srgbClr val="657422"/>
-                </a:solidFill>
-                <a:latin typeface="Courier"/>
-              </a:rPr>
-              <a:t>mean_thick =</a:t>
-            </a:r>
-            <a:r>
-              <a:rPr>
-                <a:solidFill>
-                  <a:srgbClr val="003B4F"/>
-                </a:solidFill>
-                <a:latin typeface="Courier"/>
-              </a:rPr>
-              <a:t> </a:t>
-            </a:r>
-            <a:r>
-              <a:rPr>
-                <a:solidFill>
-                  <a:srgbClr val="4758AB"/>
-                </a:solidFill>
-                <a:latin typeface="Courier"/>
-              </a:rPr>
-              <a:t>round</a:t>
-            </a:r>
-            <a:r>
-              <a:rPr>
-                <a:solidFill>
-                  <a:srgbClr val="003B4F"/>
-                </a:solidFill>
-                <a:latin typeface="Courier"/>
-              </a:rPr>
-              <a:t>(</a:t>
-            </a:r>
-            <a:r>
-              <a:rPr>
-                <a:solidFill>
-                  <a:srgbClr val="4758AB"/>
-                </a:solidFill>
-                <a:latin typeface="Courier"/>
-              </a:rPr>
-              <a:t>mean</a:t>
-            </a:r>
-            <a:r>
-              <a:rPr>
-                <a:solidFill>
-                  <a:srgbClr val="003B4F"/>
-                </a:solidFill>
-                <a:latin typeface="Courier"/>
-              </a:rPr>
-              <a:t>(thickness_mm, </a:t>
-            </a:r>
-            <a:r>
-              <a:rPr>
-                <a:solidFill>
-                  <a:srgbClr val="657422"/>
-                </a:solidFill>
-                <a:latin typeface="Courier"/>
-              </a:rPr>
-              <a:t>na.rm =</a:t>
-            </a:r>
-            <a:r>
-              <a:rPr>
-                <a:solidFill>
-                  <a:srgbClr val="003B4F"/>
-                </a:solidFill>
-                <a:latin typeface="Courier"/>
-              </a:rPr>
-              <a:t> </a:t>
-            </a:r>
-            <a:r>
-              <a:rPr>
-                <a:solidFill>
-                  <a:srgbClr val="8F5902"/>
-                </a:solidFill>
-                <a:latin typeface="Courier"/>
-              </a:rPr>
-              <a:t>TRUE</a:t>
-            </a:r>
-            <a:r>
-              <a:rPr>
-                <a:solidFill>
-                  <a:srgbClr val="003B4F"/>
-                </a:solidFill>
-                <a:latin typeface="Courier"/>
-              </a:rPr>
-              <a:t>), </a:t>
-            </a:r>
-            <a:r>
-              <a:rPr>
-                <a:solidFill>
-                  <a:srgbClr val="AD0000"/>
-                </a:solidFill>
-                <a:latin typeface="Courier"/>
-              </a:rPr>
-              <a:t>3</a:t>
-            </a:r>
-            <a:r>
-              <a:rPr>
-                <a:solidFill>
-                  <a:srgbClr val="003B4F"/>
-                </a:solidFill>
-                <a:latin typeface="Courier"/>
-              </a:rPr>
-              <a:t>)</a:t>
-            </a:r>
-            <a:br/>
-            <a:r>
-              <a:rPr>
-                <a:solidFill>
-                  <a:srgbClr val="003B4F"/>
-                </a:solidFill>
-                <a:latin typeface="Courier"/>
-              </a:rPr>
-              <a:t>  )</a:t>
-            </a:r>
-            <a:br/>
-            <a:br/>
-            <a:r>
-              <a:rPr>
-                <a:solidFill>
-                  <a:srgbClr val="003B4F"/>
-                </a:solidFill>
-                <a:latin typeface="Courier"/>
-              </a:rPr>
-              <a:t>size_stats_df</a:t>
-            </a:r>
-          </a:p>
-          <a:p>
-            <a:pPr lvl="0" indent="0">
+              <a:rPr b="1"/>
+              <a:t>🛑 Do Activity Parts 1–3 now</a:t>
+            </a:r>
+          </a:p>
+          <a:p>
+            <a:pPr lvl="0" indent="0" marL="0">
               <a:buNone/>
             </a:pPr>
             <a:r>
-              <a:rPr>
-                <a:latin typeface="Courier"/>
-              </a:rPr>
-              <a:t># A tibble: 2 × 5
-  shade     n mean_mass mean_pet mean_thick
-  &lt;chr&gt; &lt;int&gt;     &lt;dbl&gt;    &lt;dbl&gt;      &lt;dbl&gt;
-1 shady    28     0.523     56.7      0.356
-2 sunny    25     0.505     54.4      0.29 </a:t>
-            </a:r>
-          </a:p>
-        </p:txBody>
-      </p:sp>
-      <p:sp>
-        <p:nvSpPr>
-          <p:cNvPr id="4" name="Content Placeholder 3"/>
-          <p:cNvSpPr>
-            <a:spLocks noGrp="1"/>
-          </p:cNvSpPr>
-          <p:nvPr>
-            <p:ph idx="2" sz="half"/>
-          </p:nvPr>
-        </p:nvSpPr>
-        <p:spPr/>
-        <p:txBody>
-          <a:bodyPr/>
-          <a:lstStyle/>
-          <a:p>
-            <a:pPr lvl="0" indent="0" marL="0">
-              <a:buNone/>
-            </a:pPr>
-            <a:r>
-              <a:rPr b="1"/>
-              <a:t>Do the numbers support our hypothesis?</a:t>
-            </a:r>
-          </a:p>
-          <a:p>
-            <a:pPr lvl="0"/>
-            <a:r>
-              <a:rPr/>
-              <a:t>Shady heavier? → check </a:t>
-            </a:r>
-            <a:r>
-              <a:rPr>
-                <a:latin typeface="Courier"/>
-              </a:rPr>
-              <a:t>mean_mass</a:t>
-            </a:r>
-          </a:p>
-          <a:p>
-            <a:pPr lvl="0"/>
-            <a:r>
-              <a:rPr/>
-              <a:t>Shady leaves thicker? → check </a:t>
-            </a:r>
-            <a:r>
-              <a:rPr>
-                <a:latin typeface="Courier"/>
-              </a:rPr>
-              <a:t>mean_thick</a:t>
-            </a:r>
-          </a:p>
-          <a:p>
-            <a:pPr lvl="0"/>
-            <a:r>
-              <a:rPr/>
-              <a:t>Shady petioles longer? → check </a:t>
-            </a:r>
-            <a:r>
-              <a:rPr>
-                <a:latin typeface="Courier"/>
-              </a:rPr>
-              <a:t>mean_pet</a:t>
+              <a:rPr/>
+              <a:t>Load the data, find the NAs, write the summary by hand with </a:t>
+            </a:r>
+            <a:r>
+              <a:rPr>
+                <a:latin typeface="Courier"/>
+              </a:rPr>
+              <a:t>group_by()</a:t>
+            </a:r>
+            <a:r>
+              <a:rPr/>
+              <a:t> + </a:t>
+            </a:r>
+            <a:r>
+              <a:rPr>
+                <a:latin typeface="Courier"/>
+              </a:rPr>
+              <a:t>summarize()</a:t>
+            </a:r>
+            <a:r>
+              <a:rPr/>
+              <a:t>, then source </a:t>
+            </a:r>
+            <a:r>
+              <a:rPr>
+                <a:latin typeface="Courier"/>
+              </a:rPr>
+              <a:t>summary_stats()</a:t>
+            </a:r>
+            <a:r>
+              <a:rPr/>
+              <a:t> and use it on one group. Predict each output, type it, then run it.</a:t>
             </a:r>
           </a:p>
         </p:txBody>
@@ -7773,13 +8336,7 @@
             </a:pPr>
             <a:r>
               <a:rPr/>
-              <a:t>Fast Summaries with </a:t>
-            </a:r>
-            <a:r>
-              <a:rPr>
-                <a:latin typeface="Courier"/>
-              </a:rPr>
-              <a:t>skimr</a:t>
+              <a:t>🧩 Chunk 2 of 2 · Every Group, Every Column, Fast</a:t>
             </a:r>
           </a:p>
         </p:txBody>
@@ -7799,138 +8356,56 @@
           <a:bodyPr/>
           <a:lstStyle/>
           <a:p>
-            <a:pPr lvl="0" indent="0">
+            <a:pPr lvl="0" indent="0" marL="0">
               <a:buNone/>
             </a:pPr>
             <a:r>
-              <a:rPr>
-                <a:solidFill>
-                  <a:srgbClr val="5E5E5E"/>
-                </a:solidFill>
-                <a:latin typeface="Courier"/>
-              </a:rPr>
-              <a:t># skim() grouped by shade — mass only -------------------</a:t>
-            </a:r>
-            <a:br/>
-            <a:r>
-              <a:rPr>
-                <a:solidFill>
-                  <a:srgbClr val="003B4F"/>
-                </a:solidFill>
-                <a:latin typeface="Courier"/>
-              </a:rPr>
-              <a:t>leaf_df </a:t>
-            </a:r>
-            <a:r>
-              <a:rPr>
-                <a:solidFill>
-                  <a:srgbClr val="5E5E5E"/>
-                </a:solidFill>
-                <a:latin typeface="Courier"/>
-              </a:rPr>
-              <a:t>%&gt;%</a:t>
-            </a:r>
-            <a:br/>
-            <a:r>
-              <a:rPr>
-                <a:solidFill>
-                  <a:srgbClr val="003B4F"/>
-                </a:solidFill>
-                <a:latin typeface="Courier"/>
-              </a:rPr>
-              <a:t>  </a:t>
-            </a:r>
-            <a:r>
-              <a:rPr>
-                <a:solidFill>
-                  <a:srgbClr val="4758AB"/>
-                </a:solidFill>
-                <a:latin typeface="Courier"/>
-              </a:rPr>
-              <a:t>select</a:t>
-            </a:r>
-            <a:r>
-              <a:rPr>
-                <a:solidFill>
-                  <a:srgbClr val="003B4F"/>
-                </a:solidFill>
-                <a:latin typeface="Courier"/>
-              </a:rPr>
-              <a:t>(shade, mass_g) </a:t>
-            </a:r>
-            <a:r>
-              <a:rPr>
-                <a:solidFill>
-                  <a:srgbClr val="5E5E5E"/>
-                </a:solidFill>
-                <a:latin typeface="Courier"/>
-              </a:rPr>
-              <a:t>%&gt;%</a:t>
-            </a:r>
-            <a:br/>
-            <a:r>
-              <a:rPr>
-                <a:solidFill>
-                  <a:srgbClr val="003B4F"/>
-                </a:solidFill>
-                <a:latin typeface="Courier"/>
-              </a:rPr>
-              <a:t>  </a:t>
-            </a:r>
-            <a:r>
-              <a:rPr>
-                <a:solidFill>
-                  <a:srgbClr val="4758AB"/>
-                </a:solidFill>
-                <a:latin typeface="Courier"/>
-              </a:rPr>
-              <a:t>group_by</a:t>
-            </a:r>
-            <a:r>
-              <a:rPr>
-                <a:solidFill>
-                  <a:srgbClr val="003B4F"/>
-                </a:solidFill>
-                <a:latin typeface="Courier"/>
-              </a:rPr>
-              <a:t>(shade) </a:t>
-            </a:r>
-            <a:r>
-              <a:rPr>
-                <a:solidFill>
-                  <a:srgbClr val="5E5E5E"/>
-                </a:solidFill>
-                <a:latin typeface="Courier"/>
-              </a:rPr>
-              <a:t>%&gt;%</a:t>
-            </a:r>
-            <a:br/>
-            <a:r>
-              <a:rPr>
-                <a:solidFill>
-                  <a:srgbClr val="003B4F"/>
-                </a:solidFill>
-                <a:latin typeface="Courier"/>
-              </a:rPr>
-              <a:t>  </a:t>
-            </a:r>
-            <a:r>
-              <a:rPr>
-                <a:solidFill>
-                  <a:srgbClr val="4758AB"/>
-                </a:solidFill>
-                <a:latin typeface="Courier"/>
-              </a:rPr>
-              <a:t>skim</a:t>
-            </a:r>
-            <a:r>
-              <a:rPr>
-                <a:solidFill>
-                  <a:srgbClr val="003B4F"/>
-                </a:solidFill>
-                <a:latin typeface="Courier"/>
-              </a:rPr>
-              <a:t>()</a:t>
+              <a:rPr b="1"/>
+              <a:t>We will cover:</a:t>
+            </a:r>
+            <a:r>
+              <a:rPr/>
+              <a:t> </a:t>
+            </a:r>
+            <a:r>
+              <a:rPr>
+                <a:latin typeface="Courier"/>
+              </a:rPr>
+              <a:t>group_by()</a:t>
+            </a:r>
+            <a:r>
+              <a:rPr/>
+              <a:t> + </a:t>
+            </a:r>
+            <a:r>
+              <a:rPr>
+                <a:latin typeface="Courier"/>
+              </a:rPr>
+              <a:t>summary_stats()</a:t>
+            </a:r>
+            <a:r>
+              <a:rPr/>
+              <a:t> for every group at once, fast overviews with </a:t>
+            </a:r>
+            <a:r>
+              <a:rPr>
+                <a:latin typeface="Courier"/>
+              </a:rPr>
+              <a:t>skimr</a:t>
+            </a:r>
+            <a:r>
+              <a:rPr/>
+              <a:t>, and — if time allows — </a:t>
+            </a:r>
+            <a:r>
+              <a:rPr>
+                <a:latin typeface="Courier"/>
+              </a:rPr>
+              <a:t>across()</a:t>
+            </a:r>
+            <a:r>
+              <a:rPr/>
+              <a:t> for many columns at once.</a:t>
             </a:r>
           </a:p>
           <a:p>
@@ -7939,40 +8414,7 @@
             </a:pPr>
             <a:r>
               <a:rPr b="1"/>
-              <a:t>Variable type: numeric</a:t>
-            </a:r>
-          </a:p>
-          <a:p>
-            <a:pPr lvl="0" indent="0" marL="0">
-              <a:buNone/>
-            </a:pPr>
-            <a:r>
-              <a:rPr>
-                <a:latin typeface="Courier"/>
-              </a:rPr>
-              <a:t>skim()</a:t>
-            </a:r>
-            <a:r>
-              <a:rPr/>
-              <a:t> is your fastest </a:t>
-            </a:r>
-            <a:r>
-              <a:rPr b="1"/>
-              <a:t>first look</a:t>
-            </a:r>
-            <a:r>
-              <a:rPr/>
-              <a:t> — </a:t>
-            </a:r>
-            <a:r>
-              <a:rPr>
-                <a:latin typeface="Courier"/>
-              </a:rPr>
-              <a:t>n_missing</a:t>
-            </a:r>
-            <a:r>
-              <a:rPr/>
-              <a:t>, mean, SD, percentiles, and a mini histogram, per group, in one line.</a:t>
+              <a:t>🛑 After this chunk: Activity Parts 4–6.</a:t>
             </a:r>
           </a:p>
         </p:txBody>
@@ -7983,6 +8425,377 @@
 </file>
 
 <file path=ppt/slides/slide23.xml><?xml version="1.0" encoding="utf-8"?>
+<p:sld xmlns:a="http://schemas.openxmlformats.org/drawingml/2006/main" xmlns:r="http://schemas.openxmlformats.org/officeDocument/2006/relationships" xmlns:p="http://schemas.openxmlformats.org/presentationml/2006/main">
+  <p:cSld>
+    <p:spTree>
+      <p:nvGrpSpPr>
+        <p:cNvPr id="1" name=""/>
+        <p:cNvGrpSpPr/>
+        <p:nvPr/>
+      </p:nvGrpSpPr>
+      <p:grpSpPr>
+        <a:xfrm>
+          <a:off x="0" y="0"/>
+          <a:ext cx="0" cy="0"/>
+          <a:chOff x="0" y="0"/>
+          <a:chExt cx="0" cy="0"/>
+        </a:xfrm>
+      </p:grpSpPr>
+      <p:sp>
+        <p:nvSpPr>
+          <p:cNvPr id="2" name="Title 1"/>
+          <p:cNvSpPr>
+            <a:spLocks noGrp="1"/>
+          </p:cNvSpPr>
+          <p:nvPr>
+            <p:ph type="title"/>
+          </p:nvPr>
+        </p:nvSpPr>
+        <p:spPr>
+          <a:xfrm>
+            <a:off x="0" y="0"/>
+            <a:ext cx="9144000" cy="582780"/>
+          </a:xfrm>
+        </p:spPr>
+        <p:txBody>
+          <a:bodyPr/>
+          <a:lstStyle/>
+          <a:p>
+            <a:pPr lvl="0" indent="0" marL="0">
+              <a:buNone/>
+            </a:pPr>
+            <a:r>
+              <a:rPr/>
+              <a:t>Stats the Tidy Way — </a:t>
+            </a:r>
+            <a:r>
+              <a:rPr>
+                <a:latin typeface="Courier"/>
+              </a:rPr>
+              <a:t>group_by()</a:t>
+            </a:r>
+            <a:r>
+              <a:rPr/>
+              <a:t> + </a:t>
+            </a:r>
+            <a:r>
+              <a:rPr>
+                <a:latin typeface="Courier"/>
+              </a:rPr>
+              <a:t>summary_stats()</a:t>
+            </a:r>
+          </a:p>
+        </p:txBody>
+      </p:sp>
+      <p:sp>
+        <p:nvSpPr>
+          <p:cNvPr id="3" name="Content Placeholder 2"/>
+          <p:cNvSpPr>
+            <a:spLocks noGrp="1"/>
+          </p:cNvSpPr>
+          <p:nvPr>
+            <p:ph idx="1"/>
+          </p:nvPr>
+        </p:nvSpPr>
+        <p:spPr/>
+        <p:txBody>
+          <a:bodyPr/>
+          <a:lstStyle/>
+          <a:p>
+            <a:pPr lvl="0" indent="0" marL="1270000">
+              <a:buNone/>
+            </a:pPr>
+            <a:r>
+              <a:rPr sz="2000" b="1"/>
+              <a:t>Note</a:t>
+            </a:r>
+          </a:p>
+          <a:p>
+            <a:pPr lvl="0" indent="0" marL="1270000">
+              <a:buNone/>
+            </a:pPr>
+            <a:r>
+              <a:rPr sz="2000" b="1"/>
+              <a:t>🔮 Predict first:</a:t>
+            </a:r>
+            <a:r>
+              <a:rPr sz="2000"/>
+              <a:t> How many </a:t>
+            </a:r>
+            <a:r>
+              <a:rPr sz="2000" b="1"/>
+              <a:t>rows</a:t>
+            </a:r>
+            <a:r>
+              <a:rPr sz="2000"/>
+              <a:t> will this return? (Hint: how many values does </a:t>
+            </a:r>
+            <a:r>
+              <a:rPr sz="2000">
+                <a:latin typeface="Courier"/>
+              </a:rPr>
+              <a:t>shade</a:t>
+            </a:r>
+            <a:r>
+              <a:rPr sz="2000"/>
+              <a:t> take?) Predict the number before you run it.</a:t>
+            </a:r>
+          </a:p>
+        </p:txBody>
+      </p:sp>
+    </p:spTree>
+  </p:cSld>
+</p:sld>
+</file>
+
+<file path=ppt/slides/slide24.xml><?xml version="1.0" encoding="utf-8"?>
+<p:sld xmlns:a="http://schemas.openxmlformats.org/drawingml/2006/main" xmlns:r="http://schemas.openxmlformats.org/officeDocument/2006/relationships" xmlns:p="http://schemas.openxmlformats.org/presentationml/2006/main">
+  <p:cSld>
+    <p:spTree>
+      <p:nvGrpSpPr>
+        <p:cNvPr id="1" name=""/>
+        <p:cNvGrpSpPr/>
+        <p:nvPr/>
+      </p:nvGrpSpPr>
+      <p:grpSpPr>
+        <a:xfrm>
+          <a:off x="0" y="0"/>
+          <a:ext cx="0" cy="0"/>
+          <a:chOff x="0" y="0"/>
+          <a:chExt cx="0" cy="0"/>
+        </a:xfrm>
+      </p:grpSpPr>
+      <p:sp>
+        <p:nvSpPr>
+          <p:cNvPr id="3" name="Content Placeholder 2"/>
+          <p:cNvSpPr>
+            <a:spLocks noGrp="1"/>
+          </p:cNvSpPr>
+          <p:nvPr>
+            <p:ph idx="1" sz="half"/>
+          </p:nvPr>
+        </p:nvSpPr>
+        <p:spPr/>
+        <p:txBody>
+          <a:bodyPr/>
+          <a:lstStyle/>
+          <a:p>
+            <a:pPr lvl="0" indent="0">
+              <a:buNone/>
+            </a:pPr>
+            <a:r>
+              <a:rPr>
+                <a:solidFill>
+                  <a:srgbClr val="5E5E5E"/>
+                </a:solidFill>
+                <a:latin typeface="Courier"/>
+              </a:rPr>
+              <a:t># Group first, then call the SAME function -------------</a:t>
+            </a:r>
+            <a:br/>
+            <a:r>
+              <a:rPr>
+                <a:solidFill>
+                  <a:srgbClr val="003B4F"/>
+                </a:solidFill>
+                <a:latin typeface="Courier"/>
+              </a:rPr>
+              <a:t>stats_df &lt;- leaf_df </a:t>
+            </a:r>
+            <a:r>
+              <a:rPr>
+                <a:solidFill>
+                  <a:srgbClr val="5E5E5E"/>
+                </a:solidFill>
+                <a:latin typeface="Courier"/>
+              </a:rPr>
+              <a:t>%&gt;%</a:t>
+            </a:r>
+            <a:br/>
+            <a:r>
+              <a:rPr>
+                <a:solidFill>
+                  <a:srgbClr val="003B4F"/>
+                </a:solidFill>
+                <a:latin typeface="Courier"/>
+              </a:rPr>
+              <a:t>  </a:t>
+            </a:r>
+            <a:r>
+              <a:rPr>
+                <a:solidFill>
+                  <a:srgbClr val="4758AB"/>
+                </a:solidFill>
+                <a:latin typeface="Courier"/>
+              </a:rPr>
+              <a:t>group_by</a:t>
+            </a:r>
+            <a:r>
+              <a:rPr>
+                <a:solidFill>
+                  <a:srgbClr val="003B4F"/>
+                </a:solidFill>
+                <a:latin typeface="Courier"/>
+              </a:rPr>
+              <a:t>(shade) </a:t>
+            </a:r>
+            <a:r>
+              <a:rPr>
+                <a:solidFill>
+                  <a:srgbClr val="5E5E5E"/>
+                </a:solidFill>
+                <a:latin typeface="Courier"/>
+              </a:rPr>
+              <a:t>%&gt;%</a:t>
+            </a:r>
+            <a:br/>
+            <a:r>
+              <a:rPr>
+                <a:solidFill>
+                  <a:srgbClr val="003B4F"/>
+                </a:solidFill>
+                <a:latin typeface="Courier"/>
+              </a:rPr>
+              <a:t>  </a:t>
+            </a:r>
+            <a:r>
+              <a:rPr>
+                <a:solidFill>
+                  <a:srgbClr val="4758AB"/>
+                </a:solidFill>
+                <a:latin typeface="Courier"/>
+              </a:rPr>
+              <a:t>summary_stats</a:t>
+            </a:r>
+            <a:r>
+              <a:rPr>
+                <a:solidFill>
+                  <a:srgbClr val="003B4F"/>
+                </a:solidFill>
+                <a:latin typeface="Courier"/>
+              </a:rPr>
+              <a:t>(mass_g)</a:t>
+            </a:r>
+            <a:br/>
+            <a:br/>
+            <a:r>
+              <a:rPr>
+                <a:solidFill>
+                  <a:srgbClr val="003B4F"/>
+                </a:solidFill>
+                <a:latin typeface="Courier"/>
+              </a:rPr>
+              <a:t>stats_df</a:t>
+            </a:r>
+          </a:p>
+          <a:p>
+            <a:pPr lvl="0" indent="0">
+              <a:buNone/>
+            </a:pPr>
+            <a:r>
+              <a:rPr>
+                <a:latin typeface="Courier"/>
+              </a:rPr>
+              <a:t># A tibble: 2 × 8
+  shade     n  mean variance    sd    se ci_lower ci_upper
+  &lt;chr&gt; &lt;int&gt; &lt;dbl&gt;    &lt;dbl&gt; &lt;dbl&gt; &lt;dbl&gt;    &lt;dbl&gt;    &lt;dbl&gt;
+1 shady    28  0.52     0.02  0.15  0.03     0.47     0.58
+2 sunny    25  0.51     0.04  0.21  0.04     0.42     0.59</a:t>
+            </a:r>
+          </a:p>
+        </p:txBody>
+      </p:sp>
+      <p:sp>
+        <p:nvSpPr>
+          <p:cNvPr id="4" name="Content Placeholder 3"/>
+          <p:cNvSpPr>
+            <a:spLocks noGrp="1"/>
+          </p:cNvSpPr>
+          <p:nvPr>
+            <p:ph idx="2" sz="half"/>
+          </p:nvPr>
+        </p:nvSpPr>
+        <p:spPr/>
+        <p:txBody>
+          <a:bodyPr/>
+          <a:lstStyle/>
+          <a:p>
+            <a:pPr lvl="0"/>
+            <a:r>
+              <a:rPr>
+                <a:latin typeface="Courier"/>
+              </a:rPr>
+              <a:t>group_by(shade)</a:t>
+            </a:r>
+            <a:r>
+              <a:rPr/>
+              <a:t> splits the data by the </a:t>
+            </a:r>
+            <a:r>
+              <a:rPr>
+                <a:latin typeface="Courier"/>
+              </a:rPr>
+              <a:t>shade</a:t>
+            </a:r>
+            <a:r>
+              <a:rPr/>
+              <a:t> column</a:t>
+            </a:r>
+          </a:p>
+          <a:p>
+            <a:pPr lvl="0"/>
+            <a:r>
+              <a:rPr>
+                <a:latin typeface="Courier"/>
+              </a:rPr>
+              <a:t>summary_stats()</a:t>
+            </a:r>
+            <a:r>
+              <a:rPr/>
+              <a:t> doesn’t change at all — it runs once per group</a:t>
+            </a:r>
+          </a:p>
+          <a:p>
+            <a:pPr lvl="0"/>
+            <a:r>
+              <a:rPr/>
+              <a:t>You get </a:t>
+            </a:r>
+            <a:r>
+              <a:rPr b="1"/>
+              <a:t>both groups, every statistic, in one clean table</a:t>
+            </a:r>
+          </a:p>
+          <a:p>
+            <a:pPr lvl="0" indent="0" marL="0">
+              <a:buNone/>
+            </a:pPr>
+            <a:r>
+              <a:rPr/>
+              <a:t>📖 </a:t>
+            </a:r>
+            <a:r>
+              <a:rPr>
+                <a:hlinkClick r:id="rId2"/>
+              </a:rPr>
+              <a:t>R4DS §3.5 — </a:t>
+            </a:r>
+            <a:r>
+              <a:rPr>
+                <a:hlinkClick r:id="rId3"/>
+                <a:latin typeface="Courier"/>
+              </a:rPr>
+              <a:t>summarize()</a:t>
+            </a:r>
+          </a:p>
+        </p:txBody>
+      </p:sp>
+    </p:spTree>
+  </p:cSld>
+</p:sld>
+</file>
+
+<file path=ppt/slides/slide25.xml><?xml version="1.0" encoding="utf-8"?>
 <p:sld xmlns:a="http://schemas.openxmlformats.org/drawingml/2006/main" xmlns:r="http://schemas.openxmlformats.org/officeDocument/2006/relationships" xmlns:p="http://schemas.openxmlformats.org/presentationml/2006/main">
   <p:cSld>
     <p:spTree>
@@ -8027,13 +8840,7 @@
             </a:pPr>
             <a:r>
               <a:rPr/>
-              <a:t>The Fast Way — </a:t>
-            </a:r>
-            <a:r>
-              <a:rPr>
-                <a:latin typeface="Courier"/>
-              </a:rPr>
-              <a:t>across()</a:t>
+              <a:t>Multiple Variables at Once</a:t>
             </a:r>
           </a:p>
         </p:txBody>
@@ -8063,25 +8870,35 @@
                 </a:solidFill>
                 <a:latin typeface="Courier"/>
               </a:rPr>
-              <a:t># Apply the SAME function to every numeric column -----</a:t>
+              <a:t># summary_stats() handles ONE variable, so for several</a:t>
             </a:r>
             <a:br/>
             <a:r>
               <a:rPr>
                 <a:solidFill>
-                  <a:srgbClr val="003B4F"/>
-                </a:solidFill>
-                <a:latin typeface="Courier"/>
-              </a:rPr>
-              <a:t>mean_all_df &lt;- leaf_df </a:t>
-            </a:r>
-            <a:r>
-              <a:rPr>
-                <a:solidFill>
                   <a:srgbClr val="5E5E5E"/>
                 </a:solidFill>
                 <a:latin typeface="Courier"/>
               </a:rPr>
+              <a:t># measurements at once we still write summarize() directly</a:t>
+            </a:r>
+            <a:br/>
+            <a:r>
+              <a:rPr>
+                <a:solidFill>
+                  <a:srgbClr val="003B4F"/>
+                </a:solidFill>
+                <a:latin typeface="Courier"/>
+              </a:rPr>
+              <a:t>size_stats_df &lt;- leaf_df </a:t>
+            </a:r>
+            <a:r>
+              <a:rPr>
+                <a:solidFill>
+                  <a:srgbClr val="5E5E5E"/>
+                </a:solidFill>
+                <a:latin typeface="Courier"/>
+              </a:rPr>
               <a:t>%&gt;%</a:t>
             </a:r>
             <a:br/>
@@ -8162,11 +8979,29 @@
             <a:r>
               <a:rPr>
                 <a:solidFill>
+                  <a:srgbClr val="657422"/>
+                </a:solidFill>
+                <a:latin typeface="Courier"/>
+              </a:rPr>
+              <a:t>n          =</a:t>
+            </a:r>
+            <a:r>
+              <a:rPr>
+                <a:solidFill>
+                  <a:srgbClr val="003B4F"/>
+                </a:solidFill>
+                <a:latin typeface="Courier"/>
+              </a:rPr>
+              <a:t> </a:t>
+            </a:r>
+            <a:r>
+              <a:rPr>
+                <a:solidFill>
                   <a:srgbClr val="4758AB"/>
                 </a:solidFill>
                 <a:latin typeface="Courier"/>
               </a:rPr>
-              <a:t>across</a:t>
+              <a:t>sum</a:t>
             </a:r>
             <a:r>
               <a:rPr>
@@ -8177,6 +9012,33 @@
               </a:rPr>
               <a:t>(</a:t>
             </a:r>
+            <a:r>
+              <a:rPr>
+                <a:solidFill>
+                  <a:srgbClr val="5E5E5E"/>
+                </a:solidFill>
+                <a:latin typeface="Courier"/>
+              </a:rPr>
+              <a:t>!</a:t>
+            </a:r>
+            <a:r>
+              <a:rPr>
+                <a:solidFill>
+                  <a:srgbClr val="4758AB"/>
+                </a:solidFill>
+                <a:latin typeface="Courier"/>
+              </a:rPr>
+              <a:t>is.na</a:t>
+            </a:r>
+            <a:r>
+              <a:rPr>
+                <a:solidFill>
+                  <a:srgbClr val="003B4F"/>
+                </a:solidFill>
+                <a:latin typeface="Courier"/>
+              </a:rPr>
+              <a:t>(mass_g)),</a:t>
+            </a:r>
             <a:br/>
             <a:r>
               <a:rPr>
@@ -8185,7 +9047,25 @@
                 </a:solidFill>
                 <a:latin typeface="Courier"/>
               </a:rPr>
-              <a:t>      </a:t>
+              <a:t>    </a:t>
+            </a:r>
+            <a:r>
+              <a:rPr>
+                <a:solidFill>
+                  <a:srgbClr val="657422"/>
+                </a:solidFill>
+                <a:latin typeface="Courier"/>
+              </a:rPr>
+              <a:t>mean_mass  =</a:t>
+            </a:r>
+            <a:r>
+              <a:rPr>
+                <a:solidFill>
+                  <a:srgbClr val="003B4F"/>
+                </a:solidFill>
+                <a:latin typeface="Courier"/>
+              </a:rPr>
+              <a:t> </a:t>
             </a:r>
             <a:r>
               <a:rPr>
@@ -8194,16 +9074,52 @@
                 </a:solidFill>
                 <a:latin typeface="Courier"/>
               </a:rPr>
-              <a:t>c</a:t>
-            </a:r>
-            <a:r>
-              <a:rPr>
-                <a:solidFill>
-                  <a:srgbClr val="003B4F"/>
-                </a:solidFill>
-                <a:latin typeface="Courier"/>
-              </a:rPr>
-              <a:t>(mass_g, petiole_mm, thickness_mm),</a:t>
+              <a:t>mean</a:t>
+            </a:r>
+            <a:r>
+              <a:rPr>
+                <a:solidFill>
+                  <a:srgbClr val="003B4F"/>
+                </a:solidFill>
+                <a:latin typeface="Courier"/>
+              </a:rPr>
+              <a:t>(mass_g, </a:t>
+            </a:r>
+            <a:r>
+              <a:rPr>
+                <a:solidFill>
+                  <a:srgbClr val="657422"/>
+                </a:solidFill>
+                <a:latin typeface="Courier"/>
+              </a:rPr>
+              <a:t>na.rm =</a:t>
+            </a:r>
+            <a:r>
+              <a:rPr>
+                <a:solidFill>
+                  <a:srgbClr val="003B4F"/>
+                </a:solidFill>
+                <a:latin typeface="Courier"/>
+              </a:rPr>
+              <a:t> </a:t>
+            </a:r>
+            <a:r>
+              <a:rPr>
+                <a:solidFill>
+                  <a:srgbClr val="8F5902"/>
+                </a:solidFill>
+                <a:latin typeface="Courier"/>
+              </a:rPr>
+              <a:t>TRUE</a:t>
+            </a:r>
+            <a:r>
+              <a:rPr>
+                <a:solidFill>
+                  <a:srgbClr val="003B4F"/>
+                </a:solidFill>
+                <a:latin typeface="Courier"/>
+              </a:rPr>
+              <a:t>),</a:t>
             </a:r>
             <a:br/>
             <a:r>
@@ -8213,16 +9129,16 @@
                 </a:solidFill>
                 <a:latin typeface="Courier"/>
               </a:rPr>
-              <a:t>      </a:t>
-            </a:r>
-            <a:r>
-              <a:rPr>
-                <a:solidFill>
-                  <a:srgbClr val="5E5E5E"/>
-                </a:solidFill>
-                <a:latin typeface="Courier"/>
-              </a:rPr>
-              <a:t>~</a:t>
+              <a:t>    </a:t>
+            </a:r>
+            <a:r>
+              <a:rPr>
+                <a:solidFill>
+                  <a:srgbClr val="657422"/>
+                </a:solidFill>
+                <a:latin typeface="Courier"/>
+              </a:rPr>
+              <a:t>mean_pet   =</a:t>
             </a:r>
             <a:r>
               <a:rPr>
@@ -8240,16 +9156,80 @@
                 </a:solidFill>
                 <a:latin typeface="Courier"/>
               </a:rPr>
-              <a:t>round</a:t>
-            </a:r>
-            <a:r>
-              <a:rPr>
-                <a:solidFill>
-                  <a:srgbClr val="003B4F"/>
-                </a:solidFill>
-                <a:latin typeface="Courier"/>
-              </a:rPr>
-              <a:t>(</a:t>
+              <a:t>mean</a:t>
+            </a:r>
+            <a:r>
+              <a:rPr>
+                <a:solidFill>
+                  <a:srgbClr val="003B4F"/>
+                </a:solidFill>
+                <a:latin typeface="Courier"/>
+              </a:rPr>
+              <a:t>(petiole_mm, </a:t>
+            </a:r>
+            <a:r>
+              <a:rPr>
+                <a:solidFill>
+                  <a:srgbClr val="657422"/>
+                </a:solidFill>
+                <a:latin typeface="Courier"/>
+              </a:rPr>
+              <a:t>na.rm =</a:t>
+            </a:r>
+            <a:r>
+              <a:rPr>
+                <a:solidFill>
+                  <a:srgbClr val="003B4F"/>
+                </a:solidFill>
+                <a:latin typeface="Courier"/>
+              </a:rPr>
+              <a:t> </a:t>
+            </a:r>
+            <a:r>
+              <a:rPr>
+                <a:solidFill>
+                  <a:srgbClr val="8F5902"/>
+                </a:solidFill>
+                <a:latin typeface="Courier"/>
+              </a:rPr>
+              <a:t>TRUE</a:t>
+            </a:r>
+            <a:r>
+              <a:rPr>
+                <a:solidFill>
+                  <a:srgbClr val="003B4F"/>
+                </a:solidFill>
+                <a:latin typeface="Courier"/>
+              </a:rPr>
+              <a:t>),</a:t>
+            </a:r>
+            <a:br/>
+            <a:r>
+              <a:rPr>
+                <a:solidFill>
+                  <a:srgbClr val="003B4F"/>
+                </a:solidFill>
+                <a:latin typeface="Courier"/>
+              </a:rPr>
+              <a:t>    </a:t>
+            </a:r>
+            <a:r>
+              <a:rPr>
+                <a:solidFill>
+                  <a:srgbClr val="657422"/>
+                </a:solidFill>
+                <a:latin typeface="Courier"/>
+              </a:rPr>
+              <a:t>mean_thick =</a:t>
+            </a:r>
+            <a:r>
+              <a:rPr>
+                <a:solidFill>
+                  <a:srgbClr val="003B4F"/>
+                </a:solidFill>
+                <a:latin typeface="Courier"/>
+              </a:rPr>
+              <a:t> </a:t>
             </a:r>
             <a:r>
               <a:rPr>
@@ -8267,7 +9247,7 @@
                 </a:solidFill>
                 <a:latin typeface="Courier"/>
               </a:rPr>
-              <a:t>(.x, </a:t>
+              <a:t>(thickness_mm, </a:t>
             </a:r>
             <a:r>
               <a:rPr>
@@ -8303,35 +9283,7 @@
                 </a:solidFill>
                 <a:latin typeface="Courier"/>
               </a:rPr>
-              <a:t>), </a:t>
-            </a:r>
-            <a:r>
-              <a:rPr>
-                <a:solidFill>
-                  <a:srgbClr val="AD0000"/>
-                </a:solidFill>
-                <a:latin typeface="Courier"/>
-              </a:rPr>
-              <a:t>3</a:t>
-            </a:r>
-            <a:r>
-              <a:rPr>
-                <a:solidFill>
-                  <a:srgbClr val="003B4F"/>
-                </a:solidFill>
-                <a:latin typeface="Courier"/>
-              </a:rPr>
               <a:t>)</a:t>
-            </a:r>
-            <a:br/>
-            <a:r>
-              <a:rPr>
-                <a:solidFill>
-                  <a:srgbClr val="003B4F"/>
-                </a:solidFill>
-                <a:latin typeface="Courier"/>
-              </a:rPr>
-              <a:t>    )</a:t>
             </a:r>
             <a:br/>
             <a:r>
@@ -8352,7 +9304,7 @@
                 </a:solidFill>
                 <a:latin typeface="Courier"/>
               </a:rPr>
-              <a:t>mean_all_df</a:t>
+              <a:t>size_stats_df</a:t>
             </a:r>
           </a:p>
           <a:p>
@@ -8363,11 +9315,11 @@
               <a:rPr>
                 <a:latin typeface="Courier"/>
               </a:rPr>
-              <a:t># A tibble: 2 × 4
-  shade mass_g petiole_mm thickness_mm
-  &lt;chr&gt;  &lt;dbl&gt;      &lt;dbl&gt;        &lt;dbl&gt;
-1 shady  0.523       56.7        0.356
-2 sunny  0.505       54.4        0.29 </a:t>
+              <a:t># A tibble: 2 × 5
+  shade     n mean_mass mean_pet mean_thick
+  &lt;chr&gt; &lt;int&gt;     &lt;dbl&gt;    &lt;dbl&gt;      &lt;dbl&gt;
+1 shady    28     0.523     56.7      0.356
+2 sunny    25     0.505     54.4      0.290</a:t>
             </a:r>
           </a:p>
         </p:txBody>
@@ -8387,102 +9339,51 @@
           <a:bodyPr/>
           <a:lstStyle/>
           <a:p>
+            <a:pPr lvl="0" indent="0" marL="0">
+              <a:buNone/>
+            </a:pPr>
+            <a:r>
+              <a:rPr b="1"/>
+              <a:t>Do the numbers support our hypothesis?</a:t>
+            </a:r>
+          </a:p>
+          <a:p>
             <a:pPr lvl="0"/>
             <a:r>
-              <a:rPr>
-                <a:latin typeface="Courier"/>
-              </a:rPr>
-              <a:t>across(columns, function)</a:t>
-            </a:r>
-            <a:r>
-              <a:rPr/>
-              <a:t> applies one function to </a:t>
-            </a:r>
-            <a:r>
-              <a:rPr b="1"/>
-              <a:t>many columns</a:t>
-            </a:r>
-            <a:r>
-              <a:rPr/>
-              <a:t> at once</a:t>
+              <a:rPr/>
+              <a:t>Shady heavier? → check </a:t>
+            </a:r>
+            <a:r>
+              <a:rPr>
+                <a:latin typeface="Courier"/>
+              </a:rPr>
+              <a:t>mean_mass</a:t>
             </a:r>
           </a:p>
           <a:p>
             <a:pPr lvl="0"/>
             <a:r>
-              <a:rPr>
-                <a:latin typeface="Courier"/>
-              </a:rPr>
-              <a:t>.x</a:t>
-            </a:r>
-            <a:r>
-              <a:rPr/>
-              <a:t> is a stand-in for “whichever column we’re on right now”</a:t>
+              <a:rPr/>
+              <a:t>Shady leaves thicker? → check </a:t>
+            </a:r>
+            <a:r>
+              <a:rPr>
+                <a:latin typeface="Courier"/>
+              </a:rPr>
+              <a:t>mean_thick</a:t>
             </a:r>
           </a:p>
           <a:p>
             <a:pPr lvl="0"/>
             <a:r>
               <a:rPr/>
-              <a:t>Same idea as </a:t>
-            </a:r>
-            <a:r>
-              <a:rPr>
-                <a:latin typeface="Courier"/>
-              </a:rPr>
-              <a:t>mean_mass</a:t>
-            </a:r>
-            <a:r>
-              <a:rPr/>
-              <a:t>/</a:t>
-            </a:r>
-            <a:r>
-              <a:rPr>
-                <a:latin typeface="Courier"/>
-              </a:rPr>
-              <a:t>mean_thick</a:t>
-            </a:r>
-            <a:r>
-              <a:rPr/>
-              <a:t>/</a:t>
+              <a:t>Shady petioles longer? → check </a:t>
             </a:r>
             <a:r>
               <a:rPr>
                 <a:latin typeface="Courier"/>
               </a:rPr>
               <a:t>mean_pet</a:t>
-            </a:r>
-            <a:r>
-              <a:rPr/>
-              <a:t> above — just without typing each one out</a:t>
-            </a:r>
-          </a:p>
-          <a:p>
-            <a:pPr lvl="0" indent="0" marL="1270000">
-              <a:buNone/>
-            </a:pPr>
-            <a:r>
-              <a:rPr sz="2000" b="1"/>
-              <a:t>Tip</a:t>
-            </a:r>
-          </a:p>
-          <a:p>
-            <a:pPr lvl="0" indent="0" marL="1270000">
-              <a:buNone/>
-            </a:pPr>
-            <a:r>
-              <a:rPr sz="2000"/>
-              <a:t>Once you have more than 3–4 measurement columns, </a:t>
-            </a:r>
-            <a:r>
-              <a:rPr sz="2000">
-                <a:latin typeface="Courier"/>
-              </a:rPr>
-              <a:t>across()</a:t>
-            </a:r>
-            <a:r>
-              <a:rPr sz="2000"/>
-              <a:t> saves real typing — and real typos.</a:t>
             </a:r>
           </a:p>
         </p:txBody>
@@ -8492,7 +9393,7 @@
 </p:sld>
 </file>
 
-<file path=ppt/slides/slide24.xml><?xml version="1.0" encoding="utf-8"?>
+<file path=ppt/slides/slide26.xml><?xml version="1.0" encoding="utf-8"?>
 <p:sld xmlns:a="http://schemas.openxmlformats.org/drawingml/2006/main" xmlns:r="http://schemas.openxmlformats.org/officeDocument/2006/relationships" xmlns:p="http://schemas.openxmlformats.org/presentationml/2006/main">
   <p:cSld>
     <p:spTree>
@@ -8534,7 +9435,13 @@
             </a:pPr>
             <a:r>
               <a:rPr/>
-              <a:t>→ ACTIVITY 6 starts now</a:t>
+              <a:t>Fast Summaries with </a:t>
+            </a:r>
+            <a:r>
+              <a:rPr>
+                <a:latin typeface="Courier"/>
+              </a:rPr>
+              <a:t>skimr</a:t>
             </a:r>
           </a:p>
         </p:txBody>
@@ -8554,12 +9461,147 @@
           <a:bodyPr/>
           <a:lstStyle/>
           <a:p>
+            <a:pPr lvl="0" indent="0">
+              <a:buNone/>
+            </a:pPr>
+            <a:r>
+              <a:rPr>
+                <a:solidFill>
+                  <a:srgbClr val="5E5E5E"/>
+                </a:solidFill>
+                <a:latin typeface="Courier"/>
+              </a:rPr>
+              <a:t># skim() grouped by shade — mass only -------------------</a:t>
+            </a:r>
+            <a:br/>
+            <a:r>
+              <a:rPr>
+                <a:solidFill>
+                  <a:srgbClr val="003B4F"/>
+                </a:solidFill>
+                <a:latin typeface="Courier"/>
+              </a:rPr>
+              <a:t>leaf_df </a:t>
+            </a:r>
+            <a:r>
+              <a:rPr>
+                <a:solidFill>
+                  <a:srgbClr val="5E5E5E"/>
+                </a:solidFill>
+                <a:latin typeface="Courier"/>
+              </a:rPr>
+              <a:t>%&gt;%</a:t>
+            </a:r>
+            <a:br/>
+            <a:r>
+              <a:rPr>
+                <a:solidFill>
+                  <a:srgbClr val="003B4F"/>
+                </a:solidFill>
+                <a:latin typeface="Courier"/>
+              </a:rPr>
+              <a:t>  </a:t>
+            </a:r>
+            <a:r>
+              <a:rPr>
+                <a:solidFill>
+                  <a:srgbClr val="4758AB"/>
+                </a:solidFill>
+                <a:latin typeface="Courier"/>
+              </a:rPr>
+              <a:t>select</a:t>
+            </a:r>
+            <a:r>
+              <a:rPr>
+                <a:solidFill>
+                  <a:srgbClr val="003B4F"/>
+                </a:solidFill>
+                <a:latin typeface="Courier"/>
+              </a:rPr>
+              <a:t>(shade, mass_g) </a:t>
+            </a:r>
+            <a:r>
+              <a:rPr>
+                <a:solidFill>
+                  <a:srgbClr val="5E5E5E"/>
+                </a:solidFill>
+                <a:latin typeface="Courier"/>
+              </a:rPr>
+              <a:t>%&gt;%</a:t>
+            </a:r>
+            <a:br/>
+            <a:r>
+              <a:rPr>
+                <a:solidFill>
+                  <a:srgbClr val="003B4F"/>
+                </a:solidFill>
+                <a:latin typeface="Courier"/>
+              </a:rPr>
+              <a:t>  </a:t>
+            </a:r>
+            <a:r>
+              <a:rPr>
+                <a:solidFill>
+                  <a:srgbClr val="4758AB"/>
+                </a:solidFill>
+                <a:latin typeface="Courier"/>
+              </a:rPr>
+              <a:t>group_by</a:t>
+            </a:r>
+            <a:r>
+              <a:rPr>
+                <a:solidFill>
+                  <a:srgbClr val="003B4F"/>
+                </a:solidFill>
+                <a:latin typeface="Courier"/>
+              </a:rPr>
+              <a:t>(shade) </a:t>
+            </a:r>
+            <a:r>
+              <a:rPr>
+                <a:solidFill>
+                  <a:srgbClr val="5E5E5E"/>
+                </a:solidFill>
+                <a:latin typeface="Courier"/>
+              </a:rPr>
+              <a:t>%&gt;%</a:t>
+            </a:r>
+            <a:br/>
+            <a:r>
+              <a:rPr>
+                <a:solidFill>
+                  <a:srgbClr val="003B4F"/>
+                </a:solidFill>
+                <a:latin typeface="Courier"/>
+              </a:rPr>
+              <a:t>  </a:t>
+            </a:r>
+            <a:r>
+              <a:rPr>
+                <a:solidFill>
+                  <a:srgbClr val="4758AB"/>
+                </a:solidFill>
+                <a:latin typeface="Courier"/>
+              </a:rPr>
+              <a:t>skim</a:t>
+            </a:r>
+            <a:r>
+              <a:rPr>
+                <a:solidFill>
+                  <a:srgbClr val="003B4F"/>
+                </a:solidFill>
+                <a:latin typeface="Courier"/>
+              </a:rPr>
+              <a:t>()</a:t>
+            </a:r>
+          </a:p>
+          <a:p>
             <a:pPr lvl="0" indent="0" marL="0">
               <a:buNone/>
             </a:pPr>
             <a:r>
               <a:rPr b="1"/>
-              <a:t>🛑 Go to Activity 6 — Summary Statistics</a:t>
+              <a:t>Variable type: numeric</a:t>
             </a:r>
           </a:p>
           <a:p>
@@ -8567,8 +9609,32 @@
               <a:buNone/>
             </a:pPr>
             <a:r>
-              <a:rPr/>
-              <a:t>Close the slides. Finish Activity Parts 4–6, then Part 7 (review and checkpoint) on your own.</a:t>
+              <a:rPr>
+                <a:latin typeface="Courier"/>
+              </a:rPr>
+              <a:t>skim()</a:t>
+            </a:r>
+            <a:r>
+              <a:rPr/>
+              <a:t> is your fastest </a:t>
+            </a:r>
+            <a:r>
+              <a:rPr b="1"/>
+              <a:t>first look</a:t>
+            </a:r>
+            <a:r>
+              <a:rPr/>
+              <a:t> — </a:t>
+            </a:r>
+            <a:r>
+              <a:rPr>
+                <a:latin typeface="Courier"/>
+              </a:rPr>
+              <a:t>n_missing</a:t>
+            </a:r>
+            <a:r>
+              <a:rPr/>
+              <a:t>, mean, SD, percentiles, and a mini histogram, per group, in one line.</a:t>
             </a:r>
           </a:p>
         </p:txBody>
@@ -8578,7 +9644,567 @@
 </p:sld>
 </file>
 
-<file path=ppt/slides/slide25.xml><?xml version="1.0" encoding="utf-8"?>
+<file path=ppt/slides/slide27.xml><?xml version="1.0" encoding="utf-8"?>
+<p:sld xmlns:a="http://schemas.openxmlformats.org/drawingml/2006/main" xmlns:r="http://schemas.openxmlformats.org/officeDocument/2006/relationships" xmlns:p="http://schemas.openxmlformats.org/presentationml/2006/main">
+  <p:cSld>
+    <p:spTree>
+      <p:nvGrpSpPr>
+        <p:cNvPr id="1" name=""/>
+        <p:cNvGrpSpPr/>
+        <p:nvPr/>
+      </p:nvGrpSpPr>
+      <p:grpSpPr>
+        <a:xfrm>
+          <a:off x="0" y="0"/>
+          <a:ext cx="0" cy="0"/>
+          <a:chOff x="0" y="0"/>
+          <a:chExt cx="0" cy="0"/>
+        </a:xfrm>
+      </p:grpSpPr>
+      <p:sp>
+        <p:nvSpPr>
+          <p:cNvPr id="2" name="Title 1"/>
+          <p:cNvSpPr>
+            <a:spLocks noGrp="1"/>
+          </p:cNvSpPr>
+          <p:nvPr>
+            <p:ph type="title"/>
+          </p:nvPr>
+        </p:nvSpPr>
+        <p:spPr>
+          <a:xfrm>
+            <a:off x="0" y="0"/>
+            <a:ext cx="9144000" cy="602780"/>
+          </a:xfrm>
+          <a:solidFill>
+            <a:srgbClr val="1A1A2E"/>
+          </a:solidFill>
+        </p:spPr>
+        <p:txBody>
+          <a:bodyPr/>
+          <a:lstStyle/>
+          <a:p>
+            <a:pPr lvl="0" indent="0" marL="0">
+              <a:buNone/>
+            </a:pPr>
+            <a:r>
+              <a:rPr/>
+              <a:t>The Fast Way — </a:t>
+            </a:r>
+            <a:r>
+              <a:rPr>
+                <a:latin typeface="Courier"/>
+              </a:rPr>
+              <a:t>across()</a:t>
+            </a:r>
+          </a:p>
+        </p:txBody>
+      </p:sp>
+      <p:sp>
+        <p:nvSpPr>
+          <p:cNvPr id="3" name="Content Placeholder 2"/>
+          <p:cNvSpPr>
+            <a:spLocks noGrp="1"/>
+          </p:cNvSpPr>
+          <p:nvPr>
+            <p:ph idx="1" sz="half"/>
+          </p:nvPr>
+        </p:nvSpPr>
+        <p:spPr/>
+        <p:txBody>
+          <a:bodyPr/>
+          <a:lstStyle/>
+          <a:p>
+            <a:pPr lvl="0" indent="0">
+              <a:buNone/>
+            </a:pPr>
+            <a:r>
+              <a:rPr>
+                <a:solidFill>
+                  <a:srgbClr val="5E5E5E"/>
+                </a:solidFill>
+                <a:latin typeface="Courier"/>
+              </a:rPr>
+              <a:t># Apply the SAME function to every numeric column -----</a:t>
+            </a:r>
+            <a:br/>
+            <a:r>
+              <a:rPr>
+                <a:solidFill>
+                  <a:srgbClr val="003B4F"/>
+                </a:solidFill>
+                <a:latin typeface="Courier"/>
+              </a:rPr>
+              <a:t>mean_all_df &lt;- leaf_df </a:t>
+            </a:r>
+            <a:r>
+              <a:rPr>
+                <a:solidFill>
+                  <a:srgbClr val="5E5E5E"/>
+                </a:solidFill>
+                <a:latin typeface="Courier"/>
+              </a:rPr>
+              <a:t>%&gt;%</a:t>
+            </a:r>
+            <a:br/>
+            <a:r>
+              <a:rPr>
+                <a:solidFill>
+                  <a:srgbClr val="003B4F"/>
+                </a:solidFill>
+                <a:latin typeface="Courier"/>
+              </a:rPr>
+              <a:t>  </a:t>
+            </a:r>
+            <a:r>
+              <a:rPr>
+                <a:solidFill>
+                  <a:srgbClr val="4758AB"/>
+                </a:solidFill>
+                <a:latin typeface="Courier"/>
+              </a:rPr>
+              <a:t>group_by</a:t>
+            </a:r>
+            <a:r>
+              <a:rPr>
+                <a:solidFill>
+                  <a:srgbClr val="003B4F"/>
+                </a:solidFill>
+                <a:latin typeface="Courier"/>
+              </a:rPr>
+              <a:t>(shade) </a:t>
+            </a:r>
+            <a:r>
+              <a:rPr>
+                <a:solidFill>
+                  <a:srgbClr val="5E5E5E"/>
+                </a:solidFill>
+                <a:latin typeface="Courier"/>
+              </a:rPr>
+              <a:t>%&gt;%</a:t>
+            </a:r>
+            <a:br/>
+            <a:r>
+              <a:rPr>
+                <a:solidFill>
+                  <a:srgbClr val="003B4F"/>
+                </a:solidFill>
+                <a:latin typeface="Courier"/>
+              </a:rPr>
+              <a:t>  </a:t>
+            </a:r>
+            <a:r>
+              <a:rPr>
+                <a:solidFill>
+                  <a:srgbClr val="4758AB"/>
+                </a:solidFill>
+                <a:latin typeface="Courier"/>
+              </a:rPr>
+              <a:t>summarize</a:t>
+            </a:r>
+            <a:r>
+              <a:rPr>
+                <a:solidFill>
+                  <a:srgbClr val="003B4F"/>
+                </a:solidFill>
+                <a:latin typeface="Courier"/>
+              </a:rPr>
+              <a:t>(</a:t>
+            </a:r>
+            <a:br/>
+            <a:r>
+              <a:rPr>
+                <a:solidFill>
+                  <a:srgbClr val="003B4F"/>
+                </a:solidFill>
+                <a:latin typeface="Courier"/>
+              </a:rPr>
+              <a:t>    </a:t>
+            </a:r>
+            <a:r>
+              <a:rPr>
+                <a:solidFill>
+                  <a:srgbClr val="4758AB"/>
+                </a:solidFill>
+                <a:latin typeface="Courier"/>
+              </a:rPr>
+              <a:t>across</a:t>
+            </a:r>
+            <a:r>
+              <a:rPr>
+                <a:solidFill>
+                  <a:srgbClr val="003B4F"/>
+                </a:solidFill>
+                <a:latin typeface="Courier"/>
+              </a:rPr>
+              <a:t>(</a:t>
+            </a:r>
+            <a:br/>
+            <a:r>
+              <a:rPr>
+                <a:solidFill>
+                  <a:srgbClr val="003B4F"/>
+                </a:solidFill>
+                <a:latin typeface="Courier"/>
+              </a:rPr>
+              <a:t>      </a:t>
+            </a:r>
+            <a:r>
+              <a:rPr>
+                <a:solidFill>
+                  <a:srgbClr val="4758AB"/>
+                </a:solidFill>
+                <a:latin typeface="Courier"/>
+              </a:rPr>
+              <a:t>c</a:t>
+            </a:r>
+            <a:r>
+              <a:rPr>
+                <a:solidFill>
+                  <a:srgbClr val="003B4F"/>
+                </a:solidFill>
+                <a:latin typeface="Courier"/>
+              </a:rPr>
+              <a:t>(mass_g, petiole_mm, thickness_mm),</a:t>
+            </a:r>
+            <a:br/>
+            <a:r>
+              <a:rPr>
+                <a:solidFill>
+                  <a:srgbClr val="003B4F"/>
+                </a:solidFill>
+                <a:latin typeface="Courier"/>
+              </a:rPr>
+              <a:t>      </a:t>
+            </a:r>
+            <a:r>
+              <a:rPr>
+                <a:solidFill>
+                  <a:srgbClr val="5E5E5E"/>
+                </a:solidFill>
+                <a:latin typeface="Courier"/>
+              </a:rPr>
+              <a:t>~</a:t>
+            </a:r>
+            <a:r>
+              <a:rPr>
+                <a:solidFill>
+                  <a:srgbClr val="003B4F"/>
+                </a:solidFill>
+                <a:latin typeface="Courier"/>
+              </a:rPr>
+              <a:t> </a:t>
+            </a:r>
+            <a:r>
+              <a:rPr>
+                <a:solidFill>
+                  <a:srgbClr val="4758AB"/>
+                </a:solidFill>
+                <a:latin typeface="Courier"/>
+              </a:rPr>
+              <a:t>mean</a:t>
+            </a:r>
+            <a:r>
+              <a:rPr>
+                <a:solidFill>
+                  <a:srgbClr val="003B4F"/>
+                </a:solidFill>
+                <a:latin typeface="Courier"/>
+              </a:rPr>
+              <a:t>(.x, </a:t>
+            </a:r>
+            <a:r>
+              <a:rPr>
+                <a:solidFill>
+                  <a:srgbClr val="657422"/>
+                </a:solidFill>
+                <a:latin typeface="Courier"/>
+              </a:rPr>
+              <a:t>na.rm =</a:t>
+            </a:r>
+            <a:r>
+              <a:rPr>
+                <a:solidFill>
+                  <a:srgbClr val="003B4F"/>
+                </a:solidFill>
+                <a:latin typeface="Courier"/>
+              </a:rPr>
+              <a:t> </a:t>
+            </a:r>
+            <a:r>
+              <a:rPr>
+                <a:solidFill>
+                  <a:srgbClr val="8F5902"/>
+                </a:solidFill>
+                <a:latin typeface="Courier"/>
+              </a:rPr>
+              <a:t>TRUE</a:t>
+            </a:r>
+            <a:r>
+              <a:rPr>
+                <a:solidFill>
+                  <a:srgbClr val="003B4F"/>
+                </a:solidFill>
+                <a:latin typeface="Courier"/>
+              </a:rPr>
+              <a:t>)</a:t>
+            </a:r>
+            <a:br/>
+            <a:r>
+              <a:rPr>
+                <a:solidFill>
+                  <a:srgbClr val="003B4F"/>
+                </a:solidFill>
+                <a:latin typeface="Courier"/>
+              </a:rPr>
+              <a:t>    )</a:t>
+            </a:r>
+            <a:br/>
+            <a:r>
+              <a:rPr>
+                <a:solidFill>
+                  <a:srgbClr val="003B4F"/>
+                </a:solidFill>
+                <a:latin typeface="Courier"/>
+              </a:rPr>
+              <a:t>  )</a:t>
+            </a:r>
+            <a:br/>
+            <a:br/>
+            <a:r>
+              <a:rPr>
+                <a:solidFill>
+                  <a:srgbClr val="003B4F"/>
+                </a:solidFill>
+                <a:latin typeface="Courier"/>
+              </a:rPr>
+              <a:t>mean_all_df</a:t>
+            </a:r>
+          </a:p>
+          <a:p>
+            <a:pPr lvl="0" indent="0">
+              <a:buNone/>
+            </a:pPr>
+            <a:r>
+              <a:rPr>
+                <a:latin typeface="Courier"/>
+              </a:rPr>
+              <a:t># A tibble: 2 × 4
+  shade mass_g petiole_mm thickness_mm
+  &lt;chr&gt;  &lt;dbl&gt;      &lt;dbl&gt;        &lt;dbl&gt;
+1 shady  0.523       56.7        0.356
+2 sunny  0.505       54.4        0.290</a:t>
+            </a:r>
+          </a:p>
+        </p:txBody>
+      </p:sp>
+      <p:sp>
+        <p:nvSpPr>
+          <p:cNvPr id="4" name="Content Placeholder 3"/>
+          <p:cNvSpPr>
+            <a:spLocks noGrp="1"/>
+          </p:cNvSpPr>
+          <p:nvPr>
+            <p:ph idx="2" sz="half"/>
+          </p:nvPr>
+        </p:nvSpPr>
+        <p:spPr/>
+        <p:txBody>
+          <a:bodyPr/>
+          <a:lstStyle/>
+          <a:p>
+            <a:pPr lvl="0"/>
+            <a:r>
+              <a:rPr>
+                <a:latin typeface="Courier"/>
+              </a:rPr>
+              <a:t>across(columns, function)</a:t>
+            </a:r>
+            <a:r>
+              <a:rPr/>
+              <a:t> applies one function to </a:t>
+            </a:r>
+            <a:r>
+              <a:rPr b="1"/>
+              <a:t>many columns</a:t>
+            </a:r>
+            <a:r>
+              <a:rPr/>
+              <a:t> at once</a:t>
+            </a:r>
+          </a:p>
+          <a:p>
+            <a:pPr lvl="0"/>
+            <a:r>
+              <a:rPr>
+                <a:latin typeface="Courier"/>
+              </a:rPr>
+              <a:t>.x</a:t>
+            </a:r>
+            <a:r>
+              <a:rPr/>
+              <a:t> is a stand-in for “whichever column we’re on right now”</a:t>
+            </a:r>
+          </a:p>
+          <a:p>
+            <a:pPr lvl="0"/>
+            <a:r>
+              <a:rPr/>
+              <a:t>Same idea as </a:t>
+            </a:r>
+            <a:r>
+              <a:rPr>
+                <a:latin typeface="Courier"/>
+              </a:rPr>
+              <a:t>mean_mass</a:t>
+            </a:r>
+            <a:r>
+              <a:rPr/>
+              <a:t>/</a:t>
+            </a:r>
+            <a:r>
+              <a:rPr>
+                <a:latin typeface="Courier"/>
+              </a:rPr>
+              <a:t>mean_thick</a:t>
+            </a:r>
+            <a:r>
+              <a:rPr/>
+              <a:t>/</a:t>
+            </a:r>
+            <a:r>
+              <a:rPr>
+                <a:latin typeface="Courier"/>
+              </a:rPr>
+              <a:t>mean_pet</a:t>
+            </a:r>
+            <a:r>
+              <a:rPr/>
+              <a:t> above — just without typing each one out</a:t>
+            </a:r>
+          </a:p>
+          <a:p>
+            <a:pPr lvl="0" indent="0" marL="1270000">
+              <a:buNone/>
+            </a:pPr>
+            <a:r>
+              <a:rPr sz="2000" b="1"/>
+              <a:t>Tip</a:t>
+            </a:r>
+          </a:p>
+          <a:p>
+            <a:pPr lvl="0" indent="0" marL="1270000">
+              <a:buNone/>
+            </a:pPr>
+            <a:r>
+              <a:rPr sz="2000"/>
+              <a:t>Once you have more than 3–4 measurement columns, </a:t>
+            </a:r>
+            <a:r>
+              <a:rPr sz="2000">
+                <a:latin typeface="Courier"/>
+              </a:rPr>
+              <a:t>across()</a:t>
+            </a:r>
+            <a:r>
+              <a:rPr sz="2000"/>
+              <a:t> saves real typing — and real typos.</a:t>
+            </a:r>
+          </a:p>
+        </p:txBody>
+      </p:sp>
+    </p:spTree>
+  </p:cSld>
+</p:sld>
+</file>
+
+<file path=ppt/slides/slide28.xml><?xml version="1.0" encoding="utf-8"?>
+<p:sld xmlns:a="http://schemas.openxmlformats.org/drawingml/2006/main" xmlns:r="http://schemas.openxmlformats.org/officeDocument/2006/relationships" xmlns:p="http://schemas.openxmlformats.org/presentationml/2006/main">
+  <p:cSld>
+    <p:spTree>
+      <p:nvGrpSpPr>
+        <p:cNvPr id="1" name=""/>
+        <p:cNvGrpSpPr/>
+        <p:nvPr/>
+      </p:nvGrpSpPr>
+      <p:grpSpPr>
+        <a:xfrm>
+          <a:off x="0" y="0"/>
+          <a:ext cx="0" cy="0"/>
+          <a:chOff x="0" y="0"/>
+          <a:chExt cx="0" cy="0"/>
+        </a:xfrm>
+      </p:grpSpPr>
+      <p:sp>
+        <p:nvSpPr>
+          <p:cNvPr id="2" name="Title 1"/>
+          <p:cNvSpPr>
+            <a:spLocks noGrp="1"/>
+          </p:cNvSpPr>
+          <p:nvPr>
+            <p:ph type="title"/>
+          </p:nvPr>
+        </p:nvSpPr>
+        <p:spPr>
+          <a:xfrm>
+            <a:off x="0" y="0"/>
+            <a:ext cx="9144000" cy="582780"/>
+          </a:xfrm>
+        </p:spPr>
+        <p:txBody>
+          <a:bodyPr/>
+          <a:lstStyle/>
+          <a:p>
+            <a:pPr lvl="0" indent="0" marL="0">
+              <a:buNone/>
+            </a:pPr>
+            <a:r>
+              <a:rPr/>
+              <a:t>→ ACTIVITY 6 starts now</a:t>
+            </a:r>
+          </a:p>
+        </p:txBody>
+      </p:sp>
+      <p:sp>
+        <p:nvSpPr>
+          <p:cNvPr id="3" name="Content Placeholder 2"/>
+          <p:cNvSpPr>
+            <a:spLocks noGrp="1"/>
+          </p:cNvSpPr>
+          <p:nvPr>
+            <p:ph idx="1"/>
+          </p:nvPr>
+        </p:nvSpPr>
+        <p:spPr/>
+        <p:txBody>
+          <a:bodyPr/>
+          <a:lstStyle/>
+          <a:p>
+            <a:pPr lvl="0" indent="0" marL="0">
+              <a:buNone/>
+            </a:pPr>
+            <a:r>
+              <a:rPr b="1"/>
+              <a:t>🛑 Go to Activity 6 — Summary Statistics</a:t>
+            </a:r>
+          </a:p>
+          <a:p>
+            <a:pPr lvl="0" indent="0" marL="0">
+              <a:buNone/>
+            </a:pPr>
+            <a:r>
+              <a:rPr/>
+              <a:t>Close the slides. Finish Activity Parts 4–6, then Part 7 (review and checkpoint) on your own.</a:t>
+            </a:r>
+          </a:p>
+        </p:txBody>
+      </p:sp>
+    </p:spTree>
+  </p:cSld>
+</p:sld>
+</file>
+
+<file path=ppt/slides/slide29.xml><?xml version="1.0" encoding="utf-8"?>
 <p:sld xmlns:a="http://schemas.openxmlformats.org/drawingml/2006/main" xmlns:r="http://schemas.openxmlformats.org/officeDocument/2006/relationships" xmlns:p="http://schemas.openxmlformats.org/presentationml/2006/main">
   <p:cSld>
     <p:spTree>
@@ -8748,6 +10374,29 @@
                   <a:rPr>
                     <a:latin typeface="Courier"/>
                   </a:rPr>
+                  <a:t>filter(is.na())</a:t>
+                </a:r>
+                <a:r>
+                  <a:rPr/>
+                  <a:t> / </a:t>
+                </a:r>
+                <a:r>
+                  <a:rPr>
+                    <a:latin typeface="Courier"/>
+                  </a:rPr>
+                  <a:t>filter(!is.na())</a:t>
+                </a:r>
+                <a:r>
+                  <a:rPr/>
+                  <a:t> — see the missing data before you summarize</a:t>
+                </a:r>
+              </a:p>
+              <a:p>
+                <a:pPr lvl="1"/>
+                <a:r>
+                  <a:rPr>
+                    <a:latin typeface="Courier"/>
+                  </a:rPr>
                   <a:t>sum(!is.na())</a:t>
                 </a:r>
                 <a:r>
@@ -8762,8 +10411,31 @@
               <a:p>
                 <a:pPr lvl="1"/>
                 <a:r>
+                  <a:rPr>
+                    <a:latin typeface="Courier"/>
+                  </a:rPr>
+                  <a:t>group_by()</a:t>
+                </a:r>
+                <a:r>
                   <a:rPr/>
-                  <a:t>A reusable </a:t>
+                  <a:t> + </a:t>
+                </a:r>
+                <a:r>
+                  <a:rPr>
+                    <a:latin typeface="Courier"/>
+                  </a:rPr>
+                  <a:t>summarize()</a:t>
+                </a:r>
+                <a:r>
+                  <a:rPr/>
+                  <a:t> by hand — mean, variance, sd, n, se</a:t>
+                </a:r>
+              </a:p>
+              <a:p>
+                <a:pPr lvl="1"/>
+                <a:r>
+                  <a:rPr/>
+                  <a:t>The same code packaged as a reusable </a:t>
                 </a:r>
                 <a:r>
                   <a:rPr>
@@ -10001,7 +11673,7 @@
             </a:r>
             <a:r>
               <a:rPr/>
-              <a:t> counting correctly with </a:t>
+              <a:t> finding NAs in real data, counting correctly with </a:t>
             </a:r>
             <a:r>
               <a:rPr>
@@ -10011,7 +11683,35 @@
             </a:r>
             <a:r>
               <a:rPr/>
-              <a:t>, a reusable </a:t>
+              <a:t>, writing the summary </a:t>
+            </a:r>
+            <a:r>
+              <a:rPr b="1"/>
+              <a:t>by hand</a:t>
+            </a:r>
+            <a:r>
+              <a:rPr/>
+              <a:t> with </a:t>
+            </a:r>
+            <a:r>
+              <a:rPr>
+                <a:latin typeface="Courier"/>
+              </a:rPr>
+              <a:t>group_by()</a:t>
+            </a:r>
+            <a:r>
+              <a:rPr/>
+              <a:t> + </a:t>
+            </a:r>
+            <a:r>
+              <a:rPr>
+                <a:latin typeface="Courier"/>
+              </a:rPr>
+              <a:t>summarize()</a:t>
+            </a:r>
+            <a:r>
+              <a:rPr/>
+              <a:t>, and only then packaging it into a reusable </a:t>
             </a:r>
             <a:r>
               <a:rPr>
@@ -10021,7 +11721,7 @@
             </a:r>
             <a:r>
               <a:rPr/>
-              <a:t> helper, and using it one group at a time.</a:t>
+              <a:t> helper.</a:t>
             </a:r>
           </a:p>
         </p:txBody>

--- a/docs/content/summary_stats/summary_stats_lecture.pptx
+++ b/docs/content/summary_stats/summary_stats_lecture.pptx
@@ -34,6 +34,8 @@
     <p:sldId id="282" r:id="rId28"/>
     <p:sldId id="283" r:id="rId29"/>
     <p:sldId id="284" r:id="rId30"/>
+    <p:sldId id="285" r:id="rId31"/>
+    <p:sldId id="286" r:id="rId32"/>
   </p:sldIdLst>
   <p:sldSz cx="9144000" cy="5143500" type="screen16x9"/>
   <p:notesSz cx="6858000" cy="9144000"/>
@@ -3368,7 +3370,7 @@
             </a:pPr>
             <a:r>
               <a:rPr/>
-              <a:t>2026-09-22</a:t>
+              <a:t>2026-09-23</a:t>
             </a:r>
           </a:p>
         </p:txBody>
@@ -9423,7 +9425,7 @@
         <p:spPr>
           <a:xfrm>
             <a:off x="0" y="0"/>
-            <a:ext cx="9144000" cy="582780"/>
+            <a:ext cx="9144000" cy="871538"/>
           </a:xfrm>
         </p:spPr>
         <p:txBody>
@@ -9446,6 +9448,1120 @@
           </a:p>
         </p:txBody>
       </p:sp>
+      <p:sp>
+        <p:nvSpPr>
+          <p:cNvPr id="4" name="Text Placeholder 3"/>
+          <p:cNvSpPr>
+            <a:spLocks noGrp="1"/>
+          </p:cNvSpPr>
+          <p:nvPr>
+            <p:ph idx="2" sz="half" type="body"/>
+          </p:nvPr>
+        </p:nvSpPr>
+        <p:spPr/>
+        <p:txBody>
+          <a:bodyPr/>
+          <a:lstStyle/>
+          <a:p>
+            <a:pPr lvl="0" indent="0">
+              <a:buNone/>
+            </a:pPr>
+            <a:r>
+              <a:rPr>
+                <a:solidFill>
+                  <a:srgbClr val="5E5E5E"/>
+                </a:solidFill>
+                <a:latin typeface="Courier"/>
+              </a:rPr>
+              <a:t># skim() grouped by shade — mass only -------------------</a:t>
+            </a:r>
+            <a:br/>
+            <a:r>
+              <a:rPr>
+                <a:solidFill>
+                  <a:srgbClr val="003B4F"/>
+                </a:solidFill>
+                <a:latin typeface="Courier"/>
+              </a:rPr>
+              <a:t>leaf_df </a:t>
+            </a:r>
+            <a:r>
+              <a:rPr>
+                <a:solidFill>
+                  <a:srgbClr val="5E5E5E"/>
+                </a:solidFill>
+                <a:latin typeface="Courier"/>
+              </a:rPr>
+              <a:t>%&gt;%</a:t>
+            </a:r>
+            <a:br/>
+            <a:r>
+              <a:rPr>
+                <a:solidFill>
+                  <a:srgbClr val="003B4F"/>
+                </a:solidFill>
+                <a:latin typeface="Courier"/>
+              </a:rPr>
+              <a:t>  </a:t>
+            </a:r>
+            <a:r>
+              <a:rPr>
+                <a:solidFill>
+                  <a:srgbClr val="4758AB"/>
+                </a:solidFill>
+                <a:latin typeface="Courier"/>
+              </a:rPr>
+              <a:t>select</a:t>
+            </a:r>
+            <a:r>
+              <a:rPr>
+                <a:solidFill>
+                  <a:srgbClr val="003B4F"/>
+                </a:solidFill>
+                <a:latin typeface="Courier"/>
+              </a:rPr>
+              <a:t>(shade, mass_g) </a:t>
+            </a:r>
+            <a:r>
+              <a:rPr>
+                <a:solidFill>
+                  <a:srgbClr val="5E5E5E"/>
+                </a:solidFill>
+                <a:latin typeface="Courier"/>
+              </a:rPr>
+              <a:t>%&gt;%</a:t>
+            </a:r>
+            <a:br/>
+            <a:r>
+              <a:rPr>
+                <a:solidFill>
+                  <a:srgbClr val="003B4F"/>
+                </a:solidFill>
+                <a:latin typeface="Courier"/>
+              </a:rPr>
+              <a:t>  </a:t>
+            </a:r>
+            <a:r>
+              <a:rPr>
+                <a:solidFill>
+                  <a:srgbClr val="4758AB"/>
+                </a:solidFill>
+                <a:latin typeface="Courier"/>
+              </a:rPr>
+              <a:t>group_by</a:t>
+            </a:r>
+            <a:r>
+              <a:rPr>
+                <a:solidFill>
+                  <a:srgbClr val="003B4F"/>
+                </a:solidFill>
+                <a:latin typeface="Courier"/>
+              </a:rPr>
+              <a:t>(shade) </a:t>
+            </a:r>
+            <a:r>
+              <a:rPr>
+                <a:solidFill>
+                  <a:srgbClr val="5E5E5E"/>
+                </a:solidFill>
+                <a:latin typeface="Courier"/>
+              </a:rPr>
+              <a:t>%&gt;%</a:t>
+            </a:r>
+            <a:br/>
+            <a:r>
+              <a:rPr>
+                <a:solidFill>
+                  <a:srgbClr val="003B4F"/>
+                </a:solidFill>
+                <a:latin typeface="Courier"/>
+              </a:rPr>
+              <a:t>  </a:t>
+            </a:r>
+            <a:r>
+              <a:rPr>
+                <a:solidFill>
+                  <a:srgbClr val="4758AB"/>
+                </a:solidFill>
+                <a:latin typeface="Courier"/>
+              </a:rPr>
+              <a:t>skim</a:t>
+            </a:r>
+            <a:r>
+              <a:rPr>
+                <a:solidFill>
+                  <a:srgbClr val="003B4F"/>
+                </a:solidFill>
+                <a:latin typeface="Courier"/>
+              </a:rPr>
+              <a:t>()</a:t>
+            </a:r>
+          </a:p>
+        </p:txBody>
+      </p:sp>
+      <p:graphicFrame>
+        <p:nvGraphicFramePr>
+          <p:cNvPr id="6" name="Content Placeholder 5"/>
+          <p:cNvGraphicFramePr>
+            <a:graphicFrameLocks noGrp="1"/>
+          </p:cNvGraphicFramePr>
+          <p:nvPr>
+            <p:ph idx="1"/>
+          </p:nvPr>
+        </p:nvGraphicFramePr>
+        <p:xfrm>
+          <a:off x="127000" y="2819400"/>
+          <a:ext cx="8750300" cy="1435100"/>
+        </p:xfrm>
+        <a:graphic>
+          <a:graphicData uri="http://schemas.openxmlformats.org/drawingml/2006/table">
+            <a:tbl>
+              <a:tblPr firstRow="0" bandRow="1">
+                <a:tableStyleId>{5C22544A-7EE6-4342-B048-85BDC9FD1C3A}</a:tableStyleId>
+              </a:tblPr>
+              <a:tblGrid>
+                <a:gridCol w="4368800"/>
+                <a:gridCol w="4368800"/>
+              </a:tblGrid>
+              <a:tr h="0">
+                <a:tc>
+                  <a:txBody>
+                    <a:bodyPr/>
+                    <a:lstStyle/>
+                    <a:p>
+                      <a:pPr lvl="0" indent="0" marL="0" algn="l">
+                        <a:buNone/>
+                      </a:pPr>
+                      <a:r>
+                        <a:rPr/>
+                        <a:t>Name</a:t>
+                      </a:r>
+                    </a:p>
+                  </a:txBody>
+                </a:tc>
+                <a:tc>
+                  <a:txBody>
+                    <a:bodyPr/>
+                    <a:lstStyle/>
+                    <a:p>
+                      <a:pPr lvl="0" indent="0" marL="0" algn="l">
+                        <a:buNone/>
+                      </a:pPr>
+                      <a:r>
+                        <a:rPr/>
+                        <a:t>Piped data</a:t>
+                      </a:r>
+                    </a:p>
+                  </a:txBody>
+                </a:tc>
+              </a:tr>
+              <a:tr h="0">
+                <a:tc>
+                  <a:txBody>
+                    <a:bodyPr/>
+                    <a:lstStyle/>
+                    <a:p>
+                      <a:pPr lvl="0" indent="0" marL="0" algn="l">
+                        <a:buNone/>
+                      </a:pPr>
+                      <a:r>
+                        <a:rPr/>
+                        <a:t>Number of rows</a:t>
+                      </a:r>
+                    </a:p>
+                  </a:txBody>
+                </a:tc>
+                <a:tc>
+                  <a:txBody>
+                    <a:bodyPr/>
+                    <a:lstStyle/>
+                    <a:p>
+                      <a:pPr lvl="0" indent="0" marL="0" algn="l">
+                        <a:buNone/>
+                      </a:pPr>
+                      <a:r>
+                        <a:rPr/>
+                        <a:t>53</a:t>
+                      </a:r>
+                    </a:p>
+                  </a:txBody>
+                </a:tc>
+              </a:tr>
+              <a:tr h="0">
+                <a:tc>
+                  <a:txBody>
+                    <a:bodyPr/>
+                    <a:lstStyle/>
+                    <a:p>
+                      <a:pPr lvl="0" indent="0" marL="0" algn="l">
+                        <a:buNone/>
+                      </a:pPr>
+                      <a:r>
+                        <a:rPr/>
+                        <a:t>Number of columns</a:t>
+                      </a:r>
+                    </a:p>
+                  </a:txBody>
+                </a:tc>
+                <a:tc>
+                  <a:txBody>
+                    <a:bodyPr/>
+                    <a:lstStyle/>
+                    <a:p>
+                      <a:pPr lvl="0" indent="0" marL="0" algn="l">
+                        <a:buNone/>
+                      </a:pPr>
+                      <a:r>
+                        <a:rPr/>
+                        <a:t>2</a:t>
+                      </a:r>
+                    </a:p>
+                  </a:txBody>
+                </a:tc>
+              </a:tr>
+              <a:tr h="0">
+                <a:tc>
+                  <a:txBody>
+                    <a:bodyPr/>
+                    <a:lstStyle/>
+                    <a:p>
+                      <a:pPr lvl="0" indent="0" marL="0" algn="l">
+                        <a:buNone/>
+                      </a:pPr>
+                      <a:r>
+                        <a:rPr/>
+                        <a:t>_______________________</a:t>
+                      </a:r>
+                    </a:p>
+                  </a:txBody>
+                </a:tc>
+                <a:tc>
+                  <a:txBody>
+                    <a:bodyPr/>
+                    <a:lstStyle/>
+                    <a:p>
+                      <a:endParaRPr/>
+                    </a:p>
+                  </a:txBody>
+                </a:tc>
+              </a:tr>
+              <a:tr h="0">
+                <a:tc>
+                  <a:txBody>
+                    <a:bodyPr/>
+                    <a:lstStyle/>
+                    <a:p>
+                      <a:pPr lvl="0" indent="0" marL="0" algn="l">
+                        <a:buNone/>
+                      </a:pPr>
+                      <a:r>
+                        <a:rPr/>
+                        <a:t>Column type frequency:</a:t>
+                      </a:r>
+                    </a:p>
+                  </a:txBody>
+                </a:tc>
+                <a:tc>
+                  <a:txBody>
+                    <a:bodyPr/>
+                    <a:lstStyle/>
+                    <a:p>
+                      <a:endParaRPr/>
+                    </a:p>
+                  </a:txBody>
+                </a:tc>
+              </a:tr>
+              <a:tr h="0">
+                <a:tc>
+                  <a:txBody>
+                    <a:bodyPr/>
+                    <a:lstStyle/>
+                    <a:p>
+                      <a:pPr lvl="0" indent="0" marL="0" algn="l">
+                        <a:buNone/>
+                      </a:pPr>
+                      <a:r>
+                        <a:rPr/>
+                        <a:t>numeric</a:t>
+                      </a:r>
+                    </a:p>
+                  </a:txBody>
+                </a:tc>
+                <a:tc>
+                  <a:txBody>
+                    <a:bodyPr/>
+                    <a:lstStyle/>
+                    <a:p>
+                      <a:pPr lvl="0" indent="0" marL="0" algn="l">
+                        <a:buNone/>
+                      </a:pPr>
+                      <a:r>
+                        <a:rPr/>
+                        <a:t>1</a:t>
+                      </a:r>
+                    </a:p>
+                  </a:txBody>
+                </a:tc>
+              </a:tr>
+              <a:tr h="0">
+                <a:tc>
+                  <a:txBody>
+                    <a:bodyPr/>
+                    <a:lstStyle/>
+                    <a:p>
+                      <a:pPr lvl="0" indent="0" marL="0" algn="l">
+                        <a:buNone/>
+                      </a:pPr>
+                      <a:r>
+                        <a:rPr/>
+                        <a:t>________________________</a:t>
+                      </a:r>
+                    </a:p>
+                  </a:txBody>
+                </a:tc>
+                <a:tc>
+                  <a:txBody>
+                    <a:bodyPr/>
+                    <a:lstStyle/>
+                    <a:p>
+                      <a:endParaRPr/>
+                    </a:p>
+                  </a:txBody>
+                </a:tc>
+              </a:tr>
+              <a:tr h="0">
+                <a:tc>
+                  <a:txBody>
+                    <a:bodyPr/>
+                    <a:lstStyle/>
+                    <a:p>
+                      <a:pPr lvl="0" indent="0" marL="0" algn="l">
+                        <a:buNone/>
+                      </a:pPr>
+                      <a:r>
+                        <a:rPr/>
+                        <a:t>Group variables</a:t>
+                      </a:r>
+                    </a:p>
+                  </a:txBody>
+                </a:tc>
+                <a:tc>
+                  <a:txBody>
+                    <a:bodyPr/>
+                    <a:lstStyle/>
+                    <a:p>
+                      <a:pPr lvl="0" indent="0" marL="0" algn="l">
+                        <a:buNone/>
+                      </a:pPr>
+                      <a:r>
+                        <a:rPr/>
+                        <a:t>shade</a:t>
+                      </a:r>
+                    </a:p>
+                  </a:txBody>
+                </a:tc>
+              </a:tr>
+            </a:tbl>
+          </a:graphicData>
+        </a:graphic>
+      </p:graphicFrame>
+      <p:sp>
+        <p:nvSpPr>
+          <p:cNvPr id="1" name="TextBox 3"/>
+          <p:cNvSpPr txBox="1"/>
+          <p:nvPr>
+            <p:ph idx="1"/>
+          </p:nvPr>
+        </p:nvSpPr>
+        <p:spPr>
+          <a:xfrm>
+            <a:off x="127000" y="4254500"/>
+            <a:ext cx="8750300" cy="508000"/>
+          </a:xfrm>
+          <a:prstGeom prst="rect">
+            <a:avLst/>
+          </a:prstGeom>
+          <a:noFill/>
+        </p:spPr>
+        <p:txBody>
+          <a:bodyPr/>
+          <a:lstStyle/>
+          <a:p>
+            <a:pPr lvl="0" indent="0" marL="0" algn="ctr">
+              <a:buNone/>
+            </a:pPr>
+            <a:r>
+              <a:rPr/>
+              <a:t>Data summary</a:t>
+            </a:r>
+          </a:p>
+        </p:txBody>
+      </p:sp>
+    </p:spTree>
+  </p:cSld>
+</p:sld>
+</file>
+
+<file path=ppt/slides/slide27.xml><?xml version="1.0" encoding="utf-8"?>
+<p:sld xmlns:a="http://schemas.openxmlformats.org/drawingml/2006/main" xmlns:r="http://schemas.openxmlformats.org/officeDocument/2006/relationships" xmlns:p="http://schemas.openxmlformats.org/presentationml/2006/main">
+  <p:cSld>
+    <p:spTree>
+      <p:nvGrpSpPr>
+        <p:cNvPr id="1" name=""/>
+        <p:cNvGrpSpPr/>
+        <p:nvPr/>
+      </p:nvGrpSpPr>
+      <p:grpSpPr>
+        <a:xfrm>
+          <a:off x="0" y="0"/>
+          <a:ext cx="0" cy="0"/>
+          <a:chOff x="0" y="0"/>
+          <a:chExt cx="0" cy="0"/>
+        </a:xfrm>
+      </p:grpSpPr>
+      <p:sp>
+        <p:nvSpPr>
+          <p:cNvPr id="4" name="Text Placeholder 3"/>
+          <p:cNvSpPr>
+            <a:spLocks noGrp="1"/>
+          </p:cNvSpPr>
+          <p:nvPr>
+            <p:ph idx="2" sz="half" type="body"/>
+          </p:nvPr>
+        </p:nvSpPr>
+        <p:spPr/>
+        <p:txBody>
+          <a:bodyPr/>
+          <a:lstStyle/>
+          <a:p>
+            <a:pPr lvl="0" indent="0" marL="0">
+              <a:buNone/>
+            </a:pPr>
+            <a:r>
+              <a:rPr b="1"/>
+              <a:t>Variable type: numeric</a:t>
+            </a:r>
+          </a:p>
+        </p:txBody>
+      </p:sp>
+      <p:graphicFrame>
+        <p:nvGraphicFramePr>
+          <p:cNvPr id="6" name="Content Placeholder 5"/>
+          <p:cNvGraphicFramePr>
+            <a:graphicFrameLocks noGrp="1"/>
+          </p:cNvGraphicFramePr>
+          <p:nvPr>
+            <p:ph idx="1"/>
+          </p:nvPr>
+        </p:nvGraphicFramePr>
+        <p:xfrm>
+          <a:off x="127000" y="2819400"/>
+          <a:ext cx="8750300" cy="1943100"/>
+        </p:xfrm>
+        <a:graphic>
+          <a:graphicData uri="http://schemas.openxmlformats.org/drawingml/2006/table">
+            <a:tbl>
+              <a:tblPr firstRow="1" bandRow="1">
+                <a:tableStyleId>{5C22544A-7EE6-4342-B048-85BDC9FD1C3A}</a:tableStyleId>
+              </a:tblPr>
+              <a:tblGrid>
+                <a:gridCol w="1435100"/>
+                <a:gridCol w="622300"/>
+                <a:gridCol w="1028700"/>
+                <a:gridCol w="1435100"/>
+                <a:gridCol w="520700"/>
+                <a:gridCol w="520700"/>
+                <a:gridCol w="520700"/>
+                <a:gridCol w="520700"/>
+                <a:gridCol w="520700"/>
+                <a:gridCol w="520700"/>
+                <a:gridCol w="520700"/>
+                <a:gridCol w="622300"/>
+              </a:tblGrid>
+              <a:tr h="0">
+                <a:tc>
+                  <a:txBody>
+                    <a:bodyPr/>
+                    <a:lstStyle/>
+                    <a:p>
+                      <a:pPr lvl="0" indent="0" marL="0" algn="l">
+                        <a:buNone/>
+                      </a:pPr>
+                      <a:r>
+                        <a:rPr/>
+                        <a:t>skim_variable</a:t>
+                      </a:r>
+                    </a:p>
+                  </a:txBody>
+                  <a:tcPr/>
+                </a:tc>
+                <a:tc>
+                  <a:txBody>
+                    <a:bodyPr/>
+                    <a:lstStyle/>
+                    <a:p>
+                      <a:pPr lvl="0" indent="0" marL="0" algn="l">
+                        <a:buNone/>
+                      </a:pPr>
+                      <a:r>
+                        <a:rPr/>
+                        <a:t>shade</a:t>
+                      </a:r>
+                    </a:p>
+                  </a:txBody>
+                  <a:tcPr/>
+                </a:tc>
+                <a:tc>
+                  <a:txBody>
+                    <a:bodyPr/>
+                    <a:lstStyle/>
+                    <a:p>
+                      <a:pPr lvl="0" indent="0" marL="0" algn="r">
+                        <a:buNone/>
+                      </a:pPr>
+                      <a:r>
+                        <a:rPr/>
+                        <a:t>n_missing</a:t>
+                      </a:r>
+                    </a:p>
+                  </a:txBody>
+                  <a:tcPr/>
+                </a:tc>
+                <a:tc>
+                  <a:txBody>
+                    <a:bodyPr/>
+                    <a:lstStyle/>
+                    <a:p>
+                      <a:pPr lvl="0" indent="0" marL="0" algn="r">
+                        <a:buNone/>
+                      </a:pPr>
+                      <a:r>
+                        <a:rPr/>
+                        <a:t>complete_rate</a:t>
+                      </a:r>
+                    </a:p>
+                  </a:txBody>
+                  <a:tcPr/>
+                </a:tc>
+                <a:tc>
+                  <a:txBody>
+                    <a:bodyPr/>
+                    <a:lstStyle/>
+                    <a:p>
+                      <a:pPr lvl="0" indent="0" marL="0" algn="r">
+                        <a:buNone/>
+                      </a:pPr>
+                      <a:r>
+                        <a:rPr/>
+                        <a:t>mean</a:t>
+                      </a:r>
+                    </a:p>
+                  </a:txBody>
+                  <a:tcPr/>
+                </a:tc>
+                <a:tc>
+                  <a:txBody>
+                    <a:bodyPr/>
+                    <a:lstStyle/>
+                    <a:p>
+                      <a:pPr lvl="0" indent="0" marL="0" algn="r">
+                        <a:buNone/>
+                      </a:pPr>
+                      <a:r>
+                        <a:rPr/>
+                        <a:t>sd</a:t>
+                      </a:r>
+                    </a:p>
+                  </a:txBody>
+                  <a:tcPr/>
+                </a:tc>
+                <a:tc>
+                  <a:txBody>
+                    <a:bodyPr/>
+                    <a:lstStyle/>
+                    <a:p>
+                      <a:pPr lvl="0" indent="0" marL="0" algn="r">
+                        <a:buNone/>
+                      </a:pPr>
+                      <a:r>
+                        <a:rPr/>
+                        <a:t>p0</a:t>
+                      </a:r>
+                    </a:p>
+                  </a:txBody>
+                  <a:tcPr/>
+                </a:tc>
+                <a:tc>
+                  <a:txBody>
+                    <a:bodyPr/>
+                    <a:lstStyle/>
+                    <a:p>
+                      <a:pPr lvl="0" indent="0" marL="0" algn="r">
+                        <a:buNone/>
+                      </a:pPr>
+                      <a:r>
+                        <a:rPr/>
+                        <a:t>p25</a:t>
+                      </a:r>
+                    </a:p>
+                  </a:txBody>
+                  <a:tcPr/>
+                </a:tc>
+                <a:tc>
+                  <a:txBody>
+                    <a:bodyPr/>
+                    <a:lstStyle/>
+                    <a:p>
+                      <a:pPr lvl="0" indent="0" marL="0" algn="r">
+                        <a:buNone/>
+                      </a:pPr>
+                      <a:r>
+                        <a:rPr/>
+                        <a:t>p50</a:t>
+                      </a:r>
+                    </a:p>
+                  </a:txBody>
+                  <a:tcPr/>
+                </a:tc>
+                <a:tc>
+                  <a:txBody>
+                    <a:bodyPr/>
+                    <a:lstStyle/>
+                    <a:p>
+                      <a:pPr lvl="0" indent="0" marL="0" algn="r">
+                        <a:buNone/>
+                      </a:pPr>
+                      <a:r>
+                        <a:rPr/>
+                        <a:t>p75</a:t>
+                      </a:r>
+                    </a:p>
+                  </a:txBody>
+                  <a:tcPr/>
+                </a:tc>
+                <a:tc>
+                  <a:txBody>
+                    <a:bodyPr/>
+                    <a:lstStyle/>
+                    <a:p>
+                      <a:pPr lvl="0" indent="0" marL="0" algn="r">
+                        <a:buNone/>
+                      </a:pPr>
+                      <a:r>
+                        <a:rPr/>
+                        <a:t>p100</a:t>
+                      </a:r>
+                    </a:p>
+                  </a:txBody>
+                  <a:tcPr/>
+                </a:tc>
+                <a:tc>
+                  <a:txBody>
+                    <a:bodyPr/>
+                    <a:lstStyle/>
+                    <a:p>
+                      <a:pPr lvl="0" indent="0" marL="0" algn="l">
+                        <a:buNone/>
+                      </a:pPr>
+                      <a:r>
+                        <a:rPr/>
+                        <a:t>hist</a:t>
+                      </a:r>
+                    </a:p>
+                  </a:txBody>
+                  <a:tcPr/>
+                </a:tc>
+              </a:tr>
+              <a:tr h="0">
+                <a:tc>
+                  <a:txBody>
+                    <a:bodyPr/>
+                    <a:lstStyle/>
+                    <a:p>
+                      <a:pPr lvl="0" indent="0" marL="0" algn="l">
+                        <a:buNone/>
+                      </a:pPr>
+                      <a:r>
+                        <a:rPr/>
+                        <a:t>mass_g</a:t>
+                      </a:r>
+                    </a:p>
+                  </a:txBody>
+                </a:tc>
+                <a:tc>
+                  <a:txBody>
+                    <a:bodyPr/>
+                    <a:lstStyle/>
+                    <a:p>
+                      <a:pPr lvl="0" indent="0" marL="0" algn="l">
+                        <a:buNone/>
+                      </a:pPr>
+                      <a:r>
+                        <a:rPr/>
+                        <a:t>shady</a:t>
+                      </a:r>
+                    </a:p>
+                  </a:txBody>
+                </a:tc>
+                <a:tc>
+                  <a:txBody>
+                    <a:bodyPr/>
+                    <a:lstStyle/>
+                    <a:p>
+                      <a:pPr lvl="0" indent="0" marL="0" algn="r">
+                        <a:buNone/>
+                      </a:pPr>
+                      <a:r>
+                        <a:rPr/>
+                        <a:t>0</a:t>
+                      </a:r>
+                    </a:p>
+                  </a:txBody>
+                </a:tc>
+                <a:tc>
+                  <a:txBody>
+                    <a:bodyPr/>
+                    <a:lstStyle/>
+                    <a:p>
+                      <a:pPr lvl="0" indent="0" marL="0" algn="r">
+                        <a:buNone/>
+                      </a:pPr>
+                      <a:r>
+                        <a:rPr/>
+                        <a:t>1</a:t>
+                      </a:r>
+                    </a:p>
+                  </a:txBody>
+                </a:tc>
+                <a:tc>
+                  <a:txBody>
+                    <a:bodyPr/>
+                    <a:lstStyle/>
+                    <a:p>
+                      <a:pPr lvl="0" indent="0" marL="0" algn="r">
+                        <a:buNone/>
+                      </a:pPr>
+                      <a:r>
+                        <a:rPr/>
+                        <a:t>0.52</a:t>
+                      </a:r>
+                    </a:p>
+                  </a:txBody>
+                </a:tc>
+                <a:tc>
+                  <a:txBody>
+                    <a:bodyPr/>
+                    <a:lstStyle/>
+                    <a:p>
+                      <a:pPr lvl="0" indent="0" marL="0" algn="r">
+                        <a:buNone/>
+                      </a:pPr>
+                      <a:r>
+                        <a:rPr/>
+                        <a:t>0.15</a:t>
+                      </a:r>
+                    </a:p>
+                  </a:txBody>
+                </a:tc>
+                <a:tc>
+                  <a:txBody>
+                    <a:bodyPr/>
+                    <a:lstStyle/>
+                    <a:p>
+                      <a:pPr lvl="0" indent="0" marL="0" algn="r">
+                        <a:buNone/>
+                      </a:pPr>
+                      <a:r>
+                        <a:rPr/>
+                        <a:t>0.34</a:t>
+                      </a:r>
+                    </a:p>
+                  </a:txBody>
+                </a:tc>
+                <a:tc>
+                  <a:txBody>
+                    <a:bodyPr/>
+                    <a:lstStyle/>
+                    <a:p>
+                      <a:pPr lvl="0" indent="0" marL="0" algn="r">
+                        <a:buNone/>
+                      </a:pPr>
+                      <a:r>
+                        <a:rPr/>
+                        <a:t>0.42</a:t>
+                      </a:r>
+                    </a:p>
+                  </a:txBody>
+                </a:tc>
+                <a:tc>
+                  <a:txBody>
+                    <a:bodyPr/>
+                    <a:lstStyle/>
+                    <a:p>
+                      <a:pPr lvl="0" indent="0" marL="0" algn="r">
+                        <a:buNone/>
+                      </a:pPr>
+                      <a:r>
+                        <a:rPr/>
+                        <a:t>0.52</a:t>
+                      </a:r>
+                    </a:p>
+                  </a:txBody>
+                </a:tc>
+                <a:tc>
+                  <a:txBody>
+                    <a:bodyPr/>
+                    <a:lstStyle/>
+                    <a:p>
+                      <a:pPr lvl="0" indent="0" marL="0" algn="r">
+                        <a:buNone/>
+                      </a:pPr>
+                      <a:r>
+                        <a:rPr/>
+                        <a:t>0.59</a:t>
+                      </a:r>
+                    </a:p>
+                  </a:txBody>
+                </a:tc>
+                <a:tc>
+                  <a:txBody>
+                    <a:bodyPr/>
+                    <a:lstStyle/>
+                    <a:p>
+                      <a:pPr lvl="0" indent="0" marL="0" algn="r">
+                        <a:buNone/>
+                      </a:pPr>
+                      <a:r>
+                        <a:rPr/>
+                        <a:t>0.92</a:t>
+                      </a:r>
+                    </a:p>
+                  </a:txBody>
+                </a:tc>
+                <a:tc>
+                  <a:txBody>
+                    <a:bodyPr/>
+                    <a:lstStyle/>
+                    <a:p>
+                      <a:pPr lvl="0" indent="0" marL="0" algn="l">
+                        <a:buNone/>
+                      </a:pPr>
+                      <a:r>
+                        <a:rPr/>
+                        <a:t>▇▅▃▁▁</a:t>
+                      </a:r>
+                    </a:p>
+                  </a:txBody>
+                </a:tc>
+              </a:tr>
+              <a:tr h="0">
+                <a:tc>
+                  <a:txBody>
+                    <a:bodyPr/>
+                    <a:lstStyle/>
+                    <a:p>
+                      <a:pPr lvl="0" indent="0" marL="0" algn="l">
+                        <a:buNone/>
+                      </a:pPr>
+                      <a:r>
+                        <a:rPr/>
+                        <a:t>mass_g</a:t>
+                      </a:r>
+                    </a:p>
+                  </a:txBody>
+                </a:tc>
+                <a:tc>
+                  <a:txBody>
+                    <a:bodyPr/>
+                    <a:lstStyle/>
+                    <a:p>
+                      <a:pPr lvl="0" indent="0" marL="0" algn="l">
+                        <a:buNone/>
+                      </a:pPr>
+                      <a:r>
+                        <a:rPr/>
+                        <a:t>sunny</a:t>
+                      </a:r>
+                    </a:p>
+                  </a:txBody>
+                </a:tc>
+                <a:tc>
+                  <a:txBody>
+                    <a:bodyPr/>
+                    <a:lstStyle/>
+                    <a:p>
+                      <a:pPr lvl="0" indent="0" marL="0" algn="r">
+                        <a:buNone/>
+                      </a:pPr>
+                      <a:r>
+                        <a:rPr/>
+                        <a:t>0</a:t>
+                      </a:r>
+                    </a:p>
+                  </a:txBody>
+                </a:tc>
+                <a:tc>
+                  <a:txBody>
+                    <a:bodyPr/>
+                    <a:lstStyle/>
+                    <a:p>
+                      <a:pPr lvl="0" indent="0" marL="0" algn="r">
+                        <a:buNone/>
+                      </a:pPr>
+                      <a:r>
+                        <a:rPr/>
+                        <a:t>1</a:t>
+                      </a:r>
+                    </a:p>
+                  </a:txBody>
+                </a:tc>
+                <a:tc>
+                  <a:txBody>
+                    <a:bodyPr/>
+                    <a:lstStyle/>
+                    <a:p>
+                      <a:pPr lvl="0" indent="0" marL="0" algn="r">
+                        <a:buNone/>
+                      </a:pPr>
+                      <a:r>
+                        <a:rPr/>
+                        <a:t>0.51</a:t>
+                      </a:r>
+                    </a:p>
+                  </a:txBody>
+                </a:tc>
+                <a:tc>
+                  <a:txBody>
+                    <a:bodyPr/>
+                    <a:lstStyle/>
+                    <a:p>
+                      <a:pPr lvl="0" indent="0" marL="0" algn="r">
+                        <a:buNone/>
+                      </a:pPr>
+                      <a:r>
+                        <a:rPr/>
+                        <a:t>0.21</a:t>
+                      </a:r>
+                    </a:p>
+                  </a:txBody>
+                </a:tc>
+                <a:tc>
+                  <a:txBody>
+                    <a:bodyPr/>
+                    <a:lstStyle/>
+                    <a:p>
+                      <a:pPr lvl="0" indent="0" marL="0" algn="r">
+                        <a:buNone/>
+                      </a:pPr>
+                      <a:r>
+                        <a:rPr/>
+                        <a:t>0.19</a:t>
+                      </a:r>
+                    </a:p>
+                  </a:txBody>
+                </a:tc>
+                <a:tc>
+                  <a:txBody>
+                    <a:bodyPr/>
+                    <a:lstStyle/>
+                    <a:p>
+                      <a:pPr lvl="0" indent="0" marL="0" algn="r">
+                        <a:buNone/>
+                      </a:pPr>
+                      <a:r>
+                        <a:rPr/>
+                        <a:t>0.35</a:t>
+                      </a:r>
+                    </a:p>
+                  </a:txBody>
+                </a:tc>
+                <a:tc>
+                  <a:txBody>
+                    <a:bodyPr/>
+                    <a:lstStyle/>
+                    <a:p>
+                      <a:pPr lvl="0" indent="0" marL="0" algn="r">
+                        <a:buNone/>
+                      </a:pPr>
+                      <a:r>
+                        <a:rPr/>
+                        <a:t>0.48</a:t>
+                      </a:r>
+                    </a:p>
+                  </a:txBody>
+                </a:tc>
+                <a:tc>
+                  <a:txBody>
+                    <a:bodyPr/>
+                    <a:lstStyle/>
+                    <a:p>
+                      <a:pPr lvl="0" indent="0" marL="0" algn="r">
+                        <a:buNone/>
+                      </a:pPr>
+                      <a:r>
+                        <a:rPr/>
+                        <a:t>0.65</a:t>
+                      </a:r>
+                    </a:p>
+                  </a:txBody>
+                </a:tc>
+                <a:tc>
+                  <a:txBody>
+                    <a:bodyPr/>
+                    <a:lstStyle/>
+                    <a:p>
+                      <a:pPr lvl="0" indent="0" marL="0" algn="r">
+                        <a:buNone/>
+                      </a:pPr>
+                      <a:r>
+                        <a:rPr/>
+                        <a:t>1.08</a:t>
+                      </a:r>
+                    </a:p>
+                  </a:txBody>
+                </a:tc>
+                <a:tc>
+                  <a:txBody>
+                    <a:bodyPr/>
+                    <a:lstStyle/>
+                    <a:p>
+                      <a:pPr lvl="0" indent="0" marL="0" algn="l">
+                        <a:buNone/>
+                      </a:pPr>
+                      <a:r>
+                        <a:rPr/>
+                        <a:t>▇▇▆▃▁</a:t>
+                      </a:r>
+                    </a:p>
+                  </a:txBody>
+                </a:tc>
+              </a:tr>
+            </a:tbl>
+          </a:graphicData>
+        </a:graphic>
+      </p:graphicFrame>
+    </p:spTree>
+  </p:cSld>
+</p:sld>
+</file>
+
+<file path=ppt/slides/slide28.xml><?xml version="1.0" encoding="utf-8"?>
+<p:sld xmlns:a="http://schemas.openxmlformats.org/drawingml/2006/main" xmlns:r="http://schemas.openxmlformats.org/officeDocument/2006/relationships" xmlns:p="http://schemas.openxmlformats.org/presentationml/2006/main">
+  <p:cSld>
+    <p:spTree>
+      <p:nvGrpSpPr>
+        <p:cNvPr id="1" name=""/>
+        <p:cNvGrpSpPr/>
+        <p:nvPr/>
+      </p:nvGrpSpPr>
+      <p:grpSpPr>
+        <a:xfrm>
+          <a:off x="0" y="0"/>
+          <a:ext cx="0" cy="0"/>
+          <a:chOff x="0" y="0"/>
+          <a:chExt cx="0" cy="0"/>
+        </a:xfrm>
+      </p:grpSpPr>
       <p:sp>
         <p:nvSpPr>
           <p:cNvPr id="3" name="Content Placeholder 2"/>
@@ -9461,150 +10577,6 @@
           <a:bodyPr/>
           <a:lstStyle/>
           <a:p>
-            <a:pPr lvl="0" indent="0">
-              <a:buNone/>
-            </a:pPr>
-            <a:r>
-              <a:rPr>
-                <a:solidFill>
-                  <a:srgbClr val="5E5E5E"/>
-                </a:solidFill>
-                <a:latin typeface="Courier"/>
-              </a:rPr>
-              <a:t># skim() grouped by shade — mass only -------------------</a:t>
-            </a:r>
-            <a:br/>
-            <a:r>
-              <a:rPr>
-                <a:solidFill>
-                  <a:srgbClr val="003B4F"/>
-                </a:solidFill>
-                <a:latin typeface="Courier"/>
-              </a:rPr>
-              <a:t>leaf_df </a:t>
-            </a:r>
-            <a:r>
-              <a:rPr>
-                <a:solidFill>
-                  <a:srgbClr val="5E5E5E"/>
-                </a:solidFill>
-                <a:latin typeface="Courier"/>
-              </a:rPr>
-              <a:t>%&gt;%</a:t>
-            </a:r>
-            <a:br/>
-            <a:r>
-              <a:rPr>
-                <a:solidFill>
-                  <a:srgbClr val="003B4F"/>
-                </a:solidFill>
-                <a:latin typeface="Courier"/>
-              </a:rPr>
-              <a:t>  </a:t>
-            </a:r>
-            <a:r>
-              <a:rPr>
-                <a:solidFill>
-                  <a:srgbClr val="4758AB"/>
-                </a:solidFill>
-                <a:latin typeface="Courier"/>
-              </a:rPr>
-              <a:t>select</a:t>
-            </a:r>
-            <a:r>
-              <a:rPr>
-                <a:solidFill>
-                  <a:srgbClr val="003B4F"/>
-                </a:solidFill>
-                <a:latin typeface="Courier"/>
-              </a:rPr>
-              <a:t>(shade, mass_g) </a:t>
-            </a:r>
-            <a:r>
-              <a:rPr>
-                <a:solidFill>
-                  <a:srgbClr val="5E5E5E"/>
-                </a:solidFill>
-                <a:latin typeface="Courier"/>
-              </a:rPr>
-              <a:t>%&gt;%</a:t>
-            </a:r>
-            <a:br/>
-            <a:r>
-              <a:rPr>
-                <a:solidFill>
-                  <a:srgbClr val="003B4F"/>
-                </a:solidFill>
-                <a:latin typeface="Courier"/>
-              </a:rPr>
-              <a:t>  </a:t>
-            </a:r>
-            <a:r>
-              <a:rPr>
-                <a:solidFill>
-                  <a:srgbClr val="4758AB"/>
-                </a:solidFill>
-                <a:latin typeface="Courier"/>
-              </a:rPr>
-              <a:t>group_by</a:t>
-            </a:r>
-            <a:r>
-              <a:rPr>
-                <a:solidFill>
-                  <a:srgbClr val="003B4F"/>
-                </a:solidFill>
-                <a:latin typeface="Courier"/>
-              </a:rPr>
-              <a:t>(shade) </a:t>
-            </a:r>
-            <a:r>
-              <a:rPr>
-                <a:solidFill>
-                  <a:srgbClr val="5E5E5E"/>
-                </a:solidFill>
-                <a:latin typeface="Courier"/>
-              </a:rPr>
-              <a:t>%&gt;%</a:t>
-            </a:r>
-            <a:br/>
-            <a:r>
-              <a:rPr>
-                <a:solidFill>
-                  <a:srgbClr val="003B4F"/>
-                </a:solidFill>
-                <a:latin typeface="Courier"/>
-              </a:rPr>
-              <a:t>  </a:t>
-            </a:r>
-            <a:r>
-              <a:rPr>
-                <a:solidFill>
-                  <a:srgbClr val="4758AB"/>
-                </a:solidFill>
-                <a:latin typeface="Courier"/>
-              </a:rPr>
-              <a:t>skim</a:t>
-            </a:r>
-            <a:r>
-              <a:rPr>
-                <a:solidFill>
-                  <a:srgbClr val="003B4F"/>
-                </a:solidFill>
-                <a:latin typeface="Courier"/>
-              </a:rPr>
-              <a:t>()</a:t>
-            </a:r>
-          </a:p>
-          <a:p>
-            <a:pPr lvl="0" indent="0" marL="0">
-              <a:buNone/>
-            </a:pPr>
-            <a:r>
-              <a:rPr b="1"/>
-              <a:t>Variable type: numeric</a:t>
-            </a:r>
-          </a:p>
-          <a:p>
             <a:pPr lvl="0" indent="0" marL="0">
               <a:buNone/>
             </a:pPr>
@@ -9644,7 +10616,7 @@
 </p:sld>
 </file>
 
-<file path=ppt/slides/slide27.xml><?xml version="1.0" encoding="utf-8"?>
+<file path=ppt/slides/slide29.xml><?xml version="1.0" encoding="utf-8"?>
 <p:sld xmlns:a="http://schemas.openxmlformats.org/drawingml/2006/main" xmlns:r="http://schemas.openxmlformats.org/officeDocument/2006/relationships" xmlns:p="http://schemas.openxmlformats.org/presentationml/2006/main">
   <p:cSld>
     <p:spTree>
@@ -10118,7 +11090,384 @@
 </p:sld>
 </file>
 
-<file path=ppt/slides/slide28.xml><?xml version="1.0" encoding="utf-8"?>
+<file path=ppt/slides/slide3.xml><?xml version="1.0" encoding="utf-8"?>
+<p:sld xmlns:a="http://schemas.openxmlformats.org/drawingml/2006/main" xmlns:r="http://schemas.openxmlformats.org/officeDocument/2006/relationships" xmlns:p="http://schemas.openxmlformats.org/presentationml/2006/main">
+  <p:cSld>
+    <p:spTree>
+      <p:nvGrpSpPr>
+        <p:cNvPr id="1" name=""/>
+        <p:cNvGrpSpPr/>
+        <p:nvPr/>
+      </p:nvGrpSpPr>
+      <p:grpSpPr>
+        <a:xfrm>
+          <a:off x="0" y="0"/>
+          <a:ext cx="0" cy="0"/>
+          <a:chOff x="0" y="0"/>
+          <a:chExt cx="0" cy="0"/>
+        </a:xfrm>
+      </p:grpSpPr>
+      <p:sp>
+        <p:nvSpPr>
+          <p:cNvPr id="2" name="Title 1"/>
+          <p:cNvSpPr>
+            <a:spLocks noGrp="1"/>
+          </p:cNvSpPr>
+          <p:nvPr>
+            <p:ph type="title"/>
+          </p:nvPr>
+        </p:nvSpPr>
+        <p:spPr>
+          <a:xfrm>
+            <a:off x="139485" y="78119"/>
+            <a:ext cx="8229600" cy="607682"/>
+          </a:xfrm>
+        </p:spPr>
+        <p:txBody>
+          <a:bodyPr/>
+          <a:lstStyle/>
+          <a:p>
+            <a:pPr lvl="0" indent="0" marL="0">
+              <a:buNone/>
+            </a:pPr>
+            <a:r>
+              <a:rPr/>
+              <a:t>Our Scientific Question</a:t>
+            </a:r>
+          </a:p>
+        </p:txBody>
+      </p:sp>
+      <p:sp>
+        <p:nvSpPr>
+          <p:cNvPr id="3" name="Text Placeholder 2"/>
+          <p:cNvSpPr>
+            <a:spLocks noGrp="1"/>
+          </p:cNvSpPr>
+          <p:nvPr>
+            <p:ph idx="1" type="body"/>
+          </p:nvPr>
+        </p:nvSpPr>
+        <p:spPr/>
+        <p:txBody>
+          <a:bodyPr/>
+          <a:lstStyle/>
+          <a:p>
+            <a:pPr lvl="0" indent="0" marL="0">
+              <a:buNone/>
+            </a:pPr>
+            <a:r>
+              <a:rPr b="1"/>
+              <a:t>Biological prediction:</a:t>
+            </a:r>
+            <a:r>
+              <a:rPr/>
+              <a:t> Leaves on the </a:t>
+            </a:r>
+            <a:r>
+              <a:rPr i="1"/>
+              <a:t>shady</a:t>
+            </a:r>
+            <a:r>
+              <a:rPr/>
+              <a:t> side of a tree will be </a:t>
+            </a:r>
+            <a:r>
+              <a:rPr b="1"/>
+              <a:t>larger and heavier</a:t>
+            </a:r>
+            <a:r>
+              <a:rPr/>
+              <a:t> to capture more of the limited light.</a:t>
+            </a:r>
+          </a:p>
+        </p:txBody>
+      </p:sp>
+      <p:graphicFrame>
+        <p:nvGraphicFramePr>
+          <p:cNvPr id="6" name="Content Placeholder 5"/>
+          <p:cNvGraphicFramePr>
+            <a:graphicFrameLocks noGrp="1"/>
+          </p:cNvGraphicFramePr>
+          <p:nvPr>
+            <p:ph idx="1"/>
+          </p:nvPr>
+        </p:nvGraphicFramePr>
+        <p:xfrm>
+          <a:off x="127000" y="1270000"/>
+          <a:ext cx="4432300" cy="3302000"/>
+        </p:xfrm>
+        <a:graphic>
+          <a:graphicData uri="http://schemas.openxmlformats.org/drawingml/2006/table">
+            <a:tbl>
+              <a:tblPr firstRow="1" bandRow="1">
+                <a:tableStyleId>{5C22544A-7EE6-4342-B048-85BDC9FD1C3A}</a:tableStyleId>
+              </a:tblPr>
+              <a:tblGrid>
+                <a:gridCol w="1143000"/>
+                <a:gridCol w="3289300"/>
+              </a:tblGrid>
+              <a:tr h="0">
+                <a:tc>
+                  <a:txBody>
+                    <a:bodyPr/>
+                    <a:lstStyle/>
+                    <a:p>
+                      <a:endParaRPr/>
+                    </a:p>
+                  </a:txBody>
+                  <a:tcPr/>
+                </a:tc>
+                <a:tc>
+                  <a:txBody>
+                    <a:bodyPr/>
+                    <a:lstStyle/>
+                    <a:p>
+                      <a:pPr lvl="0" indent="0" marL="0">
+                        <a:buNone/>
+                      </a:pPr>
+                      <a:r>
+                        <a:rPr/>
+                        <a:t>Hypothesis</a:t>
+                      </a:r>
+                    </a:p>
+                  </a:txBody>
+                  <a:tcPr/>
+                </a:tc>
+              </a:tr>
+              <a:tr h="0">
+                <a:tc>
+                  <a:txBody>
+                    <a:bodyPr/>
+                    <a:lstStyle/>
+                    <a:p>
+                      <a:pPr lvl="0" indent="0" marL="0">
+                        <a:buNone/>
+                      </a:pPr>
+                      <a:r>
+                        <a:rPr b="1"/>
+                        <a:t>H₀ — null</a:t>
+                      </a:r>
+                    </a:p>
+                  </a:txBody>
+                </a:tc>
+                <a:tc>
+                  <a:txBody>
+                    <a:bodyPr/>
+                    <a:lstStyle/>
+                    <a:p>
+                      <a:pPr lvl="0" indent="0" marL="0">
+                        <a:buNone/>
+                      </a:pPr>
+                      <a:r>
+                        <a:rPr/>
+                        <a:t>No difference in leaf size between sunny and shady sides</a:t>
+                      </a:r>
+                    </a:p>
+                  </a:txBody>
+                </a:tc>
+              </a:tr>
+              <a:tr h="0">
+                <a:tc>
+                  <a:txBody>
+                    <a:bodyPr/>
+                    <a:lstStyle/>
+                    <a:p>
+                      <a:pPr lvl="0" indent="0" marL="0">
+                        <a:buNone/>
+                      </a:pPr>
+                      <a:r>
+                        <a:rPr b="1"/>
+                        <a:t>Hₐ — alternate</a:t>
+                      </a:r>
+                    </a:p>
+                  </a:txBody>
+                </a:tc>
+                <a:tc>
+                  <a:txBody>
+                    <a:bodyPr/>
+                    <a:lstStyle/>
+                    <a:p>
+                      <a:pPr lvl="0" indent="0" marL="0">
+                        <a:buNone/>
+                      </a:pPr>
+                      <a:r>
+                        <a:rPr/>
+                        <a:t>Leaf size differs between sunny and shady sides</a:t>
+                      </a:r>
+                    </a:p>
+                  </a:txBody>
+                </a:tc>
+              </a:tr>
+            </a:tbl>
+          </a:graphicData>
+        </a:graphic>
+      </p:graphicFrame>
+      <p:sp>
+        <p:nvSpPr>
+          <p:cNvPr id="5" name="Text Placeholder 4"/>
+          <p:cNvSpPr>
+            <a:spLocks noGrp="1"/>
+          </p:cNvSpPr>
+          <p:nvPr>
+            <p:ph idx="3" sz="quarter" type="body"/>
+          </p:nvPr>
+        </p:nvSpPr>
+        <p:spPr/>
+        <p:txBody>
+          <a:bodyPr/>
+          <a:lstStyle/>
+          <a:p>
+            <a:pPr lvl="0" indent="0" marL="0">
+              <a:buNone/>
+            </a:pPr>
+            <a:r>
+              <a:rPr b="1"/>
+              <a:t>Plan for this unit:</a:t>
+            </a:r>
+          </a:p>
+          <a:p>
+            <a:pPr lvl="0" indent="-342900" marL="342900">
+              <a:buAutoNum type="arabicPeriod"/>
+            </a:pPr>
+            <a:r>
+              <a:rPr b="1"/>
+              <a:t>Today</a:t>
+            </a:r>
+            <a:r>
+              <a:rPr/>
+              <a:t> — </a:t>
+            </a:r>
+            <a:r>
+              <a:rPr i="1"/>
+              <a:t>describe</a:t>
+            </a:r>
+            <a:r>
+              <a:rPr/>
+              <a:t> the data</a:t>
+            </a:r>
+          </a:p>
+          <a:p>
+            <a:pPr lvl="0" indent="-342900" marL="342900">
+              <a:buAutoNum type="arabicPeriod"/>
+            </a:pPr>
+            <a:r>
+              <a:rPr b="1"/>
+              <a:t>Lecture 09</a:t>
+            </a:r>
+            <a:r>
+              <a:rPr/>
+              <a:t> — formally </a:t>
+            </a:r>
+            <a:r>
+              <a:rPr i="1"/>
+              <a:t>test</a:t>
+            </a:r>
+            <a:r>
+              <a:rPr/>
+              <a:t> the hypotheses with a t-test</a:t>
+            </a:r>
+          </a:p>
+          <a:p>
+            <a:pPr lvl="0" indent="0" marL="0">
+              <a:buNone/>
+            </a:pPr>
+            <a:r>
+              <a:rPr/>
+              <a:t>Statistics helps us decide which hypothesis is better supported by the data.</a:t>
+            </a:r>
+          </a:p>
+          <a:p>
+            <a:pPr lvl="0" indent="0" marL="0">
+              <a:buNone/>
+            </a:pPr>
+            <a:r>
+              <a:rPr b="1"/>
+              <a:t>References:</a:t>
+            </a:r>
+          </a:p>
+          <a:p>
+            <a:pPr lvl="0"/>
+            <a:r>
+              <a:rPr/>
+              <a:t>📖 Whitlock &amp; Schluter, Ch. 3 — </a:t>
+            </a:r>
+            <a:r>
+              <a:rPr i="1"/>
+              <a:t>Describing Data</a:t>
+            </a:r>
+          </a:p>
+          <a:p>
+            <a:pPr lvl="0"/>
+            <a:r>
+              <a:rPr/>
+              <a:t>📖 Whitlock &amp; Schluter, Ch. 4 — </a:t>
+            </a:r>
+            <a:r>
+              <a:rPr i="1"/>
+              <a:t>Estimating with Uncertainty</a:t>
+            </a:r>
+          </a:p>
+          <a:p>
+            <a:pPr lvl="0"/>
+            <a:r>
+              <a:rPr/>
+              <a:t>📖 </a:t>
+            </a:r>
+            <a:r>
+              <a:rPr>
+                <a:hlinkClick r:id="rId2"/>
+              </a:rPr>
+              <a:t>R4DS Ch 13</a:t>
+            </a:r>
+            <a:r>
+              <a:rPr/>
+              <a:t> — Numbers</a:t>
+            </a:r>
+          </a:p>
+          <a:p>
+            <a:pPr lvl="0"/>
+            <a:r>
+              <a:rPr/>
+              <a:t>📖 </a:t>
+            </a:r>
+            <a:r>
+              <a:rPr>
+                <a:hlinkClick r:id="rId3"/>
+              </a:rPr>
+              <a:t>R4DS Ch 18</a:t>
+            </a:r>
+            <a:r>
+              <a:rPr/>
+              <a:t> — Missing Values</a:t>
+            </a:r>
+          </a:p>
+          <a:p>
+            <a:pPr lvl="0" indent="0" marL="0">
+              <a:buNone/>
+            </a:pPr>
+            <a:r>
+              <a:rPr/>
+              <a:t>Both W&amp;S PDFs are in the course </a:t>
+            </a:r>
+            <a:r>
+              <a:rPr>
+                <a:latin typeface="Courier"/>
+              </a:rPr>
+              <a:t>readings/</a:t>
+            </a:r>
+            <a:r>
+              <a:rPr/>
+              <a:t> folder.</a:t>
+            </a:r>
+          </a:p>
+        </p:txBody>
+      </p:sp>
+    </p:spTree>
+  </p:cSld>
+</p:sld>
+</file>
+
+<file path=ppt/slides/slide30.xml><?xml version="1.0" encoding="utf-8"?>
 <p:sld xmlns:a="http://schemas.openxmlformats.org/drawingml/2006/main" xmlns:r="http://schemas.openxmlformats.org/officeDocument/2006/relationships" xmlns:p="http://schemas.openxmlformats.org/presentationml/2006/main">
   <p:cSld>
     <p:spTree>
@@ -10204,7 +11553,7 @@
 </p:sld>
 </file>
 
-<file path=ppt/slides/slide29.xml><?xml version="1.0" encoding="utf-8"?>
+<file path=ppt/slides/slide31.xml><?xml version="1.0" encoding="utf-8"?>
 <p:sld xmlns:a="http://schemas.openxmlformats.org/drawingml/2006/main" xmlns:r="http://schemas.openxmlformats.org/officeDocument/2006/relationships" xmlns:p="http://schemas.openxmlformats.org/presentationml/2006/main">
   <p:cSld>
     <p:spTree>
@@ -10616,383 +11965,6 @@
             <a:r>
               <a:rPr/>
               <a:t>Mixing prose, code, and results in one document</a:t>
-            </a:r>
-          </a:p>
-        </p:txBody>
-      </p:sp>
-    </p:spTree>
-  </p:cSld>
-</p:sld>
-</file>
-
-<file path=ppt/slides/slide3.xml><?xml version="1.0" encoding="utf-8"?>
-<p:sld xmlns:a="http://schemas.openxmlformats.org/drawingml/2006/main" xmlns:r="http://schemas.openxmlformats.org/officeDocument/2006/relationships" xmlns:p="http://schemas.openxmlformats.org/presentationml/2006/main">
-  <p:cSld>
-    <p:spTree>
-      <p:nvGrpSpPr>
-        <p:cNvPr id="1" name=""/>
-        <p:cNvGrpSpPr/>
-        <p:nvPr/>
-      </p:nvGrpSpPr>
-      <p:grpSpPr>
-        <a:xfrm>
-          <a:off x="0" y="0"/>
-          <a:ext cx="0" cy="0"/>
-          <a:chOff x="0" y="0"/>
-          <a:chExt cx="0" cy="0"/>
-        </a:xfrm>
-      </p:grpSpPr>
-      <p:sp>
-        <p:nvSpPr>
-          <p:cNvPr id="2" name="Title 1"/>
-          <p:cNvSpPr>
-            <a:spLocks noGrp="1"/>
-          </p:cNvSpPr>
-          <p:nvPr>
-            <p:ph type="title"/>
-          </p:nvPr>
-        </p:nvSpPr>
-        <p:spPr>
-          <a:xfrm>
-            <a:off x="139485" y="78119"/>
-            <a:ext cx="8229600" cy="607682"/>
-          </a:xfrm>
-        </p:spPr>
-        <p:txBody>
-          <a:bodyPr/>
-          <a:lstStyle/>
-          <a:p>
-            <a:pPr lvl="0" indent="0" marL="0">
-              <a:buNone/>
-            </a:pPr>
-            <a:r>
-              <a:rPr/>
-              <a:t>Our Scientific Question</a:t>
-            </a:r>
-          </a:p>
-        </p:txBody>
-      </p:sp>
-      <p:sp>
-        <p:nvSpPr>
-          <p:cNvPr id="3" name="Text Placeholder 2"/>
-          <p:cNvSpPr>
-            <a:spLocks noGrp="1"/>
-          </p:cNvSpPr>
-          <p:nvPr>
-            <p:ph idx="1" type="body"/>
-          </p:nvPr>
-        </p:nvSpPr>
-        <p:spPr/>
-        <p:txBody>
-          <a:bodyPr/>
-          <a:lstStyle/>
-          <a:p>
-            <a:pPr lvl="0" indent="0" marL="0">
-              <a:buNone/>
-            </a:pPr>
-            <a:r>
-              <a:rPr b="1"/>
-              <a:t>Biological prediction:</a:t>
-            </a:r>
-            <a:r>
-              <a:rPr/>
-              <a:t> Leaves on the </a:t>
-            </a:r>
-            <a:r>
-              <a:rPr i="1"/>
-              <a:t>shady</a:t>
-            </a:r>
-            <a:r>
-              <a:rPr/>
-              <a:t> side of a tree will be </a:t>
-            </a:r>
-            <a:r>
-              <a:rPr b="1"/>
-              <a:t>larger and heavier</a:t>
-            </a:r>
-            <a:r>
-              <a:rPr/>
-              <a:t> to capture more of the limited light.</a:t>
-            </a:r>
-          </a:p>
-        </p:txBody>
-      </p:sp>
-      <p:graphicFrame>
-        <p:nvGraphicFramePr>
-          <p:cNvPr id="6" name="Content Placeholder 5"/>
-          <p:cNvGraphicFramePr>
-            <a:graphicFrameLocks noGrp="1"/>
-          </p:cNvGraphicFramePr>
-          <p:nvPr>
-            <p:ph idx="1"/>
-          </p:nvPr>
-        </p:nvGraphicFramePr>
-        <p:xfrm>
-          <a:off x="127000" y="1270000"/>
-          <a:ext cx="4432300" cy="3302000"/>
-        </p:xfrm>
-        <a:graphic>
-          <a:graphicData uri="http://schemas.openxmlformats.org/drawingml/2006/table">
-            <a:tbl>
-              <a:tblPr firstRow="1" bandRow="1">
-                <a:tableStyleId>{5C22544A-7EE6-4342-B048-85BDC9FD1C3A}</a:tableStyleId>
-              </a:tblPr>
-              <a:tblGrid>
-                <a:gridCol w="1143000"/>
-                <a:gridCol w="3289300"/>
-              </a:tblGrid>
-              <a:tr h="0">
-                <a:tc>
-                  <a:txBody>
-                    <a:bodyPr/>
-                    <a:lstStyle/>
-                    <a:p>
-                      <a:endParaRPr/>
-                    </a:p>
-                  </a:txBody>
-                  <a:tcPr/>
-                </a:tc>
-                <a:tc>
-                  <a:txBody>
-                    <a:bodyPr/>
-                    <a:lstStyle/>
-                    <a:p>
-                      <a:pPr lvl="0" indent="0" marL="0">
-                        <a:buNone/>
-                      </a:pPr>
-                      <a:r>
-                        <a:rPr/>
-                        <a:t>Hypothesis</a:t>
-                      </a:r>
-                    </a:p>
-                  </a:txBody>
-                  <a:tcPr/>
-                </a:tc>
-              </a:tr>
-              <a:tr h="0">
-                <a:tc>
-                  <a:txBody>
-                    <a:bodyPr/>
-                    <a:lstStyle/>
-                    <a:p>
-                      <a:pPr lvl="0" indent="0" marL="0">
-                        <a:buNone/>
-                      </a:pPr>
-                      <a:r>
-                        <a:rPr b="1"/>
-                        <a:t>H₀ — null</a:t>
-                      </a:r>
-                    </a:p>
-                  </a:txBody>
-                </a:tc>
-                <a:tc>
-                  <a:txBody>
-                    <a:bodyPr/>
-                    <a:lstStyle/>
-                    <a:p>
-                      <a:pPr lvl="0" indent="0" marL="0">
-                        <a:buNone/>
-                      </a:pPr>
-                      <a:r>
-                        <a:rPr/>
-                        <a:t>No difference in leaf size between sunny and shady sides</a:t>
-                      </a:r>
-                    </a:p>
-                  </a:txBody>
-                </a:tc>
-              </a:tr>
-              <a:tr h="0">
-                <a:tc>
-                  <a:txBody>
-                    <a:bodyPr/>
-                    <a:lstStyle/>
-                    <a:p>
-                      <a:pPr lvl="0" indent="0" marL="0">
-                        <a:buNone/>
-                      </a:pPr>
-                      <a:r>
-                        <a:rPr b="1"/>
-                        <a:t>Hₐ — alternate</a:t>
-                      </a:r>
-                    </a:p>
-                  </a:txBody>
-                </a:tc>
-                <a:tc>
-                  <a:txBody>
-                    <a:bodyPr/>
-                    <a:lstStyle/>
-                    <a:p>
-                      <a:pPr lvl="0" indent="0" marL="0">
-                        <a:buNone/>
-                      </a:pPr>
-                      <a:r>
-                        <a:rPr/>
-                        <a:t>Leaf size differs between sunny and shady sides</a:t>
-                      </a:r>
-                    </a:p>
-                  </a:txBody>
-                </a:tc>
-              </a:tr>
-            </a:tbl>
-          </a:graphicData>
-        </a:graphic>
-      </p:graphicFrame>
-      <p:sp>
-        <p:nvSpPr>
-          <p:cNvPr id="5" name="Text Placeholder 4"/>
-          <p:cNvSpPr>
-            <a:spLocks noGrp="1"/>
-          </p:cNvSpPr>
-          <p:nvPr>
-            <p:ph idx="3" sz="quarter" type="body"/>
-          </p:nvPr>
-        </p:nvSpPr>
-        <p:spPr/>
-        <p:txBody>
-          <a:bodyPr/>
-          <a:lstStyle/>
-          <a:p>
-            <a:pPr lvl="0" indent="0" marL="0">
-              <a:buNone/>
-            </a:pPr>
-            <a:r>
-              <a:rPr b="1"/>
-              <a:t>Plan for this unit:</a:t>
-            </a:r>
-          </a:p>
-          <a:p>
-            <a:pPr lvl="0" indent="-342900" marL="342900">
-              <a:buAutoNum type="arabicPeriod"/>
-            </a:pPr>
-            <a:r>
-              <a:rPr b="1"/>
-              <a:t>Today</a:t>
-            </a:r>
-            <a:r>
-              <a:rPr/>
-              <a:t> — </a:t>
-            </a:r>
-            <a:r>
-              <a:rPr i="1"/>
-              <a:t>describe</a:t>
-            </a:r>
-            <a:r>
-              <a:rPr/>
-              <a:t> the data</a:t>
-            </a:r>
-          </a:p>
-          <a:p>
-            <a:pPr lvl="0" indent="-342900" marL="342900">
-              <a:buAutoNum type="arabicPeriod"/>
-            </a:pPr>
-            <a:r>
-              <a:rPr b="1"/>
-              <a:t>Lecture 09</a:t>
-            </a:r>
-            <a:r>
-              <a:rPr/>
-              <a:t> — formally </a:t>
-            </a:r>
-            <a:r>
-              <a:rPr i="1"/>
-              <a:t>test</a:t>
-            </a:r>
-            <a:r>
-              <a:rPr/>
-              <a:t> the hypotheses with a t-test</a:t>
-            </a:r>
-          </a:p>
-          <a:p>
-            <a:pPr lvl="0" indent="0" marL="0">
-              <a:buNone/>
-            </a:pPr>
-            <a:r>
-              <a:rPr/>
-              <a:t>Statistics helps us decide which hypothesis is better supported by the data.</a:t>
-            </a:r>
-          </a:p>
-          <a:p>
-            <a:pPr lvl="0" indent="0" marL="0">
-              <a:buNone/>
-            </a:pPr>
-            <a:r>
-              <a:rPr b="1"/>
-              <a:t>References:</a:t>
-            </a:r>
-          </a:p>
-          <a:p>
-            <a:pPr lvl="0"/>
-            <a:r>
-              <a:rPr/>
-              <a:t>📖 Whitlock &amp; Schluter, Ch. 3 — </a:t>
-            </a:r>
-            <a:r>
-              <a:rPr i="1"/>
-              <a:t>Describing Data</a:t>
-            </a:r>
-          </a:p>
-          <a:p>
-            <a:pPr lvl="0"/>
-            <a:r>
-              <a:rPr/>
-              <a:t>📖 Whitlock &amp; Schluter, Ch. 4 — </a:t>
-            </a:r>
-            <a:r>
-              <a:rPr i="1"/>
-              <a:t>Estimating with Uncertainty</a:t>
-            </a:r>
-          </a:p>
-          <a:p>
-            <a:pPr lvl="0"/>
-            <a:r>
-              <a:rPr/>
-              <a:t>📖 </a:t>
-            </a:r>
-            <a:r>
-              <a:rPr>
-                <a:hlinkClick r:id="rId2"/>
-              </a:rPr>
-              <a:t>R4DS Ch 13</a:t>
-            </a:r>
-            <a:r>
-              <a:rPr/>
-              <a:t> — Numbers</a:t>
-            </a:r>
-          </a:p>
-          <a:p>
-            <a:pPr lvl="0"/>
-            <a:r>
-              <a:rPr/>
-              <a:t>📖 </a:t>
-            </a:r>
-            <a:r>
-              <a:rPr>
-                <a:hlinkClick r:id="rId3"/>
-              </a:rPr>
-              <a:t>R4DS Ch 18</a:t>
-            </a:r>
-            <a:r>
-              <a:rPr/>
-              <a:t> — Missing Values</a:t>
-            </a:r>
-          </a:p>
-          <a:p>
-            <a:pPr lvl="0" indent="0" marL="0">
-              <a:buNone/>
-            </a:pPr>
-            <a:r>
-              <a:rPr/>
-              <a:t>Both W&amp;S PDFs are in the course </a:t>
-            </a:r>
-            <a:r>
-              <a:rPr>
-                <a:latin typeface="Courier"/>
-              </a:rPr>
-              <a:t>readings/</a:t>
-            </a:r>
-            <a:r>
-              <a:rPr/>
-              <a:t> folder.</a:t>
             </a:r>
           </a:p>
         </p:txBody>

--- a/docs/content/summary_stats/summary_stats_lecture.pptx
+++ b/docs/content/summary_stats/summary_stats_lecture.pptx
@@ -12394,7 +12394,17 @@
                 </a:solidFill>
                 <a:latin typeface="Courier"/>
               </a:rPr>
-              <a:t>leaf_df &lt;- </a:t>
+              <a:t>leaf_df &lt;-</a:t>
+            </a:r>
+            <a:br/>
+            <a:r>
+              <a:rPr>
+                <a:solidFill>
+                  <a:srgbClr val="003B4F"/>
+                </a:solidFill>
+                <a:latin typeface="Courier"/>
+              </a:rPr>
+              <a:t>  </a:t>
             </a:r>
             <a:r>
               <a:rPr>

--- a/docs/content/summary_stats/summary_stats_lecture.pptx
+++ b/docs/content/summary_stats/summary_stats_lecture.pptx
@@ -3370,7 +3370,7 @@
             </a:pPr>
             <a:r>
               <a:rPr/>
-              <a:t>2026-09-23</a:t>
+              <a:t>2026-09-24</a:t>
             </a:r>
           </a:p>
         </p:txBody>

--- a/docs/content/summary_stats/summary_stats_lecture.pptx
+++ b/docs/content/summary_stats/summary_stats_lecture.pptx
@@ -3370,7 +3370,7 @@
             </a:pPr>
             <a:r>
               <a:rPr/>
-              <a:t>2026-09-24</a:t>
+              <a:t>2026-09-29</a:t>
             </a:r>
           </a:p>
         </p:txBody>

--- a/docs/content/summary_stats/summary_stats_lecture.pptx
+++ b/docs/content/summary_stats/summary_stats_lecture.pptx
@@ -3370,7 +3370,7 @@
             </a:pPr>
             <a:r>
               <a:rPr/>
-              <a:t>2026-09-29</a:t>
+              <a:t>2026-10-01</a:t>
             </a:r>
           </a:p>
         </p:txBody>

--- a/docs/content/summary_stats/summary_stats_lecture.pptx
+++ b/docs/content/summary_stats/summary_stats_lecture.pptx
@@ -3370,7 +3370,7 @@
             </a:pPr>
             <a:r>
               <a:rPr/>
-              <a:t>2026-10-01</a:t>
+              <a:t>2026-10-05</a:t>
             </a:r>
           </a:p>
         </p:txBody>
@@ -3598,7 +3598,44 @@
                 </a:solidFill>
                 <a:latin typeface="Courier"/>
               </a:rPr>
-              <a:t>(paper_mass_g))</a:t>
+              <a:t>(paper_mass_g)) </a:t>
+            </a:r>
+            <a:r>
+              <a:rPr>
+                <a:solidFill>
+                  <a:srgbClr val="5E5E5E"/>
+                </a:solidFill>
+                <a:latin typeface="Courier"/>
+              </a:rPr>
+              <a:t>%&gt;%</a:t>
+            </a:r>
+            <a:br/>
+            <a:r>
+              <a:rPr>
+                <a:solidFill>
+                  <a:srgbClr val="003B4F"/>
+                </a:solidFill>
+                <a:latin typeface="Courier"/>
+              </a:rPr>
+              <a:t>  </a:t>
+            </a:r>
+            <a:r>
+              <a:rPr>
+                <a:solidFill>
+                  <a:srgbClr val="4758AB"/>
+                </a:solidFill>
+                <a:latin typeface="Courier"/>
+              </a:rPr>
+              <a:t>select</a:t>
+            </a:r>
+            <a:r>
+              <a:rPr>
+                <a:solidFill>
+                  <a:srgbClr val="003B4F"/>
+                </a:solidFill>
+                <a:latin typeface="Courier"/>
+              </a:rPr>
+              <a:t>(teams, shade, mass_g, paper_mass_g)</a:t>
             </a:r>
           </a:p>
           <a:p>
@@ -3609,22 +3646,22 @@
               <a:rPr>
                 <a:latin typeface="Courier"/>
               </a:rPr>
-              <a:t># A tibble: 13 × 8
-   twig_id leaf_id teams       shade mass_g petiole_mm thickness_mm paper_mass_g
-   &lt;chr&gt;   &lt;chr&gt;   &lt;chr&gt;       &lt;chr&gt;  &lt;dbl&gt;      &lt;dbl&gt;        &lt;dbl&gt;        &lt;dbl&gt;
- 1 twig_2  l09     fighting_m… shady  0.920      0.383        NA              NA
- 2 &lt;NA&gt;    1       Oscar_Karl  shady  0.454     53.6           0.36           NA
- 3 &lt;NA&gt;    2       Oscar_Karl  shady  0.371     26.3           0.43           NA
- 4 &lt;NA&gt;    3       Oscar_Karl  shady  0.351     57.8           0.48           NA
- 5 &lt;NA&gt;    4       Oscar_Karl  shady  0.453     51.0           0.41           NA
- 6 &lt;NA&gt;    5       Oscar_Karl  shady  0.344     37.0           0.25           NA
- 7 &lt;NA&gt;    6       Oscar_Karl  shady  0.426     66.3           0.5            NA
- 8 &lt;NA&gt;    1       Oscar_Karl  sunny  0.357     48.7           0.41           NA
- 9 &lt;NA&gt;    2       Oscar_Karl  sunny  0.348     44.8           0.39           NA
-10 &lt;NA&gt;    3       Oscar_Karl  sunny  0.511     63.4           0.53           NA
-11 &lt;NA&gt;    4       Oscar_Karl  sunny  0.230     35.7           0.36           NA
-12 &lt;NA&gt;    5       Oscar_Karl  sunny  0.304     51.3           0.43           NA
-13 &lt;NA&gt;    6       Oscar_Karl  sunny  0.282     46.9           0.4            NA</a:t>
+              <a:t># A tibble: 13 × 4
+   teams              shade mass_g paper_mass_g
+   &lt;chr&gt;              &lt;chr&gt;  &lt;dbl&gt;        &lt;dbl&gt;
+ 1 fighting_mongooses shady  0.920           NA
+ 2 Oscar_Karl         shady  0.454           NA
+ 3 Oscar_Karl         shady  0.371           NA
+ 4 Oscar_Karl         shady  0.351           NA
+ 5 Oscar_Karl         shady  0.453           NA
+ 6 Oscar_Karl         shady  0.344           NA
+ 7 Oscar_Karl         shady  0.426           NA
+ 8 Oscar_Karl         sunny  0.357           NA
+ 9 Oscar_Karl         sunny  0.348           NA
+10 Oscar_Karl         sunny  0.511           NA
+11 Oscar_Karl         sunny  0.230           NA
+12 Oscar_Karl         sunny  0.304           NA
+13 Oscar_Karl         sunny  0.282           NA</a:t>
             </a:r>
           </a:p>
           <a:p>
@@ -3638,7 +3675,7 @@
                 </a:solidFill>
                 <a:latin typeface="Courier"/>
               </a:rPr>
-              <a:t># Flip it with ! — keep only the rows that HAVE a value</a:t>
+              <a:t># Flip it with ! — keep only rows that HAVE a value ----</a:t>
             </a:r>
             <a:br/>
             <a:r>
@@ -3712,7 +3749,44 @@
                 </a:solidFill>
                 <a:latin typeface="Courier"/>
               </a:rPr>
-              <a:t>(paper_mass_g))</a:t>
+              <a:t>(paper_mass_g)) </a:t>
+            </a:r>
+            <a:r>
+              <a:rPr>
+                <a:solidFill>
+                  <a:srgbClr val="5E5E5E"/>
+                </a:solidFill>
+                <a:latin typeface="Courier"/>
+              </a:rPr>
+              <a:t>%&gt;%</a:t>
+            </a:r>
+            <a:br/>
+            <a:r>
+              <a:rPr>
+                <a:solidFill>
+                  <a:srgbClr val="003B4F"/>
+                </a:solidFill>
+                <a:latin typeface="Courier"/>
+              </a:rPr>
+              <a:t>  </a:t>
+            </a:r>
+            <a:r>
+              <a:rPr>
+                <a:solidFill>
+                  <a:srgbClr val="4758AB"/>
+                </a:solidFill>
+                <a:latin typeface="Courier"/>
+              </a:rPr>
+              <a:t>nrow</a:t>
+            </a:r>
+            <a:r>
+              <a:rPr>
+                <a:solidFill>
+                  <a:srgbClr val="003B4F"/>
+                </a:solidFill>
+                <a:latin typeface="Courier"/>
+              </a:rPr>
+              <a:t>()</a:t>
             </a:r>
           </a:p>
           <a:p>
@@ -3723,20 +3797,7 @@
               <a:rPr>
                 <a:latin typeface="Courier"/>
               </a:rPr>
-              <a:t># A tibble: 40 × 8
-   twig_id leaf_id teams shade mass_g petiole_mm thickness_mm paper_mass_g
-   &lt;chr&gt;   &lt;chr&gt;   &lt;chr&gt; &lt;chr&gt;  &lt;dbl&gt;      &lt;dbl&gt;        &lt;dbl&gt;        &lt;dbl&gt;
- 1 &lt;NA&gt;    &lt;NA&gt;    12345 sunny   0.4          79         0.15         0.21
- 2 &lt;NA&gt;    &lt;NA&gt;    12345 sunny   0.48         63         0.14         0.21
- 3 &lt;NA&gt;    &lt;NA&gt;    12345 sunny   0.34         68         0.14         0.21
- 4 &lt;NA&gt;    &lt;NA&gt;    12345 sunny   0.65         35         0.15         0.24
- 5 &lt;NA&gt;    &lt;NA&gt;    12345 sunny   0.27         34         0.11         0.15
- 6 &lt;NA&gt;    &lt;NA&gt;    12345 sunny   0.43         40         0.16         0.34
- 7 &lt;NA&gt;    &lt;NA&gt;    12345 shady   0.39         40         0.14         0.29
- 8 &lt;NA&gt;    &lt;NA&gt;    12345 shady   0.45         65         0.15         0.25
- 9 &lt;NA&gt;    &lt;NA&gt;    12345 shady   0.6          68         0.12         0.23
-10 &lt;NA&gt;    &lt;NA&gt;    12345 shady   0.57         73         0.14         0.28
-# ℹ 30 more rows</a:t>
+              <a:t>[1] 40</a:t>
             </a:r>
           </a:p>
         </p:txBody>
@@ -3809,7 +3870,7 @@
             <a:pPr lvl="0"/>
             <a:r>
               <a:rPr/>
-              <a:t>Look at the row counts: the two tables together add back up to </a:t>
+              <a:t>The two counts add back up to </a:t>
             </a:r>
             <a:r>
               <a:rPr>
@@ -8070,9 +8131,9 @@
                 <a:latin typeface="Courier"/>
               </a:rPr>
               <a:t># A tibble: 1 × 7
-      n  mean variance    sd    se ci_lower ci_upper
-  &lt;int&gt; &lt;dbl&gt;    &lt;dbl&gt; &lt;dbl&gt; &lt;dbl&gt;    &lt;dbl&gt;    &lt;dbl&gt;
-1    25  0.51     0.04  0.21  0.04     0.42     0.59</a:t>
+      n  mean variance    sd     se ci_lower ci_upper
+  &lt;int&gt; &lt;dbl&gt;    &lt;dbl&gt; &lt;dbl&gt;  &lt;dbl&gt;    &lt;dbl&gt;    &lt;dbl&gt;
+1    25 0.505   0.0442 0.210 0.0421    0.418    0.592</a:t>
             </a:r>
           </a:p>
         </p:txBody>
@@ -8699,10 +8760,10 @@
                 <a:latin typeface="Courier"/>
               </a:rPr>
               <a:t># A tibble: 2 × 8
-  shade     n  mean variance    sd    se ci_lower ci_upper
-  &lt;chr&gt; &lt;int&gt; &lt;dbl&gt;    &lt;dbl&gt; &lt;dbl&gt; &lt;dbl&gt;    &lt;dbl&gt;    &lt;dbl&gt;
-1 shady    28  0.52     0.02  0.15  0.03     0.47     0.58
-2 sunny    25  0.51     0.04  0.21  0.04     0.42     0.59</a:t>
+  shade     n  mean variance    sd     se ci_lower ci_upper
+  &lt;chr&gt; &lt;int&gt; &lt;dbl&gt;    &lt;dbl&gt; &lt;dbl&gt;  &lt;dbl&gt;    &lt;dbl&gt;    &lt;dbl&gt;
+1 shady    28 0.523   0.0219 0.148 0.0280    0.466    0.580
+2 sunny    25 0.505   0.0442 0.210 0.0421    0.418    0.592</a:t>
             </a:r>
           </a:p>
         </p:txBody>

--- a/docs/content/summary_stats/summary_stats_lecture.pptx
+++ b/docs/content/summary_stats/summary_stats_lecture.pptx
@@ -3370,7 +3370,7 @@
             </a:pPr>
             <a:r>
               <a:rPr/>
-              <a:t>2026-10-05</a:t>
+              <a:t>2026-10-08</a:t>
             </a:r>
           </a:p>
         </p:txBody>

--- a/docs/content/summary_stats/summary_stats_lecture.pptx
+++ b/docs/content/summary_stats/summary_stats_lecture.pptx
@@ -3370,7 +3370,7 @@
             </a:pPr>
             <a:r>
               <a:rPr/>
-              <a:t>2026-10-08</a:t>
+              <a:t>2026-10-09</a:t>
             </a:r>
           </a:p>
         </p:txBody>

--- a/docs/content/summary_stats/summary_stats_lecture.pptx
+++ b/docs/content/summary_stats/summary_stats_lecture.pptx
@@ -3370,7 +3370,7 @@
             </a:pPr>
             <a:r>
               <a:rPr/>
-              <a:t>2026-10-09</a:t>
+              <a:t>2026-10-19</a:t>
             </a:r>
           </a:p>
         </p:txBody>

--- a/docs/content/summary_stats/summary_stats_lecture.pptx
+++ b/docs/content/summary_stats/summary_stats_lecture.pptx
@@ -3370,7 +3370,7 @@
             </a:pPr>
             <a:r>
               <a:rPr/>
-              <a:t>2026-10-19</a:t>
+              <a:t>2026-10-22</a:t>
             </a:r>
           </a:p>
         </p:txBody>
